--- a/context_sok_results_presentation.pptx
+++ b/context_sok_results_presentation.pptx
@@ -22,6 +22,10 @@
     <p:sldId id="270" r:id="rId21"/>
     <p:sldId id="271" r:id="rId22"/>
     <p:sldId id="272" r:id="rId23"/>
+    <p:sldId id="273" r:id="rId24"/>
+    <p:sldId id="274" r:id="rId25"/>
+    <p:sldId id="275" r:id="rId26"/>
+    <p:sldId id="276" r:id="rId27"/>
   </p:sldIdLst>
   <p:sldSz cx="12191695" cy="6858000" type="screen4x3"/>
   <p:notesSz cx="6858000" cy="9144000"/>
@@ -6569,7 +6573,7 @@
                 </a:solidFill>
                 <a:latin typeface="Calibri"/>
               </a:rPr>
-              <a:t>RQ7  ·  OPEN PROBLEMS</a:t>
+              <a:t>EVALUATION FRAGMENTATION</a:t>
             </a:r>
           </a:p>
         </p:txBody>
@@ -6602,13 +6606,13 @@
               </a:spcAft>
             </a:pPr>
             <a:r>
-              <a:rPr sz="3000" b="1">
+              <a:rPr sz="2800" b="1">
                 <a:solidFill>
                   <a:srgbClr val="FFFFFF"/>
                 </a:solidFill>
                 <a:latin typeface="Cambria"/>
               </a:rPr>
-              <a:t>Seven problems, ranked by expected value</a:t>
+              <a:t>The field has no common ground to test on</a:t>
             </a:r>
           </a:p>
         </p:txBody>
@@ -6649,16 +6653,16 @@
       </p:sp>
       <p:sp>
         <p:nvSpPr>
-          <p:cNvPr id="5" name="Rounded Rectangle 4"/>
+          <p:cNvPr id="5" name="Oval 4"/>
           <p:cNvSpPr/>
           <p:nvPr/>
         </p:nvSpPr>
         <p:spPr>
           <a:xfrm>
-            <a:off x="640080" y="2331720"/>
-            <a:ext cx="10881360" cy="475488"/>
-          </a:xfrm>
-          <a:prstGeom prst="roundRect">
+            <a:off x="868680" y="2468880"/>
+            <a:ext cx="2834640" cy="2834640"/>
+          </a:xfrm>
+          <a:prstGeom prst="ellipse">
             <a:avLst/>
           </a:prstGeom>
           <a:solidFill>
@@ -6699,28 +6703,29 @@
         </p:nvSpPr>
         <p:spPr>
           <a:xfrm>
-            <a:off x="868680" y="2404872"/>
-            <a:ext cx="457200" cy="320040"/>
-          </a:xfrm>
-          <a:prstGeom prst="rect">
-            <a:avLst/>
-          </a:prstGeom>
-          <a:noFill/>
-        </p:spPr>
-        <p:txBody>
-          <a:bodyPr wrap="square">
-            <a:spAutoFit/>
-          </a:bodyPr>
-          <a:lstStyle/>
-          <a:p>
-            <a:r>
-              <a:rPr sz="1400" b="1">
-                <a:solidFill>
-                  <a:srgbClr val="E0A458"/>
+            <a:off x="914400" y="3383280"/>
+            <a:ext cx="2743200" cy="914400"/>
+          </a:xfrm>
+          <a:prstGeom prst="rect">
+            <a:avLst/>
+          </a:prstGeom>
+          <a:noFill/>
+        </p:spPr>
+        <p:txBody>
+          <a:bodyPr wrap="square">
+            <a:spAutoFit/>
+          </a:bodyPr>
+          <a:lstStyle/>
+          <a:p>
+            <a:pPr algn="ctr"/>
+            <a:r>
+              <a:rPr sz="5400" b="1">
+                <a:solidFill>
+                  <a:srgbClr val="B54A3F"/>
                 </a:solidFill>
                 <a:latin typeface="Cambria"/>
               </a:rPr>
-              <a:t>1</a:t>
+              <a:t>42.6%</a:t>
             </a:r>
           </a:p>
         </p:txBody>
@@ -6733,78 +6738,65 @@
         </p:nvSpPr>
         <p:spPr>
           <a:xfrm>
-            <a:off x="1371600" y="2414015"/>
-            <a:ext cx="5120640" cy="320040"/>
-          </a:xfrm>
-          <a:prstGeom prst="rect">
-            <a:avLst/>
-          </a:prstGeom>
-          <a:noFill/>
-        </p:spPr>
-        <p:txBody>
-          <a:bodyPr wrap="square">
-            <a:spAutoFit/>
-          </a:bodyPr>
-          <a:lstStyle/>
-          <a:p>
-            <a:r>
-              <a:rPr sz="1350" b="1">
-                <a:solidFill>
-                  <a:srgbClr val="FFFFFF"/>
-                </a:solidFill>
-                <a:latin typeface="Calibri"/>
-              </a:rPr>
-              <a:t>Cross-track evaluation is not happening</a:t>
-            </a:r>
-          </a:p>
-        </p:txBody>
-      </p:sp>
-      <p:sp>
-        <p:nvSpPr>
-          <p:cNvPr id="8" name="TextBox 7"/>
-          <p:cNvSpPr txBox="1"/>
-          <p:nvPr/>
-        </p:nvSpPr>
-        <p:spPr>
-          <a:xfrm>
-            <a:off x="6583680" y="2414015"/>
-            <a:ext cx="4663440" cy="320040"/>
-          </a:xfrm>
-          <a:prstGeom prst="rect">
-            <a:avLst/>
-          </a:prstGeom>
-          <a:noFill/>
-        </p:spPr>
-        <p:txBody>
-          <a:bodyPr wrap="square">
-            <a:spAutoFit/>
-          </a:bodyPr>
-          <a:lstStyle/>
-          <a:p>
-            <a:r>
-              <a:rPr sz="1250" b="0">
+            <a:off x="914400" y="4114800"/>
+            <a:ext cx="2743200" cy="640080"/>
+          </a:xfrm>
+          <a:prstGeom prst="rect">
+            <a:avLst/>
+          </a:prstGeom>
+          <a:noFill/>
+        </p:spPr>
+        <p:txBody>
+          <a:bodyPr wrap="square">
+            <a:spAutoFit/>
+          </a:bodyPr>
+          <a:lstStyle/>
+          <a:p>
+            <a:pPr algn="ctr">
+              <a:spcAft>
+                <a:spcPts val="0"/>
+              </a:spcAft>
+            </a:pPr>
+            <a:r>
+              <a:rPr sz="1400" b="0">
                 <a:solidFill>
                   <a:srgbClr val="CADCFC"/>
                 </a:solidFill>
                 <a:latin typeface="Calibri"/>
               </a:rPr>
-              <a:t>0.9% of test pairs cross the divide</a:t>
-            </a:r>
-          </a:p>
-        </p:txBody>
-      </p:sp>
-      <p:sp>
-        <p:nvSpPr>
-          <p:cNvPr id="9" name="Rounded Rectangle 8"/>
+              <a:t>of attacks evaluated on</a:t>
+            </a:r>
+          </a:p>
+          <a:p>
+            <a:pPr algn="ctr">
+              <a:spcAft>
+                <a:spcPts val="0"/>
+              </a:spcAft>
+            </a:pPr>
+            <a:r>
+              <a:rPr sz="1400" b="0">
+                <a:solidFill>
+                  <a:srgbClr val="CADCFC"/>
+                </a:solidFill>
+                <a:latin typeface="Calibri"/>
+              </a:rPr>
+              <a:t>ground nobody can reuse</a:t>
+            </a:r>
+          </a:p>
+        </p:txBody>
+      </p:sp>
+      <p:sp>
+        <p:nvSpPr>
+          <p:cNvPr id="8" name="Oval 7"/>
           <p:cNvSpPr/>
           <p:nvPr/>
         </p:nvSpPr>
         <p:spPr>
           <a:xfrm>
-            <a:off x="640080" y="2907791"/>
-            <a:ext cx="10881360" cy="475488"/>
-          </a:xfrm>
-          <a:prstGeom prst="roundRect">
+            <a:off x="4069080" y="2468880"/>
+            <a:ext cx="2834640" cy="2834640"/>
+          </a:xfrm>
+          <a:prstGeom prst="ellipse">
             <a:avLst/>
           </a:prstGeom>
           <a:solidFill>
@@ -6839,832 +6831,257 @@
       </p:sp>
       <p:sp>
         <p:nvSpPr>
+          <p:cNvPr id="9" name="TextBox 8"/>
+          <p:cNvSpPr txBox="1"/>
+          <p:nvPr/>
+        </p:nvSpPr>
+        <p:spPr>
+          <a:xfrm>
+            <a:off x="4114800" y="3383280"/>
+            <a:ext cx="2743200" cy="914400"/>
+          </a:xfrm>
+          <a:prstGeom prst="rect">
+            <a:avLst/>
+          </a:prstGeom>
+          <a:noFill/>
+        </p:spPr>
+        <p:txBody>
+          <a:bodyPr wrap="square">
+            <a:spAutoFit/>
+          </a:bodyPr>
+          <a:lstStyle/>
+          <a:p>
+            <a:pPr algn="ctr"/>
+            <a:r>
+              <a:rPr sz="5400" b="1">
+                <a:solidFill>
+                  <a:srgbClr val="E0A458"/>
+                </a:solidFill>
+                <a:latin typeface="Cambria"/>
+              </a:rPr>
+              <a:t>11.7%</a:t>
+            </a:r>
+          </a:p>
+        </p:txBody>
+      </p:sp>
+      <p:sp>
+        <p:nvSpPr>
           <p:cNvPr id="10" name="TextBox 9"/>
           <p:cNvSpPr txBox="1"/>
           <p:nvPr/>
         </p:nvSpPr>
         <p:spPr>
           <a:xfrm>
-            <a:off x="868680" y="2980944"/>
-            <a:ext cx="457200" cy="320040"/>
-          </a:xfrm>
-          <a:prstGeom prst="rect">
-            <a:avLst/>
-          </a:prstGeom>
-          <a:noFill/>
-        </p:spPr>
-        <p:txBody>
-          <a:bodyPr wrap="square">
-            <a:spAutoFit/>
-          </a:bodyPr>
-          <a:lstStyle/>
-          <a:p>
-            <a:r>
-              <a:rPr sz="1400" b="1">
+            <a:off x="4114800" y="4114800"/>
+            <a:ext cx="2743200" cy="640080"/>
+          </a:xfrm>
+          <a:prstGeom prst="rect">
+            <a:avLst/>
+          </a:prstGeom>
+          <a:noFill/>
+        </p:spPr>
+        <p:txBody>
+          <a:bodyPr wrap="square">
+            <a:spAutoFit/>
+          </a:bodyPr>
+          <a:lstStyle/>
+          <a:p>
+            <a:pPr algn="ctr">
+              <a:spcAft>
+                <a:spcPts val="0"/>
+              </a:spcAft>
+            </a:pPr>
+            <a:r>
+              <a:rPr sz="1400" b="0">
+                <a:solidFill>
+                  <a:srgbClr val="CADCFC"/>
+                </a:solidFill>
+                <a:latin typeface="Calibri"/>
+              </a:rPr>
+              <a:t>covered by the most</a:t>
+            </a:r>
+          </a:p>
+          <a:p>
+            <a:pPr algn="ctr">
+              <a:spcAft>
+                <a:spcPts val="0"/>
+              </a:spcAft>
+            </a:pPr>
+            <a:r>
+              <a:rPr sz="1400" b="0">
+                <a:solidFill>
+                  <a:srgbClr val="CADCFC"/>
+                </a:solidFill>
+                <a:latin typeface="Calibri"/>
+              </a:rPr>
+              <a:t>shared substrate</a:t>
+            </a:r>
+          </a:p>
+        </p:txBody>
+      </p:sp>
+      <p:sp>
+        <p:nvSpPr>
+          <p:cNvPr id="11" name="TextBox 10"/>
+          <p:cNvSpPr txBox="1"/>
+          <p:nvPr/>
+        </p:nvSpPr>
+        <p:spPr>
+          <a:xfrm>
+            <a:off x="7498079" y="2788920"/>
+            <a:ext cx="4023360" cy="2926080"/>
+          </a:xfrm>
+          <a:prstGeom prst="rect">
+            <a:avLst/>
+          </a:prstGeom>
+          <a:noFill/>
+        </p:spPr>
+        <p:txBody>
+          <a:bodyPr wrap="square">
+            <a:spAutoFit/>
+          </a:bodyPr>
+          <a:lstStyle/>
+          <a:p>
+            <a:pPr>
+              <a:spcAft>
+                <a:spcPts val="400"/>
+              </a:spcAft>
+            </a:pPr>
+            <a:r>
+              <a:rPr sz="1700" b="1">
+                <a:solidFill>
+                  <a:srgbClr val="FFFFFF"/>
+                </a:solidFill>
+                <a:latin typeface="Calibri"/>
+              </a:rPr>
+              <a:t>255 distinct substrates</a:t>
+            </a:r>
+          </a:p>
+          <a:p>
+            <a:pPr>
+              <a:spcAft>
+                <a:spcPts val="400"/>
+              </a:spcAft>
+            </a:pPr>
+            <a:r>
+              <a:rPr sz="1300" b="0">
+                <a:solidFill>
+                  <a:srgbClr val="CADCFC"/>
+                </a:solidFill>
+                <a:latin typeface="Calibri"/>
+              </a:rPr>
+              <a:t>for 223 named attacks</a:t>
+            </a:r>
+          </a:p>
+          <a:p>
+            <a:pPr>
+              <a:spcAft>
+                <a:spcPts val="400"/>
+              </a:spcAft>
+            </a:pPr>
+            <a:r>
+              <a:rPr sz="800" b="0">
+                <a:solidFill>
+                  <a:srgbClr val="CADCFC"/>
+                </a:solidFill>
+                <a:latin typeface="Calibri"/>
+              </a:rPr>
+              <a:t/>
+            </a:r>
+          </a:p>
+          <a:p>
+            <a:pPr>
+              <a:spcAft>
+                <a:spcPts val="400"/>
+              </a:spcAft>
+            </a:pPr>
+            <a:r>
+              <a:rPr sz="1300" b="1">
                 <a:solidFill>
                   <a:srgbClr val="E0A458"/>
                 </a:solidFill>
-                <a:latin typeface="Cambria"/>
-              </a:rPr>
-              <a:t>2</a:t>
-            </a:r>
-          </a:p>
-        </p:txBody>
-      </p:sp>
-      <p:sp>
-        <p:nvSpPr>
-          <p:cNvPr id="11" name="TextBox 10"/>
-          <p:cNvSpPr txBox="1"/>
-          <p:nvPr/>
-        </p:nvSpPr>
-        <p:spPr>
-          <a:xfrm>
-            <a:off x="1371600" y="2990087"/>
-            <a:ext cx="5120640" cy="320040"/>
-          </a:xfrm>
-          <a:prstGeom prst="rect">
-            <a:avLst/>
-          </a:prstGeom>
-          <a:noFill/>
-        </p:spPr>
-        <p:txBody>
-          <a:bodyPr wrap="square">
-            <a:spAutoFit/>
-          </a:bodyPr>
-          <a:lstStyle/>
-          <a:p>
-            <a:r>
-              <a:rPr sz="1350" b="1">
-                <a:solidFill>
-                  <a:srgbClr val="FFFFFF"/>
-                </a:solidFill>
-                <a:latin typeface="Calibri"/>
-              </a:rPr>
-              <a:t>The uncovered tail</a:t>
-            </a:r>
-          </a:p>
-        </p:txBody>
-      </p:sp>
-      <p:sp>
-        <p:nvSpPr>
-          <p:cNvPr id="12" name="TextBox 11"/>
-          <p:cNvSpPr txBox="1"/>
-          <p:nvPr/>
-        </p:nvSpPr>
-        <p:spPr>
-          <a:xfrm>
-            <a:off x="6583680" y="2990087"/>
-            <a:ext cx="4663440" cy="320040"/>
-          </a:xfrm>
-          <a:prstGeom prst="rect">
-            <a:avLst/>
-          </a:prstGeom>
-          <a:noFill/>
-        </p:spPr>
-        <p:txBody>
-          <a:bodyPr wrap="square">
-            <a:spAutoFit/>
-          </a:bodyPr>
-          <a:lstStyle/>
-          <a:p>
+                <a:latin typeface="Calibri"/>
+              </a:rPr>
+              <a:t>199 of them (78%)</a:t>
+            </a:r>
+          </a:p>
+          <a:p>
+            <a:pPr>
+              <a:spcAft>
+                <a:spcPts val="400"/>
+              </a:spcAft>
+            </a:pPr>
+            <a:r>
+              <a:rPr sz="1300" b="1">
+                <a:solidFill>
+                  <a:srgbClr val="E0A458"/>
+                </a:solidFill>
+                <a:latin typeface="Calibri"/>
+              </a:rPr>
+              <a:t>are used by exactly one paper.</a:t>
+            </a:r>
+          </a:p>
+          <a:p>
+            <a:pPr>
+              <a:spcAft>
+                <a:spcPts val="400"/>
+              </a:spcAft>
+            </a:pPr>
+            <a:r>
+              <a:rPr sz="800" b="0">
+                <a:solidFill>
+                  <a:srgbClr val="CADCFC"/>
+                </a:solidFill>
+                <a:latin typeface="Calibri"/>
+              </a:rPr>
+              <a:t/>
+            </a:r>
+          </a:p>
+          <a:p>
+            <a:pPr>
+              <a:spcAft>
+                <a:spcPts val="400"/>
+              </a:spcAft>
+            </a:pPr>
             <a:r>
               <a:rPr sz="1250" b="0">
                 <a:solidFill>
-                  <a:srgbClr val="CADCFC"/>
-                </a:solidFill>
-                <a:latin typeface="Calibri"/>
-              </a:rPr>
-              <a:t>131 mechanisms have no tested defense</a:t>
-            </a:r>
-          </a:p>
-        </p:txBody>
-      </p:sp>
-      <p:sp>
-        <p:nvSpPr>
-          <p:cNvPr id="13" name="Rounded Rectangle 12"/>
-          <p:cNvSpPr/>
-          <p:nvPr/>
-        </p:nvSpPr>
-        <p:spPr>
-          <a:xfrm>
-            <a:off x="640080" y="3483863"/>
-            <a:ext cx="10881360" cy="475488"/>
-          </a:xfrm>
-          <a:prstGeom prst="roundRect">
-            <a:avLst/>
-          </a:prstGeom>
-          <a:solidFill>
-            <a:srgbClr val="1B334F"/>
-          </a:solidFill>
-          <a:ln>
-            <a:noFill/>
-          </a:ln>
-          <a:effectLst/>
-        </p:spPr>
-        <p:style>
-          <a:lnRef idx="1">
-            <a:schemeClr val="accent1"/>
-          </a:lnRef>
-          <a:fillRef idx="3">
-            <a:schemeClr val="accent1"/>
-          </a:fillRef>
-          <a:effectRef idx="2">
-            <a:schemeClr val="accent1"/>
-          </a:effectRef>
-          <a:fontRef idx="minor">
-            <a:schemeClr val="lt1"/>
-          </a:fontRef>
-        </p:style>
-        <p:txBody>
-          <a:bodyPr rtlCol="0" anchor="ctr"/>
-          <a:lstStyle/>
-          <a:p>
-            <a:pPr algn="ctr"/>
-          </a:p>
-        </p:txBody>
-      </p:sp>
-      <p:sp>
-        <p:nvSpPr>
-          <p:cNvPr id="14" name="TextBox 13"/>
-          <p:cNvSpPr txBox="1"/>
-          <p:nvPr/>
-        </p:nvSpPr>
-        <p:spPr>
-          <a:xfrm>
-            <a:off x="868680" y="3557015"/>
-            <a:ext cx="457200" cy="320040"/>
-          </a:xfrm>
-          <a:prstGeom prst="rect">
-            <a:avLst/>
-          </a:prstGeom>
-          <a:noFill/>
-        </p:spPr>
-        <p:txBody>
-          <a:bodyPr wrap="square">
-            <a:spAutoFit/>
-          </a:bodyPr>
-          <a:lstStyle/>
-          <a:p>
-            <a:r>
-              <a:rPr sz="1400" b="1">
-                <a:solidFill>
-                  <a:srgbClr val="E0A458"/>
-                </a:solidFill>
-                <a:latin typeface="Cambria"/>
-              </a:rPr>
-              <a:t>3</a:t>
-            </a:r>
-          </a:p>
-        </p:txBody>
-      </p:sp>
-      <p:sp>
-        <p:nvSpPr>
-          <p:cNvPr id="15" name="TextBox 14"/>
-          <p:cNvSpPr txBox="1"/>
-          <p:nvPr/>
-        </p:nvSpPr>
-        <p:spPr>
-          <a:xfrm>
-            <a:off x="1371600" y="3566159"/>
-            <a:ext cx="5120640" cy="320040"/>
-          </a:xfrm>
-          <a:prstGeom prst="rect">
-            <a:avLst/>
-          </a:prstGeom>
-          <a:noFill/>
-        </p:spPr>
-        <p:txBody>
-          <a:bodyPr wrap="square">
-            <a:spAutoFit/>
-          </a:bodyPr>
-          <a:lstStyle/>
-          <a:p>
-            <a:r>
-              <a:rPr sz="1350" b="1">
-                <a:solidFill>
-                  <a:srgbClr val="FFFFFF"/>
-                </a:solidFill>
-                <a:latin typeface="Calibri"/>
-              </a:rPr>
-              <a:t>Single-mechanism validation is the norm</a:t>
-            </a:r>
-          </a:p>
-        </p:txBody>
-      </p:sp>
-      <p:sp>
-        <p:nvSpPr>
-          <p:cNvPr id="16" name="TextBox 15"/>
-          <p:cNvSpPr txBox="1"/>
-          <p:nvPr/>
-        </p:nvSpPr>
-        <p:spPr>
-          <a:xfrm>
-            <a:off x="6583680" y="3566159"/>
-            <a:ext cx="4663440" cy="320040"/>
-          </a:xfrm>
-          <a:prstGeom prst="rect">
-            <a:avLst/>
-          </a:prstGeom>
-          <a:noFill/>
-        </p:spPr>
-        <p:txBody>
-          <a:bodyPr wrap="square">
-            <a:spAutoFit/>
-          </a:bodyPr>
-          <a:lstStyle/>
-          <a:p>
+                  <a:srgbClr val="CFE8EF"/>
+                </a:solidFill>
+                <a:latin typeface="Calibri"/>
+              </a:rPr>
+              <a:t>More substrates than attacks.</a:t>
+            </a:r>
+          </a:p>
+          <a:p>
+            <a:pPr>
+              <a:spcAft>
+                <a:spcPts val="400"/>
+              </a:spcAft>
+            </a:pPr>
             <a:r>
               <a:rPr sz="1250" b="0">
                 <a:solidFill>
-                  <a:srgbClr val="CADCFC"/>
-                </a:solidFill>
-                <a:latin typeface="Calibri"/>
-              </a:rPr>
-              <a:t>163 defenses tested against exactly one</a:t>
-            </a:r>
-          </a:p>
-        </p:txBody>
-      </p:sp>
-      <p:sp>
-        <p:nvSpPr>
-          <p:cNvPr id="17" name="Rounded Rectangle 16"/>
-          <p:cNvSpPr/>
-          <p:nvPr/>
-        </p:nvSpPr>
-        <p:spPr>
-          <a:xfrm>
-            <a:off x="640080" y="4059935"/>
-            <a:ext cx="10881360" cy="475488"/>
-          </a:xfrm>
-          <a:prstGeom prst="roundRect">
-            <a:avLst/>
-          </a:prstGeom>
-          <a:solidFill>
-            <a:srgbClr val="1B334F"/>
-          </a:solidFill>
-          <a:ln>
-            <a:noFill/>
-          </a:ln>
-          <a:effectLst/>
-        </p:spPr>
-        <p:style>
-          <a:lnRef idx="1">
-            <a:schemeClr val="accent1"/>
-          </a:lnRef>
-          <a:fillRef idx="3">
-            <a:schemeClr val="accent1"/>
-          </a:fillRef>
-          <a:effectRef idx="2">
-            <a:schemeClr val="accent1"/>
-          </a:effectRef>
-          <a:fontRef idx="minor">
-            <a:schemeClr val="lt1"/>
-          </a:fontRef>
-        </p:style>
-        <p:txBody>
-          <a:bodyPr rtlCol="0" anchor="ctr"/>
-          <a:lstStyle/>
-          <a:p>
-            <a:pPr algn="ctr"/>
-          </a:p>
-        </p:txBody>
-      </p:sp>
-      <p:sp>
-        <p:nvSpPr>
-          <p:cNvPr id="18" name="TextBox 17"/>
-          <p:cNvSpPr txBox="1"/>
-          <p:nvPr/>
-        </p:nvSpPr>
-        <p:spPr>
-          <a:xfrm>
-            <a:off x="868680" y="4133087"/>
-            <a:ext cx="457200" cy="320040"/>
-          </a:xfrm>
-          <a:prstGeom prst="rect">
-            <a:avLst/>
-          </a:prstGeom>
-          <a:noFill/>
-        </p:spPr>
-        <p:txBody>
-          <a:bodyPr wrap="square">
-            <a:spAutoFit/>
-          </a:bodyPr>
-          <a:lstStyle/>
-          <a:p>
-            <a:r>
-              <a:rPr sz="1400" b="1">
-                <a:solidFill>
-                  <a:srgbClr val="E0A458"/>
-                </a:solidFill>
-                <a:latin typeface="Cambria"/>
-              </a:rPr>
-              <a:t>4</a:t>
-            </a:r>
-          </a:p>
-        </p:txBody>
-      </p:sp>
-      <p:sp>
-        <p:nvSpPr>
-          <p:cNvPr id="19" name="TextBox 18"/>
-          <p:cNvSpPr txBox="1"/>
-          <p:nvPr/>
-        </p:nvSpPr>
-        <p:spPr>
-          <a:xfrm>
-            <a:off x="1371600" y="4142231"/>
-            <a:ext cx="5120640" cy="320040"/>
-          </a:xfrm>
-          <a:prstGeom prst="rect">
-            <a:avLst/>
-          </a:prstGeom>
-          <a:noFill/>
-        </p:spPr>
-        <p:txBody>
-          <a:bodyPr wrap="square">
-            <a:spAutoFit/>
-          </a:bodyPr>
-          <a:lstStyle/>
-          <a:p>
-            <a:r>
-              <a:rPr sz="1350" b="1">
-                <a:solidFill>
-                  <a:srgbClr val="FFFFFF"/>
-                </a:solidFill>
-                <a:latin typeface="Calibri"/>
-              </a:rPr>
-              <a:t>Defenses are tested only against contemporaries</a:t>
-            </a:r>
-          </a:p>
-        </p:txBody>
-      </p:sp>
-      <p:sp>
-        <p:nvSpPr>
-          <p:cNvPr id="20" name="TextBox 19"/>
-          <p:cNvSpPr txBox="1"/>
-          <p:nvPr/>
-        </p:nvSpPr>
-        <p:spPr>
-          <a:xfrm>
-            <a:off x="6583680" y="4142231"/>
-            <a:ext cx="4663440" cy="320040"/>
-          </a:xfrm>
-          <a:prstGeom prst="rect">
-            <a:avLst/>
-          </a:prstGeom>
-          <a:noFill/>
-        </p:spPr>
-        <p:txBody>
-          <a:bodyPr wrap="square">
-            <a:spAutoFit/>
-          </a:bodyPr>
-          <a:lstStyle/>
-          <a:p>
+                  <a:srgbClr val="CFE8EF"/>
+                </a:solidFill>
+                <a:latin typeface="Calibri"/>
+              </a:rPr>
+              <a:t>Two papers on the same corpus still</a:t>
+            </a:r>
+          </a:p>
+          <a:p>
+            <a:pPr>
+              <a:spcAft>
+                <a:spcPts val="400"/>
+              </a:spcAft>
+            </a:pPr>
             <a:r>
               <a:rPr sz="1250" b="0">
                 <a:solidFill>
-                  <a:srgbClr val="CADCFC"/>
-                </a:solidFill>
-                <a:latin typeface="Calibri"/>
-              </a:rPr>
-              <a:t>attack papers hold the later record</a:t>
-            </a:r>
-          </a:p>
-        </p:txBody>
-      </p:sp>
-      <p:sp>
-        <p:nvSpPr>
-          <p:cNvPr id="21" name="Rounded Rectangle 20"/>
-          <p:cNvSpPr/>
-          <p:nvPr/>
-        </p:nvSpPr>
-        <p:spPr>
-          <a:xfrm>
-            <a:off x="640080" y="4636008"/>
-            <a:ext cx="10881360" cy="475488"/>
-          </a:xfrm>
-          <a:prstGeom prst="roundRect">
-            <a:avLst/>
-          </a:prstGeom>
-          <a:solidFill>
-            <a:srgbClr val="1B334F"/>
-          </a:solidFill>
-          <a:ln>
-            <a:noFill/>
-          </a:ln>
-          <a:effectLst/>
-        </p:spPr>
-        <p:style>
-          <a:lnRef idx="1">
-            <a:schemeClr val="accent1"/>
-          </a:lnRef>
-          <a:fillRef idx="3">
-            <a:schemeClr val="accent1"/>
-          </a:fillRef>
-          <a:effectRef idx="2">
-            <a:schemeClr val="accent1"/>
-          </a:effectRef>
-          <a:fontRef idx="minor">
-            <a:schemeClr val="lt1"/>
-          </a:fontRef>
-        </p:style>
-        <p:txBody>
-          <a:bodyPr rtlCol="0" anchor="ctr"/>
-          <a:lstStyle/>
-          <a:p>
-            <a:pPr algn="ctr"/>
-          </a:p>
-        </p:txBody>
-      </p:sp>
-      <p:sp>
-        <p:nvSpPr>
-          <p:cNvPr id="22" name="TextBox 21"/>
-          <p:cNvSpPr txBox="1"/>
-          <p:nvPr/>
-        </p:nvSpPr>
-        <p:spPr>
-          <a:xfrm>
-            <a:off x="868680" y="4709160"/>
-            <a:ext cx="457200" cy="320040"/>
-          </a:xfrm>
-          <a:prstGeom prst="rect">
-            <a:avLst/>
-          </a:prstGeom>
-          <a:noFill/>
-        </p:spPr>
-        <p:txBody>
-          <a:bodyPr wrap="square">
-            <a:spAutoFit/>
-          </a:bodyPr>
-          <a:lstStyle/>
-          <a:p>
-            <a:r>
-              <a:rPr sz="1400" b="1">
-                <a:solidFill>
-                  <a:srgbClr val="E0A458"/>
-                </a:solidFill>
-                <a:latin typeface="Cambria"/>
-              </a:rPr>
-              <a:t>5</a:t>
-            </a:r>
-          </a:p>
-        </p:txBody>
-      </p:sp>
-      <p:sp>
-        <p:nvSpPr>
-          <p:cNvPr id="23" name="TextBox 22"/>
-          <p:cNvSpPr txBox="1"/>
-          <p:nvPr/>
-        </p:nvSpPr>
-        <p:spPr>
-          <a:xfrm>
-            <a:off x="1371600" y="4718304"/>
-            <a:ext cx="5120640" cy="320040"/>
-          </a:xfrm>
-          <a:prstGeom prst="rect">
-            <a:avLst/>
-          </a:prstGeom>
-          <a:noFill/>
-        </p:spPr>
-        <p:txBody>
-          <a:bodyPr wrap="square">
-            <a:spAutoFit/>
-          </a:bodyPr>
-          <a:lstStyle/>
-          <a:p>
-            <a:r>
-              <a:rPr sz="1350" b="1">
-                <a:solidFill>
-                  <a:srgbClr val="FFFFFF"/>
-                </a:solidFill>
-                <a:latin typeface="Calibri"/>
-              </a:rPr>
-              <a:t>Intervention point predicts generalization</a:t>
-            </a:r>
-          </a:p>
-        </p:txBody>
-      </p:sp>
-      <p:sp>
-        <p:nvSpPr>
-          <p:cNvPr id="24" name="TextBox 23"/>
-          <p:cNvSpPr txBox="1"/>
-          <p:nvPr/>
-        </p:nvSpPr>
-        <p:spPr>
-          <a:xfrm>
-            <a:off x="6583680" y="4718304"/>
-            <a:ext cx="4663440" cy="320040"/>
-          </a:xfrm>
-          <a:prstGeom prst="rect">
-            <a:avLst/>
-          </a:prstGeom>
-          <a:noFill/>
-        </p:spPr>
-        <p:txBody>
-          <a:bodyPr wrap="square">
-            <a:spAutoFit/>
-          </a:bodyPr>
-          <a:lstStyle/>
-          <a:p>
-            <a:r>
-              <a:rPr sz="1250" b="0">
-                <a:solidFill>
-                  <a:srgbClr val="CADCFC"/>
-                </a:solidFill>
-                <a:latin typeface="Calibri"/>
-              </a:rPr>
-              <a:t>testable, and partly confounded today</a:t>
-            </a:r>
-          </a:p>
-        </p:txBody>
-      </p:sp>
-      <p:sp>
-        <p:nvSpPr>
-          <p:cNvPr id="25" name="Rounded Rectangle 24"/>
-          <p:cNvSpPr/>
-          <p:nvPr/>
-        </p:nvSpPr>
-        <p:spPr>
-          <a:xfrm>
-            <a:off x="640080" y="5212079"/>
-            <a:ext cx="10881360" cy="475488"/>
-          </a:xfrm>
-          <a:prstGeom prst="roundRect">
-            <a:avLst/>
-          </a:prstGeom>
-          <a:solidFill>
-            <a:srgbClr val="1B334F"/>
-          </a:solidFill>
-          <a:ln>
-            <a:noFill/>
-          </a:ln>
-          <a:effectLst/>
-        </p:spPr>
-        <p:style>
-          <a:lnRef idx="1">
-            <a:schemeClr val="accent1"/>
-          </a:lnRef>
-          <a:fillRef idx="3">
-            <a:schemeClr val="accent1"/>
-          </a:fillRef>
-          <a:effectRef idx="2">
-            <a:schemeClr val="accent1"/>
-          </a:effectRef>
-          <a:fontRef idx="minor">
-            <a:schemeClr val="lt1"/>
-          </a:fontRef>
-        </p:style>
-        <p:txBody>
-          <a:bodyPr rtlCol="0" anchor="ctr"/>
-          <a:lstStyle/>
-          <a:p>
-            <a:pPr algn="ctr"/>
-          </a:p>
-        </p:txBody>
-      </p:sp>
-      <p:sp>
-        <p:nvSpPr>
-          <p:cNvPr id="26" name="TextBox 25"/>
-          <p:cNvSpPr txBox="1"/>
-          <p:nvPr/>
-        </p:nvSpPr>
-        <p:spPr>
-          <a:xfrm>
-            <a:off x="868680" y="5285231"/>
-            <a:ext cx="457200" cy="320040"/>
-          </a:xfrm>
-          <a:prstGeom prst="rect">
-            <a:avLst/>
-          </a:prstGeom>
-          <a:noFill/>
-        </p:spPr>
-        <p:txBody>
-          <a:bodyPr wrap="square">
-            <a:spAutoFit/>
-          </a:bodyPr>
-          <a:lstStyle/>
-          <a:p>
-            <a:r>
-              <a:rPr sz="1400" b="1">
-                <a:solidFill>
-                  <a:srgbClr val="E0A458"/>
-                </a:solidFill>
-                <a:latin typeface="Cambria"/>
-              </a:rPr>
-              <a:t>6</a:t>
-            </a:r>
-          </a:p>
-        </p:txBody>
-      </p:sp>
-      <p:sp>
-        <p:nvSpPr>
-          <p:cNvPr id="27" name="TextBox 26"/>
-          <p:cNvSpPr txBox="1"/>
-          <p:nvPr/>
-        </p:nvSpPr>
-        <p:spPr>
-          <a:xfrm>
-            <a:off x="1371600" y="5294375"/>
-            <a:ext cx="5120640" cy="320040"/>
-          </a:xfrm>
-          <a:prstGeom prst="rect">
-            <a:avLst/>
-          </a:prstGeom>
-          <a:noFill/>
-        </p:spPr>
-        <p:txBody>
-          <a:bodyPr wrap="square">
-            <a:spAutoFit/>
-          </a:bodyPr>
-          <a:lstStyle/>
-          <a:p>
-            <a:r>
-              <a:rPr sz="1350" b="1">
-                <a:solidFill>
-                  <a:srgbClr val="FFFFFF"/>
-                </a:solidFill>
-                <a:latin typeface="Calibri"/>
-              </a:rPr>
-              <a:t>Benchmarks stand in for mechanisms</a:t>
-            </a:r>
-          </a:p>
-        </p:txBody>
-      </p:sp>
-      <p:sp>
-        <p:nvSpPr>
-          <p:cNvPr id="28" name="TextBox 27"/>
-          <p:cNvSpPr txBox="1"/>
-          <p:nvPr/>
-        </p:nvSpPr>
-        <p:spPr>
-          <a:xfrm>
-            <a:off x="6583680" y="5294375"/>
-            <a:ext cx="4663440" cy="320040"/>
-          </a:xfrm>
-          <a:prstGeom prst="rect">
-            <a:avLst/>
-          </a:prstGeom>
-          <a:noFill/>
-        </p:spPr>
-        <p:txBody>
-          <a:bodyPr wrap="square">
-            <a:spAutoFit/>
-          </a:bodyPr>
-          <a:lstStyle/>
-          <a:p>
-            <a:r>
-              <a:rPr sz="1250" b="0">
-                <a:solidFill>
-                  <a:srgbClr val="CADCFC"/>
-                </a:solidFill>
-                <a:latin typeface="Calibri"/>
-              </a:rPr>
-              <a:t>one umbrella entry absorbs 22.9% of pairs</a:t>
-            </a:r>
-          </a:p>
-        </p:txBody>
-      </p:sp>
-      <p:sp>
-        <p:nvSpPr>
-          <p:cNvPr id="29" name="Rounded Rectangle 28"/>
-          <p:cNvSpPr/>
-          <p:nvPr/>
-        </p:nvSpPr>
-        <p:spPr>
-          <a:xfrm>
-            <a:off x="640080" y="5788152"/>
-            <a:ext cx="10881360" cy="475488"/>
-          </a:xfrm>
-          <a:prstGeom prst="roundRect">
-            <a:avLst/>
-          </a:prstGeom>
-          <a:solidFill>
-            <a:srgbClr val="1B334F"/>
-          </a:solidFill>
-          <a:ln>
-            <a:noFill/>
-          </a:ln>
-          <a:effectLst/>
-        </p:spPr>
-        <p:style>
-          <a:lnRef idx="1">
-            <a:schemeClr val="accent1"/>
-          </a:lnRef>
-          <a:fillRef idx="3">
-            <a:schemeClr val="accent1"/>
-          </a:fillRef>
-          <a:effectRef idx="2">
-            <a:schemeClr val="accent1"/>
-          </a:effectRef>
-          <a:fontRef idx="minor">
-            <a:schemeClr val="lt1"/>
-          </a:fontRef>
-        </p:style>
-        <p:txBody>
-          <a:bodyPr rtlCol="0" anchor="ctr"/>
-          <a:lstStyle/>
-          <a:p>
-            <a:pPr algn="ctr"/>
-          </a:p>
-        </p:txBody>
-      </p:sp>
-      <p:sp>
-        <p:nvSpPr>
-          <p:cNvPr id="30" name="TextBox 29"/>
-          <p:cNvSpPr txBox="1"/>
-          <p:nvPr/>
-        </p:nvSpPr>
-        <p:spPr>
-          <a:xfrm>
-            <a:off x="868680" y="5861304"/>
-            <a:ext cx="457200" cy="320040"/>
-          </a:xfrm>
-          <a:prstGeom prst="rect">
-            <a:avLst/>
-          </a:prstGeom>
-          <a:noFill/>
-        </p:spPr>
-        <p:txBody>
-          <a:bodyPr wrap="square">
-            <a:spAutoFit/>
-          </a:bodyPr>
-          <a:lstStyle/>
-          <a:p>
-            <a:r>
-              <a:rPr sz="1400" b="1">
-                <a:solidFill>
-                  <a:srgbClr val="E0A458"/>
-                </a:solidFill>
-                <a:latin typeface="Cambria"/>
-              </a:rPr>
-              <a:t>7</a:t>
-            </a:r>
-          </a:p>
-        </p:txBody>
-      </p:sp>
-      <p:sp>
-        <p:nvSpPr>
-          <p:cNvPr id="31" name="TextBox 30"/>
-          <p:cNvSpPr txBox="1"/>
-          <p:nvPr/>
-        </p:nvSpPr>
-        <p:spPr>
-          <a:xfrm>
-            <a:off x="1371600" y="5870448"/>
-            <a:ext cx="5120640" cy="320040"/>
-          </a:xfrm>
-          <a:prstGeom prst="rect">
-            <a:avLst/>
-          </a:prstGeom>
-          <a:noFill/>
-        </p:spPr>
-        <p:txBody>
-          <a:bodyPr wrap="square">
-            <a:spAutoFit/>
-          </a:bodyPr>
-          <a:lstStyle/>
-          <a:p>
-            <a:r>
-              <a:rPr sz="1350" b="1">
-                <a:solidFill>
-                  <a:srgbClr val="FFFFFF"/>
-                </a:solidFill>
-                <a:latin typeface="Calibri"/>
-              </a:rPr>
-              <a:t>Reporting conventions, not capability</a:t>
-            </a:r>
-          </a:p>
-        </p:txBody>
-      </p:sp>
-      <p:sp>
-        <p:nvSpPr>
-          <p:cNvPr id="32" name="TextBox 31"/>
-          <p:cNvSpPr txBox="1"/>
-          <p:nvPr/>
-        </p:nvSpPr>
-        <p:spPr>
-          <a:xfrm>
-            <a:off x="6583680" y="5870448"/>
-            <a:ext cx="4663440" cy="320040"/>
-          </a:xfrm>
-          <a:prstGeom prst="rect">
-            <a:avLst/>
-          </a:prstGeom>
-          <a:noFill/>
-        </p:spPr>
-        <p:txBody>
-          <a:bodyPr wrap="square">
-            <a:spAutoFit/>
-          </a:bodyPr>
-          <a:lstStyle/>
-          <a:p>
-            <a:r>
-              <a:rPr sz="1250" b="0">
-                <a:solidFill>
-                  <a:srgbClr val="CADCFC"/>
-                </a:solidFill>
-                <a:latin typeface="Calibri"/>
-              </a:rPr>
-              <a:t>four of seven need no new science</a:t>
+                  <a:srgbClr val="CFE8EF"/>
+                </a:solidFill>
+                <a:latin typeface="Calibri"/>
+              </a:rPr>
+              <a:t>are not comparable.</a:t>
             </a:r>
           </a:p>
         </p:txBody>
@@ -7724,7 +7141,7 @@
                 </a:solidFill>
                 <a:latin typeface="Calibri"/>
               </a:rPr>
-              <a:t>SYNTHESIS</a:t>
+              <a:t>DEFENSE HALF-LIFE</a:t>
             </a:r>
           </a:p>
         </p:txBody>
@@ -7757,13 +7174,13 @@
               </a:spcAft>
             </a:pPr>
             <a:r>
-              <a:rPr sz="2800" b="1">
+              <a:rPr sz="3000" b="1">
                 <a:solidFill>
                   <a:srgbClr val="FFFFFF"/>
                 </a:solidFill>
                 <a:latin typeface="Cambria"/>
               </a:rPr>
-              <a:t>The field is underclaiming coverage it already has</a:t>
+              <a:t>How long does a published defense survive?</a:t>
             </a:r>
           </a:p>
         </p:txBody>
@@ -7804,71 +7221,16 @@
       </p:sp>
       <p:sp>
         <p:nvSpPr>
-          <p:cNvPr id="5" name="TextBox 4"/>
-          <p:cNvSpPr txBox="1"/>
-          <p:nvPr/>
-        </p:nvSpPr>
-        <p:spPr>
-          <a:xfrm>
-            <a:off x="640080" y="2423160"/>
-            <a:ext cx="10881360" cy="1005840"/>
-          </a:xfrm>
-          <a:prstGeom prst="rect">
-            <a:avLst/>
-          </a:prstGeom>
-          <a:noFill/>
-        </p:spPr>
-        <p:txBody>
-          <a:bodyPr wrap="square">
-            <a:spAutoFit/>
-          </a:bodyPr>
-          <a:lstStyle/>
-          <a:p>
-            <a:pPr>
-              <a:spcAft>
-                <a:spcPts val="500"/>
-              </a:spcAft>
-            </a:pPr>
-            <a:r>
-              <a:rPr sz="1400" b="0">
-                <a:solidFill>
-                  <a:srgbClr val="CADCFC"/>
-                </a:solidFill>
-                <a:latin typeface="Calibri"/>
-              </a:rPr>
-              <a:t>Two literatures study the same pond and barely read each other (RQ2).</a:t>
-            </a:r>
-          </a:p>
-          <a:p>
-            <a:pPr>
-              <a:spcAft>
-                <a:spcPts val="500"/>
-              </a:spcAft>
-            </a:pPr>
-            <a:r>
-              <a:rPr sz="1400" b="0">
-                <a:solidFill>
-                  <a:srgbClr val="CADCFC"/>
-                </a:solidFill>
-                <a:latin typeface="Calibri"/>
-              </a:rPr>
-              <a:t>They name 223 ways to poison a context and 534 ways to defend one — and almost never test the two against each other (RQ5).</a:t>
-            </a:r>
-          </a:p>
-        </p:txBody>
-      </p:sp>
-      <p:sp>
-        <p:nvSpPr>
-          <p:cNvPr id="6" name="Rounded Rectangle 5"/>
+          <p:cNvPr id="5" name="Oval 4"/>
           <p:cNvSpPr/>
           <p:nvPr/>
         </p:nvSpPr>
         <p:spPr>
           <a:xfrm>
-            <a:off x="640080" y="3703320"/>
-            <a:ext cx="10881360" cy="1417320"/>
-          </a:xfrm>
-          <a:prstGeom prst="roundRect">
+            <a:off x="868680" y="2468880"/>
+            <a:ext cx="3017520" cy="3017520"/>
+          </a:xfrm>
+          <a:prstGeom prst="ellipse">
             <a:avLst/>
           </a:prstGeom>
           <a:solidFill>
@@ -7903,71 +7265,90 @@
       </p:sp>
       <p:sp>
         <p:nvSpPr>
+          <p:cNvPr id="6" name="TextBox 5"/>
+          <p:cNvSpPr txBox="1"/>
+          <p:nvPr/>
+        </p:nvSpPr>
+        <p:spPr>
+          <a:xfrm>
+            <a:off x="914400" y="3474720"/>
+            <a:ext cx="2926079" cy="914400"/>
+          </a:xfrm>
+          <a:prstGeom prst="rect">
+            <a:avLst/>
+          </a:prstGeom>
+          <a:noFill/>
+        </p:spPr>
+        <p:txBody>
+          <a:bodyPr wrap="square">
+            <a:spAutoFit/>
+          </a:bodyPr>
+          <a:lstStyle/>
+          <a:p>
+            <a:pPr algn="ctr"/>
+            <a:r>
+              <a:rPr sz="5400" b="1">
+                <a:solidFill>
+                  <a:srgbClr val="B54A3F"/>
+                </a:solidFill>
+                <a:latin typeface="Cambria"/>
+              </a:rPr>
+              <a:t>96%</a:t>
+            </a:r>
+          </a:p>
+        </p:txBody>
+      </p:sp>
+      <p:sp>
+        <p:nvSpPr>
           <p:cNvPr id="7" name="TextBox 6"/>
           <p:cNvSpPr txBox="1"/>
           <p:nvPr/>
         </p:nvSpPr>
         <p:spPr>
           <a:xfrm>
-            <a:off x="960120" y="3913632"/>
-            <a:ext cx="10241280" cy="1051560"/>
-          </a:xfrm>
-          <a:prstGeom prst="rect">
-            <a:avLst/>
-          </a:prstGeom>
-          <a:noFill/>
-        </p:spPr>
-        <p:txBody>
-          <a:bodyPr wrap="square">
-            <a:spAutoFit/>
-          </a:bodyPr>
-          <a:lstStyle/>
-          <a:p>
-            <a:pPr>
+            <a:off x="914400" y="4206240"/>
+            <a:ext cx="2926079" cy="640080"/>
+          </a:xfrm>
+          <a:prstGeom prst="rect">
+            <a:avLst/>
+          </a:prstGeom>
+          <a:noFill/>
+        </p:spPr>
+        <p:txBody>
+          <a:bodyPr wrap="square">
+            <a:spAutoFit/>
+          </a:bodyPr>
+          <a:lstStyle/>
+          <a:p>
+            <a:pPr algn="ctr">
               <a:spcAft>
-                <a:spcPts val="300"/>
+                <a:spcPts val="0"/>
               </a:spcAft>
             </a:pPr>
             <a:r>
-              <a:rPr sz="1700" b="1">
-                <a:solidFill>
-                  <a:srgbClr val="E0A458"/>
-                </a:solidFill>
-                <a:latin typeface="Calibri"/>
-              </a:rPr>
-              <a:t>The binding constraint is coordination, not capability.</a:t>
-            </a:r>
-          </a:p>
-          <a:p>
-            <a:pPr>
+              <a:rPr sz="1400" b="0">
+                <a:solidFill>
+                  <a:srgbClr val="CADCFC"/>
+                </a:solidFill>
+                <a:latin typeface="Calibri"/>
+              </a:rPr>
+              <a:t>of published defeats</a:t>
+            </a:r>
+          </a:p>
+          <a:p>
+            <a:pPr algn="ctr">
               <a:spcAft>
-                <a:spcPts val="300"/>
+                <a:spcPts val="0"/>
               </a:spcAft>
             </a:pPr>
             <a:r>
-              <a:rPr sz="1300" b="0">
-                <a:solidFill>
-                  <a:srgbClr val="FFFFFF"/>
-                </a:solidFill>
-                <a:latin typeface="Calibri"/>
-              </a:rPr>
-              <a:t>RQ6 found 6 of 7 runnable defenses showed some protection against the threat model they were never tested on.</a:t>
-            </a:r>
-          </a:p>
-          <a:p>
-            <a:pPr>
-              <a:spcAft>
-                <a:spcPts val="300"/>
-              </a:spcAft>
-            </a:pPr>
-            <a:r>
-              <a:rPr sz="1300" b="0">
-                <a:solidFill>
-                  <a:srgbClr val="FFFFFF"/>
-                </a:solidFill>
-                <a:latin typeface="Calibri"/>
-              </a:rPr>
-              <a:t>The generalization is already there. The evaluation convention that would surface it is not.</a:t>
+              <a:rPr sz="1400" b="0">
+                <a:solidFill>
+                  <a:srgbClr val="CADCFC"/>
+                </a:solidFill>
+                <a:latin typeface="Calibri"/>
+              </a:rPr>
+              <a:t>land within one year</a:t>
             </a:r>
           </a:p>
         </p:txBody>
@@ -7980,8 +7361,8 @@
         </p:nvSpPr>
         <p:spPr>
           <a:xfrm>
-            <a:off x="640080" y="5394960"/>
-            <a:ext cx="10881360" cy="914400"/>
+            <a:off x="4754880" y="2788920"/>
+            <a:ext cx="6675120" cy="2926080"/>
           </a:xfrm>
           <a:prstGeom prst="rect">
             <a:avLst/>
@@ -8000,13 +7381,141 @@
               </a:spcAft>
             </a:pPr>
             <a:r>
-              <a:rPr sz="1300" b="0">
+              <a:rPr sz="1500" b="1">
+                <a:solidFill>
+                  <a:srgbClr val="FFFFFF"/>
+                </a:solidFill>
+                <a:latin typeface="Calibri"/>
+              </a:rPr>
+              <a:t>24 datable defeats, median gap 1 year, maximum 2.</a:t>
+            </a:r>
+          </a:p>
+          <a:p>
+            <a:pPr>
+              <a:spcAft>
+                <a:spcPts val="400"/>
+              </a:spcAft>
+            </a:pPr>
+            <a:r>
+              <a:rPr sz="800" b="0">
+                <a:solidFill>
+                  <a:srgbClr val="CADCFC"/>
+                </a:solidFill>
+                <a:latin typeface="Calibri"/>
+              </a:rPr>
+              <a:t/>
+            </a:r>
+          </a:p>
+          <a:p>
+            <a:pPr>
+              <a:spcAft>
+                <a:spcPts val="400"/>
+              </a:spcAft>
+            </a:pPr>
+            <a:r>
+              <a:rPr sz="1250" b="0">
+                <a:solidFill>
+                  <a:srgbClr val="CADCFC"/>
+                </a:solidFill>
+                <a:latin typeface="Calibri"/>
+              </a:rPr>
+              <a:t>DataSentinel was defeated four separate times by four teams.</a:t>
+            </a:r>
+          </a:p>
+          <a:p>
+            <a:pPr>
+              <a:spcAft>
+                <a:spcPts val="400"/>
+              </a:spcAft>
+            </a:pPr>
+            <a:r>
+              <a:rPr sz="1250" b="0">
+                <a:solidFill>
+                  <a:srgbClr val="CADCFC"/>
+                </a:solidFill>
+                <a:latin typeface="Calibri"/>
+              </a:rPr>
+              <a:t>A defense does not get beaten once and settle.</a:t>
+            </a:r>
+          </a:p>
+          <a:p>
+            <a:pPr>
+              <a:spcAft>
+                <a:spcPts val="400"/>
+              </a:spcAft>
+            </a:pPr>
+            <a:r>
+              <a:rPr sz="800" b="0">
+                <a:solidFill>
+                  <a:srgbClr val="CADCFC"/>
+                </a:solidFill>
+                <a:latin typeface="Calibri"/>
+              </a:rPr>
+              <a:t/>
+            </a:r>
+          </a:p>
+          <a:p>
+            <a:pPr>
+              <a:spcAft>
+                <a:spcPts val="400"/>
+              </a:spcAft>
+            </a:pPr>
+            <a:r>
+              <a:rPr sz="1300" b="1">
+                <a:solidFill>
+                  <a:srgbClr val="E0A458"/>
+                </a:solidFill>
+                <a:latin typeface="Calibri"/>
+              </a:rPr>
+              <a:t>Read as an UPPER BOUND, not an estimate:</a:t>
+            </a:r>
+          </a:p>
+          <a:p>
+            <a:pPr>
+              <a:spcAft>
+                <a:spcPts val="400"/>
+              </a:spcAft>
+            </a:pPr>
+            <a:r>
+              <a:rPr sz="1250" b="0">
                 <a:solidFill>
                   <a:srgbClr val="CFE8EF"/>
                 </a:solidFill>
                 <a:latin typeface="Calibri"/>
               </a:rPr>
-              <a:t>And the gap is not ours. We imported the literature we thought was missing, specifically to close it. It did not close.</a:t>
+              <a:t>only 2.81% of the registry has any</a:t>
+            </a:r>
+          </a:p>
+          <a:p>
+            <a:pPr>
+              <a:spcAft>
+                <a:spcPts val="400"/>
+              </a:spcAft>
+            </a:pPr>
+            <a:r>
+              <a:rPr sz="1250" b="0">
+                <a:solidFill>
+                  <a:srgbClr val="CFE8EF"/>
+                </a:solidFill>
+                <a:latin typeface="Calibri"/>
+              </a:rPr>
+              <a:t>recorded outcome, and the sample is biased toward</a:t>
+            </a:r>
+          </a:p>
+          <a:p>
+            <a:pPr>
+              <a:spcAft>
+                <a:spcPts val="400"/>
+              </a:spcAft>
+            </a:pPr>
+            <a:r>
+              <a:rPr sz="1250" b="0">
+                <a:solidFill>
+                  <a:srgbClr val="CFE8EF"/>
+                </a:solidFill>
+                <a:latin typeface="Calibri"/>
+              </a:rPr>
+              <a:t>defenses famous enough to attract attack papers.</a:t>
             </a:r>
           </a:p>
         </p:txBody>
@@ -8066,7 +7575,7 @@
                 </a:solidFill>
                 <a:latin typeface="Calibri"/>
               </a:rPr>
-              <a:t>REPRODUCIBILITY</a:t>
+              <a:t>TRANSFER</a:t>
             </a:r>
           </a:p>
         </p:txBody>
@@ -8099,13 +7608,29 @@
               </a:spcAft>
             </a:pPr>
             <a:r>
-              <a:rPr sz="2600" b="1">
+              <a:rPr sz="2800" b="1">
                 <a:solidFill>
                   <a:srgbClr val="FFFFFF"/>
                 </a:solidFill>
                 <a:latin typeface="Cambria"/>
               </a:rPr>
-              <a:t>Every number on these slides regenerates from the repo</a:t>
+              <a:t>Detection depends on recognising the attack.</a:t>
+            </a:r>
+          </a:p>
+          <a:p>
+            <a:pPr>
+              <a:spcAft>
+                <a:spcPts val="200"/>
+              </a:spcAft>
+            </a:pPr>
+            <a:r>
+              <a:rPr sz="2800" b="1">
+                <a:solidFill>
+                  <a:srgbClr val="FFFFFF"/>
+                </a:solidFill>
+                <a:latin typeface="Cambria"/>
+              </a:rPr>
+              <a:t>Action-checking does not.</a:t>
             </a:r>
           </a:p>
         </p:txBody>
@@ -8152,8 +7677,8 @@
         </p:nvSpPr>
         <p:spPr>
           <a:xfrm>
-            <a:off x="640080" y="2468880"/>
-            <a:ext cx="10881360" cy="512064"/>
+            <a:off x="640080" y="2697480"/>
+            <a:ext cx="5257800" cy="2423160"/>
           </a:xfrm>
           <a:prstGeom prst="roundRect">
             <a:avLst/>
@@ -8196,54 +7721,57 @@
         </p:nvSpPr>
         <p:spPr>
           <a:xfrm>
-            <a:off x="914400" y="2569464"/>
-            <a:ext cx="4206240" cy="320040"/>
-          </a:xfrm>
-          <a:prstGeom prst="rect">
-            <a:avLst/>
-          </a:prstGeom>
-          <a:noFill/>
-        </p:spPr>
-        <p:txBody>
-          <a:bodyPr wrap="square">
-            <a:spAutoFit/>
-          </a:bodyPr>
-          <a:lstStyle/>
-          <a:p>
-            <a:r>
-              <a:rPr sz="1300" b="1">
+            <a:off x="914400" y="2926080"/>
+            <a:ext cx="4754880" cy="2011680"/>
+          </a:xfrm>
+          <a:prstGeom prst="rect">
+            <a:avLst/>
+          </a:prstGeom>
+          <a:noFill/>
+        </p:spPr>
+        <p:txBody>
+          <a:bodyPr wrap="square">
+            <a:spAutoFit/>
+          </a:bodyPr>
+          <a:lstStyle/>
+          <a:p>
+            <a:pPr>
+              <a:spcAft>
+                <a:spcPts val="400"/>
+              </a:spcAft>
+            </a:pPr>
+            <a:r>
+              <a:rPr sz="1500" b="1">
                 <a:solidFill>
                   <a:srgbClr val="E0A458"/>
                 </a:solidFill>
                 <a:latin typeface="Calibri"/>
               </a:rPr>
-              <a:t>config.yaml</a:t>
-            </a:r>
-          </a:p>
-        </p:txBody>
-      </p:sp>
-      <p:sp>
-        <p:nvSpPr>
-          <p:cNvPr id="7" name="TextBox 6"/>
-          <p:cNvSpPr txBox="1"/>
-          <p:nvPr/>
-        </p:nvSpPr>
-        <p:spPr>
-          <a:xfrm>
-            <a:off x="5212080" y="2569464"/>
-            <a:ext cx="6035040" cy="320040"/>
-          </a:xfrm>
-          <a:prstGeom prst="rect">
-            <a:avLst/>
-          </a:prstGeom>
-          <a:noFill/>
-        </p:spPr>
-        <p:txBody>
-          <a:bodyPr wrap="square">
-            <a:spAutoFit/>
-          </a:bodyPr>
-          <a:lstStyle/>
-          <a:p>
+              <a:t>Attack it was built against</a:t>
+            </a:r>
+          </a:p>
+          <a:p>
+            <a:pPr>
+              <a:spcAft>
+                <a:spcPts val="400"/>
+              </a:spcAft>
+            </a:pPr>
+            <a:r>
+              <a:rPr sz="600" b="0">
+                <a:solidFill>
+                  <a:srgbClr val="CADCFC"/>
+                </a:solidFill>
+                <a:latin typeface="Calibri"/>
+              </a:rPr>
+              <a:t/>
+            </a:r>
+          </a:p>
+          <a:p>
+            <a:pPr>
+              <a:spcAft>
+                <a:spcPts val="400"/>
+              </a:spcAft>
+            </a:pPr>
             <a:r>
               <a:rPr sz="1250" b="0">
                 <a:solidFill>
@@ -8251,21 +7779,69 @@
                 </a:solidFill>
                 <a:latin typeface="Calibri"/>
               </a:rPr>
-              <a:t>screening criteria, applied by rule</a:t>
-            </a:r>
-          </a:p>
-        </p:txBody>
-      </p:sp>
-      <p:sp>
-        <p:nvSpPr>
-          <p:cNvPr id="8" name="Rounded Rectangle 7"/>
+              <a:t>Three of four ingestion detectors</a:t>
+            </a:r>
+          </a:p>
+          <a:p>
+            <a:pPr>
+              <a:spcAft>
+                <a:spcPts val="400"/>
+              </a:spcAft>
+            </a:pPr>
+            <a:r>
+              <a:rPr sz="1250" b="0">
+                <a:solidFill>
+                  <a:srgbClr val="CADCFC"/>
+                </a:solidFill>
+                <a:latin typeface="Calibri"/>
+              </a:rPr>
+              <a:t>stop it completely.</a:t>
+            </a:r>
+          </a:p>
+          <a:p>
+            <a:pPr>
+              <a:spcAft>
+                <a:spcPts val="400"/>
+              </a:spcAft>
+            </a:pPr>
+            <a:r>
+              <a:rPr sz="1250" b="0">
+                <a:solidFill>
+                  <a:srgbClr val="CFE8EF"/>
+                </a:solidFill>
+                <a:latin typeface="Calibri"/>
+              </a:rPr>
+              <a:t>The attack announces itself:</a:t>
+            </a:r>
+          </a:p>
+          <a:p>
+            <a:pPr>
+              <a:spcAft>
+                <a:spcPts val="400"/>
+              </a:spcAft>
+            </a:pPr>
+            <a:r>
+              <a:rPr sz="1250" b="0">
+                <a:solidFill>
+                  <a:srgbClr val="CFE8EF"/>
+                </a:solidFill>
+                <a:latin typeface="Calibri"/>
+              </a:rPr>
+              <a:t>"an important message from Emma".</a:t>
+            </a:r>
+          </a:p>
+        </p:txBody>
+      </p:sp>
+      <p:sp>
+        <p:nvSpPr>
+          <p:cNvPr id="7" name="Rounded Rectangle 6"/>
           <p:cNvSpPr/>
           <p:nvPr/>
         </p:nvSpPr>
         <p:spPr>
           <a:xfrm>
-            <a:off x="640080" y="3090672"/>
-            <a:ext cx="10881360" cy="512064"/>
+            <a:off x="6263640" y="2697480"/>
+            <a:ext cx="5257800" cy="2423160"/>
           </a:xfrm>
           <a:prstGeom prst="roundRect">
             <a:avLst/>
@@ -8302,550 +7878,206 @@
       </p:sp>
       <p:sp>
         <p:nvSpPr>
+          <p:cNvPr id="8" name="TextBox 7"/>
+          <p:cNvSpPr txBox="1"/>
+          <p:nvPr/>
+        </p:nvSpPr>
+        <p:spPr>
+          <a:xfrm>
+            <a:off x="6537960" y="2926080"/>
+            <a:ext cx="4754880" cy="2011680"/>
+          </a:xfrm>
+          <a:prstGeom prst="rect">
+            <a:avLst/>
+          </a:prstGeom>
+          <a:noFill/>
+        </p:spPr>
+        <p:txBody>
+          <a:bodyPr wrap="square">
+            <a:spAutoFit/>
+          </a:bodyPr>
+          <a:lstStyle/>
+          <a:p>
+            <a:pPr>
+              <a:spcAft>
+                <a:spcPts val="400"/>
+              </a:spcAft>
+            </a:pPr>
+            <a:r>
+              <a:rPr sz="1500" b="1">
+                <a:solidFill>
+                  <a:srgbClr val="B54A3F"/>
+                </a:solidFill>
+                <a:latin typeface="Calibri"/>
+              </a:rPr>
+              <a:t>Same goal, different disguise</a:t>
+            </a:r>
+          </a:p>
+          <a:p>
+            <a:pPr>
+              <a:spcAft>
+                <a:spcPts val="400"/>
+              </a:spcAft>
+            </a:pPr>
+            <a:r>
+              <a:rPr sz="600" b="0">
+                <a:solidFill>
+                  <a:srgbClr val="CADCFC"/>
+                </a:solidFill>
+                <a:latin typeface="Calibri"/>
+              </a:rPr>
+              <a:t/>
+            </a:r>
+          </a:p>
+          <a:p>
+            <a:pPr>
+              <a:spcAft>
+                <a:spcPts val="400"/>
+              </a:spcAft>
+            </a:pPr>
+            <a:r>
+              <a:rPr sz="1250" b="0">
+                <a:solidFill>
+                  <a:srgbClr val="CADCFC"/>
+                </a:solidFill>
+                <a:latin typeface="Calibri"/>
+              </a:rPr>
+              <a:t>The same detectors stop working.</a:t>
+            </a:r>
+          </a:p>
+          <a:p>
+            <a:pPr>
+              <a:spcAft>
+                <a:spcPts val="400"/>
+              </a:spcAft>
+            </a:pPr>
+            <a:r>
+              <a:rPr sz="1250" b="0">
+                <a:solidFill>
+                  <a:srgbClr val="CADCFC"/>
+                </a:solidFill>
+                <a:latin typeface="Calibri"/>
+              </a:rPr>
+              <a:t>The payload forges a system turn,</a:t>
+            </a:r>
+          </a:p>
+          <a:p>
+            <a:pPr>
+              <a:spcAft>
+                <a:spcPts val="400"/>
+              </a:spcAft>
+            </a:pPr>
+            <a:r>
+              <a:rPr sz="1250" b="0">
+                <a:solidFill>
+                  <a:srgbClr val="CADCFC"/>
+                </a:solidFill>
+                <a:latin typeface="Calibri"/>
+              </a:rPr>
+              <a:t>so it reads as configuration,</a:t>
+            </a:r>
+          </a:p>
+          <a:p>
+            <a:pPr>
+              <a:spcAft>
+                <a:spcPts val="400"/>
+              </a:spcAft>
+            </a:pPr>
+            <a:r>
+              <a:rPr sz="1250" b="0">
+                <a:solidFill>
+                  <a:srgbClr val="CADCFC"/>
+                </a:solidFill>
+                <a:latin typeface="Calibri"/>
+              </a:rPr>
+              <a:t>not as an injected instruction.</a:t>
+            </a:r>
+          </a:p>
+        </p:txBody>
+      </p:sp>
+      <p:sp>
+        <p:nvSpPr>
           <p:cNvPr id="9" name="TextBox 8"/>
           <p:cNvSpPr txBox="1"/>
           <p:nvPr/>
         </p:nvSpPr>
         <p:spPr>
           <a:xfrm>
-            <a:off x="914400" y="3191256"/>
-            <a:ext cx="4206240" cy="320040"/>
-          </a:xfrm>
-          <a:prstGeom prst="rect">
-            <a:avLst/>
-          </a:prstGeom>
-          <a:noFill/>
-        </p:spPr>
-        <p:txBody>
-          <a:bodyPr wrap="square">
-            <a:spAutoFit/>
-          </a:bodyPr>
-          <a:lstStyle/>
-          <a:p>
-            <a:r>
-              <a:rPr sz="1300" b="1">
+            <a:off x="640080" y="5349240"/>
+            <a:ext cx="10881360" cy="1188720"/>
+          </a:xfrm>
+          <a:prstGeom prst="rect">
+            <a:avLst/>
+          </a:prstGeom>
+          <a:noFill/>
+        </p:spPr>
+        <p:txBody>
+          <a:bodyPr wrap="square">
+            <a:spAutoFit/>
+          </a:bodyPr>
+          <a:lstStyle/>
+          <a:p>
+            <a:pPr>
+              <a:spcAft>
+                <a:spcPts val="400"/>
+              </a:spcAft>
+            </a:pPr>
+            <a:r>
+              <a:rPr sz="1450" b="1">
+                <a:solidFill>
+                  <a:srgbClr val="FFFFFF"/>
+                </a:solidFill>
+                <a:latin typeface="Calibri"/>
+              </a:rPr>
+              <a:t>The execution-stage technique blocked BOTH.</a:t>
+            </a:r>
+          </a:p>
+          <a:p>
+            <a:pPr>
+              <a:spcAft>
+                <a:spcPts val="400"/>
+              </a:spcAft>
+            </a:pPr>
+            <a:r>
+              <a:rPr sz="1250" b="0">
+                <a:solidFill>
+                  <a:srgbClr val="CADCFC"/>
+                </a:solidFill>
+                <a:latin typeface="Calibri"/>
+              </a:rPr>
+              <a:t>It never reads the payload — it asks whether the action serves the user's request,</a:t>
+            </a:r>
+          </a:p>
+          <a:p>
+            <a:pPr>
+              <a:spcAft>
+                <a:spcPts val="400"/>
+              </a:spcAft>
+            </a:pPr>
+            <a:r>
+              <a:rPr sz="1250" b="0">
+                <a:solidFill>
+                  <a:srgbClr val="CADCFC"/>
+                </a:solidFill>
+                <a:latin typeface="Calibri"/>
+              </a:rPr>
+              <a:t>which is invariant to how the instruction was dressed up.</a:t>
+            </a:r>
+          </a:p>
+          <a:p>
+            <a:pPr>
+              <a:spcAft>
+                <a:spcPts val="400"/>
+              </a:spcAft>
+            </a:pPr>
+            <a:r>
+              <a:rPr sz="1250" b="1">
                 <a:solidFill>
                   <a:srgbClr val="E0A458"/>
                 </a:solidFill>
                 <a:latin typeface="Calibri"/>
               </a:rPr>
-              <a:t>rescreening_log.md</a:t>
-            </a:r>
-          </a:p>
-        </p:txBody>
-      </p:sp>
-      <p:sp>
-        <p:nvSpPr>
-          <p:cNvPr id="10" name="TextBox 9"/>
-          <p:cNvSpPr txBox="1"/>
-          <p:nvPr/>
-        </p:nvSpPr>
-        <p:spPr>
-          <a:xfrm>
-            <a:off x="5212080" y="3191256"/>
-            <a:ext cx="6035040" cy="320040"/>
-          </a:xfrm>
-          <a:prstGeom prst="rect">
-            <a:avLst/>
-          </a:prstGeom>
-          <a:noFill/>
-        </p:spPr>
-        <p:txBody>
-          <a:bodyPr wrap="square">
-            <a:spAutoFit/>
-          </a:bodyPr>
-          <a:lstStyle/>
-          <a:p>
-            <a:r>
-              <a:rPr sz="1250" b="0">
-                <a:solidFill>
-                  <a:srgbClr val="CADCFC"/>
-                </a:solidFill>
-                <a:latin typeface="Calibri"/>
-              </a:rPr>
-              <a:t>every corpus-affecting decision, dated, with cause</a:t>
-            </a:r>
-          </a:p>
-        </p:txBody>
-      </p:sp>
-      <p:sp>
-        <p:nvSpPr>
-          <p:cNvPr id="11" name="Rounded Rectangle 10"/>
-          <p:cNvSpPr/>
-          <p:nvPr/>
-        </p:nvSpPr>
-        <p:spPr>
-          <a:xfrm>
-            <a:off x="640080" y="3712464"/>
-            <a:ext cx="10881360" cy="512064"/>
-          </a:xfrm>
-          <a:prstGeom prst="roundRect">
-            <a:avLst/>
-          </a:prstGeom>
-          <a:solidFill>
-            <a:srgbClr val="1B334F"/>
-          </a:solidFill>
-          <a:ln>
-            <a:noFill/>
-          </a:ln>
-          <a:effectLst/>
-        </p:spPr>
-        <p:style>
-          <a:lnRef idx="1">
-            <a:schemeClr val="accent1"/>
-          </a:lnRef>
-          <a:fillRef idx="3">
-            <a:schemeClr val="accent1"/>
-          </a:fillRef>
-          <a:effectRef idx="2">
-            <a:schemeClr val="accent1"/>
-          </a:effectRef>
-          <a:fontRef idx="minor">
-            <a:schemeClr val="lt1"/>
-          </a:fontRef>
-        </p:style>
-        <p:txBody>
-          <a:bodyPr rtlCol="0" anchor="ctr"/>
-          <a:lstStyle/>
-          <a:p>
-            <a:pPr algn="ctr"/>
-          </a:p>
-        </p:txBody>
-      </p:sp>
-      <p:sp>
-        <p:nvSpPr>
-          <p:cNvPr id="12" name="TextBox 11"/>
-          <p:cNvSpPr txBox="1"/>
-          <p:nvPr/>
-        </p:nvSpPr>
-        <p:spPr>
-          <a:xfrm>
-            <a:off x="914400" y="3813048"/>
-            <a:ext cx="4206240" cy="320040"/>
-          </a:xfrm>
-          <a:prstGeom prst="rect">
-            <a:avLst/>
-          </a:prstGeom>
-          <a:noFill/>
-        </p:spPr>
-        <p:txBody>
-          <a:bodyPr wrap="square">
-            <a:spAutoFit/>
-          </a:bodyPr>
-          <a:lstStyle/>
-          <a:p>
-            <a:r>
-              <a:rPr sz="1300" b="1">
-                <a:solidFill>
-                  <a:srgbClr val="E0A458"/>
-                </a:solidFill>
-                <a:latin typeface="Calibri"/>
-              </a:rPr>
-              <a:t>scripts/</a:t>
-            </a:r>
-          </a:p>
-        </p:txBody>
-      </p:sp>
-      <p:sp>
-        <p:nvSpPr>
-          <p:cNvPr id="13" name="TextBox 12"/>
-          <p:cNvSpPr txBox="1"/>
-          <p:nvPr/>
-        </p:nvSpPr>
-        <p:spPr>
-          <a:xfrm>
-            <a:off x="5212080" y="3813048"/>
-            <a:ext cx="6035040" cy="320040"/>
-          </a:xfrm>
-          <a:prstGeom prst="rect">
-            <a:avLst/>
-          </a:prstGeom>
-          <a:noFill/>
-        </p:spPr>
-        <p:txBody>
-          <a:bodyPr wrap="square">
-            <a:spAutoFit/>
-          </a:bodyPr>
-          <a:lstStyle/>
-          <a:p>
-            <a:r>
-              <a:rPr sz="1250" b="0">
-                <a:solidFill>
-                  <a:srgbClr val="CADCFC"/>
-                </a:solidFill>
-                <a:latin typeface="Calibri"/>
-              </a:rPr>
-              <a:t>dedupe → registries → coverage matrix → RQ1/RQ2/RQ7</a:t>
-            </a:r>
-          </a:p>
-        </p:txBody>
-      </p:sp>
-      <p:sp>
-        <p:nvSpPr>
-          <p:cNvPr id="14" name="Rounded Rectangle 13"/>
-          <p:cNvSpPr/>
-          <p:nvPr/>
-        </p:nvSpPr>
-        <p:spPr>
-          <a:xfrm>
-            <a:off x="640080" y="4334256"/>
-            <a:ext cx="10881360" cy="512064"/>
-          </a:xfrm>
-          <a:prstGeom prst="roundRect">
-            <a:avLst/>
-          </a:prstGeom>
-          <a:solidFill>
-            <a:srgbClr val="1B334F"/>
-          </a:solidFill>
-          <a:ln>
-            <a:noFill/>
-          </a:ln>
-          <a:effectLst/>
-        </p:spPr>
-        <p:style>
-          <a:lnRef idx="1">
-            <a:schemeClr val="accent1"/>
-          </a:lnRef>
-          <a:fillRef idx="3">
-            <a:schemeClr val="accent1"/>
-          </a:fillRef>
-          <a:effectRef idx="2">
-            <a:schemeClr val="accent1"/>
-          </a:effectRef>
-          <a:fontRef idx="minor">
-            <a:schemeClr val="lt1"/>
-          </a:fontRef>
-        </p:style>
-        <p:txBody>
-          <a:bodyPr rtlCol="0" anchor="ctr"/>
-          <a:lstStyle/>
-          <a:p>
-            <a:pPr algn="ctr"/>
-          </a:p>
-        </p:txBody>
-      </p:sp>
-      <p:sp>
-        <p:nvSpPr>
-          <p:cNvPr id="15" name="TextBox 14"/>
-          <p:cNvSpPr txBox="1"/>
-          <p:nvPr/>
-        </p:nvSpPr>
-        <p:spPr>
-          <a:xfrm>
-            <a:off x="914400" y="4434840"/>
-            <a:ext cx="4206240" cy="320040"/>
-          </a:xfrm>
-          <a:prstGeom prst="rect">
-            <a:avLst/>
-          </a:prstGeom>
-          <a:noFill/>
-        </p:spPr>
-        <p:txBody>
-          <a:bodyPr wrap="square">
-            <a:spAutoFit/>
-          </a:bodyPr>
-          <a:lstStyle/>
-          <a:p>
-            <a:r>
-              <a:rPr sz="1300" b="1">
-                <a:solidFill>
-                  <a:srgbClr val="E0A458"/>
-                </a:solidFill>
-                <a:latin typeface="Calibri"/>
-              </a:rPr>
-              <a:t>context_sok_master_workbook.xlsx</a:t>
-            </a:r>
-          </a:p>
-        </p:txBody>
-      </p:sp>
-      <p:sp>
-        <p:nvSpPr>
-          <p:cNvPr id="16" name="TextBox 15"/>
-          <p:cNvSpPr txBox="1"/>
-          <p:nvPr/>
-        </p:nvSpPr>
-        <p:spPr>
-          <a:xfrm>
-            <a:off x="5212080" y="4434840"/>
-            <a:ext cx="6035040" cy="320040"/>
-          </a:xfrm>
-          <a:prstGeom prst="rect">
-            <a:avLst/>
-          </a:prstGeom>
-          <a:noFill/>
-        </p:spPr>
-        <p:txBody>
-          <a:bodyPr wrap="square">
-            <a:spAutoFit/>
-          </a:bodyPr>
-          <a:lstStyle/>
-          <a:p>
-            <a:r>
-              <a:rPr sz="1250" b="0">
-                <a:solidFill>
-                  <a:srgbClr val="CADCFC"/>
-                </a:solidFill>
-                <a:latin typeface="Calibri"/>
-              </a:rPr>
-              <a:t>papers, mechanisms, defenses, pairs, gaps</a:t>
-            </a:r>
-          </a:p>
-        </p:txBody>
-      </p:sp>
-      <p:sp>
-        <p:nvSpPr>
-          <p:cNvPr id="17" name="Rounded Rectangle 16"/>
-          <p:cNvSpPr/>
-          <p:nvPr/>
-        </p:nvSpPr>
-        <p:spPr>
-          <a:xfrm>
-            <a:off x="640080" y="4956048"/>
-            <a:ext cx="10881360" cy="512064"/>
-          </a:xfrm>
-          <a:prstGeom prst="roundRect">
-            <a:avLst/>
-          </a:prstGeom>
-          <a:solidFill>
-            <a:srgbClr val="1B334F"/>
-          </a:solidFill>
-          <a:ln>
-            <a:noFill/>
-          </a:ln>
-          <a:effectLst/>
-        </p:spPr>
-        <p:style>
-          <a:lnRef idx="1">
-            <a:schemeClr val="accent1"/>
-          </a:lnRef>
-          <a:fillRef idx="3">
-            <a:schemeClr val="accent1"/>
-          </a:fillRef>
-          <a:effectRef idx="2">
-            <a:schemeClr val="accent1"/>
-          </a:effectRef>
-          <a:fontRef idx="minor">
-            <a:schemeClr val="lt1"/>
-          </a:fontRef>
-        </p:style>
-        <p:txBody>
-          <a:bodyPr rtlCol="0" anchor="ctr"/>
-          <a:lstStyle/>
-          <a:p>
-            <a:pPr algn="ctr"/>
-          </a:p>
-        </p:txBody>
-      </p:sp>
-      <p:sp>
-        <p:nvSpPr>
-          <p:cNvPr id="18" name="TextBox 17"/>
-          <p:cNvSpPr txBox="1"/>
-          <p:nvPr/>
-        </p:nvSpPr>
-        <p:spPr>
-          <a:xfrm>
-            <a:off x="914400" y="5056632"/>
-            <a:ext cx="4206240" cy="320040"/>
-          </a:xfrm>
-          <a:prstGeom prst="rect">
-            <a:avLst/>
-          </a:prstGeom>
-          <a:noFill/>
-        </p:spPr>
-        <p:txBody>
-          <a:bodyPr wrap="square">
-            <a:spAutoFit/>
-          </a:bodyPr>
-          <a:lstStyle/>
-          <a:p>
-            <a:r>
-              <a:rPr sz="1300" b="1">
-                <a:solidFill>
-                  <a:srgbClr val="E0A458"/>
-                </a:solidFill>
-                <a:latin typeface="Calibri"/>
-              </a:rPr>
-              <a:t>mcp_server/</a:t>
-            </a:r>
-          </a:p>
-        </p:txBody>
-      </p:sp>
-      <p:sp>
-        <p:nvSpPr>
-          <p:cNvPr id="19" name="TextBox 18"/>
-          <p:cNvSpPr txBox="1"/>
-          <p:nvPr/>
-        </p:nvSpPr>
-        <p:spPr>
-          <a:xfrm>
-            <a:off x="5212080" y="5056632"/>
-            <a:ext cx="6035040" cy="320040"/>
-          </a:xfrm>
-          <a:prstGeom prst="rect">
-            <a:avLst/>
-          </a:prstGeom>
-          <a:noFill/>
-        </p:spPr>
-        <p:txBody>
-          <a:bodyPr wrap="square">
-            <a:spAutoFit/>
-          </a:bodyPr>
-          <a:lstStyle/>
-          <a:p>
-            <a:r>
-              <a:rPr sz="1250" b="0">
-                <a:solidFill>
-                  <a:srgbClr val="CADCFC"/>
-                </a:solidFill>
-                <a:latin typeface="Calibri"/>
-              </a:rPr>
-              <a:t>the same data, queryable conversationally</a:t>
-            </a:r>
-          </a:p>
-        </p:txBody>
-      </p:sp>
-      <p:sp>
-        <p:nvSpPr>
-          <p:cNvPr id="20" name="Rounded Rectangle 19"/>
-          <p:cNvSpPr/>
-          <p:nvPr/>
-        </p:nvSpPr>
-        <p:spPr>
-          <a:xfrm>
-            <a:off x="640080" y="5577840"/>
-            <a:ext cx="10881360" cy="512064"/>
-          </a:xfrm>
-          <a:prstGeom prst="roundRect">
-            <a:avLst/>
-          </a:prstGeom>
-          <a:solidFill>
-            <a:srgbClr val="1B334F"/>
-          </a:solidFill>
-          <a:ln>
-            <a:noFill/>
-          </a:ln>
-          <a:effectLst/>
-        </p:spPr>
-        <p:style>
-          <a:lnRef idx="1">
-            <a:schemeClr val="accent1"/>
-          </a:lnRef>
-          <a:fillRef idx="3">
-            <a:schemeClr val="accent1"/>
-          </a:fillRef>
-          <a:effectRef idx="2">
-            <a:schemeClr val="accent1"/>
-          </a:effectRef>
-          <a:fontRef idx="minor">
-            <a:schemeClr val="lt1"/>
-          </a:fontRef>
-        </p:style>
-        <p:txBody>
-          <a:bodyPr rtlCol="0" anchor="ctr"/>
-          <a:lstStyle/>
-          <a:p>
-            <a:pPr algn="ctr"/>
-          </a:p>
-        </p:txBody>
-      </p:sp>
-      <p:sp>
-        <p:nvSpPr>
-          <p:cNvPr id="21" name="TextBox 20"/>
-          <p:cNvSpPr txBox="1"/>
-          <p:nvPr/>
-        </p:nvSpPr>
-        <p:spPr>
-          <a:xfrm>
-            <a:off x="914400" y="5678424"/>
-            <a:ext cx="4206240" cy="320040"/>
-          </a:xfrm>
-          <a:prstGeom prst="rect">
-            <a:avLst/>
-          </a:prstGeom>
-          <a:noFill/>
-        </p:spPr>
-        <p:txBody>
-          <a:bodyPr wrap="square">
-            <a:spAutoFit/>
-          </a:bodyPr>
-          <a:lstStyle/>
-          <a:p>
-            <a:r>
-              <a:rPr sz="1300" b="1">
-                <a:solidFill>
-                  <a:srgbClr val="E0A458"/>
-                </a:solidFill>
-                <a:latin typeface="Calibri"/>
-              </a:rPr>
-              <a:t>scripts/build_presentation.py</a:t>
-            </a:r>
-          </a:p>
-        </p:txBody>
-      </p:sp>
-      <p:sp>
-        <p:nvSpPr>
-          <p:cNvPr id="22" name="TextBox 21"/>
-          <p:cNvSpPr txBox="1"/>
-          <p:nvPr/>
-        </p:nvSpPr>
-        <p:spPr>
-          <a:xfrm>
-            <a:off x="5212080" y="5678424"/>
-            <a:ext cx="6035040" cy="320040"/>
-          </a:xfrm>
-          <a:prstGeom prst="rect">
-            <a:avLst/>
-          </a:prstGeom>
-          <a:noFill/>
-        </p:spPr>
-        <p:txBody>
-          <a:bodyPr wrap="square">
-            <a:spAutoFit/>
-          </a:bodyPr>
-          <a:lstStyle/>
-          <a:p>
-            <a:r>
-              <a:rPr sz="1250" b="0">
-                <a:solidFill>
-                  <a:srgbClr val="CADCFC"/>
-                </a:solidFill>
-                <a:latin typeface="Calibri"/>
-              </a:rPr>
-              <a:t>this deck, built from the live registries</a:t>
-            </a:r>
-          </a:p>
-        </p:txBody>
-      </p:sp>
-      <p:sp>
-        <p:nvSpPr>
-          <p:cNvPr id="23" name="TextBox 22"/>
-          <p:cNvSpPr txBox="1"/>
-          <p:nvPr/>
-        </p:nvSpPr>
-        <p:spPr>
-          <a:xfrm>
-            <a:off x="640080" y="6309360"/>
-            <a:ext cx="10881360" cy="365760"/>
-          </a:xfrm>
-          <a:prstGeom prst="rect">
-            <a:avLst/>
-          </a:prstGeom>
-          <a:noFill/>
-        </p:spPr>
-        <p:txBody>
-          <a:bodyPr wrap="square">
-            <a:spAutoFit/>
-          </a:bodyPr>
-          <a:lstStyle/>
-          <a:p>
-            <a:r>
-              <a:rPr sz="1200" b="0">
-                <a:solidFill>
-                  <a:srgbClr val="CFE8EF"/>
-                </a:solidFill>
-                <a:latin typeface="Calibri"/>
-              </a:rPr>
-              <a:t>RQ6 numbers come from running each defense's released code or weights — never from the paper's reported figures.</a:t>
+              <a:t>RQ6 concluded execution defenses generalize least. This says the opposite.</a:t>
             </a:r>
           </a:p>
         </p:txBody>
@@ -8905,7 +8137,7 @@
                 </a:solidFill>
                 <a:latin typeface="Calibri"/>
               </a:rPr>
-              <a:t>WHAT'S NEXT</a:t>
+              <a:t>DIFFERENTIATION</a:t>
             </a:r>
           </a:p>
         </p:txBody>
@@ -8944,7 +8176,7 @@
                 </a:solidFill>
                 <a:latin typeface="Cambria"/>
               </a:rPr>
-              <a:t>From findings to manuscript</a:t>
+              <a:t>Against the five closest SoKs</a:t>
             </a:r>
           </a:p>
         </p:txBody>
@@ -8991,42 +8223,918 @@
         </p:nvSpPr>
         <p:spPr>
           <a:xfrm>
-            <a:off x="640080" y="2331720"/>
-            <a:ext cx="4114800" cy="365760"/>
-          </a:xfrm>
-          <a:prstGeom prst="rect">
-            <a:avLst/>
-          </a:prstGeom>
-          <a:noFill/>
-        </p:spPr>
-        <p:txBody>
-          <a:bodyPr wrap="square">
-            <a:spAutoFit/>
-          </a:bodyPr>
-          <a:lstStyle/>
-          <a:p>
-            <a:r>
-              <a:rPr sz="1450" b="1">
+            <a:off x="640080" y="2240280"/>
+            <a:ext cx="10881360" cy="365760"/>
+          </a:xfrm>
+          <a:prstGeom prst="rect">
+            <a:avLst/>
+          </a:prstGeom>
+          <a:noFill/>
+        </p:spPr>
+        <p:txBody>
+          <a:bodyPr wrap="square">
+            <a:spAutoFit/>
+          </a:bodyPr>
+          <a:lstStyle/>
+          <a:p>
+            <a:r>
+              <a:rPr sz="1250" b="0">
+                <a:solidFill>
+                  <a:srgbClr val="CFE8EF"/>
+                </a:solidFill>
+                <a:latin typeface="Calibri"/>
+              </a:rPr>
+              <a:t>closest competitor: The Landscape of Prompt Injection Threats (2602.10453)</a:t>
+            </a:r>
+          </a:p>
+        </p:txBody>
+      </p:sp>
+      <p:sp>
+        <p:nvSpPr>
+          <p:cNvPr id="6" name="Rounded Rectangle 5"/>
+          <p:cNvSpPr/>
+          <p:nvPr/>
+        </p:nvSpPr>
+        <p:spPr>
+          <a:xfrm>
+            <a:off x="640080" y="2697480"/>
+            <a:ext cx="10881360" cy="420624"/>
+          </a:xfrm>
+          <a:prstGeom prst="roundRect">
+            <a:avLst/>
+          </a:prstGeom>
+          <a:solidFill>
+            <a:srgbClr val="1B334F"/>
+          </a:solidFill>
+          <a:ln>
+            <a:noFill/>
+          </a:ln>
+          <a:effectLst/>
+        </p:spPr>
+        <p:style>
+          <a:lnRef idx="1">
+            <a:schemeClr val="accent1"/>
+          </a:lnRef>
+          <a:fillRef idx="3">
+            <a:schemeClr val="accent1"/>
+          </a:fillRef>
+          <a:effectRef idx="2">
+            <a:schemeClr val="accent1"/>
+          </a:effectRef>
+          <a:fontRef idx="minor">
+            <a:schemeClr val="lt1"/>
+          </a:fontRef>
+        </p:style>
+        <p:txBody>
+          <a:bodyPr rtlCol="0" anchor="ctr"/>
+          <a:lstStyle/>
+          <a:p>
+            <a:pPr algn="ctr"/>
+          </a:p>
+        </p:txBody>
+      </p:sp>
+      <p:sp>
+        <p:nvSpPr>
+          <p:cNvPr id="7" name="TextBox 6"/>
+          <p:cNvSpPr txBox="1"/>
+          <p:nvPr/>
+        </p:nvSpPr>
+        <p:spPr>
+          <a:xfrm>
+            <a:off x="868680" y="2752344"/>
+            <a:ext cx="4754880" cy="310896"/>
+          </a:xfrm>
+          <a:prstGeom prst="rect">
+            <a:avLst/>
+          </a:prstGeom>
+          <a:noFill/>
+        </p:spPr>
+        <p:txBody>
+          <a:bodyPr wrap="square">
+            <a:spAutoFit/>
+          </a:bodyPr>
+          <a:lstStyle/>
+          <a:p>
+            <a:r>
+              <a:rPr sz="1300" b="1">
+                <a:solidFill>
+                  <a:srgbClr val="FFFFFF"/>
+                </a:solidFill>
+                <a:latin typeface="Calibri"/>
+              </a:rPr>
+              <a:t>papers reviewed</a:t>
+            </a:r>
+          </a:p>
+        </p:txBody>
+      </p:sp>
+      <p:sp>
+        <p:nvSpPr>
+          <p:cNvPr id="8" name="TextBox 7"/>
+          <p:cNvSpPr txBox="1"/>
+          <p:nvPr/>
+        </p:nvSpPr>
+        <p:spPr>
+          <a:xfrm>
+            <a:off x="5760720" y="2752344"/>
+            <a:ext cx="2377440" cy="310896"/>
+          </a:xfrm>
+          <a:prstGeom prst="rect">
+            <a:avLst/>
+          </a:prstGeom>
+          <a:noFill/>
+        </p:spPr>
+        <p:txBody>
+          <a:bodyPr wrap="square">
+            <a:spAutoFit/>
+          </a:bodyPr>
+          <a:lstStyle/>
+          <a:p>
+            <a:r>
+              <a:rPr sz="1300" b="0">
+                <a:solidFill>
+                  <a:srgbClr val="CADCFC"/>
+                </a:solidFill>
+                <a:latin typeface="Calibri"/>
+              </a:rPr>
+              <a:t>78</a:t>
+            </a:r>
+          </a:p>
+        </p:txBody>
+      </p:sp>
+      <p:sp>
+        <p:nvSpPr>
+          <p:cNvPr id="9" name="TextBox 8"/>
+          <p:cNvSpPr txBox="1"/>
+          <p:nvPr/>
+        </p:nvSpPr>
+        <p:spPr>
+          <a:xfrm>
+            <a:off x="8595360" y="2752344"/>
+            <a:ext cx="2651760" cy="310896"/>
+          </a:xfrm>
+          <a:prstGeom prst="rect">
+            <a:avLst/>
+          </a:prstGeom>
+          <a:noFill/>
+        </p:spPr>
+        <p:txBody>
+          <a:bodyPr wrap="square">
+            <a:spAutoFit/>
+          </a:bodyPr>
+          <a:lstStyle/>
+          <a:p>
+            <a:r>
+              <a:rPr sz="1300" b="1">
                 <a:solidFill>
                   <a:srgbClr val="E0A458"/>
                 </a:solidFill>
-                <a:latin typeface="Cambria"/>
-              </a:rPr>
-              <a:t>Resolve the RQ6 confound</a:t>
-            </a:r>
-          </a:p>
-        </p:txBody>
-      </p:sp>
-      <p:sp>
-        <p:nvSpPr>
-          <p:cNvPr id="6" name="TextBox 5"/>
-          <p:cNvSpPr txBox="1"/>
-          <p:nvPr/>
-        </p:nvSpPr>
-        <p:spPr>
-          <a:xfrm>
-            <a:off x="4846320" y="2359151"/>
-            <a:ext cx="6675120" cy="685800"/>
+                <a:latin typeface="Calibri"/>
+              </a:rPr>
+              <a:t>1,026</a:t>
+            </a:r>
+          </a:p>
+        </p:txBody>
+      </p:sp>
+      <p:sp>
+        <p:nvSpPr>
+          <p:cNvPr id="10" name="Rounded Rectangle 9"/>
+          <p:cNvSpPr/>
+          <p:nvPr/>
+        </p:nvSpPr>
+        <p:spPr>
+          <a:xfrm>
+            <a:off x="640080" y="3209544"/>
+            <a:ext cx="10881360" cy="420624"/>
+          </a:xfrm>
+          <a:prstGeom prst="roundRect">
+            <a:avLst/>
+          </a:prstGeom>
+          <a:solidFill>
+            <a:srgbClr val="1B334F"/>
+          </a:solidFill>
+          <a:ln>
+            <a:noFill/>
+          </a:ln>
+          <a:effectLst/>
+        </p:spPr>
+        <p:style>
+          <a:lnRef idx="1">
+            <a:schemeClr val="accent1"/>
+          </a:lnRef>
+          <a:fillRef idx="3">
+            <a:schemeClr val="accent1"/>
+          </a:fillRef>
+          <a:effectRef idx="2">
+            <a:schemeClr val="accent1"/>
+          </a:effectRef>
+          <a:fontRef idx="minor">
+            <a:schemeClr val="lt1"/>
+          </a:fontRef>
+        </p:style>
+        <p:txBody>
+          <a:bodyPr rtlCol="0" anchor="ctr"/>
+          <a:lstStyle/>
+          <a:p>
+            <a:pPr algn="ctr"/>
+          </a:p>
+        </p:txBody>
+      </p:sp>
+      <p:sp>
+        <p:nvSpPr>
+          <p:cNvPr id="11" name="TextBox 10"/>
+          <p:cNvSpPr txBox="1"/>
+          <p:nvPr/>
+        </p:nvSpPr>
+        <p:spPr>
+          <a:xfrm>
+            <a:off x="868680" y="3264408"/>
+            <a:ext cx="4754880" cy="310896"/>
+          </a:xfrm>
+          <a:prstGeom prst="rect">
+            <a:avLst/>
+          </a:prstGeom>
+          <a:noFill/>
+        </p:spPr>
+        <p:txBody>
+          <a:bodyPr wrap="square">
+            <a:spAutoFit/>
+          </a:bodyPr>
+          <a:lstStyle/>
+          <a:p>
+            <a:r>
+              <a:rPr sz="1300" b="1">
+                <a:solidFill>
+                  <a:srgbClr val="FFFFFF"/>
+                </a:solidFill>
+                <a:latin typeface="Calibri"/>
+              </a:rPr>
+              <a:t>attacks catalogued</a:t>
+            </a:r>
+          </a:p>
+        </p:txBody>
+      </p:sp>
+      <p:sp>
+        <p:nvSpPr>
+          <p:cNvPr id="12" name="TextBox 11"/>
+          <p:cNvSpPr txBox="1"/>
+          <p:nvPr/>
+        </p:nvSpPr>
+        <p:spPr>
+          <a:xfrm>
+            <a:off x="5760720" y="3264408"/>
+            <a:ext cx="2377440" cy="310896"/>
+          </a:xfrm>
+          <a:prstGeom prst="rect">
+            <a:avLst/>
+          </a:prstGeom>
+          <a:noFill/>
+        </p:spPr>
+        <p:txBody>
+          <a:bodyPr wrap="square">
+            <a:spAutoFit/>
+          </a:bodyPr>
+          <a:lstStyle/>
+          <a:p>
+            <a:r>
+              <a:rPr sz="1300" b="0">
+                <a:solidFill>
+                  <a:srgbClr val="CADCFC"/>
+                </a:solidFill>
+                <a:latin typeface="Calibri"/>
+              </a:rPr>
+              <a:t>37</a:t>
+            </a:r>
+          </a:p>
+        </p:txBody>
+      </p:sp>
+      <p:sp>
+        <p:nvSpPr>
+          <p:cNvPr id="13" name="TextBox 12"/>
+          <p:cNvSpPr txBox="1"/>
+          <p:nvPr/>
+        </p:nvSpPr>
+        <p:spPr>
+          <a:xfrm>
+            <a:off x="8595360" y="3264408"/>
+            <a:ext cx="2651760" cy="310896"/>
+          </a:xfrm>
+          <a:prstGeom prst="rect">
+            <a:avLst/>
+          </a:prstGeom>
+          <a:noFill/>
+        </p:spPr>
+        <p:txBody>
+          <a:bodyPr wrap="square">
+            <a:spAutoFit/>
+          </a:bodyPr>
+          <a:lstStyle/>
+          <a:p>
+            <a:r>
+              <a:rPr sz="1300" b="1">
+                <a:solidFill>
+                  <a:srgbClr val="E0A458"/>
+                </a:solidFill>
+                <a:latin typeface="Calibri"/>
+              </a:rPr>
+              <a:t>223</a:t>
+            </a:r>
+          </a:p>
+        </p:txBody>
+      </p:sp>
+      <p:sp>
+        <p:nvSpPr>
+          <p:cNvPr id="14" name="Rounded Rectangle 13"/>
+          <p:cNvSpPr/>
+          <p:nvPr/>
+        </p:nvSpPr>
+        <p:spPr>
+          <a:xfrm>
+            <a:off x="640080" y="3721608"/>
+            <a:ext cx="10881360" cy="420624"/>
+          </a:xfrm>
+          <a:prstGeom prst="roundRect">
+            <a:avLst/>
+          </a:prstGeom>
+          <a:solidFill>
+            <a:srgbClr val="1B334F"/>
+          </a:solidFill>
+          <a:ln>
+            <a:noFill/>
+          </a:ln>
+          <a:effectLst/>
+        </p:spPr>
+        <p:style>
+          <a:lnRef idx="1">
+            <a:schemeClr val="accent1"/>
+          </a:lnRef>
+          <a:fillRef idx="3">
+            <a:schemeClr val="accent1"/>
+          </a:fillRef>
+          <a:effectRef idx="2">
+            <a:schemeClr val="accent1"/>
+          </a:effectRef>
+          <a:fontRef idx="minor">
+            <a:schemeClr val="lt1"/>
+          </a:fontRef>
+        </p:style>
+        <p:txBody>
+          <a:bodyPr rtlCol="0" anchor="ctr"/>
+          <a:lstStyle/>
+          <a:p>
+            <a:pPr algn="ctr"/>
+          </a:p>
+        </p:txBody>
+      </p:sp>
+      <p:sp>
+        <p:nvSpPr>
+          <p:cNvPr id="15" name="TextBox 14"/>
+          <p:cNvSpPr txBox="1"/>
+          <p:nvPr/>
+        </p:nvSpPr>
+        <p:spPr>
+          <a:xfrm>
+            <a:off x="868680" y="3776472"/>
+            <a:ext cx="4754880" cy="310896"/>
+          </a:xfrm>
+          <a:prstGeom prst="rect">
+            <a:avLst/>
+          </a:prstGeom>
+          <a:noFill/>
+        </p:spPr>
+        <p:txBody>
+          <a:bodyPr wrap="square">
+            <a:spAutoFit/>
+          </a:bodyPr>
+          <a:lstStyle/>
+          <a:p>
+            <a:r>
+              <a:rPr sz="1300" b="1">
+                <a:solidFill>
+                  <a:srgbClr val="FFFFFF"/>
+                </a:solidFill>
+                <a:latin typeface="Calibri"/>
+              </a:rPr>
+              <a:t>defenses catalogued</a:t>
+            </a:r>
+          </a:p>
+        </p:txBody>
+      </p:sp>
+      <p:sp>
+        <p:nvSpPr>
+          <p:cNvPr id="16" name="TextBox 15"/>
+          <p:cNvSpPr txBox="1"/>
+          <p:nvPr/>
+        </p:nvSpPr>
+        <p:spPr>
+          <a:xfrm>
+            <a:off x="5760720" y="3776472"/>
+            <a:ext cx="2377440" cy="310896"/>
+          </a:xfrm>
+          <a:prstGeom prst="rect">
+            <a:avLst/>
+          </a:prstGeom>
+          <a:noFill/>
+        </p:spPr>
+        <p:txBody>
+          <a:bodyPr wrap="square">
+            <a:spAutoFit/>
+          </a:bodyPr>
+          <a:lstStyle/>
+          <a:p>
+            <a:r>
+              <a:rPr sz="1300" b="0">
+                <a:solidFill>
+                  <a:srgbClr val="CADCFC"/>
+                </a:solidFill>
+                <a:latin typeface="Calibri"/>
+              </a:rPr>
+              <a:t>41</a:t>
+            </a:r>
+          </a:p>
+        </p:txBody>
+      </p:sp>
+      <p:sp>
+        <p:nvSpPr>
+          <p:cNvPr id="17" name="TextBox 16"/>
+          <p:cNvSpPr txBox="1"/>
+          <p:nvPr/>
+        </p:nvSpPr>
+        <p:spPr>
+          <a:xfrm>
+            <a:off x="8595360" y="3776472"/>
+            <a:ext cx="2651760" cy="310896"/>
+          </a:xfrm>
+          <a:prstGeom prst="rect">
+            <a:avLst/>
+          </a:prstGeom>
+          <a:noFill/>
+        </p:spPr>
+        <p:txBody>
+          <a:bodyPr wrap="square">
+            <a:spAutoFit/>
+          </a:bodyPr>
+          <a:lstStyle/>
+          <a:p>
+            <a:r>
+              <a:rPr sz="1300" b="1">
+                <a:solidFill>
+                  <a:srgbClr val="E0A458"/>
+                </a:solidFill>
+                <a:latin typeface="Calibri"/>
+              </a:rPr>
+              <a:t>534</a:t>
+            </a:r>
+          </a:p>
+        </p:txBody>
+      </p:sp>
+      <p:sp>
+        <p:nvSpPr>
+          <p:cNvPr id="18" name="Rounded Rectangle 17"/>
+          <p:cNvSpPr/>
+          <p:nvPr/>
+        </p:nvSpPr>
+        <p:spPr>
+          <a:xfrm>
+            <a:off x="640080" y="4233672"/>
+            <a:ext cx="10881360" cy="420624"/>
+          </a:xfrm>
+          <a:prstGeom prst="roundRect">
+            <a:avLst/>
+          </a:prstGeom>
+          <a:solidFill>
+            <a:srgbClr val="1B334F"/>
+          </a:solidFill>
+          <a:ln>
+            <a:noFill/>
+          </a:ln>
+          <a:effectLst/>
+        </p:spPr>
+        <p:style>
+          <a:lnRef idx="1">
+            <a:schemeClr val="accent1"/>
+          </a:lnRef>
+          <a:fillRef idx="3">
+            <a:schemeClr val="accent1"/>
+          </a:fillRef>
+          <a:effectRef idx="2">
+            <a:schemeClr val="accent1"/>
+          </a:effectRef>
+          <a:fontRef idx="minor">
+            <a:schemeClr val="lt1"/>
+          </a:fontRef>
+        </p:style>
+        <p:txBody>
+          <a:bodyPr rtlCol="0" anchor="ctr"/>
+          <a:lstStyle/>
+          <a:p>
+            <a:pPr algn="ctr"/>
+          </a:p>
+        </p:txBody>
+      </p:sp>
+      <p:sp>
+        <p:nvSpPr>
+          <p:cNvPr id="19" name="TextBox 18"/>
+          <p:cNvSpPr txBox="1"/>
+          <p:nvPr/>
+        </p:nvSpPr>
+        <p:spPr>
+          <a:xfrm>
+            <a:off x="868680" y="4288536"/>
+            <a:ext cx="4754880" cy="310896"/>
+          </a:xfrm>
+          <a:prstGeom prst="rect">
+            <a:avLst/>
+          </a:prstGeom>
+          <a:noFill/>
+        </p:spPr>
+        <p:txBody>
+          <a:bodyPr wrap="square">
+            <a:spAutoFit/>
+          </a:bodyPr>
+          <a:lstStyle/>
+          <a:p>
+            <a:r>
+              <a:rPr sz="1300" b="1">
+                <a:solidFill>
+                  <a:srgbClr val="FFFFFF"/>
+                </a:solidFill>
+                <a:latin typeface="Calibri"/>
+              </a:rPr>
+              <a:t>attack × defense pairs</a:t>
+            </a:r>
+          </a:p>
+        </p:txBody>
+      </p:sp>
+      <p:sp>
+        <p:nvSpPr>
+          <p:cNvPr id="20" name="TextBox 19"/>
+          <p:cNvSpPr txBox="1"/>
+          <p:nvPr/>
+        </p:nvSpPr>
+        <p:spPr>
+          <a:xfrm>
+            <a:off x="5760720" y="4288536"/>
+            <a:ext cx="2377440" cy="310896"/>
+          </a:xfrm>
+          <a:prstGeom prst="rect">
+            <a:avLst/>
+          </a:prstGeom>
+          <a:noFill/>
+        </p:spPr>
+        <p:txBody>
+          <a:bodyPr wrap="square">
+            <a:spAutoFit/>
+          </a:bodyPr>
+          <a:lstStyle/>
+          <a:p>
+            <a:r>
+              <a:rPr sz="1300" b="0">
+                <a:solidFill>
+                  <a:srgbClr val="CADCFC"/>
+                </a:solidFill>
+                <a:latin typeface="Calibri"/>
+              </a:rPr>
+              <a:t>—</a:t>
+            </a:r>
+          </a:p>
+        </p:txBody>
+      </p:sp>
+      <p:sp>
+        <p:nvSpPr>
+          <p:cNvPr id="21" name="TextBox 20"/>
+          <p:cNvSpPr txBox="1"/>
+          <p:nvPr/>
+        </p:nvSpPr>
+        <p:spPr>
+          <a:xfrm>
+            <a:off x="8595360" y="4288536"/>
+            <a:ext cx="2651760" cy="310896"/>
+          </a:xfrm>
+          <a:prstGeom prst="rect">
+            <a:avLst/>
+          </a:prstGeom>
+          <a:noFill/>
+        </p:spPr>
+        <p:txBody>
+          <a:bodyPr wrap="square">
+            <a:spAutoFit/>
+          </a:bodyPr>
+          <a:lstStyle/>
+          <a:p>
+            <a:r>
+              <a:rPr sz="1300" b="1">
+                <a:solidFill>
+                  <a:srgbClr val="E0A458"/>
+                </a:solidFill>
+                <a:latin typeface="Calibri"/>
+              </a:rPr>
+              <a:t>332</a:t>
+            </a:r>
+          </a:p>
+        </p:txBody>
+      </p:sp>
+      <p:sp>
+        <p:nvSpPr>
+          <p:cNvPr id="22" name="Rounded Rectangle 21"/>
+          <p:cNvSpPr/>
+          <p:nvPr/>
+        </p:nvSpPr>
+        <p:spPr>
+          <a:xfrm>
+            <a:off x="640080" y="4745736"/>
+            <a:ext cx="10881360" cy="420624"/>
+          </a:xfrm>
+          <a:prstGeom prst="roundRect">
+            <a:avLst/>
+          </a:prstGeom>
+          <a:solidFill>
+            <a:srgbClr val="1B334F"/>
+          </a:solidFill>
+          <a:ln>
+            <a:noFill/>
+          </a:ln>
+          <a:effectLst/>
+        </p:spPr>
+        <p:style>
+          <a:lnRef idx="1">
+            <a:schemeClr val="accent1"/>
+          </a:lnRef>
+          <a:fillRef idx="3">
+            <a:schemeClr val="accent1"/>
+          </a:fillRef>
+          <a:effectRef idx="2">
+            <a:schemeClr val="accent1"/>
+          </a:effectRef>
+          <a:fontRef idx="minor">
+            <a:schemeClr val="lt1"/>
+          </a:fontRef>
+        </p:style>
+        <p:txBody>
+          <a:bodyPr rtlCol="0" anchor="ctr"/>
+          <a:lstStyle/>
+          <a:p>
+            <a:pPr algn="ctr"/>
+          </a:p>
+        </p:txBody>
+      </p:sp>
+      <p:sp>
+        <p:nvSpPr>
+          <p:cNvPr id="23" name="TextBox 22"/>
+          <p:cNvSpPr txBox="1"/>
+          <p:nvPr/>
+        </p:nvSpPr>
+        <p:spPr>
+          <a:xfrm>
+            <a:off x="868680" y="4800600"/>
+            <a:ext cx="4754880" cy="310896"/>
+          </a:xfrm>
+          <a:prstGeom prst="rect">
+            <a:avLst/>
+          </a:prstGeom>
+          <a:noFill/>
+        </p:spPr>
+        <p:txBody>
+          <a:bodyPr wrap="square">
+            <a:spAutoFit/>
+          </a:bodyPr>
+          <a:lstStyle/>
+          <a:p>
+            <a:r>
+              <a:rPr sz="1300" b="1">
+                <a:solidFill>
+                  <a:srgbClr val="FFFFFF"/>
+                </a:solidFill>
+                <a:latin typeface="Calibri"/>
+              </a:rPr>
+              <a:t>runs own experiments</a:t>
+            </a:r>
+          </a:p>
+        </p:txBody>
+      </p:sp>
+      <p:sp>
+        <p:nvSpPr>
+          <p:cNvPr id="24" name="TextBox 23"/>
+          <p:cNvSpPr txBox="1"/>
+          <p:nvPr/>
+        </p:nvSpPr>
+        <p:spPr>
+          <a:xfrm>
+            <a:off x="5760720" y="4800600"/>
+            <a:ext cx="2377440" cy="310896"/>
+          </a:xfrm>
+          <a:prstGeom prst="rect">
+            <a:avLst/>
+          </a:prstGeom>
+          <a:noFill/>
+        </p:spPr>
+        <p:txBody>
+          <a:bodyPr wrap="square">
+            <a:spAutoFit/>
+          </a:bodyPr>
+          <a:lstStyle/>
+          <a:p>
+            <a:r>
+              <a:rPr sz="1300" b="0">
+                <a:solidFill>
+                  <a:srgbClr val="CADCFC"/>
+                </a:solidFill>
+                <a:latin typeface="Calibri"/>
+              </a:rPr>
+              <a:t>yes</a:t>
+            </a:r>
+          </a:p>
+        </p:txBody>
+      </p:sp>
+      <p:sp>
+        <p:nvSpPr>
+          <p:cNvPr id="25" name="TextBox 24"/>
+          <p:cNvSpPr txBox="1"/>
+          <p:nvPr/>
+        </p:nvSpPr>
+        <p:spPr>
+          <a:xfrm>
+            <a:off x="8595360" y="4800600"/>
+            <a:ext cx="2651760" cy="310896"/>
+          </a:xfrm>
+          <a:prstGeom prst="rect">
+            <a:avLst/>
+          </a:prstGeom>
+          <a:noFill/>
+        </p:spPr>
+        <p:txBody>
+          <a:bodyPr wrap="square">
+            <a:spAutoFit/>
+          </a:bodyPr>
+          <a:lstStyle/>
+          <a:p>
+            <a:r>
+              <a:rPr sz="1300" b="1">
+                <a:solidFill>
+                  <a:srgbClr val="E0A458"/>
+                </a:solidFill>
+                <a:latin typeface="Calibri"/>
+              </a:rPr>
+              <a:t>yes</a:t>
+            </a:r>
+          </a:p>
+        </p:txBody>
+      </p:sp>
+      <p:sp>
+        <p:nvSpPr>
+          <p:cNvPr id="26" name="Rounded Rectangle 25"/>
+          <p:cNvSpPr/>
+          <p:nvPr/>
+        </p:nvSpPr>
+        <p:spPr>
+          <a:xfrm>
+            <a:off x="640080" y="5257800"/>
+            <a:ext cx="10881360" cy="420624"/>
+          </a:xfrm>
+          <a:prstGeom prst="roundRect">
+            <a:avLst/>
+          </a:prstGeom>
+          <a:solidFill>
+            <a:srgbClr val="1B334F"/>
+          </a:solidFill>
+          <a:ln>
+            <a:noFill/>
+          </a:ln>
+          <a:effectLst/>
+        </p:spPr>
+        <p:style>
+          <a:lnRef idx="1">
+            <a:schemeClr val="accent1"/>
+          </a:lnRef>
+          <a:fillRef idx="3">
+            <a:schemeClr val="accent1"/>
+          </a:fillRef>
+          <a:effectRef idx="2">
+            <a:schemeClr val="accent1"/>
+          </a:effectRef>
+          <a:fontRef idx="minor">
+            <a:schemeClr val="lt1"/>
+          </a:fontRef>
+        </p:style>
+        <p:txBody>
+          <a:bodyPr rtlCol="0" anchor="ctr"/>
+          <a:lstStyle/>
+          <a:p>
+            <a:pPr algn="ctr"/>
+          </a:p>
+        </p:txBody>
+      </p:sp>
+      <p:sp>
+        <p:nvSpPr>
+          <p:cNvPr id="27" name="TextBox 26"/>
+          <p:cNvSpPr txBox="1"/>
+          <p:nvPr/>
+        </p:nvSpPr>
+        <p:spPr>
+          <a:xfrm>
+            <a:off x="868680" y="5312664"/>
+            <a:ext cx="4754880" cy="310896"/>
+          </a:xfrm>
+          <a:prstGeom prst="rect">
+            <a:avLst/>
+          </a:prstGeom>
+          <a:noFill/>
+        </p:spPr>
+        <p:txBody>
+          <a:bodyPr wrap="square">
+            <a:spAutoFit/>
+          </a:bodyPr>
+          <a:lstStyle/>
+          <a:p>
+            <a:r>
+              <a:rPr sz="1300" b="1">
+                <a:solidFill>
+                  <a:srgbClr val="FFFFFF"/>
+                </a:solidFill>
+                <a:latin typeface="Calibri"/>
+              </a:rPr>
+              <a:t>covers BOTH literatures</a:t>
+            </a:r>
+          </a:p>
+        </p:txBody>
+      </p:sp>
+      <p:sp>
+        <p:nvSpPr>
+          <p:cNvPr id="28" name="TextBox 27"/>
+          <p:cNvSpPr txBox="1"/>
+          <p:nvPr/>
+        </p:nvSpPr>
+        <p:spPr>
+          <a:xfrm>
+            <a:off x="5760720" y="5312664"/>
+            <a:ext cx="2377440" cy="310896"/>
+          </a:xfrm>
+          <a:prstGeom prst="rect">
+            <a:avLst/>
+          </a:prstGeom>
+          <a:noFill/>
+        </p:spPr>
+        <p:txBody>
+          <a:bodyPr wrap="square">
+            <a:spAutoFit/>
+          </a:bodyPr>
+          <a:lstStyle/>
+          <a:p>
+            <a:r>
+              <a:rPr sz="1300" b="0">
+                <a:solidFill>
+                  <a:srgbClr val="CADCFC"/>
+                </a:solidFill>
+                <a:latin typeface="Calibri"/>
+              </a:rPr>
+              <a:t>no</a:t>
+            </a:r>
+          </a:p>
+        </p:txBody>
+      </p:sp>
+      <p:sp>
+        <p:nvSpPr>
+          <p:cNvPr id="29" name="TextBox 28"/>
+          <p:cNvSpPr txBox="1"/>
+          <p:nvPr/>
+        </p:nvSpPr>
+        <p:spPr>
+          <a:xfrm>
+            <a:off x="8595360" y="5312664"/>
+            <a:ext cx="2651760" cy="310896"/>
+          </a:xfrm>
+          <a:prstGeom prst="rect">
+            <a:avLst/>
+          </a:prstGeom>
+          <a:noFill/>
+        </p:spPr>
+        <p:txBody>
+          <a:bodyPr wrap="square">
+            <a:spAutoFit/>
+          </a:bodyPr>
+          <a:lstStyle/>
+          <a:p>
+            <a:r>
+              <a:rPr sz="1300" b="1">
+                <a:solidFill>
+                  <a:srgbClr val="E0A458"/>
+                </a:solidFill>
+                <a:latin typeface="Calibri"/>
+              </a:rPr>
+              <a:t>YES</a:t>
+            </a:r>
+          </a:p>
+        </p:txBody>
+      </p:sp>
+      <p:sp>
+        <p:nvSpPr>
+          <p:cNvPr id="30" name="TextBox 29"/>
+          <p:cNvSpPr txBox="1"/>
+          <p:nvPr/>
+        </p:nvSpPr>
+        <p:spPr>
+          <a:xfrm>
+            <a:off x="640080" y="5806440"/>
+            <a:ext cx="10881360" cy="822960"/>
           </a:xfrm>
           <a:prstGeom prst="rect">
             <a:avLst/>
@@ -9041,138 +9149,107 @@
           <a:p>
             <a:pPr>
               <a:spcAft>
-                <a:spcPts val="100"/>
+                <a:spcPts val="400"/>
               </a:spcAft>
             </a:pPr>
             <a:r>
-              <a:rPr sz="1250" b="0">
-                <a:solidFill>
-                  <a:srgbClr val="CADCFC"/>
-                </a:solidFill>
-                <a:latin typeface="Calibri"/>
-              </a:rPr>
-              <a:t>port the ingestion defenses into an agent harness so intervention point is tested, not inferred</a:t>
-            </a:r>
-          </a:p>
-        </p:txBody>
-      </p:sp>
-      <p:sp>
-        <p:nvSpPr>
-          <p:cNvPr id="7" name="TextBox 6"/>
-          <p:cNvSpPr txBox="1"/>
-          <p:nvPr/>
-        </p:nvSpPr>
-        <p:spPr>
-          <a:xfrm>
-            <a:off x="640080" y="3154679"/>
-            <a:ext cx="4114800" cy="365760"/>
-          </a:xfrm>
-          <a:prstGeom prst="rect">
-            <a:avLst/>
-          </a:prstGeom>
-          <a:noFill/>
-        </p:spPr>
-        <p:txBody>
-          <a:bodyPr wrap="square">
-            <a:spAutoFit/>
-          </a:bodyPr>
-          <a:lstStyle/>
-          <a:p>
-            <a:r>
-              <a:rPr sz="1450" b="1">
-                <a:solidFill>
-                  <a:srgbClr val="E0A458"/>
-                </a:solidFill>
-                <a:latin typeface="Cambria"/>
-              </a:rPr>
-              <a:t>Close the transfer program</a:t>
-            </a:r>
-          </a:p>
-        </p:txBody>
-      </p:sp>
-      <p:sp>
-        <p:nvSpPr>
-          <p:cNvPr id="8" name="TextBox 7"/>
-          <p:cNvSpPr txBox="1"/>
-          <p:nvPr/>
-        </p:nvSpPr>
-        <p:spPr>
-          <a:xfrm>
-            <a:off x="4846320" y="3182111"/>
-            <a:ext cx="6675120" cy="685800"/>
-          </a:xfrm>
-          <a:prstGeom prst="rect">
-            <a:avLst/>
-          </a:prstGeom>
-          <a:noFill/>
-        </p:spPr>
-        <p:txBody>
-          <a:bodyPr wrap="square">
-            <a:spAutoFit/>
-          </a:bodyPr>
-          <a:lstStyle/>
+              <a:rPr sz="1300" b="1">
+                <a:solidFill>
+                  <a:srgbClr val="FFFFFF"/>
+                </a:solidFill>
+                <a:latin typeface="Calibri"/>
+              </a:rPr>
+              <a:t>They run experiments too — so that is not the distinction.</a:t>
+            </a:r>
+          </a:p>
           <a:p>
             <a:pPr>
               <a:spcAft>
-                <a:spcPts val="100"/>
+                <a:spcPts val="400"/>
               </a:spcAft>
             </a:pPr>
             <a:r>
-              <a:rPr sz="1250" b="0">
-                <a:solidFill>
-                  <a:srgbClr val="CADCFC"/>
-                </a:solidFill>
-                <a:latin typeface="Calibri"/>
-              </a:rPr>
-              <a:t>three-stage coverage recovery; first prediction already validated by execution</a:t>
-            </a:r>
-          </a:p>
-        </p:txBody>
-      </p:sp>
-      <p:sp>
-        <p:nvSpPr>
-          <p:cNvPr id="9" name="TextBox 8"/>
-          <p:cNvSpPr txBox="1"/>
-          <p:nvPr/>
-        </p:nvSpPr>
-        <p:spPr>
-          <a:xfrm>
-            <a:off x="640080" y="3977639"/>
-            <a:ext cx="4114800" cy="365760"/>
-          </a:xfrm>
-          <a:prstGeom prst="rect">
-            <a:avLst/>
-          </a:prstGeom>
-          <a:noFill/>
-        </p:spPr>
-        <p:txBody>
-          <a:bodyPr wrap="square">
-            <a:spAutoFit/>
-          </a:bodyPr>
-          <a:lstStyle/>
-          <a:p>
-            <a:r>
-              <a:rPr sz="1450" b="1">
+              <a:rPr sz="1200" b="0">
+                <a:solidFill>
+                  <a:srgbClr val="CFE8EF"/>
+                </a:solidFill>
+                <a:latin typeface="Calibri"/>
+              </a:rPr>
+              <a:t>Four of the five closest surveys sit on one side of a divide they never mention: the 314-cite ML survey does not cite security work, and the closest security SoK does not cite degradation work.</a:t>
+            </a:r>
+          </a:p>
+        </p:txBody>
+      </p:sp>
+    </p:spTree>
+  </p:cSld>
+  <p:clrMapOvr>
+    <a:masterClrMapping/>
+  </p:clrMapOvr>
+</p:sld>
+</file>
+
+<file path=ppt/slides/slide18.xml><?xml version="1.0" encoding="utf-8"?>
+<p:sld xmlns:a="http://schemas.openxmlformats.org/drawingml/2006/main" xmlns:p="http://schemas.openxmlformats.org/presentationml/2006/main" xmlns:r="http://schemas.openxmlformats.org/officeDocument/2006/relationships">
+  <p:cSld>
+    <p:bg>
+      <p:bgPr>
+        <a:solidFill>
+          <a:srgbClr val="12253C"/>
+        </a:solidFill>
+        <a:effectLst/>
+      </p:bgPr>
+    </p:bg>
+    <p:spTree>
+      <p:nvGrpSpPr>
+        <p:cNvPr id="1" name=""/>
+        <p:cNvGrpSpPr/>
+        <p:nvPr/>
+      </p:nvGrpSpPr>
+      <p:grpSpPr/>
+      <p:sp>
+        <p:nvSpPr>
+          <p:cNvPr id="2" name="TextBox 1"/>
+          <p:cNvSpPr txBox="1"/>
+          <p:nvPr/>
+        </p:nvSpPr>
+        <p:spPr>
+          <a:xfrm>
+            <a:off x="640080" y="411480"/>
+            <a:ext cx="8229600" cy="320040"/>
+          </a:xfrm>
+          <a:prstGeom prst="rect">
+            <a:avLst/>
+          </a:prstGeom>
+          <a:noFill/>
+        </p:spPr>
+        <p:txBody>
+          <a:bodyPr wrap="square">
+            <a:spAutoFit/>
+          </a:bodyPr>
+          <a:lstStyle/>
+          <a:p>
+            <a:r>
+              <a:rPr sz="1250" b="1">
                 <a:solidFill>
                   <a:srgbClr val="E0A458"/>
                 </a:solidFill>
-                <a:latin typeface="Cambria"/>
-              </a:rPr>
-              <a:t>Decide the survey question</a:t>
-            </a:r>
-          </a:p>
-        </p:txBody>
-      </p:sp>
-      <p:sp>
-        <p:nvSpPr>
-          <p:cNvPr id="10" name="TextBox 9"/>
-          <p:cNvSpPr txBox="1"/>
-          <p:nvPr/>
-        </p:nvSpPr>
-        <p:spPr>
-          <a:xfrm>
-            <a:off x="4846320" y="4005072"/>
-            <a:ext cx="6675120" cy="685800"/>
+                <a:latin typeface="Calibri"/>
+              </a:rPr>
+              <a:t>RQ7  ·  OPEN PROBLEMS</a:t>
+            </a:r>
+          </a:p>
+        </p:txBody>
+      </p:sp>
+      <p:sp>
+        <p:nvSpPr>
+          <p:cNvPr id="3" name="TextBox 2"/>
+          <p:cNvSpPr txBox="1"/>
+          <p:nvPr/>
+        </p:nvSpPr>
+        <p:spPr>
+          <a:xfrm>
+            <a:off x="640080" y="1371600"/>
+            <a:ext cx="10607040" cy="1371600"/>
           </a:xfrm>
           <a:prstGeom prst="rect">
             <a:avLst/>
@@ -9187,17 +9264,275 @@
           <a:p>
             <a:pPr>
               <a:spcAft>
-                <a:spcPts val="100"/>
+                <a:spcPts val="200"/>
               </a:spcAft>
             </a:pPr>
             <a:r>
+              <a:rPr sz="3000" b="1">
+                <a:solidFill>
+                  <a:srgbClr val="FFFFFF"/>
+                </a:solidFill>
+                <a:latin typeface="Cambria"/>
+              </a:rPr>
+              <a:t>Seven problems, ranked by expected value</a:t>
+            </a:r>
+          </a:p>
+        </p:txBody>
+      </p:sp>
+      <p:sp>
+        <p:nvSpPr>
+          <p:cNvPr id="4" name="TextBox 3"/>
+          <p:cNvSpPr txBox="1"/>
+          <p:nvPr/>
+        </p:nvSpPr>
+        <p:spPr>
+          <a:xfrm>
+            <a:off x="11521440" y="6510528"/>
+            <a:ext cx="548640" cy="274320"/>
+          </a:xfrm>
+          <a:prstGeom prst="rect">
+            <a:avLst/>
+          </a:prstGeom>
+          <a:noFill/>
+        </p:spPr>
+        <p:txBody>
+          <a:bodyPr wrap="square">
+            <a:spAutoFit/>
+          </a:bodyPr>
+          <a:lstStyle/>
+          <a:p>
+            <a:r>
+              <a:rPr sz="1000" b="0">
+                <a:solidFill>
+                  <a:srgbClr val="CADCFC"/>
+                </a:solidFill>
+                <a:latin typeface="Calibri"/>
+              </a:rPr>
+              <a:t>18</a:t>
+            </a:r>
+          </a:p>
+        </p:txBody>
+      </p:sp>
+      <p:sp>
+        <p:nvSpPr>
+          <p:cNvPr id="5" name="Rounded Rectangle 4"/>
+          <p:cNvSpPr/>
+          <p:nvPr/>
+        </p:nvSpPr>
+        <p:spPr>
+          <a:xfrm>
+            <a:off x="640080" y="2331720"/>
+            <a:ext cx="10881360" cy="475488"/>
+          </a:xfrm>
+          <a:prstGeom prst="roundRect">
+            <a:avLst/>
+          </a:prstGeom>
+          <a:solidFill>
+            <a:srgbClr val="1B334F"/>
+          </a:solidFill>
+          <a:ln>
+            <a:noFill/>
+          </a:ln>
+          <a:effectLst/>
+        </p:spPr>
+        <p:style>
+          <a:lnRef idx="1">
+            <a:schemeClr val="accent1"/>
+          </a:lnRef>
+          <a:fillRef idx="3">
+            <a:schemeClr val="accent1"/>
+          </a:fillRef>
+          <a:effectRef idx="2">
+            <a:schemeClr val="accent1"/>
+          </a:effectRef>
+          <a:fontRef idx="minor">
+            <a:schemeClr val="lt1"/>
+          </a:fontRef>
+        </p:style>
+        <p:txBody>
+          <a:bodyPr rtlCol="0" anchor="ctr"/>
+          <a:lstStyle/>
+          <a:p>
+            <a:pPr algn="ctr"/>
+          </a:p>
+        </p:txBody>
+      </p:sp>
+      <p:sp>
+        <p:nvSpPr>
+          <p:cNvPr id="6" name="TextBox 5"/>
+          <p:cNvSpPr txBox="1"/>
+          <p:nvPr/>
+        </p:nvSpPr>
+        <p:spPr>
+          <a:xfrm>
+            <a:off x="868680" y="2404872"/>
+            <a:ext cx="457200" cy="320040"/>
+          </a:xfrm>
+          <a:prstGeom prst="rect">
+            <a:avLst/>
+          </a:prstGeom>
+          <a:noFill/>
+        </p:spPr>
+        <p:txBody>
+          <a:bodyPr wrap="square">
+            <a:spAutoFit/>
+          </a:bodyPr>
+          <a:lstStyle/>
+          <a:p>
+            <a:r>
+              <a:rPr sz="1400" b="1">
+                <a:solidFill>
+                  <a:srgbClr val="E0A458"/>
+                </a:solidFill>
+                <a:latin typeface="Cambria"/>
+              </a:rPr>
+              <a:t>1</a:t>
+            </a:r>
+          </a:p>
+        </p:txBody>
+      </p:sp>
+      <p:sp>
+        <p:nvSpPr>
+          <p:cNvPr id="7" name="TextBox 6"/>
+          <p:cNvSpPr txBox="1"/>
+          <p:nvPr/>
+        </p:nvSpPr>
+        <p:spPr>
+          <a:xfrm>
+            <a:off x="1371600" y="2414015"/>
+            <a:ext cx="5120640" cy="320040"/>
+          </a:xfrm>
+          <a:prstGeom prst="rect">
+            <a:avLst/>
+          </a:prstGeom>
+          <a:noFill/>
+        </p:spPr>
+        <p:txBody>
+          <a:bodyPr wrap="square">
+            <a:spAutoFit/>
+          </a:bodyPr>
+          <a:lstStyle/>
+          <a:p>
+            <a:r>
+              <a:rPr sz="1350" b="1">
+                <a:solidFill>
+                  <a:srgbClr val="FFFFFF"/>
+                </a:solidFill>
+                <a:latin typeface="Calibri"/>
+              </a:rPr>
+              <a:t>Cross-track evaluation is not happening</a:t>
+            </a:r>
+          </a:p>
+        </p:txBody>
+      </p:sp>
+      <p:sp>
+        <p:nvSpPr>
+          <p:cNvPr id="8" name="TextBox 7"/>
+          <p:cNvSpPr txBox="1"/>
+          <p:nvPr/>
+        </p:nvSpPr>
+        <p:spPr>
+          <a:xfrm>
+            <a:off x="6583680" y="2414015"/>
+            <a:ext cx="4663440" cy="320040"/>
+          </a:xfrm>
+          <a:prstGeom prst="rect">
+            <a:avLst/>
+          </a:prstGeom>
+          <a:noFill/>
+        </p:spPr>
+        <p:txBody>
+          <a:bodyPr wrap="square">
+            <a:spAutoFit/>
+          </a:bodyPr>
+          <a:lstStyle/>
+          <a:p>
+            <a:r>
               <a:rPr sz="1250" b="0">
                 <a:solidFill>
                   <a:srgbClr val="CADCFC"/>
                 </a:solidFill>
                 <a:latin typeface="Calibri"/>
               </a:rPr>
-              <a:t>whether a pure survey satisfies the include criteria — affects the original corpus too</a:t>
+              <a:t>0.9% of test pairs cross the divide</a:t>
+            </a:r>
+          </a:p>
+        </p:txBody>
+      </p:sp>
+      <p:sp>
+        <p:nvSpPr>
+          <p:cNvPr id="9" name="Rounded Rectangle 8"/>
+          <p:cNvSpPr/>
+          <p:nvPr/>
+        </p:nvSpPr>
+        <p:spPr>
+          <a:xfrm>
+            <a:off x="640080" y="2907791"/>
+            <a:ext cx="10881360" cy="475488"/>
+          </a:xfrm>
+          <a:prstGeom prst="roundRect">
+            <a:avLst/>
+          </a:prstGeom>
+          <a:solidFill>
+            <a:srgbClr val="1B334F"/>
+          </a:solidFill>
+          <a:ln>
+            <a:noFill/>
+          </a:ln>
+          <a:effectLst/>
+        </p:spPr>
+        <p:style>
+          <a:lnRef idx="1">
+            <a:schemeClr val="accent1"/>
+          </a:lnRef>
+          <a:fillRef idx="3">
+            <a:schemeClr val="accent1"/>
+          </a:fillRef>
+          <a:effectRef idx="2">
+            <a:schemeClr val="accent1"/>
+          </a:effectRef>
+          <a:fontRef idx="minor">
+            <a:schemeClr val="lt1"/>
+          </a:fontRef>
+        </p:style>
+        <p:txBody>
+          <a:bodyPr rtlCol="0" anchor="ctr"/>
+          <a:lstStyle/>
+          <a:p>
+            <a:pPr algn="ctr"/>
+          </a:p>
+        </p:txBody>
+      </p:sp>
+      <p:sp>
+        <p:nvSpPr>
+          <p:cNvPr id="10" name="TextBox 9"/>
+          <p:cNvSpPr txBox="1"/>
+          <p:nvPr/>
+        </p:nvSpPr>
+        <p:spPr>
+          <a:xfrm>
+            <a:off x="868680" y="2980944"/>
+            <a:ext cx="457200" cy="320040"/>
+          </a:xfrm>
+          <a:prstGeom prst="rect">
+            <a:avLst/>
+          </a:prstGeom>
+          <a:noFill/>
+        </p:spPr>
+        <p:txBody>
+          <a:bodyPr wrap="square">
+            <a:spAutoFit/>
+          </a:bodyPr>
+          <a:lstStyle/>
+          <a:p>
+            <a:r>
+              <a:rPr sz="1400" b="1">
+                <a:solidFill>
+                  <a:srgbClr val="E0A458"/>
+                </a:solidFill>
+                <a:latin typeface="Cambria"/>
+              </a:rPr>
+              <a:t>2</a:t>
             </a:r>
           </a:p>
         </p:txBody>
@@ -9210,42 +9545,866 @@
         </p:nvSpPr>
         <p:spPr>
           <a:xfrm>
-            <a:off x="640080" y="4800600"/>
-            <a:ext cx="4114800" cy="365760"/>
-          </a:xfrm>
-          <a:prstGeom prst="rect">
-            <a:avLst/>
-          </a:prstGeom>
-          <a:noFill/>
-        </p:spPr>
-        <p:txBody>
-          <a:bodyPr wrap="square">
-            <a:spAutoFit/>
-          </a:bodyPr>
-          <a:lstStyle/>
-          <a:p>
-            <a:r>
-              <a:rPr sz="1450" b="1">
+            <a:off x="1371600" y="2990087"/>
+            <a:ext cx="5120640" cy="320040"/>
+          </a:xfrm>
+          <a:prstGeom prst="rect">
+            <a:avLst/>
+          </a:prstGeom>
+          <a:noFill/>
+        </p:spPr>
+        <p:txBody>
+          <a:bodyPr wrap="square">
+            <a:spAutoFit/>
+          </a:bodyPr>
+          <a:lstStyle/>
+          <a:p>
+            <a:r>
+              <a:rPr sz="1350" b="1">
+                <a:solidFill>
+                  <a:srgbClr val="FFFFFF"/>
+                </a:solidFill>
+                <a:latin typeface="Calibri"/>
+              </a:rPr>
+              <a:t>The uncovered tail</a:t>
+            </a:r>
+          </a:p>
+        </p:txBody>
+      </p:sp>
+      <p:sp>
+        <p:nvSpPr>
+          <p:cNvPr id="12" name="TextBox 11"/>
+          <p:cNvSpPr txBox="1"/>
+          <p:nvPr/>
+        </p:nvSpPr>
+        <p:spPr>
+          <a:xfrm>
+            <a:off x="6583680" y="2990087"/>
+            <a:ext cx="4663440" cy="320040"/>
+          </a:xfrm>
+          <a:prstGeom prst="rect">
+            <a:avLst/>
+          </a:prstGeom>
+          <a:noFill/>
+        </p:spPr>
+        <p:txBody>
+          <a:bodyPr wrap="square">
+            <a:spAutoFit/>
+          </a:bodyPr>
+          <a:lstStyle/>
+          <a:p>
+            <a:r>
+              <a:rPr sz="1250" b="0">
+                <a:solidFill>
+                  <a:srgbClr val="CADCFC"/>
+                </a:solidFill>
+                <a:latin typeface="Calibri"/>
+              </a:rPr>
+              <a:t>131 mechanisms have no tested defense</a:t>
+            </a:r>
+          </a:p>
+        </p:txBody>
+      </p:sp>
+      <p:sp>
+        <p:nvSpPr>
+          <p:cNvPr id="13" name="Rounded Rectangle 12"/>
+          <p:cNvSpPr/>
+          <p:nvPr/>
+        </p:nvSpPr>
+        <p:spPr>
+          <a:xfrm>
+            <a:off x="640080" y="3483863"/>
+            <a:ext cx="10881360" cy="475488"/>
+          </a:xfrm>
+          <a:prstGeom prst="roundRect">
+            <a:avLst/>
+          </a:prstGeom>
+          <a:solidFill>
+            <a:srgbClr val="1B334F"/>
+          </a:solidFill>
+          <a:ln>
+            <a:noFill/>
+          </a:ln>
+          <a:effectLst/>
+        </p:spPr>
+        <p:style>
+          <a:lnRef idx="1">
+            <a:schemeClr val="accent1"/>
+          </a:lnRef>
+          <a:fillRef idx="3">
+            <a:schemeClr val="accent1"/>
+          </a:fillRef>
+          <a:effectRef idx="2">
+            <a:schemeClr val="accent1"/>
+          </a:effectRef>
+          <a:fontRef idx="minor">
+            <a:schemeClr val="lt1"/>
+          </a:fontRef>
+        </p:style>
+        <p:txBody>
+          <a:bodyPr rtlCol="0" anchor="ctr"/>
+          <a:lstStyle/>
+          <a:p>
+            <a:pPr algn="ctr"/>
+          </a:p>
+        </p:txBody>
+      </p:sp>
+      <p:sp>
+        <p:nvSpPr>
+          <p:cNvPr id="14" name="TextBox 13"/>
+          <p:cNvSpPr txBox="1"/>
+          <p:nvPr/>
+        </p:nvSpPr>
+        <p:spPr>
+          <a:xfrm>
+            <a:off x="868680" y="3557015"/>
+            <a:ext cx="457200" cy="320040"/>
+          </a:xfrm>
+          <a:prstGeom prst="rect">
+            <a:avLst/>
+          </a:prstGeom>
+          <a:noFill/>
+        </p:spPr>
+        <p:txBody>
+          <a:bodyPr wrap="square">
+            <a:spAutoFit/>
+          </a:bodyPr>
+          <a:lstStyle/>
+          <a:p>
+            <a:r>
+              <a:rPr sz="1400" b="1">
                 <a:solidFill>
                   <a:srgbClr val="E0A458"/>
                 </a:solidFill>
                 <a:latin typeface="Cambria"/>
               </a:rPr>
-              <a:t>Differentiation table</a:t>
-            </a:r>
-          </a:p>
-        </p:txBody>
-      </p:sp>
-      <p:sp>
-        <p:nvSpPr>
-          <p:cNvPr id="12" name="TextBox 11"/>
-          <p:cNvSpPr txBox="1"/>
-          <p:nvPr/>
-        </p:nvSpPr>
-        <p:spPr>
-          <a:xfrm>
-            <a:off x="4846320" y="4828032"/>
-            <a:ext cx="6675120" cy="685800"/>
+              <a:t>3</a:t>
+            </a:r>
+          </a:p>
+        </p:txBody>
+      </p:sp>
+      <p:sp>
+        <p:nvSpPr>
+          <p:cNvPr id="15" name="TextBox 14"/>
+          <p:cNvSpPr txBox="1"/>
+          <p:nvPr/>
+        </p:nvSpPr>
+        <p:spPr>
+          <a:xfrm>
+            <a:off x="1371600" y="3566159"/>
+            <a:ext cx="5120640" cy="320040"/>
+          </a:xfrm>
+          <a:prstGeom prst="rect">
+            <a:avLst/>
+          </a:prstGeom>
+          <a:noFill/>
+        </p:spPr>
+        <p:txBody>
+          <a:bodyPr wrap="square">
+            <a:spAutoFit/>
+          </a:bodyPr>
+          <a:lstStyle/>
+          <a:p>
+            <a:r>
+              <a:rPr sz="1350" b="1">
+                <a:solidFill>
+                  <a:srgbClr val="FFFFFF"/>
+                </a:solidFill>
+                <a:latin typeface="Calibri"/>
+              </a:rPr>
+              <a:t>Single-mechanism validation is the norm</a:t>
+            </a:r>
+          </a:p>
+        </p:txBody>
+      </p:sp>
+      <p:sp>
+        <p:nvSpPr>
+          <p:cNvPr id="16" name="TextBox 15"/>
+          <p:cNvSpPr txBox="1"/>
+          <p:nvPr/>
+        </p:nvSpPr>
+        <p:spPr>
+          <a:xfrm>
+            <a:off x="6583680" y="3566159"/>
+            <a:ext cx="4663440" cy="320040"/>
+          </a:xfrm>
+          <a:prstGeom prst="rect">
+            <a:avLst/>
+          </a:prstGeom>
+          <a:noFill/>
+        </p:spPr>
+        <p:txBody>
+          <a:bodyPr wrap="square">
+            <a:spAutoFit/>
+          </a:bodyPr>
+          <a:lstStyle/>
+          <a:p>
+            <a:r>
+              <a:rPr sz="1250" b="0">
+                <a:solidFill>
+                  <a:srgbClr val="CADCFC"/>
+                </a:solidFill>
+                <a:latin typeface="Calibri"/>
+              </a:rPr>
+              <a:t>163 defenses tested against exactly one</a:t>
+            </a:r>
+          </a:p>
+        </p:txBody>
+      </p:sp>
+      <p:sp>
+        <p:nvSpPr>
+          <p:cNvPr id="17" name="Rounded Rectangle 16"/>
+          <p:cNvSpPr/>
+          <p:nvPr/>
+        </p:nvSpPr>
+        <p:spPr>
+          <a:xfrm>
+            <a:off x="640080" y="4059935"/>
+            <a:ext cx="10881360" cy="475488"/>
+          </a:xfrm>
+          <a:prstGeom prst="roundRect">
+            <a:avLst/>
+          </a:prstGeom>
+          <a:solidFill>
+            <a:srgbClr val="1B334F"/>
+          </a:solidFill>
+          <a:ln>
+            <a:noFill/>
+          </a:ln>
+          <a:effectLst/>
+        </p:spPr>
+        <p:style>
+          <a:lnRef idx="1">
+            <a:schemeClr val="accent1"/>
+          </a:lnRef>
+          <a:fillRef idx="3">
+            <a:schemeClr val="accent1"/>
+          </a:fillRef>
+          <a:effectRef idx="2">
+            <a:schemeClr val="accent1"/>
+          </a:effectRef>
+          <a:fontRef idx="minor">
+            <a:schemeClr val="lt1"/>
+          </a:fontRef>
+        </p:style>
+        <p:txBody>
+          <a:bodyPr rtlCol="0" anchor="ctr"/>
+          <a:lstStyle/>
+          <a:p>
+            <a:pPr algn="ctr"/>
+          </a:p>
+        </p:txBody>
+      </p:sp>
+      <p:sp>
+        <p:nvSpPr>
+          <p:cNvPr id="18" name="TextBox 17"/>
+          <p:cNvSpPr txBox="1"/>
+          <p:nvPr/>
+        </p:nvSpPr>
+        <p:spPr>
+          <a:xfrm>
+            <a:off x="868680" y="4133087"/>
+            <a:ext cx="457200" cy="320040"/>
+          </a:xfrm>
+          <a:prstGeom prst="rect">
+            <a:avLst/>
+          </a:prstGeom>
+          <a:noFill/>
+        </p:spPr>
+        <p:txBody>
+          <a:bodyPr wrap="square">
+            <a:spAutoFit/>
+          </a:bodyPr>
+          <a:lstStyle/>
+          <a:p>
+            <a:r>
+              <a:rPr sz="1400" b="1">
+                <a:solidFill>
+                  <a:srgbClr val="E0A458"/>
+                </a:solidFill>
+                <a:latin typeface="Cambria"/>
+              </a:rPr>
+              <a:t>4</a:t>
+            </a:r>
+          </a:p>
+        </p:txBody>
+      </p:sp>
+      <p:sp>
+        <p:nvSpPr>
+          <p:cNvPr id="19" name="TextBox 18"/>
+          <p:cNvSpPr txBox="1"/>
+          <p:nvPr/>
+        </p:nvSpPr>
+        <p:spPr>
+          <a:xfrm>
+            <a:off x="1371600" y="4142231"/>
+            <a:ext cx="5120640" cy="320040"/>
+          </a:xfrm>
+          <a:prstGeom prst="rect">
+            <a:avLst/>
+          </a:prstGeom>
+          <a:noFill/>
+        </p:spPr>
+        <p:txBody>
+          <a:bodyPr wrap="square">
+            <a:spAutoFit/>
+          </a:bodyPr>
+          <a:lstStyle/>
+          <a:p>
+            <a:r>
+              <a:rPr sz="1350" b="1">
+                <a:solidFill>
+                  <a:srgbClr val="FFFFFF"/>
+                </a:solidFill>
+                <a:latin typeface="Calibri"/>
+              </a:rPr>
+              <a:t>Defenses are tested only against contemporaries</a:t>
+            </a:r>
+          </a:p>
+        </p:txBody>
+      </p:sp>
+      <p:sp>
+        <p:nvSpPr>
+          <p:cNvPr id="20" name="TextBox 19"/>
+          <p:cNvSpPr txBox="1"/>
+          <p:nvPr/>
+        </p:nvSpPr>
+        <p:spPr>
+          <a:xfrm>
+            <a:off x="6583680" y="4142231"/>
+            <a:ext cx="4663440" cy="320040"/>
+          </a:xfrm>
+          <a:prstGeom prst="rect">
+            <a:avLst/>
+          </a:prstGeom>
+          <a:noFill/>
+        </p:spPr>
+        <p:txBody>
+          <a:bodyPr wrap="square">
+            <a:spAutoFit/>
+          </a:bodyPr>
+          <a:lstStyle/>
+          <a:p>
+            <a:r>
+              <a:rPr sz="1250" b="0">
+                <a:solidFill>
+                  <a:srgbClr val="CADCFC"/>
+                </a:solidFill>
+                <a:latin typeface="Calibri"/>
+              </a:rPr>
+              <a:t>attack papers hold the later record</a:t>
+            </a:r>
+          </a:p>
+        </p:txBody>
+      </p:sp>
+      <p:sp>
+        <p:nvSpPr>
+          <p:cNvPr id="21" name="Rounded Rectangle 20"/>
+          <p:cNvSpPr/>
+          <p:nvPr/>
+        </p:nvSpPr>
+        <p:spPr>
+          <a:xfrm>
+            <a:off x="640080" y="4636008"/>
+            <a:ext cx="10881360" cy="475488"/>
+          </a:xfrm>
+          <a:prstGeom prst="roundRect">
+            <a:avLst/>
+          </a:prstGeom>
+          <a:solidFill>
+            <a:srgbClr val="1B334F"/>
+          </a:solidFill>
+          <a:ln>
+            <a:noFill/>
+          </a:ln>
+          <a:effectLst/>
+        </p:spPr>
+        <p:style>
+          <a:lnRef idx="1">
+            <a:schemeClr val="accent1"/>
+          </a:lnRef>
+          <a:fillRef idx="3">
+            <a:schemeClr val="accent1"/>
+          </a:fillRef>
+          <a:effectRef idx="2">
+            <a:schemeClr val="accent1"/>
+          </a:effectRef>
+          <a:fontRef idx="minor">
+            <a:schemeClr val="lt1"/>
+          </a:fontRef>
+        </p:style>
+        <p:txBody>
+          <a:bodyPr rtlCol="0" anchor="ctr"/>
+          <a:lstStyle/>
+          <a:p>
+            <a:pPr algn="ctr"/>
+          </a:p>
+        </p:txBody>
+      </p:sp>
+      <p:sp>
+        <p:nvSpPr>
+          <p:cNvPr id="22" name="TextBox 21"/>
+          <p:cNvSpPr txBox="1"/>
+          <p:nvPr/>
+        </p:nvSpPr>
+        <p:spPr>
+          <a:xfrm>
+            <a:off x="868680" y="4709160"/>
+            <a:ext cx="457200" cy="320040"/>
+          </a:xfrm>
+          <a:prstGeom prst="rect">
+            <a:avLst/>
+          </a:prstGeom>
+          <a:noFill/>
+        </p:spPr>
+        <p:txBody>
+          <a:bodyPr wrap="square">
+            <a:spAutoFit/>
+          </a:bodyPr>
+          <a:lstStyle/>
+          <a:p>
+            <a:r>
+              <a:rPr sz="1400" b="1">
+                <a:solidFill>
+                  <a:srgbClr val="E0A458"/>
+                </a:solidFill>
+                <a:latin typeface="Cambria"/>
+              </a:rPr>
+              <a:t>5</a:t>
+            </a:r>
+          </a:p>
+        </p:txBody>
+      </p:sp>
+      <p:sp>
+        <p:nvSpPr>
+          <p:cNvPr id="23" name="TextBox 22"/>
+          <p:cNvSpPr txBox="1"/>
+          <p:nvPr/>
+        </p:nvSpPr>
+        <p:spPr>
+          <a:xfrm>
+            <a:off x="1371600" y="4718304"/>
+            <a:ext cx="5120640" cy="320040"/>
+          </a:xfrm>
+          <a:prstGeom prst="rect">
+            <a:avLst/>
+          </a:prstGeom>
+          <a:noFill/>
+        </p:spPr>
+        <p:txBody>
+          <a:bodyPr wrap="square">
+            <a:spAutoFit/>
+          </a:bodyPr>
+          <a:lstStyle/>
+          <a:p>
+            <a:r>
+              <a:rPr sz="1350" b="1">
+                <a:solidFill>
+                  <a:srgbClr val="FFFFFF"/>
+                </a:solidFill>
+                <a:latin typeface="Calibri"/>
+              </a:rPr>
+              <a:t>Intervention point predicts generalization</a:t>
+            </a:r>
+          </a:p>
+        </p:txBody>
+      </p:sp>
+      <p:sp>
+        <p:nvSpPr>
+          <p:cNvPr id="24" name="TextBox 23"/>
+          <p:cNvSpPr txBox="1"/>
+          <p:nvPr/>
+        </p:nvSpPr>
+        <p:spPr>
+          <a:xfrm>
+            <a:off x="6583680" y="4718304"/>
+            <a:ext cx="4663440" cy="320040"/>
+          </a:xfrm>
+          <a:prstGeom prst="rect">
+            <a:avLst/>
+          </a:prstGeom>
+          <a:noFill/>
+        </p:spPr>
+        <p:txBody>
+          <a:bodyPr wrap="square">
+            <a:spAutoFit/>
+          </a:bodyPr>
+          <a:lstStyle/>
+          <a:p>
+            <a:r>
+              <a:rPr sz="1250" b="0">
+                <a:solidFill>
+                  <a:srgbClr val="CADCFC"/>
+                </a:solidFill>
+                <a:latin typeface="Calibri"/>
+              </a:rPr>
+              <a:t>testable, and partly confounded today</a:t>
+            </a:r>
+          </a:p>
+        </p:txBody>
+      </p:sp>
+      <p:sp>
+        <p:nvSpPr>
+          <p:cNvPr id="25" name="Rounded Rectangle 24"/>
+          <p:cNvSpPr/>
+          <p:nvPr/>
+        </p:nvSpPr>
+        <p:spPr>
+          <a:xfrm>
+            <a:off x="640080" y="5212079"/>
+            <a:ext cx="10881360" cy="475488"/>
+          </a:xfrm>
+          <a:prstGeom prst="roundRect">
+            <a:avLst/>
+          </a:prstGeom>
+          <a:solidFill>
+            <a:srgbClr val="1B334F"/>
+          </a:solidFill>
+          <a:ln>
+            <a:noFill/>
+          </a:ln>
+          <a:effectLst/>
+        </p:spPr>
+        <p:style>
+          <a:lnRef idx="1">
+            <a:schemeClr val="accent1"/>
+          </a:lnRef>
+          <a:fillRef idx="3">
+            <a:schemeClr val="accent1"/>
+          </a:fillRef>
+          <a:effectRef idx="2">
+            <a:schemeClr val="accent1"/>
+          </a:effectRef>
+          <a:fontRef idx="minor">
+            <a:schemeClr val="lt1"/>
+          </a:fontRef>
+        </p:style>
+        <p:txBody>
+          <a:bodyPr rtlCol="0" anchor="ctr"/>
+          <a:lstStyle/>
+          <a:p>
+            <a:pPr algn="ctr"/>
+          </a:p>
+        </p:txBody>
+      </p:sp>
+      <p:sp>
+        <p:nvSpPr>
+          <p:cNvPr id="26" name="TextBox 25"/>
+          <p:cNvSpPr txBox="1"/>
+          <p:nvPr/>
+        </p:nvSpPr>
+        <p:spPr>
+          <a:xfrm>
+            <a:off x="868680" y="5285231"/>
+            <a:ext cx="457200" cy="320040"/>
+          </a:xfrm>
+          <a:prstGeom prst="rect">
+            <a:avLst/>
+          </a:prstGeom>
+          <a:noFill/>
+        </p:spPr>
+        <p:txBody>
+          <a:bodyPr wrap="square">
+            <a:spAutoFit/>
+          </a:bodyPr>
+          <a:lstStyle/>
+          <a:p>
+            <a:r>
+              <a:rPr sz="1400" b="1">
+                <a:solidFill>
+                  <a:srgbClr val="E0A458"/>
+                </a:solidFill>
+                <a:latin typeface="Cambria"/>
+              </a:rPr>
+              <a:t>6</a:t>
+            </a:r>
+          </a:p>
+        </p:txBody>
+      </p:sp>
+      <p:sp>
+        <p:nvSpPr>
+          <p:cNvPr id="27" name="TextBox 26"/>
+          <p:cNvSpPr txBox="1"/>
+          <p:nvPr/>
+        </p:nvSpPr>
+        <p:spPr>
+          <a:xfrm>
+            <a:off x="1371600" y="5294375"/>
+            <a:ext cx="5120640" cy="320040"/>
+          </a:xfrm>
+          <a:prstGeom prst="rect">
+            <a:avLst/>
+          </a:prstGeom>
+          <a:noFill/>
+        </p:spPr>
+        <p:txBody>
+          <a:bodyPr wrap="square">
+            <a:spAutoFit/>
+          </a:bodyPr>
+          <a:lstStyle/>
+          <a:p>
+            <a:r>
+              <a:rPr sz="1350" b="1">
+                <a:solidFill>
+                  <a:srgbClr val="FFFFFF"/>
+                </a:solidFill>
+                <a:latin typeface="Calibri"/>
+              </a:rPr>
+              <a:t>Benchmarks stand in for mechanisms</a:t>
+            </a:r>
+          </a:p>
+        </p:txBody>
+      </p:sp>
+      <p:sp>
+        <p:nvSpPr>
+          <p:cNvPr id="28" name="TextBox 27"/>
+          <p:cNvSpPr txBox="1"/>
+          <p:nvPr/>
+        </p:nvSpPr>
+        <p:spPr>
+          <a:xfrm>
+            <a:off x="6583680" y="5294375"/>
+            <a:ext cx="4663440" cy="320040"/>
+          </a:xfrm>
+          <a:prstGeom prst="rect">
+            <a:avLst/>
+          </a:prstGeom>
+          <a:noFill/>
+        </p:spPr>
+        <p:txBody>
+          <a:bodyPr wrap="square">
+            <a:spAutoFit/>
+          </a:bodyPr>
+          <a:lstStyle/>
+          <a:p>
+            <a:r>
+              <a:rPr sz="1250" b="0">
+                <a:solidFill>
+                  <a:srgbClr val="CADCFC"/>
+                </a:solidFill>
+                <a:latin typeface="Calibri"/>
+              </a:rPr>
+              <a:t>one umbrella entry absorbs 22.9% of pairs</a:t>
+            </a:r>
+          </a:p>
+        </p:txBody>
+      </p:sp>
+      <p:sp>
+        <p:nvSpPr>
+          <p:cNvPr id="29" name="Rounded Rectangle 28"/>
+          <p:cNvSpPr/>
+          <p:nvPr/>
+        </p:nvSpPr>
+        <p:spPr>
+          <a:xfrm>
+            <a:off x="640080" y="5788152"/>
+            <a:ext cx="10881360" cy="475488"/>
+          </a:xfrm>
+          <a:prstGeom prst="roundRect">
+            <a:avLst/>
+          </a:prstGeom>
+          <a:solidFill>
+            <a:srgbClr val="1B334F"/>
+          </a:solidFill>
+          <a:ln>
+            <a:noFill/>
+          </a:ln>
+          <a:effectLst/>
+        </p:spPr>
+        <p:style>
+          <a:lnRef idx="1">
+            <a:schemeClr val="accent1"/>
+          </a:lnRef>
+          <a:fillRef idx="3">
+            <a:schemeClr val="accent1"/>
+          </a:fillRef>
+          <a:effectRef idx="2">
+            <a:schemeClr val="accent1"/>
+          </a:effectRef>
+          <a:fontRef idx="minor">
+            <a:schemeClr val="lt1"/>
+          </a:fontRef>
+        </p:style>
+        <p:txBody>
+          <a:bodyPr rtlCol="0" anchor="ctr"/>
+          <a:lstStyle/>
+          <a:p>
+            <a:pPr algn="ctr"/>
+          </a:p>
+        </p:txBody>
+      </p:sp>
+      <p:sp>
+        <p:nvSpPr>
+          <p:cNvPr id="30" name="TextBox 29"/>
+          <p:cNvSpPr txBox="1"/>
+          <p:nvPr/>
+        </p:nvSpPr>
+        <p:spPr>
+          <a:xfrm>
+            <a:off x="868680" y="5861304"/>
+            <a:ext cx="457200" cy="320040"/>
+          </a:xfrm>
+          <a:prstGeom prst="rect">
+            <a:avLst/>
+          </a:prstGeom>
+          <a:noFill/>
+        </p:spPr>
+        <p:txBody>
+          <a:bodyPr wrap="square">
+            <a:spAutoFit/>
+          </a:bodyPr>
+          <a:lstStyle/>
+          <a:p>
+            <a:r>
+              <a:rPr sz="1400" b="1">
+                <a:solidFill>
+                  <a:srgbClr val="E0A458"/>
+                </a:solidFill>
+                <a:latin typeface="Cambria"/>
+              </a:rPr>
+              <a:t>7</a:t>
+            </a:r>
+          </a:p>
+        </p:txBody>
+      </p:sp>
+      <p:sp>
+        <p:nvSpPr>
+          <p:cNvPr id="31" name="TextBox 30"/>
+          <p:cNvSpPr txBox="1"/>
+          <p:nvPr/>
+        </p:nvSpPr>
+        <p:spPr>
+          <a:xfrm>
+            <a:off x="1371600" y="5870448"/>
+            <a:ext cx="5120640" cy="320040"/>
+          </a:xfrm>
+          <a:prstGeom prst="rect">
+            <a:avLst/>
+          </a:prstGeom>
+          <a:noFill/>
+        </p:spPr>
+        <p:txBody>
+          <a:bodyPr wrap="square">
+            <a:spAutoFit/>
+          </a:bodyPr>
+          <a:lstStyle/>
+          <a:p>
+            <a:r>
+              <a:rPr sz="1350" b="1">
+                <a:solidFill>
+                  <a:srgbClr val="FFFFFF"/>
+                </a:solidFill>
+                <a:latin typeface="Calibri"/>
+              </a:rPr>
+              <a:t>Reporting conventions, not capability</a:t>
+            </a:r>
+          </a:p>
+        </p:txBody>
+      </p:sp>
+      <p:sp>
+        <p:nvSpPr>
+          <p:cNvPr id="32" name="TextBox 31"/>
+          <p:cNvSpPr txBox="1"/>
+          <p:nvPr/>
+        </p:nvSpPr>
+        <p:spPr>
+          <a:xfrm>
+            <a:off x="6583680" y="5870448"/>
+            <a:ext cx="4663440" cy="320040"/>
+          </a:xfrm>
+          <a:prstGeom prst="rect">
+            <a:avLst/>
+          </a:prstGeom>
+          <a:noFill/>
+        </p:spPr>
+        <p:txBody>
+          <a:bodyPr wrap="square">
+            <a:spAutoFit/>
+          </a:bodyPr>
+          <a:lstStyle/>
+          <a:p>
+            <a:r>
+              <a:rPr sz="1250" b="0">
+                <a:solidFill>
+                  <a:srgbClr val="CADCFC"/>
+                </a:solidFill>
+                <a:latin typeface="Calibri"/>
+              </a:rPr>
+              <a:t>four of seven need no new science</a:t>
+            </a:r>
+          </a:p>
+        </p:txBody>
+      </p:sp>
+    </p:spTree>
+  </p:cSld>
+  <p:clrMapOvr>
+    <a:masterClrMapping/>
+  </p:clrMapOvr>
+</p:sld>
+</file>
+
+<file path=ppt/slides/slide19.xml><?xml version="1.0" encoding="utf-8"?>
+<p:sld xmlns:a="http://schemas.openxmlformats.org/drawingml/2006/main" xmlns:p="http://schemas.openxmlformats.org/presentationml/2006/main" xmlns:r="http://schemas.openxmlformats.org/officeDocument/2006/relationships">
+  <p:cSld>
+    <p:bg>
+      <p:bgPr>
+        <a:solidFill>
+          <a:srgbClr val="12253C"/>
+        </a:solidFill>
+        <a:effectLst/>
+      </p:bgPr>
+    </p:bg>
+    <p:spTree>
+      <p:nvGrpSpPr>
+        <p:cNvPr id="1" name=""/>
+        <p:cNvGrpSpPr/>
+        <p:nvPr/>
+      </p:nvGrpSpPr>
+      <p:grpSpPr/>
+      <p:sp>
+        <p:nvSpPr>
+          <p:cNvPr id="2" name="TextBox 1"/>
+          <p:cNvSpPr txBox="1"/>
+          <p:nvPr/>
+        </p:nvSpPr>
+        <p:spPr>
+          <a:xfrm>
+            <a:off x="640080" y="411480"/>
+            <a:ext cx="8229600" cy="320040"/>
+          </a:xfrm>
+          <a:prstGeom prst="rect">
+            <a:avLst/>
+          </a:prstGeom>
+          <a:noFill/>
+        </p:spPr>
+        <p:txBody>
+          <a:bodyPr wrap="square">
+            <a:spAutoFit/>
+          </a:bodyPr>
+          <a:lstStyle/>
+          <a:p>
+            <a:r>
+              <a:rPr sz="1250" b="1">
+                <a:solidFill>
+                  <a:srgbClr val="E0A458"/>
+                </a:solidFill>
+                <a:latin typeface="Calibri"/>
+              </a:rPr>
+              <a:t>SYNTHESIS</a:t>
+            </a:r>
+          </a:p>
+        </p:txBody>
+      </p:sp>
+      <p:sp>
+        <p:nvSpPr>
+          <p:cNvPr id="3" name="TextBox 2"/>
+          <p:cNvSpPr txBox="1"/>
+          <p:nvPr/>
+        </p:nvSpPr>
+        <p:spPr>
+          <a:xfrm>
+            <a:off x="640080" y="1371600"/>
+            <a:ext cx="10607040" cy="1371600"/>
           </a:xfrm>
           <a:prstGeom prst="rect">
             <a:avLst/>
@@ -9260,65 +10419,65 @@
           <a:p>
             <a:pPr>
               <a:spcAft>
-                <a:spcPts val="100"/>
+                <a:spcPts val="200"/>
               </a:spcAft>
             </a:pPr>
             <a:r>
-              <a:rPr sz="1250" b="0">
+              <a:rPr sz="2800" b="1">
+                <a:solidFill>
+                  <a:srgbClr val="FFFFFF"/>
+                </a:solidFill>
+                <a:latin typeface="Cambria"/>
+              </a:rPr>
+              <a:t>The field is underclaiming coverage it already has</a:t>
+            </a:r>
+          </a:p>
+        </p:txBody>
+      </p:sp>
+      <p:sp>
+        <p:nvSpPr>
+          <p:cNvPr id="4" name="TextBox 3"/>
+          <p:cNvSpPr txBox="1"/>
+          <p:nvPr/>
+        </p:nvSpPr>
+        <p:spPr>
+          <a:xfrm>
+            <a:off x="11521440" y="6510528"/>
+            <a:ext cx="548640" cy="274320"/>
+          </a:xfrm>
+          <a:prstGeom prst="rect">
+            <a:avLst/>
+          </a:prstGeom>
+          <a:noFill/>
+        </p:spPr>
+        <p:txBody>
+          <a:bodyPr wrap="square">
+            <a:spAutoFit/>
+          </a:bodyPr>
+          <a:lstStyle/>
+          <a:p>
+            <a:r>
+              <a:rPr sz="1000" b="0">
                 <a:solidFill>
                   <a:srgbClr val="CADCFC"/>
                 </a:solidFill>
                 <a:latin typeface="Calibri"/>
               </a:rPr>
-              <a:t>against the five closest SoKs</a:t>
-            </a:r>
-          </a:p>
-        </p:txBody>
-      </p:sp>
-      <p:sp>
-        <p:nvSpPr>
-          <p:cNvPr id="13" name="TextBox 12"/>
-          <p:cNvSpPr txBox="1"/>
-          <p:nvPr/>
-        </p:nvSpPr>
-        <p:spPr>
-          <a:xfrm>
-            <a:off x="640080" y="5623560"/>
-            <a:ext cx="4114800" cy="365760"/>
-          </a:xfrm>
-          <a:prstGeom prst="rect">
-            <a:avLst/>
-          </a:prstGeom>
-          <a:noFill/>
-        </p:spPr>
-        <p:txBody>
-          <a:bodyPr wrap="square">
-            <a:spAutoFit/>
-          </a:bodyPr>
-          <a:lstStyle/>
-          <a:p>
-            <a:r>
-              <a:rPr sz="1450" b="1">
-                <a:solidFill>
-                  <a:srgbClr val="E0A458"/>
-                </a:solidFill>
-                <a:latin typeface="Cambria"/>
-              </a:rPr>
-              <a:t>Manuscript draft</a:t>
-            </a:r>
-          </a:p>
-        </p:txBody>
-      </p:sp>
-      <p:sp>
-        <p:nvSpPr>
-          <p:cNvPr id="14" name="TextBox 13"/>
-          <p:cNvSpPr txBox="1"/>
-          <p:nvPr/>
-        </p:nvSpPr>
-        <p:spPr>
-          <a:xfrm>
-            <a:off x="4846320" y="5650992"/>
-            <a:ext cx="6675120" cy="685800"/>
+              <a:t>19</a:t>
+            </a:r>
+          </a:p>
+        </p:txBody>
+      </p:sp>
+      <p:sp>
+        <p:nvSpPr>
+          <p:cNvPr id="5" name="TextBox 4"/>
+          <p:cNvSpPr txBox="1"/>
+          <p:nvPr/>
+        </p:nvSpPr>
+        <p:spPr>
+          <a:xfrm>
+            <a:off x="640080" y="2423160"/>
+            <a:ext cx="10881360" cy="1005840"/>
           </a:xfrm>
           <a:prstGeom prst="rect">
             <a:avLst/>
@@ -9333,17 +10492,187 @@
           <a:p>
             <a:pPr>
               <a:spcAft>
-                <a:spcPts val="100"/>
+                <a:spcPts val="500"/>
               </a:spcAft>
             </a:pPr>
             <a:r>
-              <a:rPr sz="1250" b="0">
+              <a:rPr sz="1400" b="0">
                 <a:solidFill>
                   <a:srgbClr val="CADCFC"/>
                 </a:solidFill>
                 <a:latin typeface="Calibri"/>
               </a:rPr>
-              <a:t>RQ1–RQ7 complete; threats-to-validity already written</a:t>
+              <a:t>Two literatures study the same pond and barely read each other (RQ2).</a:t>
+            </a:r>
+          </a:p>
+          <a:p>
+            <a:pPr>
+              <a:spcAft>
+                <a:spcPts val="500"/>
+              </a:spcAft>
+            </a:pPr>
+            <a:r>
+              <a:rPr sz="1400" b="0">
+                <a:solidFill>
+                  <a:srgbClr val="CADCFC"/>
+                </a:solidFill>
+                <a:latin typeface="Calibri"/>
+              </a:rPr>
+              <a:t>They name 223 ways to poison a context and 534 ways to defend one — and almost never test the two against each other (RQ5).</a:t>
+            </a:r>
+          </a:p>
+        </p:txBody>
+      </p:sp>
+      <p:sp>
+        <p:nvSpPr>
+          <p:cNvPr id="6" name="Rounded Rectangle 5"/>
+          <p:cNvSpPr/>
+          <p:nvPr/>
+        </p:nvSpPr>
+        <p:spPr>
+          <a:xfrm>
+            <a:off x="640080" y="3703320"/>
+            <a:ext cx="10881360" cy="1417320"/>
+          </a:xfrm>
+          <a:prstGeom prst="roundRect">
+            <a:avLst/>
+          </a:prstGeom>
+          <a:solidFill>
+            <a:srgbClr val="1B334F"/>
+          </a:solidFill>
+          <a:ln>
+            <a:noFill/>
+          </a:ln>
+          <a:effectLst/>
+        </p:spPr>
+        <p:style>
+          <a:lnRef idx="1">
+            <a:schemeClr val="accent1"/>
+          </a:lnRef>
+          <a:fillRef idx="3">
+            <a:schemeClr val="accent1"/>
+          </a:fillRef>
+          <a:effectRef idx="2">
+            <a:schemeClr val="accent1"/>
+          </a:effectRef>
+          <a:fontRef idx="minor">
+            <a:schemeClr val="lt1"/>
+          </a:fontRef>
+        </p:style>
+        <p:txBody>
+          <a:bodyPr rtlCol="0" anchor="ctr"/>
+          <a:lstStyle/>
+          <a:p>
+            <a:pPr algn="ctr"/>
+          </a:p>
+        </p:txBody>
+      </p:sp>
+      <p:sp>
+        <p:nvSpPr>
+          <p:cNvPr id="7" name="TextBox 6"/>
+          <p:cNvSpPr txBox="1"/>
+          <p:nvPr/>
+        </p:nvSpPr>
+        <p:spPr>
+          <a:xfrm>
+            <a:off x="960120" y="3913632"/>
+            <a:ext cx="10241280" cy="1051560"/>
+          </a:xfrm>
+          <a:prstGeom prst="rect">
+            <a:avLst/>
+          </a:prstGeom>
+          <a:noFill/>
+        </p:spPr>
+        <p:txBody>
+          <a:bodyPr wrap="square">
+            <a:spAutoFit/>
+          </a:bodyPr>
+          <a:lstStyle/>
+          <a:p>
+            <a:pPr>
+              <a:spcAft>
+                <a:spcPts val="300"/>
+              </a:spcAft>
+            </a:pPr>
+            <a:r>
+              <a:rPr sz="1700" b="1">
+                <a:solidFill>
+                  <a:srgbClr val="E0A458"/>
+                </a:solidFill>
+                <a:latin typeface="Calibri"/>
+              </a:rPr>
+              <a:t>The binding constraint is coordination, not capability.</a:t>
+            </a:r>
+          </a:p>
+          <a:p>
+            <a:pPr>
+              <a:spcAft>
+                <a:spcPts val="300"/>
+              </a:spcAft>
+            </a:pPr>
+            <a:r>
+              <a:rPr sz="1300" b="0">
+                <a:solidFill>
+                  <a:srgbClr val="FFFFFF"/>
+                </a:solidFill>
+                <a:latin typeface="Calibri"/>
+              </a:rPr>
+              <a:t>RQ6 found 6 of 7 runnable defenses showed some protection against the threat model they were never tested on.</a:t>
+            </a:r>
+          </a:p>
+          <a:p>
+            <a:pPr>
+              <a:spcAft>
+                <a:spcPts val="300"/>
+              </a:spcAft>
+            </a:pPr>
+            <a:r>
+              <a:rPr sz="1300" b="0">
+                <a:solidFill>
+                  <a:srgbClr val="FFFFFF"/>
+                </a:solidFill>
+                <a:latin typeface="Calibri"/>
+              </a:rPr>
+              <a:t>The generalization is already there. The evaluation convention that would surface it is not.</a:t>
+            </a:r>
+          </a:p>
+        </p:txBody>
+      </p:sp>
+      <p:sp>
+        <p:nvSpPr>
+          <p:cNvPr id="8" name="TextBox 7"/>
+          <p:cNvSpPr txBox="1"/>
+          <p:nvPr/>
+        </p:nvSpPr>
+        <p:spPr>
+          <a:xfrm>
+            <a:off x="640080" y="5394960"/>
+            <a:ext cx="10881360" cy="914400"/>
+          </a:xfrm>
+          <a:prstGeom prst="rect">
+            <a:avLst/>
+          </a:prstGeom>
+          <a:noFill/>
+        </p:spPr>
+        <p:txBody>
+          <a:bodyPr wrap="square">
+            <a:spAutoFit/>
+          </a:bodyPr>
+          <a:lstStyle/>
+          <a:p>
+            <a:pPr>
+              <a:spcAft>
+                <a:spcPts val="400"/>
+              </a:spcAft>
+            </a:pPr>
+            <a:r>
+              <a:rPr sz="1300" b="0">
+                <a:solidFill>
+                  <a:srgbClr val="CFE8EF"/>
+                </a:solidFill>
+                <a:latin typeface="Calibri"/>
+              </a:rPr>
+              <a:t>And the gap is not ours. We imported the literature we thought was missing, specifically to close it. It did not close.</a:t>
             </a:r>
           </a:p>
         </p:txBody>
@@ -10499,6 +11828,1343 @@
                 <a:latin typeface="Calibri"/>
               </a:rPr>
               <a:t>7 ranked, falsifiable</a:t>
+            </a:r>
+          </a:p>
+        </p:txBody>
+      </p:sp>
+    </p:spTree>
+  </p:cSld>
+  <p:clrMapOvr>
+    <a:masterClrMapping/>
+  </p:clrMapOvr>
+</p:sld>
+</file>
+
+<file path=ppt/slides/slide20.xml><?xml version="1.0" encoding="utf-8"?>
+<p:sld xmlns:a="http://schemas.openxmlformats.org/drawingml/2006/main" xmlns:p="http://schemas.openxmlformats.org/presentationml/2006/main" xmlns:r="http://schemas.openxmlformats.org/officeDocument/2006/relationships">
+  <p:cSld>
+    <p:bg>
+      <p:bgPr>
+        <a:solidFill>
+          <a:srgbClr val="12253C"/>
+        </a:solidFill>
+        <a:effectLst/>
+      </p:bgPr>
+    </p:bg>
+    <p:spTree>
+      <p:nvGrpSpPr>
+        <p:cNvPr id="1" name=""/>
+        <p:cNvGrpSpPr/>
+        <p:nvPr/>
+      </p:nvGrpSpPr>
+      <p:grpSpPr/>
+      <p:sp>
+        <p:nvSpPr>
+          <p:cNvPr id="2" name="TextBox 1"/>
+          <p:cNvSpPr txBox="1"/>
+          <p:nvPr/>
+        </p:nvSpPr>
+        <p:spPr>
+          <a:xfrm>
+            <a:off x="640080" y="411480"/>
+            <a:ext cx="8229600" cy="320040"/>
+          </a:xfrm>
+          <a:prstGeom prst="rect">
+            <a:avLst/>
+          </a:prstGeom>
+          <a:noFill/>
+        </p:spPr>
+        <p:txBody>
+          <a:bodyPr wrap="square">
+            <a:spAutoFit/>
+          </a:bodyPr>
+          <a:lstStyle/>
+          <a:p>
+            <a:r>
+              <a:rPr sz="1250" b="1">
+                <a:solidFill>
+                  <a:srgbClr val="E0A458"/>
+                </a:solidFill>
+                <a:latin typeface="Calibri"/>
+              </a:rPr>
+              <a:t>REPRODUCIBILITY</a:t>
+            </a:r>
+          </a:p>
+        </p:txBody>
+      </p:sp>
+      <p:sp>
+        <p:nvSpPr>
+          <p:cNvPr id="3" name="TextBox 2"/>
+          <p:cNvSpPr txBox="1"/>
+          <p:nvPr/>
+        </p:nvSpPr>
+        <p:spPr>
+          <a:xfrm>
+            <a:off x="640080" y="1371600"/>
+            <a:ext cx="10607040" cy="1371600"/>
+          </a:xfrm>
+          <a:prstGeom prst="rect">
+            <a:avLst/>
+          </a:prstGeom>
+          <a:noFill/>
+        </p:spPr>
+        <p:txBody>
+          <a:bodyPr wrap="square">
+            <a:spAutoFit/>
+          </a:bodyPr>
+          <a:lstStyle/>
+          <a:p>
+            <a:pPr>
+              <a:spcAft>
+                <a:spcPts val="200"/>
+              </a:spcAft>
+            </a:pPr>
+            <a:r>
+              <a:rPr sz="2600" b="1">
+                <a:solidFill>
+                  <a:srgbClr val="FFFFFF"/>
+                </a:solidFill>
+                <a:latin typeface="Cambria"/>
+              </a:rPr>
+              <a:t>Every number on these slides regenerates from the repo</a:t>
+            </a:r>
+          </a:p>
+        </p:txBody>
+      </p:sp>
+      <p:sp>
+        <p:nvSpPr>
+          <p:cNvPr id="4" name="TextBox 3"/>
+          <p:cNvSpPr txBox="1"/>
+          <p:nvPr/>
+        </p:nvSpPr>
+        <p:spPr>
+          <a:xfrm>
+            <a:off x="11521440" y="6510528"/>
+            <a:ext cx="548640" cy="274320"/>
+          </a:xfrm>
+          <a:prstGeom prst="rect">
+            <a:avLst/>
+          </a:prstGeom>
+          <a:noFill/>
+        </p:spPr>
+        <p:txBody>
+          <a:bodyPr wrap="square">
+            <a:spAutoFit/>
+          </a:bodyPr>
+          <a:lstStyle/>
+          <a:p>
+            <a:r>
+              <a:rPr sz="1000" b="0">
+                <a:solidFill>
+                  <a:srgbClr val="CADCFC"/>
+                </a:solidFill>
+                <a:latin typeface="Calibri"/>
+              </a:rPr>
+              <a:t>20</a:t>
+            </a:r>
+          </a:p>
+        </p:txBody>
+      </p:sp>
+      <p:sp>
+        <p:nvSpPr>
+          <p:cNvPr id="5" name="Rounded Rectangle 4"/>
+          <p:cNvSpPr/>
+          <p:nvPr/>
+        </p:nvSpPr>
+        <p:spPr>
+          <a:xfrm>
+            <a:off x="640080" y="2468880"/>
+            <a:ext cx="10881360" cy="512064"/>
+          </a:xfrm>
+          <a:prstGeom prst="roundRect">
+            <a:avLst/>
+          </a:prstGeom>
+          <a:solidFill>
+            <a:srgbClr val="1B334F"/>
+          </a:solidFill>
+          <a:ln>
+            <a:noFill/>
+          </a:ln>
+          <a:effectLst/>
+        </p:spPr>
+        <p:style>
+          <a:lnRef idx="1">
+            <a:schemeClr val="accent1"/>
+          </a:lnRef>
+          <a:fillRef idx="3">
+            <a:schemeClr val="accent1"/>
+          </a:fillRef>
+          <a:effectRef idx="2">
+            <a:schemeClr val="accent1"/>
+          </a:effectRef>
+          <a:fontRef idx="minor">
+            <a:schemeClr val="lt1"/>
+          </a:fontRef>
+        </p:style>
+        <p:txBody>
+          <a:bodyPr rtlCol="0" anchor="ctr"/>
+          <a:lstStyle/>
+          <a:p>
+            <a:pPr algn="ctr"/>
+          </a:p>
+        </p:txBody>
+      </p:sp>
+      <p:sp>
+        <p:nvSpPr>
+          <p:cNvPr id="6" name="TextBox 5"/>
+          <p:cNvSpPr txBox="1"/>
+          <p:nvPr/>
+        </p:nvSpPr>
+        <p:spPr>
+          <a:xfrm>
+            <a:off x="914400" y="2569464"/>
+            <a:ext cx="4206240" cy="320040"/>
+          </a:xfrm>
+          <a:prstGeom prst="rect">
+            <a:avLst/>
+          </a:prstGeom>
+          <a:noFill/>
+        </p:spPr>
+        <p:txBody>
+          <a:bodyPr wrap="square">
+            <a:spAutoFit/>
+          </a:bodyPr>
+          <a:lstStyle/>
+          <a:p>
+            <a:r>
+              <a:rPr sz="1300" b="1">
+                <a:solidFill>
+                  <a:srgbClr val="E0A458"/>
+                </a:solidFill>
+                <a:latin typeface="Calibri"/>
+              </a:rPr>
+              <a:t>config.yaml</a:t>
+            </a:r>
+          </a:p>
+        </p:txBody>
+      </p:sp>
+      <p:sp>
+        <p:nvSpPr>
+          <p:cNvPr id="7" name="TextBox 6"/>
+          <p:cNvSpPr txBox="1"/>
+          <p:nvPr/>
+        </p:nvSpPr>
+        <p:spPr>
+          <a:xfrm>
+            <a:off x="5212080" y="2569464"/>
+            <a:ext cx="6035040" cy="320040"/>
+          </a:xfrm>
+          <a:prstGeom prst="rect">
+            <a:avLst/>
+          </a:prstGeom>
+          <a:noFill/>
+        </p:spPr>
+        <p:txBody>
+          <a:bodyPr wrap="square">
+            <a:spAutoFit/>
+          </a:bodyPr>
+          <a:lstStyle/>
+          <a:p>
+            <a:r>
+              <a:rPr sz="1250" b="0">
+                <a:solidFill>
+                  <a:srgbClr val="CADCFC"/>
+                </a:solidFill>
+                <a:latin typeface="Calibri"/>
+              </a:rPr>
+              <a:t>screening criteria, applied by rule</a:t>
+            </a:r>
+          </a:p>
+        </p:txBody>
+      </p:sp>
+      <p:sp>
+        <p:nvSpPr>
+          <p:cNvPr id="8" name="Rounded Rectangle 7"/>
+          <p:cNvSpPr/>
+          <p:nvPr/>
+        </p:nvSpPr>
+        <p:spPr>
+          <a:xfrm>
+            <a:off x="640080" y="3090672"/>
+            <a:ext cx="10881360" cy="512064"/>
+          </a:xfrm>
+          <a:prstGeom prst="roundRect">
+            <a:avLst/>
+          </a:prstGeom>
+          <a:solidFill>
+            <a:srgbClr val="1B334F"/>
+          </a:solidFill>
+          <a:ln>
+            <a:noFill/>
+          </a:ln>
+          <a:effectLst/>
+        </p:spPr>
+        <p:style>
+          <a:lnRef idx="1">
+            <a:schemeClr val="accent1"/>
+          </a:lnRef>
+          <a:fillRef idx="3">
+            <a:schemeClr val="accent1"/>
+          </a:fillRef>
+          <a:effectRef idx="2">
+            <a:schemeClr val="accent1"/>
+          </a:effectRef>
+          <a:fontRef idx="minor">
+            <a:schemeClr val="lt1"/>
+          </a:fontRef>
+        </p:style>
+        <p:txBody>
+          <a:bodyPr rtlCol="0" anchor="ctr"/>
+          <a:lstStyle/>
+          <a:p>
+            <a:pPr algn="ctr"/>
+          </a:p>
+        </p:txBody>
+      </p:sp>
+      <p:sp>
+        <p:nvSpPr>
+          <p:cNvPr id="9" name="TextBox 8"/>
+          <p:cNvSpPr txBox="1"/>
+          <p:nvPr/>
+        </p:nvSpPr>
+        <p:spPr>
+          <a:xfrm>
+            <a:off x="914400" y="3191256"/>
+            <a:ext cx="4206240" cy="320040"/>
+          </a:xfrm>
+          <a:prstGeom prst="rect">
+            <a:avLst/>
+          </a:prstGeom>
+          <a:noFill/>
+        </p:spPr>
+        <p:txBody>
+          <a:bodyPr wrap="square">
+            <a:spAutoFit/>
+          </a:bodyPr>
+          <a:lstStyle/>
+          <a:p>
+            <a:r>
+              <a:rPr sz="1300" b="1">
+                <a:solidFill>
+                  <a:srgbClr val="E0A458"/>
+                </a:solidFill>
+                <a:latin typeface="Calibri"/>
+              </a:rPr>
+              <a:t>rescreening_log.md</a:t>
+            </a:r>
+          </a:p>
+        </p:txBody>
+      </p:sp>
+      <p:sp>
+        <p:nvSpPr>
+          <p:cNvPr id="10" name="TextBox 9"/>
+          <p:cNvSpPr txBox="1"/>
+          <p:nvPr/>
+        </p:nvSpPr>
+        <p:spPr>
+          <a:xfrm>
+            <a:off x="5212080" y="3191256"/>
+            <a:ext cx="6035040" cy="320040"/>
+          </a:xfrm>
+          <a:prstGeom prst="rect">
+            <a:avLst/>
+          </a:prstGeom>
+          <a:noFill/>
+        </p:spPr>
+        <p:txBody>
+          <a:bodyPr wrap="square">
+            <a:spAutoFit/>
+          </a:bodyPr>
+          <a:lstStyle/>
+          <a:p>
+            <a:r>
+              <a:rPr sz="1250" b="0">
+                <a:solidFill>
+                  <a:srgbClr val="CADCFC"/>
+                </a:solidFill>
+                <a:latin typeface="Calibri"/>
+              </a:rPr>
+              <a:t>every corpus-affecting decision, dated, with cause</a:t>
+            </a:r>
+          </a:p>
+        </p:txBody>
+      </p:sp>
+      <p:sp>
+        <p:nvSpPr>
+          <p:cNvPr id="11" name="Rounded Rectangle 10"/>
+          <p:cNvSpPr/>
+          <p:nvPr/>
+        </p:nvSpPr>
+        <p:spPr>
+          <a:xfrm>
+            <a:off x="640080" y="3712464"/>
+            <a:ext cx="10881360" cy="512064"/>
+          </a:xfrm>
+          <a:prstGeom prst="roundRect">
+            <a:avLst/>
+          </a:prstGeom>
+          <a:solidFill>
+            <a:srgbClr val="1B334F"/>
+          </a:solidFill>
+          <a:ln>
+            <a:noFill/>
+          </a:ln>
+          <a:effectLst/>
+        </p:spPr>
+        <p:style>
+          <a:lnRef idx="1">
+            <a:schemeClr val="accent1"/>
+          </a:lnRef>
+          <a:fillRef idx="3">
+            <a:schemeClr val="accent1"/>
+          </a:fillRef>
+          <a:effectRef idx="2">
+            <a:schemeClr val="accent1"/>
+          </a:effectRef>
+          <a:fontRef idx="minor">
+            <a:schemeClr val="lt1"/>
+          </a:fontRef>
+        </p:style>
+        <p:txBody>
+          <a:bodyPr rtlCol="0" anchor="ctr"/>
+          <a:lstStyle/>
+          <a:p>
+            <a:pPr algn="ctr"/>
+          </a:p>
+        </p:txBody>
+      </p:sp>
+      <p:sp>
+        <p:nvSpPr>
+          <p:cNvPr id="12" name="TextBox 11"/>
+          <p:cNvSpPr txBox="1"/>
+          <p:nvPr/>
+        </p:nvSpPr>
+        <p:spPr>
+          <a:xfrm>
+            <a:off x="914400" y="3813048"/>
+            <a:ext cx="4206240" cy="320040"/>
+          </a:xfrm>
+          <a:prstGeom prst="rect">
+            <a:avLst/>
+          </a:prstGeom>
+          <a:noFill/>
+        </p:spPr>
+        <p:txBody>
+          <a:bodyPr wrap="square">
+            <a:spAutoFit/>
+          </a:bodyPr>
+          <a:lstStyle/>
+          <a:p>
+            <a:r>
+              <a:rPr sz="1300" b="1">
+                <a:solidFill>
+                  <a:srgbClr val="E0A458"/>
+                </a:solidFill>
+                <a:latin typeface="Calibri"/>
+              </a:rPr>
+              <a:t>scripts/</a:t>
+            </a:r>
+          </a:p>
+        </p:txBody>
+      </p:sp>
+      <p:sp>
+        <p:nvSpPr>
+          <p:cNvPr id="13" name="TextBox 12"/>
+          <p:cNvSpPr txBox="1"/>
+          <p:nvPr/>
+        </p:nvSpPr>
+        <p:spPr>
+          <a:xfrm>
+            <a:off x="5212080" y="3813048"/>
+            <a:ext cx="6035040" cy="320040"/>
+          </a:xfrm>
+          <a:prstGeom prst="rect">
+            <a:avLst/>
+          </a:prstGeom>
+          <a:noFill/>
+        </p:spPr>
+        <p:txBody>
+          <a:bodyPr wrap="square">
+            <a:spAutoFit/>
+          </a:bodyPr>
+          <a:lstStyle/>
+          <a:p>
+            <a:r>
+              <a:rPr sz="1250" b="0">
+                <a:solidFill>
+                  <a:srgbClr val="CADCFC"/>
+                </a:solidFill>
+                <a:latin typeface="Calibri"/>
+              </a:rPr>
+              <a:t>dedupe → registries → coverage matrix → RQ1/RQ2/RQ7</a:t>
+            </a:r>
+          </a:p>
+        </p:txBody>
+      </p:sp>
+      <p:sp>
+        <p:nvSpPr>
+          <p:cNvPr id="14" name="Rounded Rectangle 13"/>
+          <p:cNvSpPr/>
+          <p:nvPr/>
+        </p:nvSpPr>
+        <p:spPr>
+          <a:xfrm>
+            <a:off x="640080" y="4334256"/>
+            <a:ext cx="10881360" cy="512064"/>
+          </a:xfrm>
+          <a:prstGeom prst="roundRect">
+            <a:avLst/>
+          </a:prstGeom>
+          <a:solidFill>
+            <a:srgbClr val="1B334F"/>
+          </a:solidFill>
+          <a:ln>
+            <a:noFill/>
+          </a:ln>
+          <a:effectLst/>
+        </p:spPr>
+        <p:style>
+          <a:lnRef idx="1">
+            <a:schemeClr val="accent1"/>
+          </a:lnRef>
+          <a:fillRef idx="3">
+            <a:schemeClr val="accent1"/>
+          </a:fillRef>
+          <a:effectRef idx="2">
+            <a:schemeClr val="accent1"/>
+          </a:effectRef>
+          <a:fontRef idx="minor">
+            <a:schemeClr val="lt1"/>
+          </a:fontRef>
+        </p:style>
+        <p:txBody>
+          <a:bodyPr rtlCol="0" anchor="ctr"/>
+          <a:lstStyle/>
+          <a:p>
+            <a:pPr algn="ctr"/>
+          </a:p>
+        </p:txBody>
+      </p:sp>
+      <p:sp>
+        <p:nvSpPr>
+          <p:cNvPr id="15" name="TextBox 14"/>
+          <p:cNvSpPr txBox="1"/>
+          <p:nvPr/>
+        </p:nvSpPr>
+        <p:spPr>
+          <a:xfrm>
+            <a:off x="914400" y="4434840"/>
+            <a:ext cx="4206240" cy="320040"/>
+          </a:xfrm>
+          <a:prstGeom prst="rect">
+            <a:avLst/>
+          </a:prstGeom>
+          <a:noFill/>
+        </p:spPr>
+        <p:txBody>
+          <a:bodyPr wrap="square">
+            <a:spAutoFit/>
+          </a:bodyPr>
+          <a:lstStyle/>
+          <a:p>
+            <a:r>
+              <a:rPr sz="1300" b="1">
+                <a:solidFill>
+                  <a:srgbClr val="E0A458"/>
+                </a:solidFill>
+                <a:latin typeface="Calibri"/>
+              </a:rPr>
+              <a:t>context_sok_master_workbook.xlsx</a:t>
+            </a:r>
+          </a:p>
+        </p:txBody>
+      </p:sp>
+      <p:sp>
+        <p:nvSpPr>
+          <p:cNvPr id="16" name="TextBox 15"/>
+          <p:cNvSpPr txBox="1"/>
+          <p:nvPr/>
+        </p:nvSpPr>
+        <p:spPr>
+          <a:xfrm>
+            <a:off x="5212080" y="4434840"/>
+            <a:ext cx="6035040" cy="320040"/>
+          </a:xfrm>
+          <a:prstGeom prst="rect">
+            <a:avLst/>
+          </a:prstGeom>
+          <a:noFill/>
+        </p:spPr>
+        <p:txBody>
+          <a:bodyPr wrap="square">
+            <a:spAutoFit/>
+          </a:bodyPr>
+          <a:lstStyle/>
+          <a:p>
+            <a:r>
+              <a:rPr sz="1250" b="0">
+                <a:solidFill>
+                  <a:srgbClr val="CADCFC"/>
+                </a:solidFill>
+                <a:latin typeface="Calibri"/>
+              </a:rPr>
+              <a:t>papers, mechanisms, defenses, pairs, gaps</a:t>
+            </a:r>
+          </a:p>
+        </p:txBody>
+      </p:sp>
+      <p:sp>
+        <p:nvSpPr>
+          <p:cNvPr id="17" name="Rounded Rectangle 16"/>
+          <p:cNvSpPr/>
+          <p:nvPr/>
+        </p:nvSpPr>
+        <p:spPr>
+          <a:xfrm>
+            <a:off x="640080" y="4956048"/>
+            <a:ext cx="10881360" cy="512064"/>
+          </a:xfrm>
+          <a:prstGeom prst="roundRect">
+            <a:avLst/>
+          </a:prstGeom>
+          <a:solidFill>
+            <a:srgbClr val="1B334F"/>
+          </a:solidFill>
+          <a:ln>
+            <a:noFill/>
+          </a:ln>
+          <a:effectLst/>
+        </p:spPr>
+        <p:style>
+          <a:lnRef idx="1">
+            <a:schemeClr val="accent1"/>
+          </a:lnRef>
+          <a:fillRef idx="3">
+            <a:schemeClr val="accent1"/>
+          </a:fillRef>
+          <a:effectRef idx="2">
+            <a:schemeClr val="accent1"/>
+          </a:effectRef>
+          <a:fontRef idx="minor">
+            <a:schemeClr val="lt1"/>
+          </a:fontRef>
+        </p:style>
+        <p:txBody>
+          <a:bodyPr rtlCol="0" anchor="ctr"/>
+          <a:lstStyle/>
+          <a:p>
+            <a:pPr algn="ctr"/>
+          </a:p>
+        </p:txBody>
+      </p:sp>
+      <p:sp>
+        <p:nvSpPr>
+          <p:cNvPr id="18" name="TextBox 17"/>
+          <p:cNvSpPr txBox="1"/>
+          <p:nvPr/>
+        </p:nvSpPr>
+        <p:spPr>
+          <a:xfrm>
+            <a:off x="914400" y="5056632"/>
+            <a:ext cx="4206240" cy="320040"/>
+          </a:xfrm>
+          <a:prstGeom prst="rect">
+            <a:avLst/>
+          </a:prstGeom>
+          <a:noFill/>
+        </p:spPr>
+        <p:txBody>
+          <a:bodyPr wrap="square">
+            <a:spAutoFit/>
+          </a:bodyPr>
+          <a:lstStyle/>
+          <a:p>
+            <a:r>
+              <a:rPr sz="1300" b="1">
+                <a:solidFill>
+                  <a:srgbClr val="E0A458"/>
+                </a:solidFill>
+                <a:latin typeface="Calibri"/>
+              </a:rPr>
+              <a:t>mcp_server/</a:t>
+            </a:r>
+          </a:p>
+        </p:txBody>
+      </p:sp>
+      <p:sp>
+        <p:nvSpPr>
+          <p:cNvPr id="19" name="TextBox 18"/>
+          <p:cNvSpPr txBox="1"/>
+          <p:nvPr/>
+        </p:nvSpPr>
+        <p:spPr>
+          <a:xfrm>
+            <a:off x="5212080" y="5056632"/>
+            <a:ext cx="6035040" cy="320040"/>
+          </a:xfrm>
+          <a:prstGeom prst="rect">
+            <a:avLst/>
+          </a:prstGeom>
+          <a:noFill/>
+        </p:spPr>
+        <p:txBody>
+          <a:bodyPr wrap="square">
+            <a:spAutoFit/>
+          </a:bodyPr>
+          <a:lstStyle/>
+          <a:p>
+            <a:r>
+              <a:rPr sz="1250" b="0">
+                <a:solidFill>
+                  <a:srgbClr val="CADCFC"/>
+                </a:solidFill>
+                <a:latin typeface="Calibri"/>
+              </a:rPr>
+              <a:t>the same data, queryable conversationally</a:t>
+            </a:r>
+          </a:p>
+        </p:txBody>
+      </p:sp>
+      <p:sp>
+        <p:nvSpPr>
+          <p:cNvPr id="20" name="Rounded Rectangle 19"/>
+          <p:cNvSpPr/>
+          <p:nvPr/>
+        </p:nvSpPr>
+        <p:spPr>
+          <a:xfrm>
+            <a:off x="640080" y="5577840"/>
+            <a:ext cx="10881360" cy="512064"/>
+          </a:xfrm>
+          <a:prstGeom prst="roundRect">
+            <a:avLst/>
+          </a:prstGeom>
+          <a:solidFill>
+            <a:srgbClr val="1B334F"/>
+          </a:solidFill>
+          <a:ln>
+            <a:noFill/>
+          </a:ln>
+          <a:effectLst/>
+        </p:spPr>
+        <p:style>
+          <a:lnRef idx="1">
+            <a:schemeClr val="accent1"/>
+          </a:lnRef>
+          <a:fillRef idx="3">
+            <a:schemeClr val="accent1"/>
+          </a:fillRef>
+          <a:effectRef idx="2">
+            <a:schemeClr val="accent1"/>
+          </a:effectRef>
+          <a:fontRef idx="minor">
+            <a:schemeClr val="lt1"/>
+          </a:fontRef>
+        </p:style>
+        <p:txBody>
+          <a:bodyPr rtlCol="0" anchor="ctr"/>
+          <a:lstStyle/>
+          <a:p>
+            <a:pPr algn="ctr"/>
+          </a:p>
+        </p:txBody>
+      </p:sp>
+      <p:sp>
+        <p:nvSpPr>
+          <p:cNvPr id="21" name="TextBox 20"/>
+          <p:cNvSpPr txBox="1"/>
+          <p:nvPr/>
+        </p:nvSpPr>
+        <p:spPr>
+          <a:xfrm>
+            <a:off x="914400" y="5678424"/>
+            <a:ext cx="4206240" cy="320040"/>
+          </a:xfrm>
+          <a:prstGeom prst="rect">
+            <a:avLst/>
+          </a:prstGeom>
+          <a:noFill/>
+        </p:spPr>
+        <p:txBody>
+          <a:bodyPr wrap="square">
+            <a:spAutoFit/>
+          </a:bodyPr>
+          <a:lstStyle/>
+          <a:p>
+            <a:r>
+              <a:rPr sz="1300" b="1">
+                <a:solidFill>
+                  <a:srgbClr val="E0A458"/>
+                </a:solidFill>
+                <a:latin typeface="Calibri"/>
+              </a:rPr>
+              <a:t>scripts/build_presentation.py</a:t>
+            </a:r>
+          </a:p>
+        </p:txBody>
+      </p:sp>
+      <p:sp>
+        <p:nvSpPr>
+          <p:cNvPr id="22" name="TextBox 21"/>
+          <p:cNvSpPr txBox="1"/>
+          <p:nvPr/>
+        </p:nvSpPr>
+        <p:spPr>
+          <a:xfrm>
+            <a:off x="5212080" y="5678424"/>
+            <a:ext cx="6035040" cy="320040"/>
+          </a:xfrm>
+          <a:prstGeom prst="rect">
+            <a:avLst/>
+          </a:prstGeom>
+          <a:noFill/>
+        </p:spPr>
+        <p:txBody>
+          <a:bodyPr wrap="square">
+            <a:spAutoFit/>
+          </a:bodyPr>
+          <a:lstStyle/>
+          <a:p>
+            <a:r>
+              <a:rPr sz="1250" b="0">
+                <a:solidFill>
+                  <a:srgbClr val="CADCFC"/>
+                </a:solidFill>
+                <a:latin typeface="Calibri"/>
+              </a:rPr>
+              <a:t>this deck, built from the live registries</a:t>
+            </a:r>
+          </a:p>
+        </p:txBody>
+      </p:sp>
+      <p:sp>
+        <p:nvSpPr>
+          <p:cNvPr id="23" name="TextBox 22"/>
+          <p:cNvSpPr txBox="1"/>
+          <p:nvPr/>
+        </p:nvSpPr>
+        <p:spPr>
+          <a:xfrm>
+            <a:off x="640080" y="6309360"/>
+            <a:ext cx="10881360" cy="365760"/>
+          </a:xfrm>
+          <a:prstGeom prst="rect">
+            <a:avLst/>
+          </a:prstGeom>
+          <a:noFill/>
+        </p:spPr>
+        <p:txBody>
+          <a:bodyPr wrap="square">
+            <a:spAutoFit/>
+          </a:bodyPr>
+          <a:lstStyle/>
+          <a:p>
+            <a:r>
+              <a:rPr sz="1200" b="0">
+                <a:solidFill>
+                  <a:srgbClr val="CFE8EF"/>
+                </a:solidFill>
+                <a:latin typeface="Calibri"/>
+              </a:rPr>
+              <a:t>RQ6 numbers come from running each defense's released code or weights — never from the paper's reported figures.</a:t>
+            </a:r>
+          </a:p>
+        </p:txBody>
+      </p:sp>
+    </p:spTree>
+  </p:cSld>
+  <p:clrMapOvr>
+    <a:masterClrMapping/>
+  </p:clrMapOvr>
+</p:sld>
+</file>
+
+<file path=ppt/slides/slide21.xml><?xml version="1.0" encoding="utf-8"?>
+<p:sld xmlns:a="http://schemas.openxmlformats.org/drawingml/2006/main" xmlns:p="http://schemas.openxmlformats.org/presentationml/2006/main" xmlns:r="http://schemas.openxmlformats.org/officeDocument/2006/relationships">
+  <p:cSld>
+    <p:bg>
+      <p:bgPr>
+        <a:solidFill>
+          <a:srgbClr val="12253C"/>
+        </a:solidFill>
+        <a:effectLst/>
+      </p:bgPr>
+    </p:bg>
+    <p:spTree>
+      <p:nvGrpSpPr>
+        <p:cNvPr id="1" name=""/>
+        <p:cNvGrpSpPr/>
+        <p:nvPr/>
+      </p:nvGrpSpPr>
+      <p:grpSpPr/>
+      <p:sp>
+        <p:nvSpPr>
+          <p:cNvPr id="2" name="TextBox 1"/>
+          <p:cNvSpPr txBox="1"/>
+          <p:nvPr/>
+        </p:nvSpPr>
+        <p:spPr>
+          <a:xfrm>
+            <a:off x="640080" y="411480"/>
+            <a:ext cx="8229600" cy="320040"/>
+          </a:xfrm>
+          <a:prstGeom prst="rect">
+            <a:avLst/>
+          </a:prstGeom>
+          <a:noFill/>
+        </p:spPr>
+        <p:txBody>
+          <a:bodyPr wrap="square">
+            <a:spAutoFit/>
+          </a:bodyPr>
+          <a:lstStyle/>
+          <a:p>
+            <a:r>
+              <a:rPr sz="1250" b="1">
+                <a:solidFill>
+                  <a:srgbClr val="E0A458"/>
+                </a:solidFill>
+                <a:latin typeface="Calibri"/>
+              </a:rPr>
+              <a:t>WHAT'S NEXT</a:t>
+            </a:r>
+          </a:p>
+        </p:txBody>
+      </p:sp>
+      <p:sp>
+        <p:nvSpPr>
+          <p:cNvPr id="3" name="TextBox 2"/>
+          <p:cNvSpPr txBox="1"/>
+          <p:nvPr/>
+        </p:nvSpPr>
+        <p:spPr>
+          <a:xfrm>
+            <a:off x="640080" y="1371600"/>
+            <a:ext cx="10607040" cy="1371600"/>
+          </a:xfrm>
+          <a:prstGeom prst="rect">
+            <a:avLst/>
+          </a:prstGeom>
+          <a:noFill/>
+        </p:spPr>
+        <p:txBody>
+          <a:bodyPr wrap="square">
+            <a:spAutoFit/>
+          </a:bodyPr>
+          <a:lstStyle/>
+          <a:p>
+            <a:pPr>
+              <a:spcAft>
+                <a:spcPts val="200"/>
+              </a:spcAft>
+            </a:pPr>
+            <a:r>
+              <a:rPr sz="3000" b="1">
+                <a:solidFill>
+                  <a:srgbClr val="FFFFFF"/>
+                </a:solidFill>
+                <a:latin typeface="Cambria"/>
+              </a:rPr>
+              <a:t>From findings to manuscript</a:t>
+            </a:r>
+          </a:p>
+        </p:txBody>
+      </p:sp>
+      <p:sp>
+        <p:nvSpPr>
+          <p:cNvPr id="4" name="TextBox 3"/>
+          <p:cNvSpPr txBox="1"/>
+          <p:nvPr/>
+        </p:nvSpPr>
+        <p:spPr>
+          <a:xfrm>
+            <a:off x="11521440" y="6510528"/>
+            <a:ext cx="548640" cy="274320"/>
+          </a:xfrm>
+          <a:prstGeom prst="rect">
+            <a:avLst/>
+          </a:prstGeom>
+          <a:noFill/>
+        </p:spPr>
+        <p:txBody>
+          <a:bodyPr wrap="square">
+            <a:spAutoFit/>
+          </a:bodyPr>
+          <a:lstStyle/>
+          <a:p>
+            <a:r>
+              <a:rPr sz="1000" b="0">
+                <a:solidFill>
+                  <a:srgbClr val="CADCFC"/>
+                </a:solidFill>
+                <a:latin typeface="Calibri"/>
+              </a:rPr>
+              <a:t>21</a:t>
+            </a:r>
+          </a:p>
+        </p:txBody>
+      </p:sp>
+      <p:sp>
+        <p:nvSpPr>
+          <p:cNvPr id="5" name="TextBox 4"/>
+          <p:cNvSpPr txBox="1"/>
+          <p:nvPr/>
+        </p:nvSpPr>
+        <p:spPr>
+          <a:xfrm>
+            <a:off x="640080" y="2331720"/>
+            <a:ext cx="4114800" cy="365760"/>
+          </a:xfrm>
+          <a:prstGeom prst="rect">
+            <a:avLst/>
+          </a:prstGeom>
+          <a:noFill/>
+        </p:spPr>
+        <p:txBody>
+          <a:bodyPr wrap="square">
+            <a:spAutoFit/>
+          </a:bodyPr>
+          <a:lstStyle/>
+          <a:p>
+            <a:r>
+              <a:rPr sz="1450" b="1">
+                <a:solidFill>
+                  <a:srgbClr val="E0A458"/>
+                </a:solidFill>
+                <a:latin typeface="Cambria"/>
+              </a:rPr>
+              <a:t>Resolve the RQ6 confound</a:t>
+            </a:r>
+          </a:p>
+        </p:txBody>
+      </p:sp>
+      <p:sp>
+        <p:nvSpPr>
+          <p:cNvPr id="6" name="TextBox 5"/>
+          <p:cNvSpPr txBox="1"/>
+          <p:nvPr/>
+        </p:nvSpPr>
+        <p:spPr>
+          <a:xfrm>
+            <a:off x="4846320" y="2359151"/>
+            <a:ext cx="6675120" cy="685800"/>
+          </a:xfrm>
+          <a:prstGeom prst="rect">
+            <a:avLst/>
+          </a:prstGeom>
+          <a:noFill/>
+        </p:spPr>
+        <p:txBody>
+          <a:bodyPr wrap="square">
+            <a:spAutoFit/>
+          </a:bodyPr>
+          <a:lstStyle/>
+          <a:p>
+            <a:pPr>
+              <a:spcAft>
+                <a:spcPts val="100"/>
+              </a:spcAft>
+            </a:pPr>
+            <a:r>
+              <a:rPr sz="1250" b="0">
+                <a:solidFill>
+                  <a:srgbClr val="CADCFC"/>
+                </a:solidFill>
+                <a:latin typeface="Calibri"/>
+              </a:rPr>
+              <a:t>port the ingestion defenses into an agent harness so intervention point is tested, not inferred</a:t>
+            </a:r>
+          </a:p>
+        </p:txBody>
+      </p:sp>
+      <p:sp>
+        <p:nvSpPr>
+          <p:cNvPr id="7" name="TextBox 6"/>
+          <p:cNvSpPr txBox="1"/>
+          <p:nvPr/>
+        </p:nvSpPr>
+        <p:spPr>
+          <a:xfrm>
+            <a:off x="640080" y="3154679"/>
+            <a:ext cx="4114800" cy="365760"/>
+          </a:xfrm>
+          <a:prstGeom prst="rect">
+            <a:avLst/>
+          </a:prstGeom>
+          <a:noFill/>
+        </p:spPr>
+        <p:txBody>
+          <a:bodyPr wrap="square">
+            <a:spAutoFit/>
+          </a:bodyPr>
+          <a:lstStyle/>
+          <a:p>
+            <a:r>
+              <a:rPr sz="1450" b="1">
+                <a:solidFill>
+                  <a:srgbClr val="E0A458"/>
+                </a:solidFill>
+                <a:latin typeface="Cambria"/>
+              </a:rPr>
+              <a:t>Close the transfer program</a:t>
+            </a:r>
+          </a:p>
+        </p:txBody>
+      </p:sp>
+      <p:sp>
+        <p:nvSpPr>
+          <p:cNvPr id="8" name="TextBox 7"/>
+          <p:cNvSpPr txBox="1"/>
+          <p:nvPr/>
+        </p:nvSpPr>
+        <p:spPr>
+          <a:xfrm>
+            <a:off x="4846320" y="3182111"/>
+            <a:ext cx="6675120" cy="685800"/>
+          </a:xfrm>
+          <a:prstGeom prst="rect">
+            <a:avLst/>
+          </a:prstGeom>
+          <a:noFill/>
+        </p:spPr>
+        <p:txBody>
+          <a:bodyPr wrap="square">
+            <a:spAutoFit/>
+          </a:bodyPr>
+          <a:lstStyle/>
+          <a:p>
+            <a:pPr>
+              <a:spcAft>
+                <a:spcPts val="100"/>
+              </a:spcAft>
+            </a:pPr>
+            <a:r>
+              <a:rPr sz="1250" b="0">
+                <a:solidFill>
+                  <a:srgbClr val="CADCFC"/>
+                </a:solidFill>
+                <a:latin typeface="Calibri"/>
+              </a:rPr>
+              <a:t>three-stage coverage recovery; first prediction already validated by execution</a:t>
+            </a:r>
+          </a:p>
+        </p:txBody>
+      </p:sp>
+      <p:sp>
+        <p:nvSpPr>
+          <p:cNvPr id="9" name="TextBox 8"/>
+          <p:cNvSpPr txBox="1"/>
+          <p:nvPr/>
+        </p:nvSpPr>
+        <p:spPr>
+          <a:xfrm>
+            <a:off x="640080" y="3977639"/>
+            <a:ext cx="4114800" cy="365760"/>
+          </a:xfrm>
+          <a:prstGeom prst="rect">
+            <a:avLst/>
+          </a:prstGeom>
+          <a:noFill/>
+        </p:spPr>
+        <p:txBody>
+          <a:bodyPr wrap="square">
+            <a:spAutoFit/>
+          </a:bodyPr>
+          <a:lstStyle/>
+          <a:p>
+            <a:r>
+              <a:rPr sz="1450" b="1">
+                <a:solidFill>
+                  <a:srgbClr val="E0A458"/>
+                </a:solidFill>
+                <a:latin typeface="Cambria"/>
+              </a:rPr>
+              <a:t>Decide the survey question</a:t>
+            </a:r>
+          </a:p>
+        </p:txBody>
+      </p:sp>
+      <p:sp>
+        <p:nvSpPr>
+          <p:cNvPr id="10" name="TextBox 9"/>
+          <p:cNvSpPr txBox="1"/>
+          <p:nvPr/>
+        </p:nvSpPr>
+        <p:spPr>
+          <a:xfrm>
+            <a:off x="4846320" y="4005072"/>
+            <a:ext cx="6675120" cy="685800"/>
+          </a:xfrm>
+          <a:prstGeom prst="rect">
+            <a:avLst/>
+          </a:prstGeom>
+          <a:noFill/>
+        </p:spPr>
+        <p:txBody>
+          <a:bodyPr wrap="square">
+            <a:spAutoFit/>
+          </a:bodyPr>
+          <a:lstStyle/>
+          <a:p>
+            <a:pPr>
+              <a:spcAft>
+                <a:spcPts val="100"/>
+              </a:spcAft>
+            </a:pPr>
+            <a:r>
+              <a:rPr sz="1250" b="0">
+                <a:solidFill>
+                  <a:srgbClr val="CADCFC"/>
+                </a:solidFill>
+                <a:latin typeface="Calibri"/>
+              </a:rPr>
+              <a:t>whether a pure survey satisfies the include criteria — affects the original corpus too</a:t>
+            </a:r>
+          </a:p>
+        </p:txBody>
+      </p:sp>
+      <p:sp>
+        <p:nvSpPr>
+          <p:cNvPr id="11" name="TextBox 10"/>
+          <p:cNvSpPr txBox="1"/>
+          <p:nvPr/>
+        </p:nvSpPr>
+        <p:spPr>
+          <a:xfrm>
+            <a:off x="640080" y="4800600"/>
+            <a:ext cx="4114800" cy="365760"/>
+          </a:xfrm>
+          <a:prstGeom prst="rect">
+            <a:avLst/>
+          </a:prstGeom>
+          <a:noFill/>
+        </p:spPr>
+        <p:txBody>
+          <a:bodyPr wrap="square">
+            <a:spAutoFit/>
+          </a:bodyPr>
+          <a:lstStyle/>
+          <a:p>
+            <a:r>
+              <a:rPr sz="1450" b="1">
+                <a:solidFill>
+                  <a:srgbClr val="E0A458"/>
+                </a:solidFill>
+                <a:latin typeface="Cambria"/>
+              </a:rPr>
+              <a:t>Differentiation table</a:t>
+            </a:r>
+          </a:p>
+        </p:txBody>
+      </p:sp>
+      <p:sp>
+        <p:nvSpPr>
+          <p:cNvPr id="12" name="TextBox 11"/>
+          <p:cNvSpPr txBox="1"/>
+          <p:nvPr/>
+        </p:nvSpPr>
+        <p:spPr>
+          <a:xfrm>
+            <a:off x="4846320" y="4828032"/>
+            <a:ext cx="6675120" cy="685800"/>
+          </a:xfrm>
+          <a:prstGeom prst="rect">
+            <a:avLst/>
+          </a:prstGeom>
+          <a:noFill/>
+        </p:spPr>
+        <p:txBody>
+          <a:bodyPr wrap="square">
+            <a:spAutoFit/>
+          </a:bodyPr>
+          <a:lstStyle/>
+          <a:p>
+            <a:pPr>
+              <a:spcAft>
+                <a:spcPts val="100"/>
+              </a:spcAft>
+            </a:pPr>
+            <a:r>
+              <a:rPr sz="1250" b="0">
+                <a:solidFill>
+                  <a:srgbClr val="CADCFC"/>
+                </a:solidFill>
+                <a:latin typeface="Calibri"/>
+              </a:rPr>
+              <a:t>against the five closest SoKs</a:t>
+            </a:r>
+          </a:p>
+        </p:txBody>
+      </p:sp>
+      <p:sp>
+        <p:nvSpPr>
+          <p:cNvPr id="13" name="TextBox 12"/>
+          <p:cNvSpPr txBox="1"/>
+          <p:nvPr/>
+        </p:nvSpPr>
+        <p:spPr>
+          <a:xfrm>
+            <a:off x="640080" y="5623560"/>
+            <a:ext cx="4114800" cy="365760"/>
+          </a:xfrm>
+          <a:prstGeom prst="rect">
+            <a:avLst/>
+          </a:prstGeom>
+          <a:noFill/>
+        </p:spPr>
+        <p:txBody>
+          <a:bodyPr wrap="square">
+            <a:spAutoFit/>
+          </a:bodyPr>
+          <a:lstStyle/>
+          <a:p>
+            <a:r>
+              <a:rPr sz="1450" b="1">
+                <a:solidFill>
+                  <a:srgbClr val="E0A458"/>
+                </a:solidFill>
+                <a:latin typeface="Cambria"/>
+              </a:rPr>
+              <a:t>Manuscript draft</a:t>
+            </a:r>
+          </a:p>
+        </p:txBody>
+      </p:sp>
+      <p:sp>
+        <p:nvSpPr>
+          <p:cNvPr id="14" name="TextBox 13"/>
+          <p:cNvSpPr txBox="1"/>
+          <p:nvPr/>
+        </p:nvSpPr>
+        <p:spPr>
+          <a:xfrm>
+            <a:off x="4846320" y="5650992"/>
+            <a:ext cx="6675120" cy="685800"/>
+          </a:xfrm>
+          <a:prstGeom prst="rect">
+            <a:avLst/>
+          </a:prstGeom>
+          <a:noFill/>
+        </p:spPr>
+        <p:txBody>
+          <a:bodyPr wrap="square">
+            <a:spAutoFit/>
+          </a:bodyPr>
+          <a:lstStyle/>
+          <a:p>
+            <a:pPr>
+              <a:spcAft>
+                <a:spcPts val="100"/>
+              </a:spcAft>
+            </a:pPr>
+            <a:r>
+              <a:rPr sz="1250" b="0">
+                <a:solidFill>
+                  <a:srgbClr val="CADCFC"/>
+                </a:solidFill>
+                <a:latin typeface="Calibri"/>
+              </a:rPr>
+              <a:t>RQ1–RQ7 complete; threats-to-validity already written</a:t>
             </a:r>
           </a:p>
         </p:txBody>

--- a/context_sok_results_presentation.pptx
+++ b/context_sok_results_presentation.pptx
@@ -6573,7 +6573,7 @@
                 </a:solidFill>
                 <a:latin typeface="Calibri"/>
               </a:rPr>
-              <a:t>EVALUATION FRAGMENTATION</a:t>
+              <a:t>BENCHMARK STANDARDIZATION</a:t>
             </a:r>
           </a:p>
         </p:txBody>
@@ -6612,7 +6612,7 @@
                 </a:solidFill>
                 <a:latin typeface="Cambria"/>
               </a:rPr>
-              <a:t>The field has no common ground to test on</a:t>
+              <a:t>The field has no standard benchmark to test on</a:t>
             </a:r>
           </a:p>
         </p:txBody>
@@ -6914,7 +6914,7 @@
                 </a:solidFill>
                 <a:latin typeface="Calibri"/>
               </a:rPr>
-              <a:t>shared substrate</a:t>
+              <a:t>shared benchmark</a:t>
             </a:r>
           </a:p>
         </p:txBody>
@@ -6953,7 +6953,7 @@
                 </a:solidFill>
                 <a:latin typeface="Calibri"/>
               </a:rPr>
-              <a:t>255 distinct substrates</a:t>
+              <a:t>255 distinct benchmarks</a:t>
             </a:r>
           </a:p>
           <a:p>
@@ -7049,7 +7049,7 @@
                 </a:solidFill>
                 <a:latin typeface="Calibri"/>
               </a:rPr>
-              <a:t>More substrates than attacks.</a:t>
+              <a:t>More benchmarks than attacks.</a:t>
             </a:r>
           </a:p>
           <a:p>

--- a/context_sok_results_presentation.pptx
+++ b/context_sok_results_presentation.pptx
@@ -10008,7 +10008,7 @@
                 </a:solidFill>
                 <a:latin typeface="Calibri"/>
               </a:rPr>
-              <a:t>THE ROADMAP</a:t>
+              <a:t>THE PROBLEM</a:t>
             </a:r>
           </a:p>
         </p:txBody>
@@ -10047,7 +10047,7 @@
                 </a:solidFill>
                 <a:latin typeface="Cambria"/>
               </a:rPr>
-              <a:t>Seven questions, then the experiments</a:t>
+              <a:t>An agent believes its context window</a:t>
             </a:r>
           </a:p>
         </p:txBody>
@@ -10088,14 +10088,101 @@
       </p:sp>
       <p:sp>
         <p:nvSpPr>
-          <p:cNvPr id="5" name="Rectangle 4"/>
+          <p:cNvPr id="5" name="TextBox 4"/>
+          <p:cNvSpPr txBox="1"/>
+          <p:nvPr/>
+        </p:nvSpPr>
+        <p:spPr>
+          <a:xfrm>
+            <a:off x="640080" y="2148840"/>
+            <a:ext cx="10881360" cy="1828800"/>
+          </a:xfrm>
+          <a:prstGeom prst="rect">
+            <a:avLst/>
+          </a:prstGeom>
+          <a:noFill/>
+        </p:spPr>
+        <p:txBody>
+          <a:bodyPr wrap="square">
+            <a:spAutoFit/>
+          </a:bodyPr>
+          <a:lstStyle/>
+          <a:p>
+            <a:pPr>
+              <a:spcAft>
+                <a:spcPts val="700"/>
+              </a:spcAft>
+            </a:pPr>
+            <a:r>
+              <a:rPr sz="1500" b="1">
+                <a:solidFill>
+                  <a:srgbClr val="FFFFFF"/>
+                </a:solidFill>
+                <a:latin typeface="Calibri"/>
+              </a:rPr>
+              <a:t>An LLM agent reads one block of text and then acts. We call this block the context window.</a:t>
+            </a:r>
+          </a:p>
+          <a:p>
+            <a:pPr>
+              <a:spcAft>
+                <a:spcPts val="700"/>
+              </a:spcAft>
+            </a:pPr>
+            <a:r>
+              <a:rPr sz="1400" b="0">
+                <a:solidFill>
+                  <a:srgbClr val="CADCFC"/>
+                </a:solidFill>
+                <a:latin typeface="Calibri"/>
+              </a:rPr>
+              <a:t>The block holds many things at once. It holds the user's question. It holds pages that a tool returned. It holds documents that a search step found. It holds notes from an earlier session.</a:t>
+            </a:r>
+          </a:p>
+          <a:p>
+            <a:pPr>
+              <a:spcAft>
+                <a:spcPts val="700"/>
+              </a:spcAft>
+            </a:pPr>
+            <a:r>
+              <a:rPr sz="1500" b="1">
+                <a:solidFill>
+                  <a:srgbClr val="E0A458"/>
+                </a:solidFill>
+                <a:latin typeface="Calibri"/>
+              </a:rPr>
+              <a:t>The model cannot tell these apart. Everything in the block looks the same to it.</a:t>
+            </a:r>
+          </a:p>
+          <a:p>
+            <a:pPr>
+              <a:spcAft>
+                <a:spcPts val="700"/>
+              </a:spcAft>
+            </a:pPr>
+            <a:r>
+              <a:rPr sz="1400" b="0">
+                <a:solidFill>
+                  <a:srgbClr val="CADCFC"/>
+                </a:solidFill>
+                <a:latin typeface="Calibri"/>
+              </a:rPr>
+              <a:t>So any text that reaches the block can change what the agent does. The text does not need to come from the user. It only needs to arrive.</a:t>
+            </a:r>
+          </a:p>
+        </p:txBody>
+      </p:sp>
+      <p:sp>
+        <p:nvSpPr>
+          <p:cNvPr id="6" name="Rectangle 5"/>
           <p:cNvSpPr/>
           <p:nvPr/>
         </p:nvSpPr>
         <p:spPr>
           <a:xfrm>
-            <a:off x="640080" y="2029968"/>
-            <a:ext cx="10881360" cy="475488"/>
+            <a:off x="640080" y="4343400"/>
+            <a:ext cx="10881360" cy="1417320"/>
           </a:xfrm>
           <a:prstGeom prst="rect">
             <a:avLst/>
@@ -10132,68 +10219,71 @@
       </p:sp>
       <p:sp>
         <p:nvSpPr>
-          <p:cNvPr id="6" name="TextBox 5"/>
-          <p:cNvSpPr txBox="1"/>
-          <p:nvPr/>
-        </p:nvSpPr>
-        <p:spPr>
-          <a:xfrm>
-            <a:off x="868680" y="2103120"/>
-            <a:ext cx="1005840" cy="320040"/>
-          </a:xfrm>
-          <a:prstGeom prst="rect">
-            <a:avLst/>
-          </a:prstGeom>
-          <a:noFill/>
-        </p:spPr>
-        <p:txBody>
-          <a:bodyPr wrap="square">
-            <a:spAutoFit/>
-          </a:bodyPr>
-          <a:lstStyle/>
-          <a:p>
-            <a:r>
-              <a:rPr sz="1400" b="1">
+          <p:cNvPr id="7" name="TextBox 6"/>
+          <p:cNvSpPr txBox="1"/>
+          <p:nvPr/>
+        </p:nvSpPr>
+        <p:spPr>
+          <a:xfrm>
+            <a:off x="960120" y="4553712"/>
+            <a:ext cx="10241280" cy="1097280"/>
+          </a:xfrm>
+          <a:prstGeom prst="rect">
+            <a:avLst/>
+          </a:prstGeom>
+          <a:noFill/>
+        </p:spPr>
+        <p:txBody>
+          <a:bodyPr wrap="square">
+            <a:spAutoFit/>
+          </a:bodyPr>
+          <a:lstStyle/>
+          <a:p>
+            <a:pPr>
+              <a:spcAft>
+                <a:spcPts val="400"/>
+              </a:spcAft>
+            </a:pPr>
+            <a:r>
+              <a:rPr sz="1500" b="1">
                 <a:solidFill>
                   <a:srgbClr val="E0A458"/>
                 </a:solidFill>
-                <a:latin typeface="Cambria"/>
-              </a:rPr>
-              <a:t>BASE</a:t>
-            </a:r>
-          </a:p>
-        </p:txBody>
-      </p:sp>
-      <p:sp>
-        <p:nvSpPr>
-          <p:cNvPr id="7" name="TextBox 6"/>
-          <p:cNvSpPr txBox="1"/>
-          <p:nvPr/>
-        </p:nvSpPr>
-        <p:spPr>
-          <a:xfrm>
-            <a:off x="1874519" y="2112264"/>
-            <a:ext cx="3108960" cy="320040"/>
-          </a:xfrm>
-          <a:prstGeom prst="rect">
-            <a:avLst/>
-          </a:prstGeom>
-          <a:noFill/>
-        </p:spPr>
-        <p:txBody>
-          <a:bodyPr wrap="square">
-            <a:spAutoFit/>
-          </a:bodyPr>
-          <a:lstStyle/>
-          <a:p>
-            <a:r>
-              <a:rPr sz="1350" b="1">
+                <a:latin typeface="Calibri"/>
+              </a:rPr>
+              <a:t>The guiding picture: the context window is a pond.</a:t>
+            </a:r>
+          </a:p>
+          <a:p>
+            <a:pPr>
+              <a:spcAft>
+                <a:spcPts val="400"/>
+              </a:spcAft>
+            </a:pPr>
+            <a:r>
+              <a:rPr sz="1300" b="0">
                 <a:solidFill>
                   <a:srgbClr val="FFFFFF"/>
                 </a:solidFill>
                 <a:latin typeface="Calibri"/>
               </a:rPr>
-              <a:t>What we measure</a:t>
+              <a:t>Water comes in through a fixed set of streams. Clean water and dirty water mix in the same pond. Everything downstream drinks the mixture.</a:t>
+            </a:r>
+          </a:p>
+          <a:p>
+            <a:pPr>
+              <a:spcAft>
+                <a:spcPts val="400"/>
+              </a:spcAft>
+            </a:pPr>
+            <a:r>
+              <a:rPr sz="1300" b="0">
+                <a:solidFill>
+                  <a:srgbClr val="FFFFFF"/>
+                </a:solidFill>
+                <a:latin typeface="Calibri"/>
+              </a:rPr>
+              <a:t>We ask two questions. How many streams are there? What guards the mouth of each one?</a:t>
             </a:r>
           </a:p>
         </p:txBody>
@@ -10206,1196 +10296,62 @@
         </p:nvSpPr>
         <p:spPr>
           <a:xfrm>
-            <a:off x="5120640" y="2112264"/>
-            <a:ext cx="6126480" cy="320040"/>
-          </a:xfrm>
-          <a:prstGeom prst="rect">
-            <a:avLst/>
-          </a:prstGeom>
-          <a:noFill/>
-        </p:spPr>
-        <p:txBody>
-          <a:bodyPr wrap="square">
-            <a:spAutoFit/>
-          </a:bodyPr>
-          <a:lstStyle/>
-          <a:p>
-            <a:r>
-              <a:rPr sz="1300" b="0">
-                <a:solidFill>
-                  <a:srgbClr val="CADCFC"/>
-                </a:solidFill>
-                <a:latin typeface="Calibri"/>
-              </a:rPr>
-              <a:t>3 axes: channel, intent, consequence</a:t>
-            </a:r>
-          </a:p>
-        </p:txBody>
-      </p:sp>
-      <p:sp>
-        <p:nvSpPr>
-          <p:cNvPr id="9" name="Rectangle 8"/>
-          <p:cNvSpPr/>
-          <p:nvPr/>
-        </p:nvSpPr>
-        <p:spPr>
-          <a:xfrm>
-            <a:off x="640080" y="2528316"/>
-            <a:ext cx="10881360" cy="475488"/>
-          </a:xfrm>
-          <a:prstGeom prst="rect">
-            <a:avLst/>
-          </a:prstGeom>
-          <a:solidFill>
-            <a:srgbClr val="1B334F"/>
-          </a:solidFill>
-          <a:ln>
-            <a:noFill/>
-          </a:ln>
-          <a:effectLst/>
-        </p:spPr>
-        <p:style>
-          <a:lnRef idx="1">
-            <a:schemeClr val="accent1"/>
-          </a:lnRef>
-          <a:fillRef idx="3">
-            <a:schemeClr val="accent1"/>
-          </a:fillRef>
-          <a:effectRef idx="2">
-            <a:schemeClr val="accent1"/>
-          </a:effectRef>
-          <a:fontRef idx="minor">
-            <a:schemeClr val="lt1"/>
-          </a:fontRef>
-        </p:style>
-        <p:txBody>
-          <a:bodyPr rtlCol="0" anchor="ctr"/>
-          <a:lstStyle/>
-          <a:p>
-            <a:pPr algn="ctr"/>
-          </a:p>
-        </p:txBody>
-      </p:sp>
-      <p:sp>
-        <p:nvSpPr>
-          <p:cNvPr id="10" name="TextBox 9"/>
-          <p:cNvSpPr txBox="1"/>
-          <p:nvPr/>
-        </p:nvSpPr>
-        <p:spPr>
-          <a:xfrm>
-            <a:off x="868680" y="2601468"/>
-            <a:ext cx="1005840" cy="320040"/>
-          </a:xfrm>
-          <a:prstGeom prst="rect">
-            <a:avLst/>
-          </a:prstGeom>
-          <a:noFill/>
-        </p:spPr>
-        <p:txBody>
-          <a:bodyPr wrap="square">
-            <a:spAutoFit/>
-          </a:bodyPr>
-          <a:lstStyle/>
-          <a:p>
-            <a:r>
-              <a:rPr sz="1400" b="1">
-                <a:solidFill>
-                  <a:srgbClr val="E0A458"/>
-                </a:solidFill>
-                <a:latin typeface="Cambria"/>
-              </a:rPr>
-              <a:t>RQ1</a:t>
-            </a:r>
-          </a:p>
-        </p:txBody>
-      </p:sp>
-      <p:sp>
-        <p:nvSpPr>
-          <p:cNvPr id="11" name="TextBox 10"/>
-          <p:cNvSpPr txBox="1"/>
-          <p:nvPr/>
-        </p:nvSpPr>
-        <p:spPr>
-          <a:xfrm>
-            <a:off x="1874519" y="2610612"/>
-            <a:ext cx="3108960" cy="320040"/>
-          </a:xfrm>
-          <a:prstGeom prst="rect">
-            <a:avLst/>
-          </a:prstGeom>
-          <a:noFill/>
-        </p:spPr>
-        <p:txBody>
-          <a:bodyPr wrap="square">
-            <a:spAutoFit/>
-          </a:bodyPr>
-          <a:lstStyle/>
-          <a:p>
-            <a:r>
-              <a:rPr sz="1350" b="1">
-                <a:solidFill>
-                  <a:srgbClr val="FFFFFF"/>
-                </a:solidFill>
-                <a:latin typeface="Calibri"/>
-              </a:rPr>
-              <a:t>Taxonomy</a:t>
-            </a:r>
-          </a:p>
-        </p:txBody>
-      </p:sp>
-      <p:sp>
-        <p:nvSpPr>
-          <p:cNvPr id="12" name="TextBox 11"/>
-          <p:cNvSpPr txBox="1"/>
-          <p:nvPr/>
-        </p:nvSpPr>
-        <p:spPr>
-          <a:xfrm>
-            <a:off x="5120640" y="2610612"/>
-            <a:ext cx="6126480" cy="320040"/>
-          </a:xfrm>
-          <a:prstGeom prst="rect">
-            <a:avLst/>
-          </a:prstGeom>
-          <a:noFill/>
-        </p:spPr>
-        <p:txBody>
-          <a:bodyPr wrap="square">
-            <a:spAutoFit/>
-          </a:bodyPr>
-          <a:lstStyle/>
-          <a:p>
-            <a:r>
-              <a:rPr sz="1300" b="0">
-                <a:solidFill>
-                  <a:srgbClr val="CADCFC"/>
-                </a:solidFill>
-                <a:latin typeface="Calibri"/>
-              </a:rPr>
-              <a:t>60.5% of the cube is empty</a:t>
-            </a:r>
-          </a:p>
-        </p:txBody>
-      </p:sp>
-      <p:sp>
-        <p:nvSpPr>
-          <p:cNvPr id="13" name="Rectangle 12"/>
-          <p:cNvSpPr/>
-          <p:nvPr/>
-        </p:nvSpPr>
-        <p:spPr>
-          <a:xfrm>
-            <a:off x="640080" y="3026664"/>
-            <a:ext cx="10881360" cy="475488"/>
-          </a:xfrm>
-          <a:prstGeom prst="rect">
-            <a:avLst/>
-          </a:prstGeom>
-          <a:solidFill>
-            <a:srgbClr val="1B334F"/>
-          </a:solidFill>
-          <a:ln>
-            <a:noFill/>
-          </a:ln>
-          <a:effectLst/>
-        </p:spPr>
-        <p:style>
-          <a:lnRef idx="1">
-            <a:schemeClr val="accent1"/>
-          </a:lnRef>
-          <a:fillRef idx="3">
-            <a:schemeClr val="accent1"/>
-          </a:fillRef>
-          <a:effectRef idx="2">
-            <a:schemeClr val="accent1"/>
-          </a:effectRef>
-          <a:fontRef idx="minor">
-            <a:schemeClr val="lt1"/>
-          </a:fontRef>
-        </p:style>
-        <p:txBody>
-          <a:bodyPr rtlCol="0" anchor="ctr"/>
-          <a:lstStyle/>
-          <a:p>
-            <a:pPr algn="ctr"/>
-          </a:p>
-        </p:txBody>
-      </p:sp>
-      <p:sp>
-        <p:nvSpPr>
-          <p:cNvPr id="14" name="TextBox 13"/>
-          <p:cNvSpPr txBox="1"/>
-          <p:nvPr/>
-        </p:nvSpPr>
-        <p:spPr>
-          <a:xfrm>
-            <a:off x="868680" y="3099816"/>
-            <a:ext cx="1005840" cy="320040"/>
-          </a:xfrm>
-          <a:prstGeom prst="rect">
-            <a:avLst/>
-          </a:prstGeom>
-          <a:noFill/>
-        </p:spPr>
-        <p:txBody>
-          <a:bodyPr wrap="square">
-            <a:spAutoFit/>
-          </a:bodyPr>
-          <a:lstStyle/>
-          <a:p>
-            <a:r>
-              <a:rPr sz="1400" b="1">
-                <a:solidFill>
-                  <a:srgbClr val="E0A458"/>
-                </a:solidFill>
-                <a:latin typeface="Cambria"/>
-              </a:rPr>
-              <a:t>RQ2</a:t>
-            </a:r>
-          </a:p>
-        </p:txBody>
-      </p:sp>
-      <p:sp>
-        <p:nvSpPr>
-          <p:cNvPr id="15" name="TextBox 14"/>
-          <p:cNvSpPr txBox="1"/>
-          <p:nvPr/>
-        </p:nvSpPr>
-        <p:spPr>
-          <a:xfrm>
-            <a:off x="1874519" y="3108960"/>
-            <a:ext cx="3108960" cy="320040"/>
-          </a:xfrm>
-          <a:prstGeom prst="rect">
-            <a:avLst/>
-          </a:prstGeom>
-          <a:noFill/>
-        </p:spPr>
-        <p:txBody>
-          <a:bodyPr wrap="square">
-            <a:spAutoFit/>
-          </a:bodyPr>
-          <a:lstStyle/>
-          <a:p>
-            <a:r>
-              <a:rPr sz="1350" b="1">
-                <a:solidFill>
-                  <a:srgbClr val="FFFFFF"/>
-                </a:solidFill>
-                <a:latin typeface="Calibri"/>
-              </a:rPr>
-              <a:t>Cross-citation</a:t>
-            </a:r>
-          </a:p>
-        </p:txBody>
-      </p:sp>
-      <p:sp>
-        <p:nvSpPr>
-          <p:cNvPr id="16" name="TextBox 15"/>
-          <p:cNvSpPr txBox="1"/>
-          <p:nvPr/>
-        </p:nvSpPr>
-        <p:spPr>
-          <a:xfrm>
-            <a:off x="5120640" y="3108960"/>
-            <a:ext cx="6126480" cy="320040"/>
-          </a:xfrm>
-          <a:prstGeom prst="rect">
-            <a:avLst/>
-          </a:prstGeom>
-          <a:noFill/>
-        </p:spPr>
-        <p:txBody>
-          <a:bodyPr wrap="square">
-            <a:spAutoFit/>
-          </a:bodyPr>
-          <a:lstStyle/>
-          <a:p>
-            <a:r>
-              <a:rPr sz="1300" b="0">
-                <a:solidFill>
-                  <a:srgbClr val="CADCFC"/>
-                </a:solidFill>
-                <a:latin typeface="Calibri"/>
-              </a:rPr>
-              <a:t>11.7% / 9.1% between tracks</a:t>
-            </a:r>
-          </a:p>
-        </p:txBody>
-      </p:sp>
-      <p:sp>
-        <p:nvSpPr>
-          <p:cNvPr id="17" name="Rectangle 16"/>
-          <p:cNvSpPr/>
-          <p:nvPr/>
-        </p:nvSpPr>
-        <p:spPr>
-          <a:xfrm>
-            <a:off x="640080" y="3525012"/>
-            <a:ext cx="10881360" cy="475488"/>
-          </a:xfrm>
-          <a:prstGeom prst="rect">
-            <a:avLst/>
-          </a:prstGeom>
-          <a:solidFill>
-            <a:srgbClr val="1B334F"/>
-          </a:solidFill>
-          <a:ln>
-            <a:noFill/>
-          </a:ln>
-          <a:effectLst/>
-        </p:spPr>
-        <p:style>
-          <a:lnRef idx="1">
-            <a:schemeClr val="accent1"/>
-          </a:lnRef>
-          <a:fillRef idx="3">
-            <a:schemeClr val="accent1"/>
-          </a:fillRef>
-          <a:effectRef idx="2">
-            <a:schemeClr val="accent1"/>
-          </a:effectRef>
-          <a:fontRef idx="minor">
-            <a:schemeClr val="lt1"/>
-          </a:fontRef>
-        </p:style>
-        <p:txBody>
-          <a:bodyPr rtlCol="0" anchor="ctr"/>
-          <a:lstStyle/>
-          <a:p>
-            <a:pPr algn="ctr"/>
-          </a:p>
-        </p:txBody>
-      </p:sp>
-      <p:sp>
-        <p:nvSpPr>
-          <p:cNvPr id="18" name="TextBox 17"/>
-          <p:cNvSpPr txBox="1"/>
-          <p:nvPr/>
-        </p:nvSpPr>
-        <p:spPr>
-          <a:xfrm>
-            <a:off x="868680" y="3598164"/>
-            <a:ext cx="1005840" cy="320040"/>
-          </a:xfrm>
-          <a:prstGeom prst="rect">
-            <a:avLst/>
-          </a:prstGeom>
-          <a:noFill/>
-        </p:spPr>
-        <p:txBody>
-          <a:bodyPr wrap="square">
-            <a:spAutoFit/>
-          </a:bodyPr>
-          <a:lstStyle/>
-          <a:p>
-            <a:r>
-              <a:rPr sz="1400" b="1">
-                <a:solidFill>
-                  <a:srgbClr val="E0A458"/>
-                </a:solidFill>
-                <a:latin typeface="Cambria"/>
-              </a:rPr>
-              <a:t>RQ3</a:t>
-            </a:r>
-          </a:p>
-        </p:txBody>
-      </p:sp>
-      <p:sp>
-        <p:nvSpPr>
-          <p:cNvPr id="19" name="TextBox 18"/>
-          <p:cNvSpPr txBox="1"/>
-          <p:nvPr/>
-        </p:nvSpPr>
-        <p:spPr>
-          <a:xfrm>
-            <a:off x="1874519" y="3607308"/>
-            <a:ext cx="3108960" cy="320040"/>
-          </a:xfrm>
-          <a:prstGeom prst="rect">
-            <a:avLst/>
-          </a:prstGeom>
-          <a:noFill/>
-        </p:spPr>
-        <p:txBody>
-          <a:bodyPr wrap="square">
-            <a:spAutoFit/>
-          </a:bodyPr>
-          <a:lstStyle/>
-          <a:p>
-            <a:r>
-              <a:rPr sz="1350" b="1">
-                <a:solidFill>
-                  <a:srgbClr val="FFFFFF"/>
-                </a:solidFill>
-                <a:latin typeface="Calibri"/>
-              </a:rPr>
-              <a:t>Pollution census</a:t>
-            </a:r>
-          </a:p>
-        </p:txBody>
-      </p:sp>
-      <p:sp>
-        <p:nvSpPr>
-          <p:cNvPr id="20" name="TextBox 19"/>
-          <p:cNvSpPr txBox="1"/>
-          <p:nvPr/>
-        </p:nvSpPr>
-        <p:spPr>
-          <a:xfrm>
-            <a:off x="5120640" y="3607308"/>
-            <a:ext cx="6126480" cy="320040"/>
-          </a:xfrm>
-          <a:prstGeom prst="rect">
-            <a:avLst/>
-          </a:prstGeom>
-          <a:noFill/>
-        </p:spPr>
-        <p:txBody>
-          <a:bodyPr wrap="square">
-            <a:spAutoFit/>
-          </a:bodyPr>
-          <a:lstStyle/>
-          <a:p>
-            <a:r>
-              <a:rPr sz="1300" b="0">
-                <a:solidFill>
-                  <a:srgbClr val="CADCFC"/>
-                </a:solidFill>
-                <a:latin typeface="Calibri"/>
-              </a:rPr>
-              <a:t>223 named mechanisms</a:t>
-            </a:r>
-          </a:p>
-        </p:txBody>
-      </p:sp>
-      <p:sp>
-        <p:nvSpPr>
-          <p:cNvPr id="21" name="Rectangle 20"/>
-          <p:cNvSpPr/>
-          <p:nvPr/>
-        </p:nvSpPr>
-        <p:spPr>
-          <a:xfrm>
-            <a:off x="640080" y="4023360"/>
-            <a:ext cx="10881360" cy="475488"/>
-          </a:xfrm>
-          <a:prstGeom prst="rect">
-            <a:avLst/>
-          </a:prstGeom>
-          <a:solidFill>
-            <a:srgbClr val="1B334F"/>
-          </a:solidFill>
-          <a:ln>
-            <a:noFill/>
-          </a:ln>
-          <a:effectLst/>
-        </p:spPr>
-        <p:style>
-          <a:lnRef idx="1">
-            <a:schemeClr val="accent1"/>
-          </a:lnRef>
-          <a:fillRef idx="3">
-            <a:schemeClr val="accent1"/>
-          </a:fillRef>
-          <a:effectRef idx="2">
-            <a:schemeClr val="accent1"/>
-          </a:effectRef>
-          <a:fontRef idx="minor">
-            <a:schemeClr val="lt1"/>
-          </a:fontRef>
-        </p:style>
-        <p:txBody>
-          <a:bodyPr rtlCol="0" anchor="ctr"/>
-          <a:lstStyle/>
-          <a:p>
-            <a:pPr algn="ctr"/>
-          </a:p>
-        </p:txBody>
-      </p:sp>
-      <p:sp>
-        <p:nvSpPr>
-          <p:cNvPr id="22" name="TextBox 21"/>
-          <p:cNvSpPr txBox="1"/>
-          <p:nvPr/>
-        </p:nvSpPr>
-        <p:spPr>
-          <a:xfrm>
-            <a:off x="868680" y="4096512"/>
-            <a:ext cx="1005840" cy="320040"/>
-          </a:xfrm>
-          <a:prstGeom prst="rect">
-            <a:avLst/>
-          </a:prstGeom>
-          <a:noFill/>
-        </p:spPr>
-        <p:txBody>
-          <a:bodyPr wrap="square">
-            <a:spAutoFit/>
-          </a:bodyPr>
-          <a:lstStyle/>
-          <a:p>
-            <a:r>
-              <a:rPr sz="1400" b="1">
-                <a:solidFill>
-                  <a:srgbClr val="E0A458"/>
-                </a:solidFill>
-                <a:latin typeface="Cambria"/>
-              </a:rPr>
-              <a:t>RQ4</a:t>
-            </a:r>
-          </a:p>
-        </p:txBody>
-      </p:sp>
-      <p:sp>
-        <p:nvSpPr>
-          <p:cNvPr id="23" name="TextBox 22"/>
-          <p:cNvSpPr txBox="1"/>
-          <p:nvPr/>
-        </p:nvSpPr>
-        <p:spPr>
-          <a:xfrm>
-            <a:off x="1874519" y="4105656"/>
-            <a:ext cx="3108960" cy="320040"/>
-          </a:xfrm>
-          <a:prstGeom prst="rect">
-            <a:avLst/>
-          </a:prstGeom>
-          <a:noFill/>
-        </p:spPr>
-        <p:txBody>
-          <a:bodyPr wrap="square">
-            <a:spAutoFit/>
-          </a:bodyPr>
-          <a:lstStyle/>
-          <a:p>
-            <a:r>
-              <a:rPr sz="1350" b="1">
-                <a:solidFill>
-                  <a:srgbClr val="FFFFFF"/>
-                </a:solidFill>
-                <a:latin typeface="Calibri"/>
-              </a:rPr>
-              <a:t>Defense census</a:t>
-            </a:r>
-          </a:p>
-        </p:txBody>
-      </p:sp>
-      <p:sp>
-        <p:nvSpPr>
-          <p:cNvPr id="24" name="TextBox 23"/>
-          <p:cNvSpPr txBox="1"/>
-          <p:nvPr/>
-        </p:nvSpPr>
-        <p:spPr>
-          <a:xfrm>
-            <a:off x="5120640" y="4105656"/>
-            <a:ext cx="6126480" cy="320040"/>
-          </a:xfrm>
-          <a:prstGeom prst="rect">
-            <a:avLst/>
-          </a:prstGeom>
-          <a:noFill/>
-        </p:spPr>
-        <p:txBody>
-          <a:bodyPr wrap="square">
-            <a:spAutoFit/>
-          </a:bodyPr>
-          <a:lstStyle/>
-          <a:p>
-            <a:r>
-              <a:rPr sz="1300" b="0">
-                <a:solidFill>
-                  <a:srgbClr val="CADCFC"/>
-                </a:solidFill>
-                <a:latin typeface="Calibri"/>
-              </a:rPr>
-              <a:t>534 named defenses</a:t>
-            </a:r>
-          </a:p>
-        </p:txBody>
-      </p:sp>
-      <p:sp>
-        <p:nvSpPr>
-          <p:cNvPr id="25" name="Rectangle 24"/>
-          <p:cNvSpPr/>
-          <p:nvPr/>
-        </p:nvSpPr>
-        <p:spPr>
-          <a:xfrm>
-            <a:off x="640080" y="4521708"/>
-            <a:ext cx="10881360" cy="475488"/>
-          </a:xfrm>
-          <a:prstGeom prst="rect">
-            <a:avLst/>
-          </a:prstGeom>
-          <a:solidFill>
-            <a:srgbClr val="1B334F"/>
-          </a:solidFill>
-          <a:ln>
-            <a:noFill/>
-          </a:ln>
-          <a:effectLst/>
-        </p:spPr>
-        <p:style>
-          <a:lnRef idx="1">
-            <a:schemeClr val="accent1"/>
-          </a:lnRef>
-          <a:fillRef idx="3">
-            <a:schemeClr val="accent1"/>
-          </a:fillRef>
-          <a:effectRef idx="2">
-            <a:schemeClr val="accent1"/>
-          </a:effectRef>
-          <a:fontRef idx="minor">
-            <a:schemeClr val="lt1"/>
-          </a:fontRef>
-        </p:style>
-        <p:txBody>
-          <a:bodyPr rtlCol="0" anchor="ctr"/>
-          <a:lstStyle/>
-          <a:p>
-            <a:pPr algn="ctr"/>
-          </a:p>
-        </p:txBody>
-      </p:sp>
-      <p:sp>
-        <p:nvSpPr>
-          <p:cNvPr id="26" name="TextBox 25"/>
-          <p:cNvSpPr txBox="1"/>
-          <p:nvPr/>
-        </p:nvSpPr>
-        <p:spPr>
-          <a:xfrm>
-            <a:off x="868680" y="4594860"/>
-            <a:ext cx="1005840" cy="320040"/>
-          </a:xfrm>
-          <a:prstGeom prst="rect">
-            <a:avLst/>
-          </a:prstGeom>
-          <a:noFill/>
-        </p:spPr>
-        <p:txBody>
-          <a:bodyPr wrap="square">
-            <a:spAutoFit/>
-          </a:bodyPr>
-          <a:lstStyle/>
-          <a:p>
-            <a:r>
-              <a:rPr sz="1400" b="1">
-                <a:solidFill>
-                  <a:srgbClr val="E0A458"/>
-                </a:solidFill>
-                <a:latin typeface="Cambria"/>
-              </a:rPr>
-              <a:t>RQ5</a:t>
-            </a:r>
-          </a:p>
-        </p:txBody>
-      </p:sp>
-      <p:sp>
-        <p:nvSpPr>
-          <p:cNvPr id="27" name="TextBox 26"/>
-          <p:cNvSpPr txBox="1"/>
-          <p:nvPr/>
-        </p:nvSpPr>
-        <p:spPr>
-          <a:xfrm>
-            <a:off x="1874519" y="4604004"/>
-            <a:ext cx="3108960" cy="320040"/>
-          </a:xfrm>
-          <a:prstGeom prst="rect">
-            <a:avLst/>
-          </a:prstGeom>
-          <a:noFill/>
-        </p:spPr>
-        <p:txBody>
-          <a:bodyPr wrap="square">
-            <a:spAutoFit/>
-          </a:bodyPr>
-          <a:lstStyle/>
-          <a:p>
-            <a:r>
-              <a:rPr sz="1350" b="1">
-                <a:solidFill>
-                  <a:srgbClr val="FFFFFF"/>
-                </a:solidFill>
-                <a:latin typeface="Calibri"/>
-              </a:rPr>
-              <a:t>Coverage matrix</a:t>
-            </a:r>
-          </a:p>
-        </p:txBody>
-      </p:sp>
-      <p:sp>
-        <p:nvSpPr>
-          <p:cNvPr id="28" name="TextBox 27"/>
-          <p:cNvSpPr txBox="1"/>
-          <p:nvPr/>
-        </p:nvSpPr>
-        <p:spPr>
-          <a:xfrm>
-            <a:off x="5120640" y="4604004"/>
-            <a:ext cx="6126480" cy="320040"/>
-          </a:xfrm>
-          <a:prstGeom prst="rect">
-            <a:avLst/>
-          </a:prstGeom>
-          <a:noFill/>
-        </p:spPr>
-        <p:txBody>
-          <a:bodyPr wrap="square">
-            <a:spAutoFit/>
-          </a:bodyPr>
-          <a:lstStyle/>
-          <a:p>
-            <a:r>
-              <a:rPr sz="1300" b="0">
-                <a:solidFill>
-                  <a:srgbClr val="CADCFC"/>
-                </a:solidFill>
-                <a:latin typeface="Calibri"/>
-              </a:rPr>
-              <a:t>119 mechanisms never defended</a:t>
-            </a:r>
-          </a:p>
-        </p:txBody>
-      </p:sp>
-      <p:sp>
-        <p:nvSpPr>
-          <p:cNvPr id="29" name="Rectangle 28"/>
-          <p:cNvSpPr/>
-          <p:nvPr/>
-        </p:nvSpPr>
-        <p:spPr>
-          <a:xfrm>
-            <a:off x="640080" y="5020056"/>
-            <a:ext cx="10881360" cy="475488"/>
-          </a:xfrm>
-          <a:prstGeom prst="rect">
-            <a:avLst/>
-          </a:prstGeom>
-          <a:solidFill>
-            <a:srgbClr val="1B334F"/>
-          </a:solidFill>
-          <a:ln>
-            <a:noFill/>
-          </a:ln>
-          <a:effectLst/>
-        </p:spPr>
-        <p:style>
-          <a:lnRef idx="1">
-            <a:schemeClr val="accent1"/>
-          </a:lnRef>
-          <a:fillRef idx="3">
-            <a:schemeClr val="accent1"/>
-          </a:fillRef>
-          <a:effectRef idx="2">
-            <a:schemeClr val="accent1"/>
-          </a:effectRef>
-          <a:fontRef idx="minor">
-            <a:schemeClr val="lt1"/>
-          </a:fontRef>
-        </p:style>
-        <p:txBody>
-          <a:bodyPr rtlCol="0" anchor="ctr"/>
-          <a:lstStyle/>
-          <a:p>
-            <a:pPr algn="ctr"/>
-          </a:p>
-        </p:txBody>
-      </p:sp>
-      <p:sp>
-        <p:nvSpPr>
-          <p:cNvPr id="30" name="TextBox 29"/>
-          <p:cNvSpPr txBox="1"/>
-          <p:nvPr/>
-        </p:nvSpPr>
-        <p:spPr>
-          <a:xfrm>
-            <a:off x="868680" y="5093208"/>
-            <a:ext cx="1005840" cy="320040"/>
-          </a:xfrm>
-          <a:prstGeom prst="rect">
-            <a:avLst/>
-          </a:prstGeom>
-          <a:noFill/>
-        </p:spPr>
-        <p:txBody>
-          <a:bodyPr wrap="square">
-            <a:spAutoFit/>
-          </a:bodyPr>
-          <a:lstStyle/>
-          <a:p>
-            <a:r>
-              <a:rPr sz="1400" b="1">
-                <a:solidFill>
-                  <a:srgbClr val="E0A458"/>
-                </a:solidFill>
-                <a:latin typeface="Cambria"/>
-              </a:rPr>
-              <a:t>RQ6</a:t>
-            </a:r>
-          </a:p>
-        </p:txBody>
-      </p:sp>
-      <p:sp>
-        <p:nvSpPr>
-          <p:cNvPr id="31" name="TextBox 30"/>
-          <p:cNvSpPr txBox="1"/>
-          <p:nvPr/>
-        </p:nvSpPr>
-        <p:spPr>
-          <a:xfrm>
-            <a:off x="1874519" y="5102352"/>
-            <a:ext cx="3108960" cy="320040"/>
-          </a:xfrm>
-          <a:prstGeom prst="rect">
-            <a:avLst/>
-          </a:prstGeom>
-          <a:noFill/>
-        </p:spPr>
-        <p:txBody>
-          <a:bodyPr wrap="square">
-            <a:spAutoFit/>
-          </a:bodyPr>
-          <a:lstStyle/>
-          <a:p>
-            <a:r>
-              <a:rPr sz="1350" b="1">
-                <a:solidFill>
-                  <a:srgbClr val="FFFFFF"/>
-                </a:solidFill>
-                <a:latin typeface="Calibri"/>
-              </a:rPr>
-              <a:t>Generalization</a:t>
-            </a:r>
-          </a:p>
-        </p:txBody>
-      </p:sp>
-      <p:sp>
-        <p:nvSpPr>
-          <p:cNvPr id="32" name="TextBox 31"/>
-          <p:cNvSpPr txBox="1"/>
-          <p:nvPr/>
-        </p:nvSpPr>
-        <p:spPr>
-          <a:xfrm>
-            <a:off x="5120640" y="5102352"/>
-            <a:ext cx="6126480" cy="320040"/>
-          </a:xfrm>
-          <a:prstGeom prst="rect">
-            <a:avLst/>
-          </a:prstGeom>
-          <a:noFill/>
-        </p:spPr>
-        <p:txBody>
-          <a:bodyPr wrap="square">
-            <a:spAutoFit/>
-          </a:bodyPr>
-          <a:lstStyle/>
-          <a:p>
-            <a:r>
-              <a:rPr sz="1300" b="0">
-                <a:solidFill>
-                  <a:srgbClr val="CADCFC"/>
-                </a:solidFill>
-                <a:latin typeface="Calibri"/>
-              </a:rPr>
-              <a:t>9 reconstructed case studies</a:t>
-            </a:r>
-          </a:p>
-        </p:txBody>
-      </p:sp>
-      <p:sp>
-        <p:nvSpPr>
-          <p:cNvPr id="33" name="Rectangle 32"/>
-          <p:cNvSpPr/>
-          <p:nvPr/>
-        </p:nvSpPr>
-        <p:spPr>
-          <a:xfrm>
-            <a:off x="640080" y="5518404"/>
-            <a:ext cx="10881360" cy="475488"/>
-          </a:xfrm>
-          <a:prstGeom prst="rect">
-            <a:avLst/>
-          </a:prstGeom>
-          <a:solidFill>
-            <a:srgbClr val="1B334F"/>
-          </a:solidFill>
-          <a:ln>
-            <a:noFill/>
-          </a:ln>
-          <a:effectLst/>
-        </p:spPr>
-        <p:style>
-          <a:lnRef idx="1">
-            <a:schemeClr val="accent1"/>
-          </a:lnRef>
-          <a:fillRef idx="3">
-            <a:schemeClr val="accent1"/>
-          </a:fillRef>
-          <a:effectRef idx="2">
-            <a:schemeClr val="accent1"/>
-          </a:effectRef>
-          <a:fontRef idx="minor">
-            <a:schemeClr val="lt1"/>
-          </a:fontRef>
-        </p:style>
-        <p:txBody>
-          <a:bodyPr rtlCol="0" anchor="ctr"/>
-          <a:lstStyle/>
-          <a:p>
-            <a:pPr algn="ctr"/>
-          </a:p>
-        </p:txBody>
-      </p:sp>
-      <p:sp>
-        <p:nvSpPr>
-          <p:cNvPr id="34" name="TextBox 33"/>
-          <p:cNvSpPr txBox="1"/>
-          <p:nvPr/>
-        </p:nvSpPr>
-        <p:spPr>
-          <a:xfrm>
-            <a:off x="868680" y="5591556"/>
-            <a:ext cx="1005840" cy="320040"/>
-          </a:xfrm>
-          <a:prstGeom prst="rect">
-            <a:avLst/>
-          </a:prstGeom>
-          <a:noFill/>
-        </p:spPr>
-        <p:txBody>
-          <a:bodyPr wrap="square">
-            <a:spAutoFit/>
-          </a:bodyPr>
-          <a:lstStyle/>
-          <a:p>
-            <a:r>
-              <a:rPr sz="1400" b="1">
-                <a:solidFill>
-                  <a:srgbClr val="E0A458"/>
-                </a:solidFill>
-                <a:latin typeface="Cambria"/>
-              </a:rPr>
-              <a:t>RQ7</a:t>
-            </a:r>
-          </a:p>
-        </p:txBody>
-      </p:sp>
-      <p:sp>
-        <p:nvSpPr>
-          <p:cNvPr id="35" name="TextBox 34"/>
-          <p:cNvSpPr txBox="1"/>
-          <p:nvPr/>
-        </p:nvSpPr>
-        <p:spPr>
-          <a:xfrm>
-            <a:off x="1874519" y="5600700"/>
-            <a:ext cx="3108960" cy="320040"/>
-          </a:xfrm>
-          <a:prstGeom prst="rect">
-            <a:avLst/>
-          </a:prstGeom>
-          <a:noFill/>
-        </p:spPr>
-        <p:txBody>
-          <a:bodyPr wrap="square">
-            <a:spAutoFit/>
-          </a:bodyPr>
-          <a:lstStyle/>
-          <a:p>
-            <a:r>
-              <a:rPr sz="1350" b="1">
-                <a:solidFill>
-                  <a:srgbClr val="FFFFFF"/>
-                </a:solidFill>
-                <a:latin typeface="Calibri"/>
-              </a:rPr>
-              <a:t>Open problems</a:t>
-            </a:r>
-          </a:p>
-        </p:txBody>
-      </p:sp>
-      <p:sp>
-        <p:nvSpPr>
-          <p:cNvPr id="36" name="TextBox 35"/>
-          <p:cNvSpPr txBox="1"/>
-          <p:nvPr/>
-        </p:nvSpPr>
-        <p:spPr>
-          <a:xfrm>
-            <a:off x="5120640" y="5600700"/>
-            <a:ext cx="6126480" cy="320040"/>
-          </a:xfrm>
-          <a:prstGeom prst="rect">
-            <a:avLst/>
-          </a:prstGeom>
-          <a:noFill/>
-        </p:spPr>
-        <p:txBody>
-          <a:bodyPr wrap="square">
-            <a:spAutoFit/>
-          </a:bodyPr>
-          <a:lstStyle/>
-          <a:p>
-            <a:r>
-              <a:rPr sz="1300" b="0">
-                <a:solidFill>
-                  <a:srgbClr val="CADCFC"/>
-                </a:solidFill>
-                <a:latin typeface="Calibri"/>
-              </a:rPr>
-              <a:t>7 ranked, falsifiable</a:t>
-            </a:r>
-          </a:p>
-        </p:txBody>
-      </p:sp>
-      <p:sp>
-        <p:nvSpPr>
-          <p:cNvPr id="37" name="Rectangle 36"/>
-          <p:cNvSpPr/>
-          <p:nvPr/>
-        </p:nvSpPr>
-        <p:spPr>
-          <a:xfrm>
-            <a:off x="640080" y="6016752"/>
-            <a:ext cx="10881360" cy="475488"/>
-          </a:xfrm>
-          <a:prstGeom prst="rect">
-            <a:avLst/>
-          </a:prstGeom>
-          <a:solidFill>
-            <a:srgbClr val="1B334F"/>
-          </a:solidFill>
-          <a:ln>
-            <a:noFill/>
-          </a:ln>
-          <a:effectLst/>
-        </p:spPr>
-        <p:style>
-          <a:lnRef idx="1">
-            <a:schemeClr val="accent1"/>
-          </a:lnRef>
-          <a:fillRef idx="3">
-            <a:schemeClr val="accent1"/>
-          </a:fillRef>
-          <a:effectRef idx="2">
-            <a:schemeClr val="accent1"/>
-          </a:effectRef>
-          <a:fontRef idx="minor">
-            <a:schemeClr val="lt1"/>
-          </a:fontRef>
-        </p:style>
-        <p:txBody>
-          <a:bodyPr rtlCol="0" anchor="ctr"/>
-          <a:lstStyle/>
-          <a:p>
-            <a:pPr algn="ctr"/>
-          </a:p>
-        </p:txBody>
-      </p:sp>
-      <p:sp>
-        <p:nvSpPr>
-          <p:cNvPr id="38" name="TextBox 37"/>
-          <p:cNvSpPr txBox="1"/>
-          <p:nvPr/>
-        </p:nvSpPr>
-        <p:spPr>
-          <a:xfrm>
-            <a:off x="868680" y="6089904"/>
-            <a:ext cx="1005840" cy="320040"/>
-          </a:xfrm>
-          <a:prstGeom prst="rect">
-            <a:avLst/>
-          </a:prstGeom>
-          <a:noFill/>
-        </p:spPr>
-        <p:txBody>
-          <a:bodyPr wrap="square">
-            <a:spAutoFit/>
-          </a:bodyPr>
-          <a:lstStyle/>
-          <a:p>
-            <a:r>
-              <a:rPr sz="1400" b="1">
-                <a:solidFill>
-                  <a:srgbClr val="E0A458"/>
-                </a:solidFill>
-                <a:latin typeface="Cambria"/>
-              </a:rPr>
-              <a:t>NEW</a:t>
-            </a:r>
-          </a:p>
-        </p:txBody>
-      </p:sp>
-      <p:sp>
-        <p:nvSpPr>
-          <p:cNvPr id="39" name="TextBox 38"/>
-          <p:cNvSpPr txBox="1"/>
-          <p:nvPr/>
-        </p:nvSpPr>
-        <p:spPr>
-          <a:xfrm>
-            <a:off x="1874519" y="6099048"/>
-            <a:ext cx="3108960" cy="320040"/>
-          </a:xfrm>
-          <a:prstGeom prst="rect">
-            <a:avLst/>
-          </a:prstGeom>
-          <a:noFill/>
-        </p:spPr>
-        <p:txBody>
-          <a:bodyPr wrap="square">
-            <a:spAutoFit/>
-          </a:bodyPr>
-          <a:lstStyle/>
-          <a:p>
-            <a:r>
-              <a:rPr sz="1350" b="1">
-                <a:solidFill>
-                  <a:srgbClr val="FFFFFF"/>
-                </a:solidFill>
-                <a:latin typeface="Calibri"/>
-              </a:rPr>
-              <a:t>Transfer matrix</a:t>
-            </a:r>
-          </a:p>
-        </p:txBody>
-      </p:sp>
-      <p:sp>
-        <p:nvSpPr>
-          <p:cNvPr id="40" name="TextBox 39"/>
-          <p:cNvSpPr txBox="1"/>
-          <p:nvPr/>
-        </p:nvSpPr>
-        <p:spPr>
-          <a:xfrm>
-            <a:off x="5120640" y="6099048"/>
-            <a:ext cx="6126480" cy="320040"/>
-          </a:xfrm>
-          <a:prstGeom prst="rect">
-            <a:avLst/>
-          </a:prstGeom>
-          <a:noFill/>
-        </p:spPr>
-        <p:txBody>
-          <a:bodyPr wrap="square">
-            <a:spAutoFit/>
-          </a:bodyPr>
-          <a:lstStyle/>
-          <a:p>
-            <a:r>
-              <a:rPr sz="1300" b="0">
-                <a:solidFill>
-                  <a:srgbClr val="CADCFC"/>
-                </a:solidFill>
-                <a:latin typeface="Calibri"/>
-              </a:rPr>
-              <a:t>16 cells that no paper reports</a:t>
+            <a:off x="640080" y="5897880"/>
+            <a:ext cx="10881360" cy="457200"/>
+          </a:xfrm>
+          <a:prstGeom prst="rect">
+            <a:avLst/>
+          </a:prstGeom>
+          <a:noFill/>
+        </p:spPr>
+        <p:txBody>
+          <a:bodyPr wrap="square">
+            <a:spAutoFit/>
+          </a:bodyPr>
+          <a:lstStyle/>
+          <a:p>
+            <a:r>
+              <a:rPr sz="1250" b="0">
+                <a:solidFill>
+                  <a:srgbClr val="CFE8EF"/>
+                </a:solidFill>
+                <a:latin typeface="Calibri"/>
+              </a:rPr>
+              <a:t>We do not study training data. We study what enters the context at run time.</a:t>
+            </a:r>
+          </a:p>
+        </p:txBody>
+      </p:sp>
+      <p:sp>
+        <p:nvSpPr>
+          <p:cNvPr id="9" name="TextBox 8"/>
+          <p:cNvSpPr txBox="1"/>
+          <p:nvPr/>
+        </p:nvSpPr>
+        <p:spPr>
+          <a:xfrm>
+            <a:off x="640080" y="6419088"/>
+            <a:ext cx="10789920" cy="402336"/>
+          </a:xfrm>
+          <a:prstGeom prst="rect">
+            <a:avLst/>
+          </a:prstGeom>
+          <a:noFill/>
+        </p:spPr>
+        <p:txBody>
+          <a:bodyPr wrap="square">
+            <a:spAutoFit/>
+          </a:bodyPr>
+          <a:lstStyle/>
+          <a:p>
+            <a:r>
+              <a:rPr sz="850" b="0">
+                <a:solidFill>
+                  <a:srgbClr val="5B6B79"/>
+                </a:solidFill>
+                <a:latin typeface="Calibri"/>
+              </a:rPr>
+              <a:t>Sources:  Context text acts on the agent: Greshake et al., AISec@CCS 2023, arXiv:2302.12173   ·   Long context degrades use: Liu et al., TACL 2023, arXiv:2307.03172   ·   Pond framing: this work</a:t>
             </a:r>
           </a:p>
         </p:txBody>
@@ -13895,7 +12851,41 @@
         </p:nvSpPr>
         <p:spPr>
           <a:xfrm>
-            <a:off x="640080" y="5897880"/>
+            <a:off x="640080" y="6419088"/>
+            <a:ext cx="10789920" cy="402336"/>
+          </a:xfrm>
+          <a:prstGeom prst="rect">
+            <a:avLst/>
+          </a:prstGeom>
+          <a:noFill/>
+        </p:spPr>
+        <p:txBody>
+          <a:bodyPr wrap="square">
+            <a:spAutoFit/>
+          </a:bodyPr>
+          <a:lstStyle/>
+          <a:p>
+            <a:r>
+              <a:rPr sz="850" b="0">
+                <a:solidFill>
+                  <a:srgbClr val="5B6B79"/>
+                </a:solidFill>
+                <a:latin typeface="Calibri"/>
+              </a:rPr>
+              <a:t>Sources:  PoisonedRAG Zou et al., USENIX Security 2024, arXiv:2402.07867   ·   BadRAG Xue et al., 2024, arXiv:2406.00083   ·   RobustRAG Xiang et al., 2024, arXiv:2405.15556   ·   ParamMute Huang et al., NeurIPS 2025, arXiv:2502.15543</a:t>
+            </a:r>
+          </a:p>
+        </p:txBody>
+      </p:sp>
+      <p:sp>
+        <p:nvSpPr>
+          <p:cNvPr id="11" name="TextBox 10"/>
+          <p:cNvSpPr txBox="1"/>
+          <p:nvPr/>
+        </p:nvSpPr>
+        <p:spPr>
+          <a:xfrm>
+            <a:off x="640080" y="5806440"/>
             <a:ext cx="10881360" cy="822960"/>
           </a:xfrm>
           <a:prstGeom prst="rect">
@@ -14638,6 +13628,40 @@
           </a:p>
         </p:txBody>
       </p:sp>
+      <p:sp>
+        <p:nvSpPr>
+          <p:cNvPr id="16" name="TextBox 15"/>
+          <p:cNvSpPr txBox="1"/>
+          <p:nvPr/>
+        </p:nvSpPr>
+        <p:spPr>
+          <a:xfrm>
+            <a:off x="640080" y="6419088"/>
+            <a:ext cx="10789920" cy="402336"/>
+          </a:xfrm>
+          <a:prstGeom prst="rect">
+            <a:avLst/>
+          </a:prstGeom>
+          <a:noFill/>
+        </p:spPr>
+        <p:txBody>
+          <a:bodyPr wrap="square">
+            <a:spAutoFit/>
+          </a:bodyPr>
+          <a:lstStyle/>
+          <a:p>
+            <a:r>
+              <a:rPr sz="850" b="0">
+                <a:solidFill>
+                  <a:srgbClr val="5B6B79"/>
+                </a:solidFill>
+                <a:latin typeface="Calibri"/>
+              </a:rPr>
+              <a:t>Sources:  ParamMute Huang et al., NeurIPS 2025, arXiv:2502.15543   ·   RobustRAG Xiang et al., 2024, arXiv:2405.15556   ·   PoisonedRAG Zou et al., USENIX Security 2024, arXiv:2402.07867   ·   BadRAG Xue et al., 2024, arXiv:2406.00083   ·   all numbers: our runs</a:t>
+            </a:r>
+          </a:p>
+        </p:txBody>
+      </p:sp>
     </p:spTree>
   </p:cSld>
   <p:clrMapOvr>
@@ -16098,6 +15122,40 @@
           </a:p>
         </p:txBody>
       </p:sp>
+      <p:sp>
+        <p:nvSpPr>
+          <p:cNvPr id="41" name="TextBox 40"/>
+          <p:cNvSpPr txBox="1"/>
+          <p:nvPr/>
+        </p:nvSpPr>
+        <p:spPr>
+          <a:xfrm>
+            <a:off x="640080" y="6419088"/>
+            <a:ext cx="10789920" cy="402336"/>
+          </a:xfrm>
+          <a:prstGeom prst="rect">
+            <a:avLst/>
+          </a:prstGeom>
+          <a:noFill/>
+        </p:spPr>
+        <p:txBody>
+          <a:bodyPr wrap="square">
+            <a:spAutoFit/>
+          </a:bodyPr>
+          <a:lstStyle/>
+          <a:p>
+            <a:r>
+              <a:rPr sz="850" b="0">
+                <a:solidFill>
+                  <a:srgbClr val="5B6B79"/>
+                </a:solidFill>
+                <a:latin typeface="Calibri"/>
+              </a:rPr>
+              <a:t>Sources:  BadRAG Selective-Fact and DoS Xue et al., 2024, arXiv:2406.00083   ·   RobustRAG Xiang et al., 2024, arXiv:2405.15556   ·   ParamMute Huang et al., NeurIPS 2025, arXiv:2502.15543   ·   all numbers: our runs</a:t>
+            </a:r>
+          </a:p>
+        </p:txBody>
+      </p:sp>
     </p:spTree>
   </p:cSld>
   <p:clrMapOvr>
@@ -17600,6 +16658,40 @@
           </a:p>
         </p:txBody>
       </p:sp>
+      <p:sp>
+        <p:nvSpPr>
+          <p:cNvPr id="42" name="TextBox 41"/>
+          <p:cNvSpPr txBox="1"/>
+          <p:nvPr/>
+        </p:nvSpPr>
+        <p:spPr>
+          <a:xfrm>
+            <a:off x="640080" y="6419088"/>
+            <a:ext cx="10789920" cy="402336"/>
+          </a:xfrm>
+          <a:prstGeom prst="rect">
+            <a:avLst/>
+          </a:prstGeom>
+          <a:noFill/>
+        </p:spPr>
+        <p:txBody>
+          <a:bodyPr wrap="square">
+            <a:spAutoFit/>
+          </a:bodyPr>
+          <a:lstStyle/>
+          <a:p>
+            <a:r>
+              <a:rPr sz="850" b="0">
+                <a:solidFill>
+                  <a:srgbClr val="5B6B79"/>
+                </a:solidFill>
+                <a:latin typeface="Calibri"/>
+              </a:rPr>
+              <a:t>Sources:  KeywordAgg and DecodingAgg both ship in Xiang et al., 2024, arXiv:2405.15556   ·   BadRAG DoS Xue et al., 2024, arXiv:2406.00083   ·   all numbers: our runs</a:t>
+            </a:r>
+          </a:p>
+        </p:txBody>
+      </p:sp>
     </p:spTree>
   </p:cSld>
   <p:clrMapOvr>
@@ -19908,7 +19000,7 @@
                 </a:solidFill>
                 <a:latin typeface="Calibri"/>
               </a:rPr>
-              <a:t>THE PROBLEM</a:t>
+              <a:t>THE TAXONOMY</a:t>
             </a:r>
           </a:p>
         </p:txBody>
@@ -19941,13 +19033,13 @@
               </a:spcAft>
             </a:pPr>
             <a:r>
-              <a:rPr sz="3000" b="1">
+              <a:rPr sz="2800" b="1">
                 <a:solidFill>
                   <a:srgbClr val="FFFFFF"/>
                 </a:solidFill>
                 <a:latin typeface="Cambria"/>
               </a:rPr>
-              <a:t>An agent believes its context window</a:t>
+              <a:t>We describe every case with three questions</a:t>
             </a:r>
           </a:p>
         </p:txBody>
@@ -19988,101 +19080,14 @@
       </p:sp>
       <p:sp>
         <p:nvSpPr>
-          <p:cNvPr id="5" name="TextBox 4"/>
-          <p:cNvSpPr txBox="1"/>
-          <p:nvPr/>
-        </p:nvSpPr>
-        <p:spPr>
-          <a:xfrm>
-            <a:off x="640080" y="2148840"/>
-            <a:ext cx="10881360" cy="1828800"/>
-          </a:xfrm>
-          <a:prstGeom prst="rect">
-            <a:avLst/>
-          </a:prstGeom>
-          <a:noFill/>
-        </p:spPr>
-        <p:txBody>
-          <a:bodyPr wrap="square">
-            <a:spAutoFit/>
-          </a:bodyPr>
-          <a:lstStyle/>
-          <a:p>
-            <a:pPr>
-              <a:spcAft>
-                <a:spcPts val="700"/>
-              </a:spcAft>
-            </a:pPr>
-            <a:r>
-              <a:rPr sz="1500" b="1">
-                <a:solidFill>
-                  <a:srgbClr val="FFFFFF"/>
-                </a:solidFill>
-                <a:latin typeface="Calibri"/>
-              </a:rPr>
-              <a:t>An LLM agent reads one block of text and then acts. We call this block the context window.</a:t>
-            </a:r>
-          </a:p>
-          <a:p>
-            <a:pPr>
-              <a:spcAft>
-                <a:spcPts val="700"/>
-              </a:spcAft>
-            </a:pPr>
-            <a:r>
-              <a:rPr sz="1400" b="0">
-                <a:solidFill>
-                  <a:srgbClr val="CADCFC"/>
-                </a:solidFill>
-                <a:latin typeface="Calibri"/>
-              </a:rPr>
-              <a:t>The block holds many things at once. It holds the user's question. It holds pages that a tool returned. It holds documents that a search step found. It holds notes from an earlier session.</a:t>
-            </a:r>
-          </a:p>
-          <a:p>
-            <a:pPr>
-              <a:spcAft>
-                <a:spcPts val="700"/>
-              </a:spcAft>
-            </a:pPr>
-            <a:r>
-              <a:rPr sz="1500" b="1">
-                <a:solidFill>
-                  <a:srgbClr val="E0A458"/>
-                </a:solidFill>
-                <a:latin typeface="Calibri"/>
-              </a:rPr>
-              <a:t>The model cannot tell these apart. Everything in the block looks the same to it.</a:t>
-            </a:r>
-          </a:p>
-          <a:p>
-            <a:pPr>
-              <a:spcAft>
-                <a:spcPts val="700"/>
-              </a:spcAft>
-            </a:pPr>
-            <a:r>
-              <a:rPr sz="1400" b="0">
-                <a:solidFill>
-                  <a:srgbClr val="CADCFC"/>
-                </a:solidFill>
-                <a:latin typeface="Calibri"/>
-              </a:rPr>
-              <a:t>So any text that reaches the block can change what the agent does. The text does not need to come from the user. It only needs to arrive.</a:t>
-            </a:r>
-          </a:p>
-        </p:txBody>
-      </p:sp>
-      <p:sp>
-        <p:nvSpPr>
-          <p:cNvPr id="6" name="Rectangle 5"/>
+          <p:cNvPr id="5" name="Rectangle 4"/>
           <p:cNvSpPr/>
           <p:nvPr/>
         </p:nvSpPr>
         <p:spPr>
           <a:xfrm>
-            <a:off x="640080" y="4343400"/>
-            <a:ext cx="10881360" cy="1417320"/>
+            <a:off x="640080" y="2331720"/>
+            <a:ext cx="3520440" cy="2880360"/>
           </a:xfrm>
           <a:prstGeom prst="rect">
             <a:avLst/>
@@ -20119,14 +19124,669 @@
       </p:sp>
       <p:sp>
         <p:nvSpPr>
+          <p:cNvPr id="6" name="TextBox 5"/>
+          <p:cNvSpPr txBox="1"/>
+          <p:nvPr/>
+        </p:nvSpPr>
+        <p:spPr>
+          <a:xfrm>
+            <a:off x="896112" y="2542032"/>
+            <a:ext cx="3017520" cy="365760"/>
+          </a:xfrm>
+          <a:prstGeom prst="rect">
+            <a:avLst/>
+          </a:prstGeom>
+          <a:noFill/>
+        </p:spPr>
+        <p:txBody>
+          <a:bodyPr wrap="square">
+            <a:spAutoFit/>
+          </a:bodyPr>
+          <a:lstStyle/>
+          <a:p>
+            <a:r>
+              <a:rPr sz="1600" b="1">
+                <a:solidFill>
+                  <a:srgbClr val="E0A458"/>
+                </a:solidFill>
+                <a:latin typeface="Cambria"/>
+              </a:rPr>
+              <a:t>CHANNEL</a:t>
+            </a:r>
+          </a:p>
+        </p:txBody>
+      </p:sp>
+      <p:sp>
+        <p:nvSpPr>
           <p:cNvPr id="7" name="TextBox 6"/>
           <p:cNvSpPr txBox="1"/>
           <p:nvPr/>
         </p:nvSpPr>
         <p:spPr>
           <a:xfrm>
-            <a:off x="960120" y="4553712"/>
-            <a:ext cx="10241280" cy="1097280"/>
+            <a:off x="896112" y="2944368"/>
+            <a:ext cx="3017520" cy="365760"/>
+          </a:xfrm>
+          <a:prstGeom prst="rect">
+            <a:avLst/>
+          </a:prstGeom>
+          <a:noFill/>
+        </p:spPr>
+        <p:txBody>
+          <a:bodyPr wrap="square">
+            <a:spAutoFit/>
+          </a:bodyPr>
+          <a:lstStyle/>
+          <a:p>
+            <a:r>
+              <a:rPr sz="1400" b="1">
+                <a:solidFill>
+                  <a:srgbClr val="FFFFFF"/>
+                </a:solidFill>
+                <a:latin typeface="Calibri"/>
+              </a:rPr>
+              <a:t>How did it get in?</a:t>
+            </a:r>
+          </a:p>
+        </p:txBody>
+      </p:sp>
+      <p:sp>
+        <p:nvSpPr>
+          <p:cNvPr id="8" name="TextBox 7"/>
+          <p:cNvSpPr txBox="1"/>
+          <p:nvPr/>
+        </p:nvSpPr>
+        <p:spPr>
+          <a:xfrm>
+            <a:off x="896112" y="3383280"/>
+            <a:ext cx="3108960" cy="1463040"/>
+          </a:xfrm>
+          <a:prstGeom prst="rect">
+            <a:avLst/>
+          </a:prstGeom>
+          <a:noFill/>
+        </p:spPr>
+        <p:txBody>
+          <a:bodyPr wrap="square">
+            <a:spAutoFit/>
+          </a:bodyPr>
+          <a:lstStyle/>
+          <a:p>
+            <a:pPr>
+              <a:spcAft>
+                <a:spcPts val="100"/>
+              </a:spcAft>
+            </a:pPr>
+            <a:r>
+              <a:rPr sz="1250" b="0">
+                <a:solidFill>
+                  <a:srgbClr val="CADCFC"/>
+                </a:solidFill>
+                <a:latin typeface="Calibri"/>
+              </a:rPr>
+              <a:t>The stream it came through.</a:t>
+            </a:r>
+          </a:p>
+          <a:p>
+            <a:pPr>
+              <a:spcAft>
+                <a:spcPts val="100"/>
+              </a:spcAft>
+            </a:pPr>
+            <a:r>
+              <a:rPr sz="1250" b="0">
+                <a:solidFill>
+                  <a:srgbClr val="CADCFC"/>
+                </a:solidFill>
+                <a:latin typeface="Calibri"/>
+              </a:rPr>
+              <a:t>An email that a tool read is</a:t>
+            </a:r>
+          </a:p>
+          <a:p>
+            <a:pPr>
+              <a:spcAft>
+                <a:spcPts val="100"/>
+              </a:spcAft>
+            </a:pPr>
+            <a:r>
+              <a:rPr sz="1250" b="0">
+                <a:solidFill>
+                  <a:srgbClr val="CADCFC"/>
+                </a:solidFill>
+                <a:latin typeface="Calibri"/>
+              </a:rPr>
+              <a:t>one channel. A document that</a:t>
+            </a:r>
+          </a:p>
+          <a:p>
+            <a:pPr>
+              <a:spcAft>
+                <a:spcPts val="100"/>
+              </a:spcAft>
+            </a:pPr>
+            <a:r>
+              <a:rPr sz="1250" b="0">
+                <a:solidFill>
+                  <a:srgbClr val="CADCFC"/>
+                </a:solidFill>
+                <a:latin typeface="Calibri"/>
+              </a:rPr>
+              <a:t>a search returned is another.</a:t>
+            </a:r>
+          </a:p>
+        </p:txBody>
+      </p:sp>
+      <p:sp>
+        <p:nvSpPr>
+          <p:cNvPr id="9" name="TextBox 8"/>
+          <p:cNvSpPr txBox="1"/>
+          <p:nvPr/>
+        </p:nvSpPr>
+        <p:spPr>
+          <a:xfrm>
+            <a:off x="896112" y="4828032"/>
+            <a:ext cx="3017520" cy="274320"/>
+          </a:xfrm>
+          <a:prstGeom prst="rect">
+            <a:avLst/>
+          </a:prstGeom>
+          <a:noFill/>
+        </p:spPr>
+        <p:txBody>
+          <a:bodyPr wrap="square">
+            <a:spAutoFit/>
+          </a:bodyPr>
+          <a:lstStyle/>
+          <a:p>
+            <a:r>
+              <a:rPr sz="1200" b="0">
+                <a:solidFill>
+                  <a:srgbClr val="CFE8EF"/>
+                </a:solidFill>
+                <a:latin typeface="Calibri"/>
+              </a:rPr>
+              <a:t>9 values</a:t>
+            </a:r>
+          </a:p>
+        </p:txBody>
+      </p:sp>
+      <p:sp>
+        <p:nvSpPr>
+          <p:cNvPr id="10" name="Rectangle 9"/>
+          <p:cNvSpPr/>
+          <p:nvPr/>
+        </p:nvSpPr>
+        <p:spPr>
+          <a:xfrm>
+            <a:off x="4352544" y="2331720"/>
+            <a:ext cx="3520440" cy="2880360"/>
+          </a:xfrm>
+          <a:prstGeom prst="rect">
+            <a:avLst/>
+          </a:prstGeom>
+          <a:solidFill>
+            <a:srgbClr val="1B334F"/>
+          </a:solidFill>
+          <a:ln>
+            <a:noFill/>
+          </a:ln>
+          <a:effectLst/>
+        </p:spPr>
+        <p:style>
+          <a:lnRef idx="1">
+            <a:schemeClr val="accent1"/>
+          </a:lnRef>
+          <a:fillRef idx="3">
+            <a:schemeClr val="accent1"/>
+          </a:fillRef>
+          <a:effectRef idx="2">
+            <a:schemeClr val="accent1"/>
+          </a:effectRef>
+          <a:fontRef idx="minor">
+            <a:schemeClr val="lt1"/>
+          </a:fontRef>
+        </p:style>
+        <p:txBody>
+          <a:bodyPr rtlCol="0" anchor="ctr"/>
+          <a:lstStyle/>
+          <a:p>
+            <a:pPr algn="ctr"/>
+          </a:p>
+        </p:txBody>
+      </p:sp>
+      <p:sp>
+        <p:nvSpPr>
+          <p:cNvPr id="11" name="TextBox 10"/>
+          <p:cNvSpPr txBox="1"/>
+          <p:nvPr/>
+        </p:nvSpPr>
+        <p:spPr>
+          <a:xfrm>
+            <a:off x="4608576" y="2542032"/>
+            <a:ext cx="3017520" cy="365760"/>
+          </a:xfrm>
+          <a:prstGeom prst="rect">
+            <a:avLst/>
+          </a:prstGeom>
+          <a:noFill/>
+        </p:spPr>
+        <p:txBody>
+          <a:bodyPr wrap="square">
+            <a:spAutoFit/>
+          </a:bodyPr>
+          <a:lstStyle/>
+          <a:p>
+            <a:r>
+              <a:rPr sz="1600" b="1">
+                <a:solidFill>
+                  <a:srgbClr val="E0A458"/>
+                </a:solidFill>
+                <a:latin typeface="Cambria"/>
+              </a:rPr>
+              <a:t>INTENT</a:t>
+            </a:r>
+          </a:p>
+        </p:txBody>
+      </p:sp>
+      <p:sp>
+        <p:nvSpPr>
+          <p:cNvPr id="12" name="TextBox 11"/>
+          <p:cNvSpPr txBox="1"/>
+          <p:nvPr/>
+        </p:nvSpPr>
+        <p:spPr>
+          <a:xfrm>
+            <a:off x="4608576" y="2944368"/>
+            <a:ext cx="3017520" cy="365760"/>
+          </a:xfrm>
+          <a:prstGeom prst="rect">
+            <a:avLst/>
+          </a:prstGeom>
+          <a:noFill/>
+        </p:spPr>
+        <p:txBody>
+          <a:bodyPr wrap="square">
+            <a:spAutoFit/>
+          </a:bodyPr>
+          <a:lstStyle/>
+          <a:p>
+            <a:r>
+              <a:rPr sz="1400" b="1">
+                <a:solidFill>
+                  <a:srgbClr val="FFFFFF"/>
+                </a:solidFill>
+                <a:latin typeface="Calibri"/>
+              </a:rPr>
+              <a:t>Did someone mean it?</a:t>
+            </a:r>
+          </a:p>
+        </p:txBody>
+      </p:sp>
+      <p:sp>
+        <p:nvSpPr>
+          <p:cNvPr id="13" name="TextBox 12"/>
+          <p:cNvSpPr txBox="1"/>
+          <p:nvPr/>
+        </p:nvSpPr>
+        <p:spPr>
+          <a:xfrm>
+            <a:off x="4608576" y="3383280"/>
+            <a:ext cx="3108960" cy="1463040"/>
+          </a:xfrm>
+          <a:prstGeom prst="rect">
+            <a:avLst/>
+          </a:prstGeom>
+          <a:noFill/>
+        </p:spPr>
+        <p:txBody>
+          <a:bodyPr wrap="square">
+            <a:spAutoFit/>
+          </a:bodyPr>
+          <a:lstStyle/>
+          <a:p>
+            <a:pPr>
+              <a:spcAft>
+                <a:spcPts val="100"/>
+              </a:spcAft>
+            </a:pPr>
+            <a:r>
+              <a:rPr sz="1250" b="0">
+                <a:solidFill>
+                  <a:srgbClr val="CADCFC"/>
+                </a:solidFill>
+                <a:latin typeface="Calibri"/>
+              </a:rPr>
+              <a:t>Adversarial means a person put</a:t>
+            </a:r>
+          </a:p>
+          <a:p>
+            <a:pPr>
+              <a:spcAft>
+                <a:spcPts val="100"/>
+              </a:spcAft>
+            </a:pPr>
+            <a:r>
+              <a:rPr sz="1250" b="0">
+                <a:solidFill>
+                  <a:srgbClr val="CADCFC"/>
+                </a:solidFill>
+                <a:latin typeface="Calibri"/>
+              </a:rPr>
+              <a:t>it there to cause the effect.</a:t>
+            </a:r>
+          </a:p>
+          <a:p>
+            <a:pPr>
+              <a:spcAft>
+                <a:spcPts val="100"/>
+              </a:spcAft>
+            </a:pPr>
+            <a:r>
+              <a:rPr sz="1250" b="0">
+                <a:solidFill>
+                  <a:srgbClr val="CADCFC"/>
+                </a:solidFill>
+                <a:latin typeface="Calibri"/>
+              </a:rPr>
+              <a:t>Incidental means no one did.</a:t>
+            </a:r>
+          </a:p>
+          <a:p>
+            <a:pPr>
+              <a:spcAft>
+                <a:spcPts val="100"/>
+              </a:spcAft>
+            </a:pPr>
+            <a:r>
+              <a:rPr sz="1250" b="0">
+                <a:solidFill>
+                  <a:srgbClr val="CADCFC"/>
+                </a:solidFill>
+                <a:latin typeface="Calibri"/>
+              </a:rPr>
+              <a:t>The text is just long or stale.</a:t>
+            </a:r>
+          </a:p>
+        </p:txBody>
+      </p:sp>
+      <p:sp>
+        <p:nvSpPr>
+          <p:cNvPr id="14" name="TextBox 13"/>
+          <p:cNvSpPr txBox="1"/>
+          <p:nvPr/>
+        </p:nvSpPr>
+        <p:spPr>
+          <a:xfrm>
+            <a:off x="4608576" y="4828032"/>
+            <a:ext cx="3017520" cy="274320"/>
+          </a:xfrm>
+          <a:prstGeom prst="rect">
+            <a:avLst/>
+          </a:prstGeom>
+          <a:noFill/>
+        </p:spPr>
+        <p:txBody>
+          <a:bodyPr wrap="square">
+            <a:spAutoFit/>
+          </a:bodyPr>
+          <a:lstStyle/>
+          <a:p>
+            <a:r>
+              <a:rPr sz="1200" b="0">
+                <a:solidFill>
+                  <a:srgbClr val="CFE8EF"/>
+                </a:solidFill>
+                <a:latin typeface="Calibri"/>
+              </a:rPr>
+              <a:t>3 values</a:t>
+            </a:r>
+          </a:p>
+        </p:txBody>
+      </p:sp>
+      <p:sp>
+        <p:nvSpPr>
+          <p:cNvPr id="15" name="Rectangle 14"/>
+          <p:cNvSpPr/>
+          <p:nvPr/>
+        </p:nvSpPr>
+        <p:spPr>
+          <a:xfrm>
+            <a:off x="8065007" y="2331720"/>
+            <a:ext cx="3520440" cy="2880360"/>
+          </a:xfrm>
+          <a:prstGeom prst="rect">
+            <a:avLst/>
+          </a:prstGeom>
+          <a:solidFill>
+            <a:srgbClr val="1B334F"/>
+          </a:solidFill>
+          <a:ln>
+            <a:noFill/>
+          </a:ln>
+          <a:effectLst/>
+        </p:spPr>
+        <p:style>
+          <a:lnRef idx="1">
+            <a:schemeClr val="accent1"/>
+          </a:lnRef>
+          <a:fillRef idx="3">
+            <a:schemeClr val="accent1"/>
+          </a:fillRef>
+          <a:effectRef idx="2">
+            <a:schemeClr val="accent1"/>
+          </a:effectRef>
+          <a:fontRef idx="minor">
+            <a:schemeClr val="lt1"/>
+          </a:fontRef>
+        </p:style>
+        <p:txBody>
+          <a:bodyPr rtlCol="0" anchor="ctr"/>
+          <a:lstStyle/>
+          <a:p>
+            <a:pPr algn="ctr"/>
+          </a:p>
+        </p:txBody>
+      </p:sp>
+      <p:sp>
+        <p:nvSpPr>
+          <p:cNvPr id="16" name="TextBox 15"/>
+          <p:cNvSpPr txBox="1"/>
+          <p:nvPr/>
+        </p:nvSpPr>
+        <p:spPr>
+          <a:xfrm>
+            <a:off x="8321039" y="2542032"/>
+            <a:ext cx="3017520" cy="365760"/>
+          </a:xfrm>
+          <a:prstGeom prst="rect">
+            <a:avLst/>
+          </a:prstGeom>
+          <a:noFill/>
+        </p:spPr>
+        <p:txBody>
+          <a:bodyPr wrap="square">
+            <a:spAutoFit/>
+          </a:bodyPr>
+          <a:lstStyle/>
+          <a:p>
+            <a:r>
+              <a:rPr sz="1600" b="1">
+                <a:solidFill>
+                  <a:srgbClr val="E0A458"/>
+                </a:solidFill>
+                <a:latin typeface="Cambria"/>
+              </a:rPr>
+              <a:t>CONSEQUENCE</a:t>
+            </a:r>
+          </a:p>
+        </p:txBody>
+      </p:sp>
+      <p:sp>
+        <p:nvSpPr>
+          <p:cNvPr id="17" name="TextBox 16"/>
+          <p:cNvSpPr txBox="1"/>
+          <p:nvPr/>
+        </p:nvSpPr>
+        <p:spPr>
+          <a:xfrm>
+            <a:off x="8321039" y="2944368"/>
+            <a:ext cx="3017520" cy="365760"/>
+          </a:xfrm>
+          <a:prstGeom prst="rect">
+            <a:avLst/>
+          </a:prstGeom>
+          <a:noFill/>
+        </p:spPr>
+        <p:txBody>
+          <a:bodyPr wrap="square">
+            <a:spAutoFit/>
+          </a:bodyPr>
+          <a:lstStyle/>
+          <a:p>
+            <a:r>
+              <a:rPr sz="1400" b="1">
+                <a:solidFill>
+                  <a:srgbClr val="FFFFFF"/>
+                </a:solidFill>
+                <a:latin typeface="Calibri"/>
+              </a:rPr>
+              <a:t>What went wrong?</a:t>
+            </a:r>
+          </a:p>
+        </p:txBody>
+      </p:sp>
+      <p:sp>
+        <p:nvSpPr>
+          <p:cNvPr id="18" name="TextBox 17"/>
+          <p:cNvSpPr txBox="1"/>
+          <p:nvPr/>
+        </p:nvSpPr>
+        <p:spPr>
+          <a:xfrm>
+            <a:off x="8321039" y="3383280"/>
+            <a:ext cx="3108960" cy="1463040"/>
+          </a:xfrm>
+          <a:prstGeom prst="rect">
+            <a:avLst/>
+          </a:prstGeom>
+          <a:noFill/>
+        </p:spPr>
+        <p:txBody>
+          <a:bodyPr wrap="square">
+            <a:spAutoFit/>
+          </a:bodyPr>
+          <a:lstStyle/>
+          <a:p>
+            <a:pPr>
+              <a:spcAft>
+                <a:spcPts val="100"/>
+              </a:spcAft>
+            </a:pPr>
+            <a:r>
+              <a:rPr sz="1250" b="0">
+                <a:solidFill>
+                  <a:srgbClr val="CADCFC"/>
+                </a:solidFill>
+                <a:latin typeface="Calibri"/>
+              </a:rPr>
+              <a:t>The effect on the agent after</a:t>
+            </a:r>
+          </a:p>
+          <a:p>
+            <a:pPr>
+              <a:spcAft>
+                <a:spcPts val="100"/>
+              </a:spcAft>
+            </a:pPr>
+            <a:r>
+              <a:rPr sz="1250" b="0">
+                <a:solidFill>
+                  <a:srgbClr val="CADCFC"/>
+                </a:solidFill>
+                <a:latin typeface="Calibri"/>
+              </a:rPr>
+              <a:t>the text is in the window.</a:t>
+            </a:r>
+          </a:p>
+          <a:p>
+            <a:pPr>
+              <a:spcAft>
+                <a:spcPts val="100"/>
+              </a:spcAft>
+            </a:pPr>
+            <a:r>
+              <a:rPr sz="1250" b="0">
+                <a:solidFill>
+                  <a:srgbClr val="CADCFC"/>
+                </a:solidFill>
+                <a:latin typeface="Calibri"/>
+              </a:rPr>
+              <a:t>A wrong answer and a stolen</a:t>
+            </a:r>
+          </a:p>
+          <a:p>
+            <a:pPr>
+              <a:spcAft>
+                <a:spcPts val="100"/>
+              </a:spcAft>
+            </a:pPr>
+            <a:r>
+              <a:rPr sz="1250" b="0">
+                <a:solidFill>
+                  <a:srgbClr val="CADCFC"/>
+                </a:solidFill>
+                <a:latin typeface="Calibri"/>
+              </a:rPr>
+              <a:t>file are different effects.</a:t>
+            </a:r>
+          </a:p>
+        </p:txBody>
+      </p:sp>
+      <p:sp>
+        <p:nvSpPr>
+          <p:cNvPr id="19" name="TextBox 18"/>
+          <p:cNvSpPr txBox="1"/>
+          <p:nvPr/>
+        </p:nvSpPr>
+        <p:spPr>
+          <a:xfrm>
+            <a:off x="8321039" y="4828032"/>
+            <a:ext cx="3017520" cy="274320"/>
+          </a:xfrm>
+          <a:prstGeom prst="rect">
+            <a:avLst/>
+          </a:prstGeom>
+          <a:noFill/>
+        </p:spPr>
+        <p:txBody>
+          <a:bodyPr wrap="square">
+            <a:spAutoFit/>
+          </a:bodyPr>
+          <a:lstStyle/>
+          <a:p>
+            <a:r>
+              <a:rPr sz="1200" b="0">
+                <a:solidFill>
+                  <a:srgbClr val="CFE8EF"/>
+                </a:solidFill>
+                <a:latin typeface="Calibri"/>
+              </a:rPr>
+              <a:t>6 values</a:t>
+            </a:r>
+          </a:p>
+        </p:txBody>
+      </p:sp>
+      <p:sp>
+        <p:nvSpPr>
+          <p:cNvPr id="20" name="TextBox 19"/>
+          <p:cNvSpPr txBox="1"/>
+          <p:nvPr/>
+        </p:nvSpPr>
+        <p:spPr>
+          <a:xfrm>
+            <a:off x="640080" y="5486400"/>
+            <a:ext cx="10881360" cy="1097280"/>
           </a:xfrm>
           <a:prstGeom prst="rect">
             <a:avLst/>
@@ -20147,77 +19807,77 @@
             <a:r>
               <a:rPr sz="1500" b="1">
                 <a:solidFill>
+                  <a:srgbClr val="FFFFFF"/>
+                </a:solidFill>
+                <a:latin typeface="Calibri"/>
+              </a:rPr>
+              <a:t>9 channels x 3 intents x 6 consequences = 162 cells. We call this the cube.</a:t>
+            </a:r>
+          </a:p>
+          <a:p>
+            <a:pPr>
+              <a:spcAft>
+                <a:spcPts val="400"/>
+              </a:spcAft>
+            </a:pPr>
+            <a:r>
+              <a:rPr sz="1300" b="0">
+                <a:solidFill>
+                  <a:srgbClr val="CADCFC"/>
+                </a:solidFill>
+                <a:latin typeface="Calibri"/>
+              </a:rPr>
+              <a:t>One paper can fill more than one cell. An empty cell means that nobody has studied that combination.</a:t>
+            </a:r>
+          </a:p>
+          <a:p>
+            <a:pPr>
+              <a:spcAft>
+                <a:spcPts val="400"/>
+              </a:spcAft>
+            </a:pPr>
+            <a:r>
+              <a:rPr sz="1300" b="1">
+                <a:solidFill>
                   <a:srgbClr val="E0A458"/>
                 </a:solidFill>
                 <a:latin typeface="Calibri"/>
               </a:rPr>
-              <a:t>The guiding picture: the context window is a pond.</a:t>
-            </a:r>
-          </a:p>
-          <a:p>
-            <a:pPr>
-              <a:spcAft>
-                <a:spcPts val="400"/>
-              </a:spcAft>
-            </a:pPr>
-            <a:r>
-              <a:rPr sz="1300" b="0">
-                <a:solidFill>
-                  <a:srgbClr val="FFFFFF"/>
-                </a:solidFill>
-                <a:latin typeface="Calibri"/>
-              </a:rPr>
-              <a:t>Water comes in through a fixed set of streams. Clean water and dirty water mix in the same pond. Everything downstream drinks the mixture.</a:t>
-            </a:r>
-          </a:p>
-          <a:p>
-            <a:pPr>
-              <a:spcAft>
-                <a:spcPts val="400"/>
-              </a:spcAft>
-            </a:pPr>
-            <a:r>
-              <a:rPr sz="1300" b="0">
-                <a:solidFill>
-                  <a:srgbClr val="FFFFFF"/>
-                </a:solidFill>
-                <a:latin typeface="Calibri"/>
-              </a:rPr>
-              <a:t>We ask two questions. How many streams are there? What guards the mouth of each one?</a:t>
-            </a:r>
-          </a:p>
-        </p:txBody>
-      </p:sp>
-      <p:sp>
-        <p:nvSpPr>
-          <p:cNvPr id="8" name="TextBox 7"/>
-          <p:cNvSpPr txBox="1"/>
-          <p:nvPr/>
-        </p:nvSpPr>
-        <p:spPr>
-          <a:xfrm>
-            <a:off x="640080" y="5943600"/>
-            <a:ext cx="10881360" cy="457200"/>
-          </a:xfrm>
-          <a:prstGeom prst="rect">
-            <a:avLst/>
-          </a:prstGeom>
-          <a:noFill/>
-        </p:spPr>
-        <p:txBody>
-          <a:bodyPr wrap="square">
-            <a:spAutoFit/>
-          </a:bodyPr>
-          <a:lstStyle/>
-          <a:p>
-            <a:r>
-              <a:rPr sz="1250" b="0">
-                <a:solidFill>
-                  <a:srgbClr val="CFE8EF"/>
-                </a:solidFill>
-                <a:latin typeface="Calibri"/>
-              </a:rPr>
-              <a:t>We do not study training data. We study what enters the context at run time.</a:t>
+              <a:t>The cube is the spine of the paper. It shows what the field knows and what it has never looked at.</a:t>
+            </a:r>
+          </a:p>
+        </p:txBody>
+      </p:sp>
+      <p:sp>
+        <p:nvSpPr>
+          <p:cNvPr id="21" name="TextBox 20"/>
+          <p:cNvSpPr txBox="1"/>
+          <p:nvPr/>
+        </p:nvSpPr>
+        <p:spPr>
+          <a:xfrm>
+            <a:off x="640080" y="6419088"/>
+            <a:ext cx="10789920" cy="402336"/>
+          </a:xfrm>
+          <a:prstGeom prst="rect">
+            <a:avLst/>
+          </a:prstGeom>
+          <a:noFill/>
+        </p:spPr>
+        <p:txBody>
+          <a:bodyPr wrap="square">
+            <a:spAutoFit/>
+          </a:bodyPr>
+          <a:lstStyle/>
+          <a:p>
+            <a:r>
+              <a:rPr sz="850" b="0">
+                <a:solidFill>
+                  <a:srgbClr val="5B6B79"/>
+                </a:solidFill>
+                <a:latin typeface="Calibri"/>
+              </a:rPr>
+              <a:t>Sources:  Axes and cube: this work   ·   Adversarial end: Greshake et al., AISec@CCS 2023, arXiv:2302.12173   ·   Incidental end: Liu et al., TACL 2023, arXiv:2307.03172</a:t>
             </a:r>
           </a:p>
         </p:txBody>
@@ -22116,7 +21776,7 @@
                 </a:solidFill>
                 <a:latin typeface="Calibri"/>
               </a:rPr>
-              <a:t>THE TAXONOMY</a:t>
+              <a:t>AXIS 1  ·  CHANNEL</a:t>
             </a:r>
           </a:p>
         </p:txBody>
@@ -22129,7 +21789,7 @@
         </p:nvSpPr>
         <p:spPr>
           <a:xfrm>
-            <a:off x="640080" y="1371600"/>
+            <a:off x="640080" y="1170432"/>
             <a:ext cx="10607040" cy="1371600"/>
           </a:xfrm>
           <a:prstGeom prst="rect">
@@ -22155,7 +21815,7 @@
                 </a:solidFill>
                 <a:latin typeface="Cambria"/>
               </a:rPr>
-              <a:t>We describe every case with three questions</a:t>
+              <a:t>The nine ways text reaches the window</a:t>
             </a:r>
           </a:p>
         </p:txBody>
@@ -22196,14 +21856,116 @@
       </p:sp>
       <p:sp>
         <p:nvSpPr>
-          <p:cNvPr id="5" name="Rectangle 4"/>
+          <p:cNvPr id="5" name="TextBox 4"/>
+          <p:cNvSpPr txBox="1"/>
+          <p:nvPr/>
+        </p:nvSpPr>
+        <p:spPr>
+          <a:xfrm>
+            <a:off x="868680" y="1993392"/>
+            <a:ext cx="2103120" cy="274320"/>
+          </a:xfrm>
+          <a:prstGeom prst="rect">
+            <a:avLst/>
+          </a:prstGeom>
+          <a:noFill/>
+        </p:spPr>
+        <p:txBody>
+          <a:bodyPr wrap="square">
+            <a:spAutoFit/>
+          </a:bodyPr>
+          <a:lstStyle/>
+          <a:p>
+            <a:r>
+              <a:rPr sz="1150" b="1">
+                <a:solidFill>
+                  <a:srgbClr val="E0A458"/>
+                </a:solidFill>
+                <a:latin typeface="Calibri"/>
+              </a:rPr>
+              <a:t>CHANNEL</a:t>
+            </a:r>
+          </a:p>
+        </p:txBody>
+      </p:sp>
+      <p:sp>
+        <p:nvSpPr>
+          <p:cNvPr id="6" name="TextBox 5"/>
+          <p:cNvSpPr txBox="1"/>
+          <p:nvPr/>
+        </p:nvSpPr>
+        <p:spPr>
+          <a:xfrm>
+            <a:off x="3108960" y="1993392"/>
+            <a:ext cx="6949440" cy="274320"/>
+          </a:xfrm>
+          <a:prstGeom prst="rect">
+            <a:avLst/>
+          </a:prstGeom>
+          <a:noFill/>
+        </p:spPr>
+        <p:txBody>
+          <a:bodyPr wrap="square">
+            <a:spAutoFit/>
+          </a:bodyPr>
+          <a:lstStyle/>
+          <a:p>
+            <a:r>
+              <a:rPr sz="1150" b="1">
+                <a:solidFill>
+                  <a:srgbClr val="E0A458"/>
+                </a:solidFill>
+                <a:latin typeface="Calibri"/>
+              </a:rPr>
+              <a:t>WHAT IT MEANS</a:t>
+            </a:r>
+          </a:p>
+        </p:txBody>
+      </p:sp>
+      <p:sp>
+        <p:nvSpPr>
+          <p:cNvPr id="7" name="TextBox 6"/>
+          <p:cNvSpPr txBox="1"/>
+          <p:nvPr/>
+        </p:nvSpPr>
+        <p:spPr>
+          <a:xfrm>
+            <a:off x="10607040" y="1993392"/>
+            <a:ext cx="914400" cy="274320"/>
+          </a:xfrm>
+          <a:prstGeom prst="rect">
+            <a:avLst/>
+          </a:prstGeom>
+          <a:noFill/>
+        </p:spPr>
+        <p:txBody>
+          <a:bodyPr wrap="square">
+            <a:spAutoFit/>
+          </a:bodyPr>
+          <a:lstStyle/>
+          <a:p>
+            <a:r>
+              <a:rPr sz="1150" b="1">
+                <a:solidFill>
+                  <a:srgbClr val="E0A458"/>
+                </a:solidFill>
+                <a:latin typeface="Calibri"/>
+              </a:rPr>
+              <a:t>ATTACKS</a:t>
+            </a:r>
+          </a:p>
+        </p:txBody>
+      </p:sp>
+      <p:sp>
+        <p:nvSpPr>
+          <p:cNvPr id="8" name="Rectangle 7"/>
           <p:cNvSpPr/>
           <p:nvPr/>
         </p:nvSpPr>
         <p:spPr>
           <a:xfrm>
-            <a:off x="640080" y="2331720"/>
-            <a:ext cx="3520440" cy="2880360"/>
+            <a:off x="640080" y="2267712"/>
+            <a:ext cx="10881360" cy="365760"/>
           </a:xfrm>
           <a:prstGeom prst="rect">
             <a:avLst/>
@@ -22240,203 +22002,116 @@
       </p:sp>
       <p:sp>
         <p:nvSpPr>
-          <p:cNvPr id="6" name="TextBox 5"/>
-          <p:cNvSpPr txBox="1"/>
-          <p:nvPr/>
-        </p:nvSpPr>
-        <p:spPr>
-          <a:xfrm>
-            <a:off x="896112" y="2542032"/>
-            <a:ext cx="3017520" cy="365760"/>
-          </a:xfrm>
-          <a:prstGeom prst="rect">
-            <a:avLst/>
-          </a:prstGeom>
-          <a:noFill/>
-        </p:spPr>
-        <p:txBody>
-          <a:bodyPr wrap="square">
-            <a:spAutoFit/>
-          </a:bodyPr>
-          <a:lstStyle/>
-          <a:p>
-            <a:r>
-              <a:rPr sz="1600" b="1">
+          <p:cNvPr id="9" name="TextBox 8"/>
+          <p:cNvSpPr txBox="1"/>
+          <p:nvPr/>
+        </p:nvSpPr>
+        <p:spPr>
+          <a:xfrm>
+            <a:off x="868680" y="2322576"/>
+            <a:ext cx="2103120" cy="274320"/>
+          </a:xfrm>
+          <a:prstGeom prst="rect">
+            <a:avLst/>
+          </a:prstGeom>
+          <a:noFill/>
+        </p:spPr>
+        <p:txBody>
+          <a:bodyPr wrap="square">
+            <a:spAutoFit/>
+          </a:bodyPr>
+          <a:lstStyle/>
+          <a:p>
+            <a:r>
+              <a:rPr sz="1200" b="1">
+                <a:solidFill>
+                  <a:srgbClr val="FFFFFF"/>
+                </a:solidFill>
+                <a:latin typeface="Calibri"/>
+              </a:rPr>
+              <a:t>tool-output</a:t>
+            </a:r>
+          </a:p>
+        </p:txBody>
+      </p:sp>
+      <p:sp>
+        <p:nvSpPr>
+          <p:cNvPr id="10" name="TextBox 9"/>
+          <p:cNvSpPr txBox="1"/>
+          <p:nvPr/>
+        </p:nvSpPr>
+        <p:spPr>
+          <a:xfrm>
+            <a:off x="3108960" y="2322576"/>
+            <a:ext cx="7315200" cy="274320"/>
+          </a:xfrm>
+          <a:prstGeom prst="rect">
+            <a:avLst/>
+          </a:prstGeom>
+          <a:noFill/>
+        </p:spPr>
+        <p:txBody>
+          <a:bodyPr wrap="square">
+            <a:spAutoFit/>
+          </a:bodyPr>
+          <a:lstStyle/>
+          <a:p>
+            <a:r>
+              <a:rPr sz="1200" b="0">
+                <a:solidFill>
+                  <a:srgbClr val="CADCFC"/>
+                </a:solidFill>
+                <a:latin typeface="Calibri"/>
+              </a:rPr>
+              <a:t>What a tool gives back: a web page, an email, a file the agent opened.</a:t>
+            </a:r>
+          </a:p>
+        </p:txBody>
+      </p:sp>
+      <p:sp>
+        <p:nvSpPr>
+          <p:cNvPr id="11" name="TextBox 10"/>
+          <p:cNvSpPr txBox="1"/>
+          <p:nvPr/>
+        </p:nvSpPr>
+        <p:spPr>
+          <a:xfrm>
+            <a:off x="10607040" y="2322576"/>
+            <a:ext cx="914400" cy="274320"/>
+          </a:xfrm>
+          <a:prstGeom prst="rect">
+            <a:avLst/>
+          </a:prstGeom>
+          <a:noFill/>
+        </p:spPr>
+        <p:txBody>
+          <a:bodyPr wrap="square">
+            <a:spAutoFit/>
+          </a:bodyPr>
+          <a:lstStyle/>
+          <a:p>
+            <a:r>
+              <a:rPr sz="1200" b="1">
                 <a:solidFill>
                   <a:srgbClr val="E0A458"/>
                 </a:solidFill>
-                <a:latin typeface="Cambria"/>
-              </a:rPr>
-              <a:t>CHANNEL</a:t>
-            </a:r>
-          </a:p>
-        </p:txBody>
-      </p:sp>
-      <p:sp>
-        <p:nvSpPr>
-          <p:cNvPr id="7" name="TextBox 6"/>
-          <p:cNvSpPr txBox="1"/>
-          <p:nvPr/>
-        </p:nvSpPr>
-        <p:spPr>
-          <a:xfrm>
-            <a:off x="896112" y="2944368"/>
-            <a:ext cx="3017520" cy="365760"/>
-          </a:xfrm>
-          <a:prstGeom prst="rect">
-            <a:avLst/>
-          </a:prstGeom>
-          <a:noFill/>
-        </p:spPr>
-        <p:txBody>
-          <a:bodyPr wrap="square">
-            <a:spAutoFit/>
-          </a:bodyPr>
-          <a:lstStyle/>
-          <a:p>
-            <a:r>
-              <a:rPr sz="1400" b="1">
-                <a:solidFill>
-                  <a:srgbClr val="FFFFFF"/>
-                </a:solidFill>
-                <a:latin typeface="Calibri"/>
-              </a:rPr>
-              <a:t>How did it get in?</a:t>
-            </a:r>
-          </a:p>
-        </p:txBody>
-      </p:sp>
-      <p:sp>
-        <p:nvSpPr>
-          <p:cNvPr id="8" name="TextBox 7"/>
-          <p:cNvSpPr txBox="1"/>
-          <p:nvPr/>
-        </p:nvSpPr>
-        <p:spPr>
-          <a:xfrm>
-            <a:off x="896112" y="3383280"/>
-            <a:ext cx="3108960" cy="1463040"/>
-          </a:xfrm>
-          <a:prstGeom prst="rect">
-            <a:avLst/>
-          </a:prstGeom>
-          <a:noFill/>
-        </p:spPr>
-        <p:txBody>
-          <a:bodyPr wrap="square">
-            <a:spAutoFit/>
-          </a:bodyPr>
-          <a:lstStyle/>
-          <a:p>
-            <a:pPr>
-              <a:spcAft>
-                <a:spcPts val="100"/>
-              </a:spcAft>
-            </a:pPr>
-            <a:r>
-              <a:rPr sz="1250" b="0">
-                <a:solidFill>
-                  <a:srgbClr val="CADCFC"/>
-                </a:solidFill>
-                <a:latin typeface="Calibri"/>
-              </a:rPr>
-              <a:t>The stream it came through.</a:t>
-            </a:r>
-          </a:p>
-          <a:p>
-            <a:pPr>
-              <a:spcAft>
-                <a:spcPts val="100"/>
-              </a:spcAft>
-            </a:pPr>
-            <a:r>
-              <a:rPr sz="1250" b="0">
-                <a:solidFill>
-                  <a:srgbClr val="CADCFC"/>
-                </a:solidFill>
-                <a:latin typeface="Calibri"/>
-              </a:rPr>
-              <a:t>An email that a tool read is</a:t>
-            </a:r>
-          </a:p>
-          <a:p>
-            <a:pPr>
-              <a:spcAft>
-                <a:spcPts val="100"/>
-              </a:spcAft>
-            </a:pPr>
-            <a:r>
-              <a:rPr sz="1250" b="0">
-                <a:solidFill>
-                  <a:srgbClr val="CADCFC"/>
-                </a:solidFill>
-                <a:latin typeface="Calibri"/>
-              </a:rPr>
-              <a:t>one channel. A document that</a:t>
-            </a:r>
-          </a:p>
-          <a:p>
-            <a:pPr>
-              <a:spcAft>
-                <a:spcPts val="100"/>
-              </a:spcAft>
-            </a:pPr>
-            <a:r>
-              <a:rPr sz="1250" b="0">
-                <a:solidFill>
-                  <a:srgbClr val="CADCFC"/>
-                </a:solidFill>
-                <a:latin typeface="Calibri"/>
-              </a:rPr>
-              <a:t>a search returned is another.</a:t>
-            </a:r>
-          </a:p>
-        </p:txBody>
-      </p:sp>
-      <p:sp>
-        <p:nvSpPr>
-          <p:cNvPr id="9" name="TextBox 8"/>
-          <p:cNvSpPr txBox="1"/>
-          <p:nvPr/>
-        </p:nvSpPr>
-        <p:spPr>
-          <a:xfrm>
-            <a:off x="896112" y="4828032"/>
-            <a:ext cx="3017520" cy="274320"/>
-          </a:xfrm>
-          <a:prstGeom prst="rect">
-            <a:avLst/>
-          </a:prstGeom>
-          <a:noFill/>
-        </p:spPr>
-        <p:txBody>
-          <a:bodyPr wrap="square">
-            <a:spAutoFit/>
-          </a:bodyPr>
-          <a:lstStyle/>
-          <a:p>
-            <a:r>
-              <a:rPr sz="1200" b="0">
-                <a:solidFill>
-                  <a:srgbClr val="CFE8EF"/>
-                </a:solidFill>
-                <a:latin typeface="Calibri"/>
-              </a:rPr>
-              <a:t>9 values</a:t>
-            </a:r>
-          </a:p>
-        </p:txBody>
-      </p:sp>
-      <p:sp>
-        <p:nvSpPr>
-          <p:cNvPr id="10" name="Rectangle 9"/>
+                <a:latin typeface="Calibri"/>
+              </a:rPr>
+              <a:t>66</a:t>
+            </a:r>
+          </a:p>
+        </p:txBody>
+      </p:sp>
+      <p:sp>
+        <p:nvSpPr>
+          <p:cNvPr id="12" name="Rectangle 11"/>
           <p:cNvSpPr/>
           <p:nvPr/>
         </p:nvSpPr>
         <p:spPr>
           <a:xfrm>
-            <a:off x="4352544" y="2331720"/>
-            <a:ext cx="3520440" cy="2880360"/>
+            <a:off x="640080" y="2670048"/>
+            <a:ext cx="10881360" cy="365760"/>
           </a:xfrm>
           <a:prstGeom prst="rect">
             <a:avLst/>
@@ -22473,203 +22148,116 @@
       </p:sp>
       <p:sp>
         <p:nvSpPr>
-          <p:cNvPr id="11" name="TextBox 10"/>
-          <p:cNvSpPr txBox="1"/>
-          <p:nvPr/>
-        </p:nvSpPr>
-        <p:spPr>
-          <a:xfrm>
-            <a:off x="4608576" y="2542032"/>
-            <a:ext cx="3017520" cy="365760"/>
-          </a:xfrm>
-          <a:prstGeom prst="rect">
-            <a:avLst/>
-          </a:prstGeom>
-          <a:noFill/>
-        </p:spPr>
-        <p:txBody>
-          <a:bodyPr wrap="square">
-            <a:spAutoFit/>
-          </a:bodyPr>
-          <a:lstStyle/>
-          <a:p>
-            <a:r>
-              <a:rPr sz="1600" b="1">
+          <p:cNvPr id="13" name="TextBox 12"/>
+          <p:cNvSpPr txBox="1"/>
+          <p:nvPr/>
+        </p:nvSpPr>
+        <p:spPr>
+          <a:xfrm>
+            <a:off x="868680" y="2724912"/>
+            <a:ext cx="2103120" cy="274320"/>
+          </a:xfrm>
+          <a:prstGeom prst="rect">
+            <a:avLst/>
+          </a:prstGeom>
+          <a:noFill/>
+        </p:spPr>
+        <p:txBody>
+          <a:bodyPr wrap="square">
+            <a:spAutoFit/>
+          </a:bodyPr>
+          <a:lstStyle/>
+          <a:p>
+            <a:r>
+              <a:rPr sz="1200" b="1">
+                <a:solidFill>
+                  <a:srgbClr val="FFFFFF"/>
+                </a:solidFill>
+                <a:latin typeface="Calibri"/>
+              </a:rPr>
+              <a:t>direct-input</a:t>
+            </a:r>
+          </a:p>
+        </p:txBody>
+      </p:sp>
+      <p:sp>
+        <p:nvSpPr>
+          <p:cNvPr id="14" name="TextBox 13"/>
+          <p:cNvSpPr txBox="1"/>
+          <p:nvPr/>
+        </p:nvSpPr>
+        <p:spPr>
+          <a:xfrm>
+            <a:off x="3108960" y="2724912"/>
+            <a:ext cx="7315200" cy="274320"/>
+          </a:xfrm>
+          <a:prstGeom prst="rect">
+            <a:avLst/>
+          </a:prstGeom>
+          <a:noFill/>
+        </p:spPr>
+        <p:txBody>
+          <a:bodyPr wrap="square">
+            <a:spAutoFit/>
+          </a:bodyPr>
+          <a:lstStyle/>
+          <a:p>
+            <a:r>
+              <a:rPr sz="1200" b="0">
+                <a:solidFill>
+                  <a:srgbClr val="CADCFC"/>
+                </a:solidFill>
+                <a:latin typeface="Calibri"/>
+              </a:rPr>
+              <a:t>The prompt itself. The user's text, or the system prompt above it.</a:t>
+            </a:r>
+          </a:p>
+        </p:txBody>
+      </p:sp>
+      <p:sp>
+        <p:nvSpPr>
+          <p:cNvPr id="15" name="TextBox 14"/>
+          <p:cNvSpPr txBox="1"/>
+          <p:nvPr/>
+        </p:nvSpPr>
+        <p:spPr>
+          <a:xfrm>
+            <a:off x="10607040" y="2724912"/>
+            <a:ext cx="914400" cy="274320"/>
+          </a:xfrm>
+          <a:prstGeom prst="rect">
+            <a:avLst/>
+          </a:prstGeom>
+          <a:noFill/>
+        </p:spPr>
+        <p:txBody>
+          <a:bodyPr wrap="square">
+            <a:spAutoFit/>
+          </a:bodyPr>
+          <a:lstStyle/>
+          <a:p>
+            <a:r>
+              <a:rPr sz="1200" b="1">
                 <a:solidFill>
                   <a:srgbClr val="E0A458"/>
                 </a:solidFill>
-                <a:latin typeface="Cambria"/>
-              </a:rPr>
-              <a:t>INTENT</a:t>
-            </a:r>
-          </a:p>
-        </p:txBody>
-      </p:sp>
-      <p:sp>
-        <p:nvSpPr>
-          <p:cNvPr id="12" name="TextBox 11"/>
-          <p:cNvSpPr txBox="1"/>
-          <p:nvPr/>
-        </p:nvSpPr>
-        <p:spPr>
-          <a:xfrm>
-            <a:off x="4608576" y="2944368"/>
-            <a:ext cx="3017520" cy="365760"/>
-          </a:xfrm>
-          <a:prstGeom prst="rect">
-            <a:avLst/>
-          </a:prstGeom>
-          <a:noFill/>
-        </p:spPr>
-        <p:txBody>
-          <a:bodyPr wrap="square">
-            <a:spAutoFit/>
-          </a:bodyPr>
-          <a:lstStyle/>
-          <a:p>
-            <a:r>
-              <a:rPr sz="1400" b="1">
-                <a:solidFill>
-                  <a:srgbClr val="FFFFFF"/>
-                </a:solidFill>
-                <a:latin typeface="Calibri"/>
-              </a:rPr>
-              <a:t>Did someone mean it?</a:t>
-            </a:r>
-          </a:p>
-        </p:txBody>
-      </p:sp>
-      <p:sp>
-        <p:nvSpPr>
-          <p:cNvPr id="13" name="TextBox 12"/>
-          <p:cNvSpPr txBox="1"/>
-          <p:nvPr/>
-        </p:nvSpPr>
-        <p:spPr>
-          <a:xfrm>
-            <a:off x="4608576" y="3383280"/>
-            <a:ext cx="3108960" cy="1463040"/>
-          </a:xfrm>
-          <a:prstGeom prst="rect">
-            <a:avLst/>
-          </a:prstGeom>
-          <a:noFill/>
-        </p:spPr>
-        <p:txBody>
-          <a:bodyPr wrap="square">
-            <a:spAutoFit/>
-          </a:bodyPr>
-          <a:lstStyle/>
-          <a:p>
-            <a:pPr>
-              <a:spcAft>
-                <a:spcPts val="100"/>
-              </a:spcAft>
-            </a:pPr>
-            <a:r>
-              <a:rPr sz="1250" b="0">
-                <a:solidFill>
-                  <a:srgbClr val="CADCFC"/>
-                </a:solidFill>
-                <a:latin typeface="Calibri"/>
-              </a:rPr>
-              <a:t>Adversarial means a person put</a:t>
-            </a:r>
-          </a:p>
-          <a:p>
-            <a:pPr>
-              <a:spcAft>
-                <a:spcPts val="100"/>
-              </a:spcAft>
-            </a:pPr>
-            <a:r>
-              <a:rPr sz="1250" b="0">
-                <a:solidFill>
-                  <a:srgbClr val="CADCFC"/>
-                </a:solidFill>
-                <a:latin typeface="Calibri"/>
-              </a:rPr>
-              <a:t>it there to cause the effect.</a:t>
-            </a:r>
-          </a:p>
-          <a:p>
-            <a:pPr>
-              <a:spcAft>
-                <a:spcPts val="100"/>
-              </a:spcAft>
-            </a:pPr>
-            <a:r>
-              <a:rPr sz="1250" b="0">
-                <a:solidFill>
-                  <a:srgbClr val="CADCFC"/>
-                </a:solidFill>
-                <a:latin typeface="Calibri"/>
-              </a:rPr>
-              <a:t>Incidental means no one did.</a:t>
-            </a:r>
-          </a:p>
-          <a:p>
-            <a:pPr>
-              <a:spcAft>
-                <a:spcPts val="100"/>
-              </a:spcAft>
-            </a:pPr>
-            <a:r>
-              <a:rPr sz="1250" b="0">
-                <a:solidFill>
-                  <a:srgbClr val="CADCFC"/>
-                </a:solidFill>
-                <a:latin typeface="Calibri"/>
-              </a:rPr>
-              <a:t>The text is just long or stale.</a:t>
-            </a:r>
-          </a:p>
-        </p:txBody>
-      </p:sp>
-      <p:sp>
-        <p:nvSpPr>
-          <p:cNvPr id="14" name="TextBox 13"/>
-          <p:cNvSpPr txBox="1"/>
-          <p:nvPr/>
-        </p:nvSpPr>
-        <p:spPr>
-          <a:xfrm>
-            <a:off x="4608576" y="4828032"/>
-            <a:ext cx="3017520" cy="274320"/>
-          </a:xfrm>
-          <a:prstGeom prst="rect">
-            <a:avLst/>
-          </a:prstGeom>
-          <a:noFill/>
-        </p:spPr>
-        <p:txBody>
-          <a:bodyPr wrap="square">
-            <a:spAutoFit/>
-          </a:bodyPr>
-          <a:lstStyle/>
-          <a:p>
-            <a:r>
-              <a:rPr sz="1200" b="0">
-                <a:solidFill>
-                  <a:srgbClr val="CFE8EF"/>
-                </a:solidFill>
-                <a:latin typeface="Calibri"/>
-              </a:rPr>
-              <a:t>3 values</a:t>
-            </a:r>
-          </a:p>
-        </p:txBody>
-      </p:sp>
-      <p:sp>
-        <p:nvSpPr>
-          <p:cNvPr id="15" name="Rectangle 14"/>
+                <a:latin typeface="Calibri"/>
+              </a:rPr>
+              <a:t>66</a:t>
+            </a:r>
+          </a:p>
+        </p:txBody>
+      </p:sp>
+      <p:sp>
+        <p:nvSpPr>
+          <p:cNvPr id="16" name="Rectangle 15"/>
           <p:cNvSpPr/>
           <p:nvPr/>
         </p:nvSpPr>
         <p:spPr>
           <a:xfrm>
-            <a:off x="8065007" y="2331720"/>
-            <a:ext cx="3520440" cy="2880360"/>
+            <a:off x="640080" y="3072384"/>
+            <a:ext cx="10881360" cy="365760"/>
           </a:xfrm>
           <a:prstGeom prst="rect">
             <a:avLst/>
@@ -22706,169 +22294,778 @@
       </p:sp>
       <p:sp>
         <p:nvSpPr>
-          <p:cNvPr id="16" name="TextBox 15"/>
-          <p:cNvSpPr txBox="1"/>
-          <p:nvPr/>
-        </p:nvSpPr>
-        <p:spPr>
-          <a:xfrm>
-            <a:off x="8321039" y="2542032"/>
-            <a:ext cx="3017520" cy="365760"/>
-          </a:xfrm>
-          <a:prstGeom prst="rect">
-            <a:avLst/>
-          </a:prstGeom>
-          <a:noFill/>
-        </p:spPr>
-        <p:txBody>
-          <a:bodyPr wrap="square">
-            <a:spAutoFit/>
-          </a:bodyPr>
-          <a:lstStyle/>
-          <a:p>
-            <a:r>
-              <a:rPr sz="1600" b="1">
+          <p:cNvPr id="17" name="TextBox 16"/>
+          <p:cNvSpPr txBox="1"/>
+          <p:nvPr/>
+        </p:nvSpPr>
+        <p:spPr>
+          <a:xfrm>
+            <a:off x="868680" y="3127248"/>
+            <a:ext cx="2103120" cy="274320"/>
+          </a:xfrm>
+          <a:prstGeom prst="rect">
+            <a:avLst/>
+          </a:prstGeom>
+          <a:noFill/>
+        </p:spPr>
+        <p:txBody>
+          <a:bodyPr wrap="square">
+            <a:spAutoFit/>
+          </a:bodyPr>
+          <a:lstStyle/>
+          <a:p>
+            <a:r>
+              <a:rPr sz="1200" b="1">
+                <a:solidFill>
+                  <a:srgbClr val="FFFFFF"/>
+                </a:solidFill>
+                <a:latin typeface="Calibri"/>
+              </a:rPr>
+              <a:t>RAG</a:t>
+            </a:r>
+          </a:p>
+        </p:txBody>
+      </p:sp>
+      <p:sp>
+        <p:nvSpPr>
+          <p:cNvPr id="18" name="TextBox 17"/>
+          <p:cNvSpPr txBox="1"/>
+          <p:nvPr/>
+        </p:nvSpPr>
+        <p:spPr>
+          <a:xfrm>
+            <a:off x="3108960" y="3127248"/>
+            <a:ext cx="7315200" cy="274320"/>
+          </a:xfrm>
+          <a:prstGeom prst="rect">
+            <a:avLst/>
+          </a:prstGeom>
+          <a:noFill/>
+        </p:spPr>
+        <p:txBody>
+          <a:bodyPr wrap="square">
+            <a:spAutoFit/>
+          </a:bodyPr>
+          <a:lstStyle/>
+          <a:p>
+            <a:r>
+              <a:rPr sz="1200" b="0">
+                <a:solidFill>
+                  <a:srgbClr val="CADCFC"/>
+                </a:solidFill>
+                <a:latin typeface="Calibri"/>
+              </a:rPr>
+              <a:t>A document that a search step pulled out of a corpus.</a:t>
+            </a:r>
+          </a:p>
+        </p:txBody>
+      </p:sp>
+      <p:sp>
+        <p:nvSpPr>
+          <p:cNvPr id="19" name="TextBox 18"/>
+          <p:cNvSpPr txBox="1"/>
+          <p:nvPr/>
+        </p:nvSpPr>
+        <p:spPr>
+          <a:xfrm>
+            <a:off x="10607040" y="3127248"/>
+            <a:ext cx="914400" cy="274320"/>
+          </a:xfrm>
+          <a:prstGeom prst="rect">
+            <a:avLst/>
+          </a:prstGeom>
+          <a:noFill/>
+        </p:spPr>
+        <p:txBody>
+          <a:bodyPr wrap="square">
+            <a:spAutoFit/>
+          </a:bodyPr>
+          <a:lstStyle/>
+          <a:p>
+            <a:r>
+              <a:rPr sz="1200" b="1">
                 <a:solidFill>
                   <a:srgbClr val="E0A458"/>
                 </a:solidFill>
-                <a:latin typeface="Cambria"/>
-              </a:rPr>
-              <a:t>CONSEQUENCE</a:t>
-            </a:r>
-          </a:p>
-        </p:txBody>
-      </p:sp>
-      <p:sp>
-        <p:nvSpPr>
-          <p:cNvPr id="17" name="TextBox 16"/>
-          <p:cNvSpPr txBox="1"/>
-          <p:nvPr/>
-        </p:nvSpPr>
-        <p:spPr>
-          <a:xfrm>
-            <a:off x="8321039" y="2944368"/>
-            <a:ext cx="3017520" cy="365760"/>
-          </a:xfrm>
-          <a:prstGeom prst="rect">
-            <a:avLst/>
-          </a:prstGeom>
-          <a:noFill/>
-        </p:spPr>
-        <p:txBody>
-          <a:bodyPr wrap="square">
-            <a:spAutoFit/>
-          </a:bodyPr>
-          <a:lstStyle/>
-          <a:p>
-            <a:r>
-              <a:rPr sz="1400" b="1">
+                <a:latin typeface="Calibri"/>
+              </a:rPr>
+              <a:t>28</a:t>
+            </a:r>
+          </a:p>
+        </p:txBody>
+      </p:sp>
+      <p:sp>
+        <p:nvSpPr>
+          <p:cNvPr id="20" name="Rectangle 19"/>
+          <p:cNvSpPr/>
+          <p:nvPr/>
+        </p:nvSpPr>
+        <p:spPr>
+          <a:xfrm>
+            <a:off x="640080" y="3474720"/>
+            <a:ext cx="10881360" cy="365760"/>
+          </a:xfrm>
+          <a:prstGeom prst="rect">
+            <a:avLst/>
+          </a:prstGeom>
+          <a:solidFill>
+            <a:srgbClr val="1B334F"/>
+          </a:solidFill>
+          <a:ln>
+            <a:noFill/>
+          </a:ln>
+          <a:effectLst/>
+        </p:spPr>
+        <p:style>
+          <a:lnRef idx="1">
+            <a:schemeClr val="accent1"/>
+          </a:lnRef>
+          <a:fillRef idx="3">
+            <a:schemeClr val="accent1"/>
+          </a:fillRef>
+          <a:effectRef idx="2">
+            <a:schemeClr val="accent1"/>
+          </a:effectRef>
+          <a:fontRef idx="minor">
+            <a:schemeClr val="lt1"/>
+          </a:fontRef>
+        </p:style>
+        <p:txBody>
+          <a:bodyPr rtlCol="0" anchor="ctr"/>
+          <a:lstStyle/>
+          <a:p>
+            <a:pPr algn="ctr"/>
+          </a:p>
+        </p:txBody>
+      </p:sp>
+      <p:sp>
+        <p:nvSpPr>
+          <p:cNvPr id="21" name="TextBox 20"/>
+          <p:cNvSpPr txBox="1"/>
+          <p:nvPr/>
+        </p:nvSpPr>
+        <p:spPr>
+          <a:xfrm>
+            <a:off x="868680" y="3529584"/>
+            <a:ext cx="2103120" cy="274320"/>
+          </a:xfrm>
+          <a:prstGeom prst="rect">
+            <a:avLst/>
+          </a:prstGeom>
+          <a:noFill/>
+        </p:spPr>
+        <p:txBody>
+          <a:bodyPr wrap="square">
+            <a:spAutoFit/>
+          </a:bodyPr>
+          <a:lstStyle/>
+          <a:p>
+            <a:r>
+              <a:rPr sz="1200" b="1">
                 <a:solidFill>
                   <a:srgbClr val="FFFFFF"/>
                 </a:solidFill>
                 <a:latin typeface="Calibri"/>
               </a:rPr>
-              <a:t>What went wrong?</a:t>
-            </a:r>
-          </a:p>
-        </p:txBody>
-      </p:sp>
-      <p:sp>
-        <p:nvSpPr>
-          <p:cNvPr id="18" name="TextBox 17"/>
-          <p:cNvSpPr txBox="1"/>
-          <p:nvPr/>
-        </p:nvSpPr>
-        <p:spPr>
-          <a:xfrm>
-            <a:off x="8321039" y="3383280"/>
-            <a:ext cx="3108960" cy="1463040"/>
-          </a:xfrm>
-          <a:prstGeom prst="rect">
-            <a:avLst/>
-          </a:prstGeom>
-          <a:noFill/>
-        </p:spPr>
-        <p:txBody>
-          <a:bodyPr wrap="square">
-            <a:spAutoFit/>
-          </a:bodyPr>
-          <a:lstStyle/>
-          <a:p>
-            <a:pPr>
-              <a:spcAft>
-                <a:spcPts val="100"/>
-              </a:spcAft>
-            </a:pPr>
-            <a:r>
-              <a:rPr sz="1250" b="0">
+              <a:t>cross-modal</a:t>
+            </a:r>
+          </a:p>
+        </p:txBody>
+      </p:sp>
+      <p:sp>
+        <p:nvSpPr>
+          <p:cNvPr id="22" name="TextBox 21"/>
+          <p:cNvSpPr txBox="1"/>
+          <p:nvPr/>
+        </p:nvSpPr>
+        <p:spPr>
+          <a:xfrm>
+            <a:off x="3108960" y="3529584"/>
+            <a:ext cx="7315200" cy="274320"/>
+          </a:xfrm>
+          <a:prstGeom prst="rect">
+            <a:avLst/>
+          </a:prstGeom>
+          <a:noFill/>
+        </p:spPr>
+        <p:txBody>
+          <a:bodyPr wrap="square">
+            <a:spAutoFit/>
+          </a:bodyPr>
+          <a:lstStyle/>
+          <a:p>
+            <a:r>
+              <a:rPr sz="1200" b="0">
                 <a:solidFill>
                   <a:srgbClr val="CADCFC"/>
                 </a:solidFill>
                 <a:latin typeface="Calibri"/>
               </a:rPr>
-              <a:t>The effect on the agent after</a:t>
-            </a:r>
-          </a:p>
-          <a:p>
-            <a:pPr>
-              <a:spcAft>
-                <a:spcPts val="100"/>
-              </a:spcAft>
-            </a:pPr>
-            <a:r>
-              <a:rPr sz="1250" b="0">
+              <a:t>Text carried inside an image, audio or video, not in a text field.</a:t>
+            </a:r>
+          </a:p>
+        </p:txBody>
+      </p:sp>
+      <p:sp>
+        <p:nvSpPr>
+          <p:cNvPr id="23" name="TextBox 22"/>
+          <p:cNvSpPr txBox="1"/>
+          <p:nvPr/>
+        </p:nvSpPr>
+        <p:spPr>
+          <a:xfrm>
+            <a:off x="10607040" y="3529584"/>
+            <a:ext cx="914400" cy="274320"/>
+          </a:xfrm>
+          <a:prstGeom prst="rect">
+            <a:avLst/>
+          </a:prstGeom>
+          <a:noFill/>
+        </p:spPr>
+        <p:txBody>
+          <a:bodyPr wrap="square">
+            <a:spAutoFit/>
+          </a:bodyPr>
+          <a:lstStyle/>
+          <a:p>
+            <a:r>
+              <a:rPr sz="1200" b="1">
+                <a:solidFill>
+                  <a:srgbClr val="E0A458"/>
+                </a:solidFill>
+                <a:latin typeface="Calibri"/>
+              </a:rPr>
+              <a:t>18</a:t>
+            </a:r>
+          </a:p>
+        </p:txBody>
+      </p:sp>
+      <p:sp>
+        <p:nvSpPr>
+          <p:cNvPr id="24" name="Rectangle 23"/>
+          <p:cNvSpPr/>
+          <p:nvPr/>
+        </p:nvSpPr>
+        <p:spPr>
+          <a:xfrm>
+            <a:off x="640080" y="3877056"/>
+            <a:ext cx="10881360" cy="365760"/>
+          </a:xfrm>
+          <a:prstGeom prst="rect">
+            <a:avLst/>
+          </a:prstGeom>
+          <a:solidFill>
+            <a:srgbClr val="1B334F"/>
+          </a:solidFill>
+          <a:ln>
+            <a:noFill/>
+          </a:ln>
+          <a:effectLst/>
+        </p:spPr>
+        <p:style>
+          <a:lnRef idx="1">
+            <a:schemeClr val="accent1"/>
+          </a:lnRef>
+          <a:fillRef idx="3">
+            <a:schemeClr val="accent1"/>
+          </a:fillRef>
+          <a:effectRef idx="2">
+            <a:schemeClr val="accent1"/>
+          </a:effectRef>
+          <a:fontRef idx="minor">
+            <a:schemeClr val="lt1"/>
+          </a:fontRef>
+        </p:style>
+        <p:txBody>
+          <a:bodyPr rtlCol="0" anchor="ctr"/>
+          <a:lstStyle/>
+          <a:p>
+            <a:pPr algn="ctr"/>
+          </a:p>
+        </p:txBody>
+      </p:sp>
+      <p:sp>
+        <p:nvSpPr>
+          <p:cNvPr id="25" name="TextBox 24"/>
+          <p:cNvSpPr txBox="1"/>
+          <p:nvPr/>
+        </p:nvSpPr>
+        <p:spPr>
+          <a:xfrm>
+            <a:off x="868680" y="3931920"/>
+            <a:ext cx="2103120" cy="274320"/>
+          </a:xfrm>
+          <a:prstGeom prst="rect">
+            <a:avLst/>
+          </a:prstGeom>
+          <a:noFill/>
+        </p:spPr>
+        <p:txBody>
+          <a:bodyPr wrap="square">
+            <a:spAutoFit/>
+          </a:bodyPr>
+          <a:lstStyle/>
+          <a:p>
+            <a:r>
+              <a:rPr sz="1200" b="1">
+                <a:solidFill>
+                  <a:srgbClr val="FFFFFF"/>
+                </a:solidFill>
+                <a:latin typeface="Calibri"/>
+              </a:rPr>
+              <a:t>memory</a:t>
+            </a:r>
+          </a:p>
+        </p:txBody>
+      </p:sp>
+      <p:sp>
+        <p:nvSpPr>
+          <p:cNvPr id="26" name="TextBox 25"/>
+          <p:cNvSpPr txBox="1"/>
+          <p:nvPr/>
+        </p:nvSpPr>
+        <p:spPr>
+          <a:xfrm>
+            <a:off x="3108960" y="3931920"/>
+            <a:ext cx="7315200" cy="274320"/>
+          </a:xfrm>
+          <a:prstGeom prst="rect">
+            <a:avLst/>
+          </a:prstGeom>
+          <a:noFill/>
+        </p:spPr>
+        <p:txBody>
+          <a:bodyPr wrap="square">
+            <a:spAutoFit/>
+          </a:bodyPr>
+          <a:lstStyle/>
+          <a:p>
+            <a:r>
+              <a:rPr sz="1200" b="0">
                 <a:solidFill>
                   <a:srgbClr val="CADCFC"/>
                 </a:solidFill>
                 <a:latin typeface="Calibri"/>
               </a:rPr>
-              <a:t>the text is in the window.</a:t>
-            </a:r>
-          </a:p>
-          <a:p>
-            <a:pPr>
-              <a:spcAft>
-                <a:spcPts val="100"/>
-              </a:spcAft>
-            </a:pPr>
-            <a:r>
-              <a:rPr sz="1250" b="0">
+              <a:t>Something the agent stored on an earlier run and reads again now.</a:t>
+            </a:r>
+          </a:p>
+        </p:txBody>
+      </p:sp>
+      <p:sp>
+        <p:nvSpPr>
+          <p:cNvPr id="27" name="TextBox 26"/>
+          <p:cNvSpPr txBox="1"/>
+          <p:nvPr/>
+        </p:nvSpPr>
+        <p:spPr>
+          <a:xfrm>
+            <a:off x="10607040" y="3931920"/>
+            <a:ext cx="914400" cy="274320"/>
+          </a:xfrm>
+          <a:prstGeom prst="rect">
+            <a:avLst/>
+          </a:prstGeom>
+          <a:noFill/>
+        </p:spPr>
+        <p:txBody>
+          <a:bodyPr wrap="square">
+            <a:spAutoFit/>
+          </a:bodyPr>
+          <a:lstStyle/>
+          <a:p>
+            <a:r>
+              <a:rPr sz="1200" b="1">
+                <a:solidFill>
+                  <a:srgbClr val="E0A458"/>
+                </a:solidFill>
+                <a:latin typeface="Calibri"/>
+              </a:rPr>
+              <a:t>14</a:t>
+            </a:r>
+          </a:p>
+        </p:txBody>
+      </p:sp>
+      <p:sp>
+        <p:nvSpPr>
+          <p:cNvPr id="28" name="Rectangle 27"/>
+          <p:cNvSpPr/>
+          <p:nvPr/>
+        </p:nvSpPr>
+        <p:spPr>
+          <a:xfrm>
+            <a:off x="640080" y="4279392"/>
+            <a:ext cx="10881360" cy="365760"/>
+          </a:xfrm>
+          <a:prstGeom prst="rect">
+            <a:avLst/>
+          </a:prstGeom>
+          <a:solidFill>
+            <a:srgbClr val="1B334F"/>
+          </a:solidFill>
+          <a:ln>
+            <a:noFill/>
+          </a:ln>
+          <a:effectLst/>
+        </p:spPr>
+        <p:style>
+          <a:lnRef idx="1">
+            <a:schemeClr val="accent1"/>
+          </a:lnRef>
+          <a:fillRef idx="3">
+            <a:schemeClr val="accent1"/>
+          </a:fillRef>
+          <a:effectRef idx="2">
+            <a:schemeClr val="accent1"/>
+          </a:effectRef>
+          <a:fontRef idx="minor">
+            <a:schemeClr val="lt1"/>
+          </a:fontRef>
+        </p:style>
+        <p:txBody>
+          <a:bodyPr rtlCol="0" anchor="ctr"/>
+          <a:lstStyle/>
+          <a:p>
+            <a:pPr algn="ctr"/>
+          </a:p>
+        </p:txBody>
+      </p:sp>
+      <p:sp>
+        <p:nvSpPr>
+          <p:cNvPr id="29" name="TextBox 28"/>
+          <p:cNvSpPr txBox="1"/>
+          <p:nvPr/>
+        </p:nvSpPr>
+        <p:spPr>
+          <a:xfrm>
+            <a:off x="868680" y="4334255"/>
+            <a:ext cx="2103120" cy="274320"/>
+          </a:xfrm>
+          <a:prstGeom prst="rect">
+            <a:avLst/>
+          </a:prstGeom>
+          <a:noFill/>
+        </p:spPr>
+        <p:txBody>
+          <a:bodyPr wrap="square">
+            <a:spAutoFit/>
+          </a:bodyPr>
+          <a:lstStyle/>
+          <a:p>
+            <a:r>
+              <a:rPr sz="1200" b="1">
+                <a:solidFill>
+                  <a:srgbClr val="FFFFFF"/>
+                </a:solidFill>
+                <a:latin typeface="Calibri"/>
+              </a:rPr>
+              <a:t>tool-metadata</a:t>
+            </a:r>
+          </a:p>
+        </p:txBody>
+      </p:sp>
+      <p:sp>
+        <p:nvSpPr>
+          <p:cNvPr id="30" name="TextBox 29"/>
+          <p:cNvSpPr txBox="1"/>
+          <p:nvPr/>
+        </p:nvSpPr>
+        <p:spPr>
+          <a:xfrm>
+            <a:off x="3108960" y="4334255"/>
+            <a:ext cx="7315200" cy="274320"/>
+          </a:xfrm>
+          <a:prstGeom prst="rect">
+            <a:avLst/>
+          </a:prstGeom>
+          <a:noFill/>
+        </p:spPr>
+        <p:txBody>
+          <a:bodyPr wrap="square">
+            <a:spAutoFit/>
+          </a:bodyPr>
+          <a:lstStyle/>
+          <a:p>
+            <a:r>
+              <a:rPr sz="1200" b="0">
                 <a:solidFill>
                   <a:srgbClr val="CADCFC"/>
                 </a:solidFill>
                 <a:latin typeface="Calibri"/>
               </a:rPr>
-              <a:t>A wrong answer and a stolen</a:t>
-            </a:r>
-          </a:p>
-          <a:p>
-            <a:pPr>
-              <a:spcAft>
-                <a:spcPts val="100"/>
-              </a:spcAft>
-            </a:pPr>
-            <a:r>
-              <a:rPr sz="1250" b="0">
+              <a:t>The description of a tool, not its output. The text that says what the tool does.</a:t>
+            </a:r>
+          </a:p>
+        </p:txBody>
+      </p:sp>
+      <p:sp>
+        <p:nvSpPr>
+          <p:cNvPr id="31" name="TextBox 30"/>
+          <p:cNvSpPr txBox="1"/>
+          <p:nvPr/>
+        </p:nvSpPr>
+        <p:spPr>
+          <a:xfrm>
+            <a:off x="10607040" y="4334255"/>
+            <a:ext cx="914400" cy="274320"/>
+          </a:xfrm>
+          <a:prstGeom prst="rect">
+            <a:avLst/>
+          </a:prstGeom>
+          <a:noFill/>
+        </p:spPr>
+        <p:txBody>
+          <a:bodyPr wrap="square">
+            <a:spAutoFit/>
+          </a:bodyPr>
+          <a:lstStyle/>
+          <a:p>
+            <a:r>
+              <a:rPr sz="1200" b="1">
+                <a:solidFill>
+                  <a:srgbClr val="E0A458"/>
+                </a:solidFill>
+                <a:latin typeface="Calibri"/>
+              </a:rPr>
+              <a:t>12</a:t>
+            </a:r>
+          </a:p>
+        </p:txBody>
+      </p:sp>
+      <p:sp>
+        <p:nvSpPr>
+          <p:cNvPr id="32" name="Rectangle 31"/>
+          <p:cNvSpPr/>
+          <p:nvPr/>
+        </p:nvSpPr>
+        <p:spPr>
+          <a:xfrm>
+            <a:off x="640080" y="4681728"/>
+            <a:ext cx="10881360" cy="365760"/>
+          </a:xfrm>
+          <a:prstGeom prst="rect">
+            <a:avLst/>
+          </a:prstGeom>
+          <a:solidFill>
+            <a:srgbClr val="1B334F"/>
+          </a:solidFill>
+          <a:ln>
+            <a:noFill/>
+          </a:ln>
+          <a:effectLst/>
+        </p:spPr>
+        <p:style>
+          <a:lnRef idx="1">
+            <a:schemeClr val="accent1"/>
+          </a:lnRef>
+          <a:fillRef idx="3">
+            <a:schemeClr val="accent1"/>
+          </a:fillRef>
+          <a:effectRef idx="2">
+            <a:schemeClr val="accent1"/>
+          </a:effectRef>
+          <a:fontRef idx="minor">
+            <a:schemeClr val="lt1"/>
+          </a:fontRef>
+        </p:style>
+        <p:txBody>
+          <a:bodyPr rtlCol="0" anchor="ctr"/>
+          <a:lstStyle/>
+          <a:p>
+            <a:pPr algn="ctr"/>
+          </a:p>
+        </p:txBody>
+      </p:sp>
+      <p:sp>
+        <p:nvSpPr>
+          <p:cNvPr id="33" name="TextBox 32"/>
+          <p:cNvSpPr txBox="1"/>
+          <p:nvPr/>
+        </p:nvSpPr>
+        <p:spPr>
+          <a:xfrm>
+            <a:off x="868680" y="4736592"/>
+            <a:ext cx="2103120" cy="274320"/>
+          </a:xfrm>
+          <a:prstGeom prst="rect">
+            <a:avLst/>
+          </a:prstGeom>
+          <a:noFill/>
+        </p:spPr>
+        <p:txBody>
+          <a:bodyPr wrap="square">
+            <a:spAutoFit/>
+          </a:bodyPr>
+          <a:lstStyle/>
+          <a:p>
+            <a:r>
+              <a:rPr sz="1200" b="1">
+                <a:solidFill>
+                  <a:srgbClr val="FFFFFF"/>
+                </a:solidFill>
+                <a:latin typeface="Calibri"/>
+              </a:rPr>
+              <a:t>multi-agent</a:t>
+            </a:r>
+          </a:p>
+        </p:txBody>
+      </p:sp>
+      <p:sp>
+        <p:nvSpPr>
+          <p:cNvPr id="34" name="TextBox 33"/>
+          <p:cNvSpPr txBox="1"/>
+          <p:nvPr/>
+        </p:nvSpPr>
+        <p:spPr>
+          <a:xfrm>
+            <a:off x="3108960" y="4736592"/>
+            <a:ext cx="7315200" cy="274320"/>
+          </a:xfrm>
+          <a:prstGeom prst="rect">
+            <a:avLst/>
+          </a:prstGeom>
+          <a:noFill/>
+        </p:spPr>
+        <p:txBody>
+          <a:bodyPr wrap="square">
+            <a:spAutoFit/>
+          </a:bodyPr>
+          <a:lstStyle/>
+          <a:p>
+            <a:r>
+              <a:rPr sz="1200" b="0">
                 <a:solidFill>
                   <a:srgbClr val="CADCFC"/>
                 </a:solidFill>
                 <a:latin typeface="Calibri"/>
               </a:rPr>
-              <a:t>file are different effects.</a:t>
-            </a:r>
-          </a:p>
-        </p:txBody>
-      </p:sp>
-      <p:sp>
-        <p:nvSpPr>
-          <p:cNvPr id="19" name="TextBox 18"/>
-          <p:cNvSpPr txBox="1"/>
-          <p:nvPr/>
-        </p:nvSpPr>
-        <p:spPr>
-          <a:xfrm>
-            <a:off x="8321039" y="4828032"/>
-            <a:ext cx="3017520" cy="274320"/>
+              <a:t>A message from another agent in the same system.</a:t>
+            </a:r>
+          </a:p>
+        </p:txBody>
+      </p:sp>
+      <p:sp>
+        <p:nvSpPr>
+          <p:cNvPr id="35" name="TextBox 34"/>
+          <p:cNvSpPr txBox="1"/>
+          <p:nvPr/>
+        </p:nvSpPr>
+        <p:spPr>
+          <a:xfrm>
+            <a:off x="10607040" y="4736592"/>
+            <a:ext cx="914400" cy="274320"/>
+          </a:xfrm>
+          <a:prstGeom prst="rect">
+            <a:avLst/>
+          </a:prstGeom>
+          <a:noFill/>
+        </p:spPr>
+        <p:txBody>
+          <a:bodyPr wrap="square">
+            <a:spAutoFit/>
+          </a:bodyPr>
+          <a:lstStyle/>
+          <a:p>
+            <a:r>
+              <a:rPr sz="1200" b="1">
+                <a:solidFill>
+                  <a:srgbClr val="E0A458"/>
+                </a:solidFill>
+                <a:latin typeface="Calibri"/>
+              </a:rPr>
+              <a:t>9</a:t>
+            </a:r>
+          </a:p>
+        </p:txBody>
+      </p:sp>
+      <p:sp>
+        <p:nvSpPr>
+          <p:cNvPr id="36" name="Rectangle 35"/>
+          <p:cNvSpPr/>
+          <p:nvPr/>
+        </p:nvSpPr>
+        <p:spPr>
+          <a:xfrm>
+            <a:off x="640080" y="5084064"/>
+            <a:ext cx="10881360" cy="365760"/>
+          </a:xfrm>
+          <a:prstGeom prst="rect">
+            <a:avLst/>
+          </a:prstGeom>
+          <a:solidFill>
+            <a:srgbClr val="1B334F"/>
+          </a:solidFill>
+          <a:ln>
+            <a:noFill/>
+          </a:ln>
+          <a:effectLst/>
+        </p:spPr>
+        <p:style>
+          <a:lnRef idx="1">
+            <a:schemeClr val="accent1"/>
+          </a:lnRef>
+          <a:fillRef idx="3">
+            <a:schemeClr val="accent1"/>
+          </a:fillRef>
+          <a:effectRef idx="2">
+            <a:schemeClr val="accent1"/>
+          </a:effectRef>
+          <a:fontRef idx="minor">
+            <a:schemeClr val="lt1"/>
+          </a:fontRef>
+        </p:style>
+        <p:txBody>
+          <a:bodyPr rtlCol="0" anchor="ctr"/>
+          <a:lstStyle/>
+          <a:p>
+            <a:pPr algn="ctr"/>
+          </a:p>
+        </p:txBody>
+      </p:sp>
+      <p:sp>
+        <p:nvSpPr>
+          <p:cNvPr id="37" name="TextBox 36"/>
+          <p:cNvSpPr txBox="1"/>
+          <p:nvPr/>
+        </p:nvSpPr>
+        <p:spPr>
+          <a:xfrm>
+            <a:off x="868680" y="5138928"/>
+            <a:ext cx="2103120" cy="274320"/>
+          </a:xfrm>
+          <a:prstGeom prst="rect">
+            <a:avLst/>
+          </a:prstGeom>
+          <a:noFill/>
+        </p:spPr>
+        <p:txBody>
+          <a:bodyPr wrap="square">
+            <a:spAutoFit/>
+          </a:bodyPr>
+          <a:lstStyle/>
+          <a:p>
+            <a:r>
+              <a:rPr sz="1200" b="1">
+                <a:solidFill>
+                  <a:srgbClr val="FFFFFF"/>
+                </a:solidFill>
+                <a:latin typeface="Calibri"/>
+              </a:rPr>
+              <a:t>supply-chain</a:t>
+            </a:r>
+          </a:p>
+        </p:txBody>
+      </p:sp>
+      <p:sp>
+        <p:nvSpPr>
+          <p:cNvPr id="38" name="TextBox 37"/>
+          <p:cNvSpPr txBox="1"/>
+          <p:nvPr/>
+        </p:nvSpPr>
+        <p:spPr>
+          <a:xfrm>
+            <a:off x="3108960" y="5138928"/>
+            <a:ext cx="7315200" cy="274320"/>
           </a:xfrm>
           <a:prstGeom prst="rect">
             <a:avLst/>
@@ -22884,82 +23081,296 @@
             <a:r>
               <a:rPr sz="1200" b="0">
                 <a:solidFill>
+                  <a:srgbClr val="CADCFC"/>
+                </a:solidFill>
+                <a:latin typeface="Calibri"/>
+              </a:rPr>
+              <a:t>A package, template or prompt file the agent inherits before it starts.</a:t>
+            </a:r>
+          </a:p>
+        </p:txBody>
+      </p:sp>
+      <p:sp>
+        <p:nvSpPr>
+          <p:cNvPr id="39" name="TextBox 38"/>
+          <p:cNvSpPr txBox="1"/>
+          <p:nvPr/>
+        </p:nvSpPr>
+        <p:spPr>
+          <a:xfrm>
+            <a:off x="10607040" y="5138928"/>
+            <a:ext cx="914400" cy="274320"/>
+          </a:xfrm>
+          <a:prstGeom prst="rect">
+            <a:avLst/>
+          </a:prstGeom>
+          <a:noFill/>
+        </p:spPr>
+        <p:txBody>
+          <a:bodyPr wrap="square">
+            <a:spAutoFit/>
+          </a:bodyPr>
+          <a:lstStyle/>
+          <a:p>
+            <a:r>
+              <a:rPr sz="1200" b="1">
+                <a:solidFill>
+                  <a:srgbClr val="E0A458"/>
+                </a:solidFill>
+                <a:latin typeface="Calibri"/>
+              </a:rPr>
+              <a:t>6</a:t>
+            </a:r>
+          </a:p>
+        </p:txBody>
+      </p:sp>
+      <p:sp>
+        <p:nvSpPr>
+          <p:cNvPr id="40" name="Rectangle 39"/>
+          <p:cNvSpPr/>
+          <p:nvPr/>
+        </p:nvSpPr>
+        <p:spPr>
+          <a:xfrm>
+            <a:off x="640080" y="5486400"/>
+            <a:ext cx="10881360" cy="365760"/>
+          </a:xfrm>
+          <a:prstGeom prst="rect">
+            <a:avLst/>
+          </a:prstGeom>
+          <a:solidFill>
+            <a:srgbClr val="1B334F"/>
+          </a:solidFill>
+          <a:ln>
+            <a:noFill/>
+          </a:ln>
+          <a:effectLst/>
+        </p:spPr>
+        <p:style>
+          <a:lnRef idx="1">
+            <a:schemeClr val="accent1"/>
+          </a:lnRef>
+          <a:fillRef idx="3">
+            <a:schemeClr val="accent1"/>
+          </a:fillRef>
+          <a:effectRef idx="2">
+            <a:schemeClr val="accent1"/>
+          </a:effectRef>
+          <a:fontRef idx="minor">
+            <a:schemeClr val="lt1"/>
+          </a:fontRef>
+        </p:style>
+        <p:txBody>
+          <a:bodyPr rtlCol="0" anchor="ctr"/>
+          <a:lstStyle/>
+          <a:p>
+            <a:pPr algn="ctr"/>
+          </a:p>
+        </p:txBody>
+      </p:sp>
+      <p:sp>
+        <p:nvSpPr>
+          <p:cNvPr id="41" name="TextBox 40"/>
+          <p:cNvSpPr txBox="1"/>
+          <p:nvPr/>
+        </p:nvSpPr>
+        <p:spPr>
+          <a:xfrm>
+            <a:off x="868680" y="5541264"/>
+            <a:ext cx="2103120" cy="274320"/>
+          </a:xfrm>
+          <a:prstGeom prst="rect">
+            <a:avLst/>
+          </a:prstGeom>
+          <a:noFill/>
+        </p:spPr>
+        <p:txBody>
+          <a:bodyPr wrap="square">
+            <a:spAutoFit/>
+          </a:bodyPr>
+          <a:lstStyle/>
+          <a:p>
+            <a:r>
+              <a:rPr sz="1200" b="1">
+                <a:solidFill>
+                  <a:srgbClr val="FFFFFF"/>
+                </a:solidFill>
+                <a:latin typeface="Calibri"/>
+              </a:rPr>
+              <a:t>skill</a:t>
+            </a:r>
+          </a:p>
+        </p:txBody>
+      </p:sp>
+      <p:sp>
+        <p:nvSpPr>
+          <p:cNvPr id="42" name="TextBox 41"/>
+          <p:cNvSpPr txBox="1"/>
+          <p:nvPr/>
+        </p:nvSpPr>
+        <p:spPr>
+          <a:xfrm>
+            <a:off x="3108960" y="5541264"/>
+            <a:ext cx="7315200" cy="274320"/>
+          </a:xfrm>
+          <a:prstGeom prst="rect">
+            <a:avLst/>
+          </a:prstGeom>
+          <a:noFill/>
+        </p:spPr>
+        <p:txBody>
+          <a:bodyPr wrap="square">
+            <a:spAutoFit/>
+          </a:bodyPr>
+          <a:lstStyle/>
+          <a:p>
+            <a:r>
+              <a:rPr sz="1200" b="0">
+                <a:solidFill>
+                  <a:srgbClr val="CADCFC"/>
+                </a:solidFill>
+                <a:latin typeface="Calibri"/>
+              </a:rPr>
+              <a:t>A stored procedure the agent loads and follows.</a:t>
+            </a:r>
+          </a:p>
+        </p:txBody>
+      </p:sp>
+      <p:sp>
+        <p:nvSpPr>
+          <p:cNvPr id="43" name="TextBox 42"/>
+          <p:cNvSpPr txBox="1"/>
+          <p:nvPr/>
+        </p:nvSpPr>
+        <p:spPr>
+          <a:xfrm>
+            <a:off x="10607040" y="5541264"/>
+            <a:ext cx="914400" cy="274320"/>
+          </a:xfrm>
+          <a:prstGeom prst="rect">
+            <a:avLst/>
+          </a:prstGeom>
+          <a:noFill/>
+        </p:spPr>
+        <p:txBody>
+          <a:bodyPr wrap="square">
+            <a:spAutoFit/>
+          </a:bodyPr>
+          <a:lstStyle/>
+          <a:p>
+            <a:r>
+              <a:rPr sz="1200" b="1">
+                <a:solidFill>
+                  <a:srgbClr val="E0A458"/>
+                </a:solidFill>
+                <a:latin typeface="Calibri"/>
+              </a:rPr>
+              <a:t>4</a:t>
+            </a:r>
+          </a:p>
+        </p:txBody>
+      </p:sp>
+      <p:sp>
+        <p:nvSpPr>
+          <p:cNvPr id="44" name="TextBox 43"/>
+          <p:cNvSpPr txBox="1"/>
+          <p:nvPr/>
+        </p:nvSpPr>
+        <p:spPr>
+          <a:xfrm>
+            <a:off x="640080" y="5925312"/>
+            <a:ext cx="10881360" cy="365760"/>
+          </a:xfrm>
+          <a:prstGeom prst="rect">
+            <a:avLst/>
+          </a:prstGeom>
+          <a:noFill/>
+        </p:spPr>
+        <p:txBody>
+          <a:bodyPr wrap="square">
+            <a:spAutoFit/>
+          </a:bodyPr>
+          <a:lstStyle/>
+          <a:p>
+            <a:r>
+              <a:rPr sz="1200" b="0">
+                <a:solidFill>
                   <a:srgbClr val="CFE8EF"/>
                 </a:solidFill>
                 <a:latin typeface="Calibri"/>
               </a:rPr>
-              <a:t>6 values</a:t>
-            </a:r>
-          </a:p>
-        </p:txBody>
-      </p:sp>
-      <p:sp>
-        <p:nvSpPr>
-          <p:cNvPr id="20" name="TextBox 19"/>
-          <p:cNvSpPr txBox="1"/>
-          <p:nvPr/>
-        </p:nvSpPr>
-        <p:spPr>
-          <a:xfrm>
-            <a:off x="640080" y="5486400"/>
-            <a:ext cx="10881360" cy="1097280"/>
-          </a:xfrm>
-          <a:prstGeom prst="rect">
-            <a:avLst/>
-          </a:prstGeom>
-          <a:noFill/>
-        </p:spPr>
-        <p:txBody>
-          <a:bodyPr wrap="square">
-            <a:spAutoFit/>
-          </a:bodyPr>
-          <a:lstStyle/>
-          <a:p>
-            <a:pPr>
-              <a:spcAft>
-                <a:spcPts val="400"/>
-              </a:spcAft>
-            </a:pPr>
-            <a:r>
-              <a:rPr sz="1500" b="1">
-                <a:solidFill>
-                  <a:srgbClr val="FFFFFF"/>
-                </a:solidFill>
-                <a:latin typeface="Calibri"/>
-              </a:rPr>
-              <a:t>9 channels x 3 intents x 6 consequences = 162 cells. We call this the cube.</a:t>
-            </a:r>
-          </a:p>
-          <a:p>
-            <a:pPr>
-              <a:spcAft>
-                <a:spcPts val="400"/>
-              </a:spcAft>
-            </a:pPr>
-            <a:r>
-              <a:rPr sz="1300" b="0">
-                <a:solidFill>
-                  <a:srgbClr val="CADCFC"/>
-                </a:solidFill>
-                <a:latin typeface="Calibri"/>
-              </a:rPr>
-              <a:t>One paper can fill more than one cell. An empty cell means that nobody has studied that combination.</a:t>
-            </a:r>
-          </a:p>
-          <a:p>
-            <a:pPr>
-              <a:spcAft>
-                <a:spcPts val="400"/>
-              </a:spcAft>
-            </a:pPr>
-            <a:r>
-              <a:rPr sz="1300" b="1">
-                <a:solidFill>
-                  <a:srgbClr val="E0A458"/>
-                </a:solidFill>
-                <a:latin typeface="Calibri"/>
-              </a:rPr>
-              <a:t>The cube is the spine of the paper. It shows what the field knows and what it has never looked at.</a:t>
+              <a:t>The right column counts the named attacks we found for that channel. A defense sits on a channel too.</a:t>
+            </a:r>
+          </a:p>
+        </p:txBody>
+      </p:sp>
+      <p:sp>
+        <p:nvSpPr>
+          <p:cNvPr id="45" name="TextBox 44"/>
+          <p:cNvSpPr txBox="1"/>
+          <p:nvPr/>
+        </p:nvSpPr>
+        <p:spPr>
+          <a:xfrm>
+            <a:off x="640080" y="6236208"/>
+            <a:ext cx="10789920" cy="566928"/>
+          </a:xfrm>
+          <a:prstGeom prst="rect">
+            <a:avLst/>
+          </a:prstGeom>
+          <a:noFill/>
+        </p:spPr>
+        <p:txBody>
+          <a:bodyPr wrap="square">
+            <a:spAutoFit/>
+          </a:bodyPr>
+          <a:lstStyle/>
+          <a:p>
+            <a:pPr>
+              <a:spcAft>
+                <a:spcPts val="0"/>
+              </a:spcAft>
+            </a:pPr>
+            <a:r>
+              <a:rPr sz="750" b="0">
+                <a:solidFill>
+                  <a:srgbClr val="5B6B79"/>
+                </a:solidFill>
+                <a:latin typeface="Calibri"/>
+              </a:rPr>
+              <a:t>Sources:  tool-output Greshake et al., AISec@CCS 2023, arXiv:2302.12173   ·   direct-input Liu et al., 2023, arXiv:2306.05499   ·   RAG Zou et al., USENIX Security 2024, arXiv:2402.07867</a:t>
+            </a:r>
+          </a:p>
+          <a:p>
+            <a:pPr>
+              <a:spcAft>
+                <a:spcPts val="0"/>
+              </a:spcAft>
+            </a:pPr>
+            <a:r>
+              <a:rPr sz="750" b="0">
+                <a:solidFill>
+                  <a:srgbClr val="5B6B79"/>
+                </a:solidFill>
+                <a:latin typeface="Calibri"/>
+              </a:rPr>
+              <a:t>              memory Chen et al., NeurIPS 2024, arXiv:2407.12784   ·   cross-modal Wang et al., EMNLP 2025, arXiv:2505.11717   ·   tool-metadata Wang et al., AAAI 2026, arXiv:2508.14925</a:t>
+            </a:r>
+          </a:p>
+          <a:p>
+            <a:pPr>
+              <a:spcAft>
+                <a:spcPts val="0"/>
+              </a:spcAft>
+            </a:pPr>
+            <a:r>
+              <a:rPr sz="750" b="0">
+                <a:solidFill>
+                  <a:srgbClr val="5B6B79"/>
+                </a:solidFill>
+                <a:latin typeface="Calibri"/>
+              </a:rPr>
+              <a:t>              multi-agent Lee et al., ESORICS 2025, arXiv:2410.07283   ·   supply-chain Qu et al., 2026, arXiv:2604.03081   ·   skill Jia et al., 2026, arXiv:2602.14211</a:t>
             </a:r>
           </a:p>
         </p:txBody>
@@ -23019,7 +23430,7 @@
                 </a:solidFill>
                 <a:latin typeface="Calibri"/>
               </a:rPr>
-              <a:t>AXIS 1  ·  CHANNEL</a:t>
+              <a:t>AXIS 3  ·  CONSEQUENCE</a:t>
             </a:r>
           </a:p>
         </p:txBody>
@@ -23032,7 +23443,7 @@
         </p:nvSpPr>
         <p:spPr>
           <a:xfrm>
-            <a:off x="640080" y="1170432"/>
+            <a:off x="640080" y="1371600"/>
             <a:ext cx="10607040" cy="1371600"/>
           </a:xfrm>
           <a:prstGeom prst="rect">
@@ -23058,7 +23469,7 @@
                 </a:solidFill>
                 <a:latin typeface="Cambria"/>
               </a:rPr>
-              <a:t>The nine ways text reaches the window</a:t>
+              <a:t>The six ways the agent then fails</a:t>
             </a:r>
           </a:p>
         </p:txBody>
@@ -23105,8 +23516,8 @@
         </p:nvSpPr>
         <p:spPr>
           <a:xfrm>
-            <a:off x="868680" y="1993392"/>
-            <a:ext cx="2103120" cy="274320"/>
+            <a:off x="868680" y="2240280"/>
+            <a:ext cx="2651760" cy="274320"/>
           </a:xfrm>
           <a:prstGeom prst="rect">
             <a:avLst/>
@@ -23126,7 +23537,7 @@
                 </a:solidFill>
                 <a:latin typeface="Calibri"/>
               </a:rPr>
-              <a:t>CHANNEL</a:t>
+              <a:t>CONSEQUENCE</a:t>
             </a:r>
           </a:p>
         </p:txBody>
@@ -23139,8 +23550,8 @@
         </p:nvSpPr>
         <p:spPr>
           <a:xfrm>
-            <a:off x="3108960" y="1993392"/>
-            <a:ext cx="6949440" cy="274320"/>
+            <a:off x="3703320" y="2240280"/>
+            <a:ext cx="6400800" cy="274320"/>
           </a:xfrm>
           <a:prstGeom prst="rect">
             <a:avLst/>
@@ -23173,7 +23584,7 @@
         </p:nvSpPr>
         <p:spPr>
           <a:xfrm>
-            <a:off x="10607040" y="1993392"/>
+            <a:off x="10607040" y="2240280"/>
             <a:ext cx="914400" cy="274320"/>
           </a:xfrm>
           <a:prstGeom prst="rect">
@@ -23207,8 +23618,8 @@
         </p:nvSpPr>
         <p:spPr>
           <a:xfrm>
-            <a:off x="640080" y="2340864"/>
-            <a:ext cx="10881360" cy="365760"/>
+            <a:off x="640080" y="2523744"/>
+            <a:ext cx="10881360" cy="530352"/>
           </a:xfrm>
           <a:prstGeom prst="rect">
             <a:avLst/>
@@ -23251,8 +23662,8 @@
         </p:nvSpPr>
         <p:spPr>
           <a:xfrm>
-            <a:off x="868680" y="2395728"/>
-            <a:ext cx="2103120" cy="274320"/>
+            <a:off x="868680" y="2651760"/>
+            <a:ext cx="2651760" cy="274320"/>
           </a:xfrm>
           <a:prstGeom prst="rect">
             <a:avLst/>
@@ -23272,7 +23683,7 @@
                 </a:solidFill>
                 <a:latin typeface="Calibri"/>
               </a:rPr>
-              <a:t>tool-output</a:t>
+              <a:t>goal-hijack</a:t>
             </a:r>
           </a:p>
         </p:txBody>
@@ -23285,28 +23696,33 @@
         </p:nvSpPr>
         <p:spPr>
           <a:xfrm>
-            <a:off x="3108960" y="2395728"/>
-            <a:ext cx="7315200" cy="274320"/>
-          </a:xfrm>
-          <a:prstGeom prst="rect">
-            <a:avLst/>
-          </a:prstGeom>
-          <a:noFill/>
-        </p:spPr>
-        <p:txBody>
-          <a:bodyPr wrap="square">
-            <a:spAutoFit/>
-          </a:bodyPr>
-          <a:lstStyle/>
-          <a:p>
-            <a:r>
-              <a:rPr sz="1200" b="0">
+            <a:off x="3703320" y="2560320"/>
+            <a:ext cx="6766560" cy="475488"/>
+          </a:xfrm>
+          <a:prstGeom prst="rect">
+            <a:avLst/>
+          </a:prstGeom>
+          <a:noFill/>
+        </p:spPr>
+        <p:txBody>
+          <a:bodyPr wrap="square">
+            <a:spAutoFit/>
+          </a:bodyPr>
+          <a:lstStyle/>
+          <a:p>
+            <a:pPr>
+              <a:spcAft>
+                <a:spcPts val="0"/>
+              </a:spcAft>
+            </a:pPr>
+            <a:r>
+              <a:rPr sz="1150" b="0">
                 <a:solidFill>
                   <a:srgbClr val="CADCFC"/>
                 </a:solidFill>
                 <a:latin typeface="Calibri"/>
               </a:rPr>
-              <a:t>What a tool gives back: a web page, an email, a file the agent opened.</a:t>
+              <a:t>The agent does another person's task instead of yours. Text in the window gives an order and the agent obeys.</a:t>
             </a:r>
           </a:p>
         </p:txBody>
@@ -23319,7 +23735,7 @@
         </p:nvSpPr>
         <p:spPr>
           <a:xfrm>
-            <a:off x="10607040" y="2395728"/>
+            <a:off x="10607040" y="2651760"/>
             <a:ext cx="914400" cy="274320"/>
           </a:xfrm>
           <a:prstGeom prst="rect">
@@ -23340,7 +23756,7 @@
                 </a:solidFill>
                 <a:latin typeface="Calibri"/>
               </a:rPr>
-              <a:t>66</a:t>
+              <a:t>126</a:t>
             </a:r>
           </a:p>
         </p:txBody>
@@ -23353,8 +23769,8 @@
         </p:nvSpPr>
         <p:spPr>
           <a:xfrm>
-            <a:off x="640080" y="2770632"/>
-            <a:ext cx="10881360" cy="365760"/>
+            <a:off x="640080" y="3099815"/>
+            <a:ext cx="10881360" cy="530352"/>
           </a:xfrm>
           <a:prstGeom prst="rect">
             <a:avLst/>
@@ -23397,8 +23813,8 @@
         </p:nvSpPr>
         <p:spPr>
           <a:xfrm>
-            <a:off x="868680" y="2825496"/>
-            <a:ext cx="2103120" cy="274320"/>
+            <a:off x="868680" y="3227832"/>
+            <a:ext cx="2651760" cy="274320"/>
           </a:xfrm>
           <a:prstGeom prst="rect">
             <a:avLst/>
@@ -23418,7 +23834,7 @@
                 </a:solidFill>
                 <a:latin typeface="Calibri"/>
               </a:rPr>
-              <a:t>direct-input</a:t>
+              <a:t>reasoning-corruption</a:t>
             </a:r>
           </a:p>
         </p:txBody>
@@ -23431,28 +23847,33 @@
         </p:nvSpPr>
         <p:spPr>
           <a:xfrm>
-            <a:off x="3108960" y="2825496"/>
-            <a:ext cx="7315200" cy="274320"/>
-          </a:xfrm>
-          <a:prstGeom prst="rect">
-            <a:avLst/>
-          </a:prstGeom>
-          <a:noFill/>
-        </p:spPr>
-        <p:txBody>
-          <a:bodyPr wrap="square">
-            <a:spAutoFit/>
-          </a:bodyPr>
-          <a:lstStyle/>
-          <a:p>
-            <a:r>
-              <a:rPr sz="1200" b="0">
+            <a:off x="3703320" y="3136391"/>
+            <a:ext cx="6766560" cy="475488"/>
+          </a:xfrm>
+          <a:prstGeom prst="rect">
+            <a:avLst/>
+          </a:prstGeom>
+          <a:noFill/>
+        </p:spPr>
+        <p:txBody>
+          <a:bodyPr wrap="square">
+            <a:spAutoFit/>
+          </a:bodyPr>
+          <a:lstStyle/>
+          <a:p>
+            <a:pPr>
+              <a:spcAft>
+                <a:spcPts val="0"/>
+              </a:spcAft>
+            </a:pPr>
+            <a:r>
+              <a:rPr sz="1150" b="0">
                 <a:solidFill>
                   <a:srgbClr val="CADCFC"/>
                 </a:solidFill>
                 <a:latin typeface="Calibri"/>
               </a:rPr>
-              <a:t>The prompt itself. The user's text, or the system prompt above it.</a:t>
+              <a:t>Every word in the window is true. The window is too long or too cluttered, and the model stops using it well.</a:t>
             </a:r>
           </a:p>
         </p:txBody>
@@ -23465,7 +23886,7 @@
         </p:nvSpPr>
         <p:spPr>
           <a:xfrm>
-            <a:off x="10607040" y="2825496"/>
+            <a:off x="10607040" y="3227832"/>
             <a:ext cx="914400" cy="274320"/>
           </a:xfrm>
           <a:prstGeom prst="rect">
@@ -23486,7 +23907,7 @@
                 </a:solidFill>
                 <a:latin typeface="Calibri"/>
               </a:rPr>
-              <a:t>66</a:t>
+              <a:t>46</a:t>
             </a:r>
           </a:p>
         </p:txBody>
@@ -23499,8 +23920,8 @@
         </p:nvSpPr>
         <p:spPr>
           <a:xfrm>
-            <a:off x="640080" y="3200400"/>
-            <a:ext cx="10881360" cy="365760"/>
+            <a:off x="640080" y="3675887"/>
+            <a:ext cx="10881360" cy="530352"/>
           </a:xfrm>
           <a:prstGeom prst="rect">
             <a:avLst/>
@@ -23543,8 +23964,8 @@
         </p:nvSpPr>
         <p:spPr>
           <a:xfrm>
-            <a:off x="868680" y="3255264"/>
-            <a:ext cx="2103120" cy="274320"/>
+            <a:off x="868680" y="3803903"/>
+            <a:ext cx="2651760" cy="274320"/>
           </a:xfrm>
           <a:prstGeom prst="rect">
             <a:avLst/>
@@ -23564,7 +23985,7 @@
                 </a:solidFill>
                 <a:latin typeface="Calibri"/>
               </a:rPr>
-              <a:t>RAG</a:t>
+              <a:t>silent-corruption</a:t>
             </a:r>
           </a:p>
         </p:txBody>
@@ -23577,28 +23998,33 @@
         </p:nvSpPr>
         <p:spPr>
           <a:xfrm>
-            <a:off x="3108960" y="3255264"/>
-            <a:ext cx="7315200" cy="274320"/>
-          </a:xfrm>
-          <a:prstGeom prst="rect">
-            <a:avLst/>
-          </a:prstGeom>
-          <a:noFill/>
-        </p:spPr>
-        <p:txBody>
-          <a:bodyPr wrap="square">
-            <a:spAutoFit/>
-          </a:bodyPr>
-          <a:lstStyle/>
-          <a:p>
-            <a:r>
-              <a:rPr sz="1200" b="0">
+            <a:off x="3703320" y="3712463"/>
+            <a:ext cx="6766560" cy="475488"/>
+          </a:xfrm>
+          <a:prstGeom prst="rect">
+            <a:avLst/>
+          </a:prstGeom>
+          <a:noFill/>
+        </p:spPr>
+        <p:txBody>
+          <a:bodyPr wrap="square">
+            <a:spAutoFit/>
+          </a:bodyPr>
+          <a:lstStyle/>
+          <a:p>
+            <a:pPr>
+              <a:spcAft>
+                <a:spcPts val="0"/>
+              </a:spcAft>
+            </a:pPr>
+            <a:r>
+              <a:rPr sz="1150" b="0">
                 <a:solidFill>
                   <a:srgbClr val="CADCFC"/>
                 </a:solidFill>
                 <a:latin typeface="Calibri"/>
               </a:rPr>
-              <a:t>A document that a search step pulled out of a corpus.</a:t>
+              <a:t>The agent answers from false or stale content. Nobody gave it a new task. It simply believes a wrong thing.</a:t>
             </a:r>
           </a:p>
         </p:txBody>
@@ -23611,7 +24037,7 @@
         </p:nvSpPr>
         <p:spPr>
           <a:xfrm>
-            <a:off x="10607040" y="3255264"/>
+            <a:off x="10607040" y="3803903"/>
             <a:ext cx="914400" cy="274320"/>
           </a:xfrm>
           <a:prstGeom prst="rect">
@@ -23632,7 +24058,7 @@
                 </a:solidFill>
                 <a:latin typeface="Calibri"/>
               </a:rPr>
-              <a:t>28</a:t>
+              <a:t>21</a:t>
             </a:r>
           </a:p>
         </p:txBody>
@@ -23645,8 +24071,8 @@
         </p:nvSpPr>
         <p:spPr>
           <a:xfrm>
-            <a:off x="640080" y="3630168"/>
-            <a:ext cx="10881360" cy="365760"/>
+            <a:off x="640080" y="4251960"/>
+            <a:ext cx="10881360" cy="530352"/>
           </a:xfrm>
           <a:prstGeom prst="rect">
             <a:avLst/>
@@ -23689,8 +24115,8 @@
         </p:nvSpPr>
         <p:spPr>
           <a:xfrm>
-            <a:off x="868680" y="3685031"/>
-            <a:ext cx="2103120" cy="274320"/>
+            <a:off x="868680" y="4379976"/>
+            <a:ext cx="2651760" cy="274320"/>
           </a:xfrm>
           <a:prstGeom prst="rect">
             <a:avLst/>
@@ -23710,7 +24136,7 @@
                 </a:solidFill>
                 <a:latin typeface="Calibri"/>
               </a:rPr>
-              <a:t>cross-modal</a:t>
+              <a:t>persistence-backdoor</a:t>
             </a:r>
           </a:p>
         </p:txBody>
@@ -23723,28 +24149,33 @@
         </p:nvSpPr>
         <p:spPr>
           <a:xfrm>
-            <a:off x="3108960" y="3685031"/>
-            <a:ext cx="7315200" cy="274320"/>
-          </a:xfrm>
-          <a:prstGeom prst="rect">
-            <a:avLst/>
-          </a:prstGeom>
-          <a:noFill/>
-        </p:spPr>
-        <p:txBody>
-          <a:bodyPr wrap="square">
-            <a:spAutoFit/>
-          </a:bodyPr>
-          <a:lstStyle/>
-          <a:p>
-            <a:r>
-              <a:rPr sz="1200" b="0">
+            <a:off x="3703320" y="4288536"/>
+            <a:ext cx="6766560" cy="475488"/>
+          </a:xfrm>
+          <a:prstGeom prst="rect">
+            <a:avLst/>
+          </a:prstGeom>
+          <a:noFill/>
+        </p:spPr>
+        <p:txBody>
+          <a:bodyPr wrap="square">
+            <a:spAutoFit/>
+          </a:bodyPr>
+          <a:lstStyle/>
+          <a:p>
+            <a:pPr>
+              <a:spcAft>
+                <a:spcPts val="0"/>
+              </a:spcAft>
+            </a:pPr>
+            <a:r>
+              <a:rPr sz="1150" b="0">
                 <a:solidFill>
                   <a:srgbClr val="CADCFC"/>
                 </a:solidFill>
                 <a:latin typeface="Calibri"/>
               </a:rPr>
-              <a:t>Text carried inside an image, audio or video, not in a text field.</a:t>
+              <a:t>The bad content is written to memory or to a store. It fires on a later run, maybe for another user.</a:t>
             </a:r>
           </a:p>
         </p:txBody>
@@ -23757,7 +24188,7 @@
         </p:nvSpPr>
         <p:spPr>
           <a:xfrm>
-            <a:off x="10607040" y="3685031"/>
+            <a:off x="10607040" y="4379976"/>
             <a:ext cx="914400" cy="274320"/>
           </a:xfrm>
           <a:prstGeom prst="rect">
@@ -23778,7 +24209,7 @@
                 </a:solidFill>
                 <a:latin typeface="Calibri"/>
               </a:rPr>
-              <a:t>18</a:t>
+              <a:t>14</a:t>
             </a:r>
           </a:p>
         </p:txBody>
@@ -23791,8 +24222,8 @@
         </p:nvSpPr>
         <p:spPr>
           <a:xfrm>
-            <a:off x="640080" y="4059935"/>
-            <a:ext cx="10881360" cy="365760"/>
+            <a:off x="640080" y="4828031"/>
+            <a:ext cx="10881360" cy="530352"/>
           </a:xfrm>
           <a:prstGeom prst="rect">
             <a:avLst/>
@@ -23835,8 +24266,8 @@
         </p:nvSpPr>
         <p:spPr>
           <a:xfrm>
-            <a:off x="868680" y="4114799"/>
-            <a:ext cx="2103120" cy="274320"/>
+            <a:off x="868680" y="4956047"/>
+            <a:ext cx="2651760" cy="274320"/>
           </a:xfrm>
           <a:prstGeom prst="rect">
             <a:avLst/>
@@ -23856,7 +24287,7 @@
                 </a:solidFill>
                 <a:latin typeface="Calibri"/>
               </a:rPr>
-              <a:t>memory</a:t>
+              <a:t>data-exfiltration</a:t>
             </a:r>
           </a:p>
         </p:txBody>
@@ -23869,28 +24300,33 @@
         </p:nvSpPr>
         <p:spPr>
           <a:xfrm>
-            <a:off x="3108960" y="4114799"/>
-            <a:ext cx="7315200" cy="274320"/>
-          </a:xfrm>
-          <a:prstGeom prst="rect">
-            <a:avLst/>
-          </a:prstGeom>
-          <a:noFill/>
-        </p:spPr>
-        <p:txBody>
-          <a:bodyPr wrap="square">
-            <a:spAutoFit/>
-          </a:bodyPr>
-          <a:lstStyle/>
-          <a:p>
-            <a:r>
-              <a:rPr sz="1200" b="0">
+            <a:off x="3703320" y="4864607"/>
+            <a:ext cx="6766560" cy="475488"/>
+          </a:xfrm>
+          <a:prstGeom prst="rect">
+            <a:avLst/>
+          </a:prstGeom>
+          <a:noFill/>
+        </p:spPr>
+        <p:txBody>
+          <a:bodyPr wrap="square">
+            <a:spAutoFit/>
+          </a:bodyPr>
+          <a:lstStyle/>
+          <a:p>
+            <a:pPr>
+              <a:spcAft>
+                <a:spcPts val="0"/>
+              </a:spcAft>
+            </a:pPr>
+            <a:r>
+              <a:rPr sz="1150" b="0">
                 <a:solidFill>
                   <a:srgbClr val="CADCFC"/>
                 </a:solidFill>
                 <a:latin typeface="Calibri"/>
               </a:rPr>
-              <a:t>Something the agent stored on an earlier run and reads again now.</a:t>
+              <a:t>The agent sends out what it can read. It uses a tool call, a link or a message to move the data.</a:t>
             </a:r>
           </a:p>
         </p:txBody>
@@ -23903,7 +24339,7 @@
         </p:nvSpPr>
         <p:spPr>
           <a:xfrm>
-            <a:off x="10607040" y="4114799"/>
+            <a:off x="10607040" y="4956047"/>
             <a:ext cx="914400" cy="274320"/>
           </a:xfrm>
           <a:prstGeom prst="rect">
@@ -23924,7 +24360,7 @@
                 </a:solidFill>
                 <a:latin typeface="Calibri"/>
               </a:rPr>
-              <a:t>14</a:t>
+              <a:t>13</a:t>
             </a:r>
           </a:p>
         </p:txBody>
@@ -23937,8 +24373,8 @@
         </p:nvSpPr>
         <p:spPr>
           <a:xfrm>
-            <a:off x="640080" y="4489704"/>
-            <a:ext cx="10881360" cy="365760"/>
+            <a:off x="640080" y="5404104"/>
+            <a:ext cx="10881360" cy="530352"/>
           </a:xfrm>
           <a:prstGeom prst="rect">
             <a:avLst/>
@@ -23981,8 +24417,8 @@
         </p:nvSpPr>
         <p:spPr>
           <a:xfrm>
-            <a:off x="868680" y="4544568"/>
-            <a:ext cx="2103120" cy="274320"/>
+            <a:off x="868680" y="5532120"/>
+            <a:ext cx="2651760" cy="274320"/>
           </a:xfrm>
           <a:prstGeom prst="rect">
             <a:avLst/>
@@ -24002,7 +24438,7 @@
                 </a:solidFill>
                 <a:latin typeface="Calibri"/>
               </a:rPr>
-              <a:t>tool-metadata</a:t>
+              <a:t>resource-abuse</a:t>
             </a:r>
           </a:p>
         </p:txBody>
@@ -24015,28 +24451,33 @@
         </p:nvSpPr>
         <p:spPr>
           <a:xfrm>
-            <a:off x="3108960" y="4544568"/>
-            <a:ext cx="7315200" cy="274320"/>
-          </a:xfrm>
-          <a:prstGeom prst="rect">
-            <a:avLst/>
-          </a:prstGeom>
-          <a:noFill/>
-        </p:spPr>
-        <p:txBody>
-          <a:bodyPr wrap="square">
-            <a:spAutoFit/>
-          </a:bodyPr>
-          <a:lstStyle/>
-          <a:p>
-            <a:r>
-              <a:rPr sz="1200" b="0">
+            <a:off x="3703320" y="5440680"/>
+            <a:ext cx="6766560" cy="475488"/>
+          </a:xfrm>
+          <a:prstGeom prst="rect">
+            <a:avLst/>
+          </a:prstGeom>
+          <a:noFill/>
+        </p:spPr>
+        <p:txBody>
+          <a:bodyPr wrap="square">
+            <a:spAutoFit/>
+          </a:bodyPr>
+          <a:lstStyle/>
+          <a:p>
+            <a:pPr>
+              <a:spcAft>
+                <a:spcPts val="0"/>
+              </a:spcAft>
+            </a:pPr>
+            <a:r>
+              <a:rPr sz="1150" b="0">
                 <a:solidFill>
                   <a:srgbClr val="CADCFC"/>
                 </a:solidFill>
                 <a:latin typeface="Calibri"/>
               </a:rPr>
-              <a:t>The description of a tool, not its output. The text that says what the tool does.</a:t>
+              <a:t>No data moves and no goal changes. The agent burns time or refuses to answer at all.</a:t>
             </a:r>
           </a:p>
         </p:txBody>
@@ -24049,7 +24490,7 @@
         </p:nvSpPr>
         <p:spPr>
           <a:xfrm>
-            <a:off x="10607040" y="4544568"/>
+            <a:off x="10607040" y="5532120"/>
             <a:ext cx="914400" cy="274320"/>
           </a:xfrm>
           <a:prstGeom prst="rect">
@@ -24070,52 +24511,47 @@
                 </a:solidFill>
                 <a:latin typeface="Calibri"/>
               </a:rPr>
-              <a:t>12</a:t>
-            </a:r>
-          </a:p>
-        </p:txBody>
-      </p:sp>
-      <p:sp>
-        <p:nvSpPr>
-          <p:cNvPr id="32" name="Rectangle 31"/>
-          <p:cNvSpPr/>
-          <p:nvPr/>
-        </p:nvSpPr>
-        <p:spPr>
-          <a:xfrm>
-            <a:off x="640080" y="4919472"/>
-            <a:ext cx="10881360" cy="365760"/>
-          </a:xfrm>
-          <a:prstGeom prst="rect">
-            <a:avLst/>
-          </a:prstGeom>
-          <a:solidFill>
-            <a:srgbClr val="1B334F"/>
-          </a:solidFill>
-          <a:ln>
-            <a:noFill/>
-          </a:ln>
-          <a:effectLst/>
-        </p:spPr>
-        <p:style>
-          <a:lnRef idx="1">
-            <a:schemeClr val="accent1"/>
-          </a:lnRef>
-          <a:fillRef idx="3">
-            <a:schemeClr val="accent1"/>
-          </a:fillRef>
-          <a:effectRef idx="2">
-            <a:schemeClr val="accent1"/>
-          </a:effectRef>
-          <a:fontRef idx="minor">
-            <a:schemeClr val="lt1"/>
-          </a:fontRef>
-        </p:style>
-        <p:txBody>
-          <a:bodyPr rtlCol="0" anchor="ctr"/>
-          <a:lstStyle/>
-          <a:p>
-            <a:pPr algn="ctr"/>
+              <a:t>3</a:t>
+            </a:r>
+          </a:p>
+        </p:txBody>
+      </p:sp>
+      <p:sp>
+        <p:nvSpPr>
+          <p:cNvPr id="32" name="TextBox 31"/>
+          <p:cNvSpPr txBox="1"/>
+          <p:nvPr/>
+        </p:nvSpPr>
+        <p:spPr>
+          <a:xfrm>
+            <a:off x="640080" y="6016752"/>
+            <a:ext cx="10881360" cy="411480"/>
+          </a:xfrm>
+          <a:prstGeom prst="rect">
+            <a:avLst/>
+          </a:prstGeom>
+          <a:noFill/>
+        </p:spPr>
+        <p:txBody>
+          <a:bodyPr wrap="square">
+            <a:spAutoFit/>
+          </a:bodyPr>
+          <a:lstStyle/>
+          <a:p>
+            <a:pPr>
+              <a:spcAft>
+                <a:spcPts val="400"/>
+              </a:spcAft>
+            </a:pPr>
+            <a:r>
+              <a:rPr sz="1250" b="0">
+                <a:solidFill>
+                  <a:srgbClr val="CFE8EF"/>
+                </a:solidFill>
+                <a:latin typeface="Calibri"/>
+              </a:rPr>
+              <a:t>The second row is the ML/AI track. The other five are mostly the security track. That split is the point of the paper.</a:t>
+            </a:r>
           </a:p>
         </p:txBody>
       </p:sp>
@@ -24127,422 +24563,28 @@
         </p:nvSpPr>
         <p:spPr>
           <a:xfrm>
-            <a:off x="868680" y="4974336"/>
-            <a:ext cx="2103120" cy="274320"/>
-          </a:xfrm>
-          <a:prstGeom prst="rect">
-            <a:avLst/>
-          </a:prstGeom>
-          <a:noFill/>
-        </p:spPr>
-        <p:txBody>
-          <a:bodyPr wrap="square">
-            <a:spAutoFit/>
-          </a:bodyPr>
-          <a:lstStyle/>
-          <a:p>
-            <a:r>
-              <a:rPr sz="1200" b="1">
-                <a:solidFill>
-                  <a:srgbClr val="FFFFFF"/>
-                </a:solidFill>
-                <a:latin typeface="Calibri"/>
-              </a:rPr>
-              <a:t>multi-agent</a:t>
-            </a:r>
-          </a:p>
-        </p:txBody>
-      </p:sp>
-      <p:sp>
-        <p:nvSpPr>
-          <p:cNvPr id="34" name="TextBox 33"/>
-          <p:cNvSpPr txBox="1"/>
-          <p:nvPr/>
-        </p:nvSpPr>
-        <p:spPr>
-          <a:xfrm>
-            <a:off x="3108960" y="4974336"/>
-            <a:ext cx="7315200" cy="274320"/>
-          </a:xfrm>
-          <a:prstGeom prst="rect">
-            <a:avLst/>
-          </a:prstGeom>
-          <a:noFill/>
-        </p:spPr>
-        <p:txBody>
-          <a:bodyPr wrap="square">
-            <a:spAutoFit/>
-          </a:bodyPr>
-          <a:lstStyle/>
-          <a:p>
-            <a:r>
-              <a:rPr sz="1200" b="0">
-                <a:solidFill>
-                  <a:srgbClr val="CADCFC"/>
-                </a:solidFill>
-                <a:latin typeface="Calibri"/>
-              </a:rPr>
-              <a:t>A message from another agent in the same system.</a:t>
-            </a:r>
-          </a:p>
-        </p:txBody>
-      </p:sp>
-      <p:sp>
-        <p:nvSpPr>
-          <p:cNvPr id="35" name="TextBox 34"/>
-          <p:cNvSpPr txBox="1"/>
-          <p:nvPr/>
-        </p:nvSpPr>
-        <p:spPr>
-          <a:xfrm>
-            <a:off x="10607040" y="4974336"/>
-            <a:ext cx="914400" cy="274320"/>
-          </a:xfrm>
-          <a:prstGeom prst="rect">
-            <a:avLst/>
-          </a:prstGeom>
-          <a:noFill/>
-        </p:spPr>
-        <p:txBody>
-          <a:bodyPr wrap="square">
-            <a:spAutoFit/>
-          </a:bodyPr>
-          <a:lstStyle/>
-          <a:p>
-            <a:r>
-              <a:rPr sz="1200" b="1">
-                <a:solidFill>
-                  <a:srgbClr val="E0A458"/>
-                </a:solidFill>
-                <a:latin typeface="Calibri"/>
-              </a:rPr>
-              <a:t>9</a:t>
-            </a:r>
-          </a:p>
-        </p:txBody>
-      </p:sp>
-      <p:sp>
-        <p:nvSpPr>
-          <p:cNvPr id="36" name="Rectangle 35"/>
-          <p:cNvSpPr/>
-          <p:nvPr/>
-        </p:nvSpPr>
-        <p:spPr>
-          <a:xfrm>
-            <a:off x="640080" y="5349240"/>
-            <a:ext cx="10881360" cy="365760"/>
-          </a:xfrm>
-          <a:prstGeom prst="rect">
-            <a:avLst/>
-          </a:prstGeom>
-          <a:solidFill>
-            <a:srgbClr val="1B334F"/>
-          </a:solidFill>
-          <a:ln>
-            <a:noFill/>
-          </a:ln>
-          <a:effectLst/>
-        </p:spPr>
-        <p:style>
-          <a:lnRef idx="1">
-            <a:schemeClr val="accent1"/>
-          </a:lnRef>
-          <a:fillRef idx="3">
-            <a:schemeClr val="accent1"/>
-          </a:fillRef>
-          <a:effectRef idx="2">
-            <a:schemeClr val="accent1"/>
-          </a:effectRef>
-          <a:fontRef idx="minor">
-            <a:schemeClr val="lt1"/>
-          </a:fontRef>
-        </p:style>
-        <p:txBody>
-          <a:bodyPr rtlCol="0" anchor="ctr"/>
-          <a:lstStyle/>
-          <a:p>
-            <a:pPr algn="ctr"/>
-          </a:p>
-        </p:txBody>
-      </p:sp>
-      <p:sp>
-        <p:nvSpPr>
-          <p:cNvPr id="37" name="TextBox 36"/>
-          <p:cNvSpPr txBox="1"/>
-          <p:nvPr/>
-        </p:nvSpPr>
-        <p:spPr>
-          <a:xfrm>
-            <a:off x="868680" y="5404103"/>
-            <a:ext cx="2103120" cy="274320"/>
-          </a:xfrm>
-          <a:prstGeom prst="rect">
-            <a:avLst/>
-          </a:prstGeom>
-          <a:noFill/>
-        </p:spPr>
-        <p:txBody>
-          <a:bodyPr wrap="square">
-            <a:spAutoFit/>
-          </a:bodyPr>
-          <a:lstStyle/>
-          <a:p>
-            <a:r>
-              <a:rPr sz="1200" b="1">
-                <a:solidFill>
-                  <a:srgbClr val="FFFFFF"/>
-                </a:solidFill>
-                <a:latin typeface="Calibri"/>
-              </a:rPr>
-              <a:t>supply-chain</a:t>
-            </a:r>
-          </a:p>
-        </p:txBody>
-      </p:sp>
-      <p:sp>
-        <p:nvSpPr>
-          <p:cNvPr id="38" name="TextBox 37"/>
-          <p:cNvSpPr txBox="1"/>
-          <p:nvPr/>
-        </p:nvSpPr>
-        <p:spPr>
-          <a:xfrm>
-            <a:off x="3108960" y="5404103"/>
-            <a:ext cx="7315200" cy="274320"/>
-          </a:xfrm>
-          <a:prstGeom prst="rect">
-            <a:avLst/>
-          </a:prstGeom>
-          <a:noFill/>
-        </p:spPr>
-        <p:txBody>
-          <a:bodyPr wrap="square">
-            <a:spAutoFit/>
-          </a:bodyPr>
-          <a:lstStyle/>
-          <a:p>
-            <a:r>
-              <a:rPr sz="1200" b="0">
-                <a:solidFill>
-                  <a:srgbClr val="CADCFC"/>
-                </a:solidFill>
-                <a:latin typeface="Calibri"/>
-              </a:rPr>
-              <a:t>A package, template or prompt file the agent inherits before it starts.</a:t>
-            </a:r>
-          </a:p>
-        </p:txBody>
-      </p:sp>
-      <p:sp>
-        <p:nvSpPr>
-          <p:cNvPr id="39" name="TextBox 38"/>
-          <p:cNvSpPr txBox="1"/>
-          <p:nvPr/>
-        </p:nvSpPr>
-        <p:spPr>
-          <a:xfrm>
-            <a:off x="10607040" y="5404103"/>
-            <a:ext cx="914400" cy="274320"/>
-          </a:xfrm>
-          <a:prstGeom prst="rect">
-            <a:avLst/>
-          </a:prstGeom>
-          <a:noFill/>
-        </p:spPr>
-        <p:txBody>
-          <a:bodyPr wrap="square">
-            <a:spAutoFit/>
-          </a:bodyPr>
-          <a:lstStyle/>
-          <a:p>
-            <a:r>
-              <a:rPr sz="1200" b="1">
-                <a:solidFill>
-                  <a:srgbClr val="E0A458"/>
-                </a:solidFill>
-                <a:latin typeface="Calibri"/>
-              </a:rPr>
-              <a:t>6</a:t>
-            </a:r>
-          </a:p>
-        </p:txBody>
-      </p:sp>
-      <p:sp>
-        <p:nvSpPr>
-          <p:cNvPr id="40" name="Rectangle 39"/>
-          <p:cNvSpPr/>
-          <p:nvPr/>
-        </p:nvSpPr>
-        <p:spPr>
-          <a:xfrm>
-            <a:off x="640080" y="5779008"/>
-            <a:ext cx="10881360" cy="365760"/>
-          </a:xfrm>
-          <a:prstGeom prst="rect">
-            <a:avLst/>
-          </a:prstGeom>
-          <a:solidFill>
-            <a:srgbClr val="1B334F"/>
-          </a:solidFill>
-          <a:ln>
-            <a:noFill/>
-          </a:ln>
-          <a:effectLst/>
-        </p:spPr>
-        <p:style>
-          <a:lnRef idx="1">
-            <a:schemeClr val="accent1"/>
-          </a:lnRef>
-          <a:fillRef idx="3">
-            <a:schemeClr val="accent1"/>
-          </a:fillRef>
-          <a:effectRef idx="2">
-            <a:schemeClr val="accent1"/>
-          </a:effectRef>
-          <a:fontRef idx="minor">
-            <a:schemeClr val="lt1"/>
-          </a:fontRef>
-        </p:style>
-        <p:txBody>
-          <a:bodyPr rtlCol="0" anchor="ctr"/>
-          <a:lstStyle/>
-          <a:p>
-            <a:pPr algn="ctr"/>
-          </a:p>
-        </p:txBody>
-      </p:sp>
-      <p:sp>
-        <p:nvSpPr>
-          <p:cNvPr id="41" name="TextBox 40"/>
-          <p:cNvSpPr txBox="1"/>
-          <p:nvPr/>
-        </p:nvSpPr>
-        <p:spPr>
-          <a:xfrm>
-            <a:off x="868680" y="5833872"/>
-            <a:ext cx="2103120" cy="274320"/>
-          </a:xfrm>
-          <a:prstGeom prst="rect">
-            <a:avLst/>
-          </a:prstGeom>
-          <a:noFill/>
-        </p:spPr>
-        <p:txBody>
-          <a:bodyPr wrap="square">
-            <a:spAutoFit/>
-          </a:bodyPr>
-          <a:lstStyle/>
-          <a:p>
-            <a:r>
-              <a:rPr sz="1200" b="1">
-                <a:solidFill>
-                  <a:srgbClr val="FFFFFF"/>
-                </a:solidFill>
-                <a:latin typeface="Calibri"/>
-              </a:rPr>
-              <a:t>skill</a:t>
-            </a:r>
-          </a:p>
-        </p:txBody>
-      </p:sp>
-      <p:sp>
-        <p:nvSpPr>
-          <p:cNvPr id="42" name="TextBox 41"/>
-          <p:cNvSpPr txBox="1"/>
-          <p:nvPr/>
-        </p:nvSpPr>
-        <p:spPr>
-          <a:xfrm>
-            <a:off x="3108960" y="5833872"/>
-            <a:ext cx="7315200" cy="274320"/>
-          </a:xfrm>
-          <a:prstGeom prst="rect">
-            <a:avLst/>
-          </a:prstGeom>
-          <a:noFill/>
-        </p:spPr>
-        <p:txBody>
-          <a:bodyPr wrap="square">
-            <a:spAutoFit/>
-          </a:bodyPr>
-          <a:lstStyle/>
-          <a:p>
-            <a:r>
-              <a:rPr sz="1200" b="0">
-                <a:solidFill>
-                  <a:srgbClr val="CADCFC"/>
-                </a:solidFill>
-                <a:latin typeface="Calibri"/>
-              </a:rPr>
-              <a:t>A stored procedure the agent loads and follows.</a:t>
-            </a:r>
-          </a:p>
-        </p:txBody>
-      </p:sp>
-      <p:sp>
-        <p:nvSpPr>
-          <p:cNvPr id="43" name="TextBox 42"/>
-          <p:cNvSpPr txBox="1"/>
-          <p:nvPr/>
-        </p:nvSpPr>
-        <p:spPr>
-          <a:xfrm>
-            <a:off x="10607040" y="5833872"/>
-            <a:ext cx="914400" cy="274320"/>
-          </a:xfrm>
-          <a:prstGeom prst="rect">
-            <a:avLst/>
-          </a:prstGeom>
-          <a:noFill/>
-        </p:spPr>
-        <p:txBody>
-          <a:bodyPr wrap="square">
-            <a:spAutoFit/>
-          </a:bodyPr>
-          <a:lstStyle/>
-          <a:p>
-            <a:r>
-              <a:rPr sz="1200" b="1">
-                <a:solidFill>
-                  <a:srgbClr val="E0A458"/>
-                </a:solidFill>
-                <a:latin typeface="Calibri"/>
-              </a:rPr>
-              <a:t>4</a:t>
-            </a:r>
-          </a:p>
-        </p:txBody>
-      </p:sp>
-      <p:sp>
-        <p:nvSpPr>
-          <p:cNvPr id="44" name="TextBox 43"/>
-          <p:cNvSpPr txBox="1"/>
-          <p:nvPr/>
-        </p:nvSpPr>
-        <p:spPr>
-          <a:xfrm>
-            <a:off x="640080" y="6309360"/>
-            <a:ext cx="10881360" cy="365760"/>
-          </a:xfrm>
-          <a:prstGeom prst="rect">
-            <a:avLst/>
-          </a:prstGeom>
-          <a:noFill/>
-        </p:spPr>
-        <p:txBody>
-          <a:bodyPr wrap="square">
-            <a:spAutoFit/>
-          </a:bodyPr>
-          <a:lstStyle/>
-          <a:p>
-            <a:r>
-              <a:rPr sz="1200" b="0">
-                <a:solidFill>
-                  <a:srgbClr val="CFE8EF"/>
-                </a:solidFill>
-                <a:latin typeface="Calibri"/>
-              </a:rPr>
-              <a:t>The right column counts the named attacks we found for that channel. A defense sits on a channel too.</a:t>
+            <a:off x="640080" y="6327648"/>
+            <a:ext cx="10789920" cy="493776"/>
+          </a:xfrm>
+          <a:prstGeom prst="rect">
+            <a:avLst/>
+          </a:prstGeom>
+          <a:noFill/>
+        </p:spPr>
+        <p:txBody>
+          <a:bodyPr wrap="square">
+            <a:spAutoFit/>
+          </a:bodyPr>
+          <a:lstStyle/>
+          <a:p>
+            <a:r>
+              <a:rPr sz="750" b="0">
+                <a:solidFill>
+                  <a:srgbClr val="5B6B79"/>
+                </a:solidFill>
+                <a:latin typeface="Calibri"/>
+              </a:rPr>
+              <a:t>Sources:  goal-hijack Greshake et al., AISec@CCS 2023, arXiv:2302.12173   ·   reasoning-corruption Liu et al., TACL 2023, arXiv:2307.03172; Shi et al., ICML 2023, arXiv:2302.00093   ·   silent-corruption Xie et al., ICLR 2023   ·   persistence-backdoor Chen et al., NeurIPS 2024, arXiv:2407.12784   ·   data-exfiltration Qi et al., ICLR 2024   ·   resource-abuse Xue et al., 2024, arXiv:2406.00083</a:t>
             </a:r>
           </a:p>
         </p:txBody>
@@ -24602,7 +24644,7 @@
                 </a:solidFill>
                 <a:latin typeface="Calibri"/>
               </a:rPr>
-              <a:t>AXIS 3  ·  CONSEQUENCE</a:t>
+              <a:t>AXIS 2  ·  INTENT</a:t>
             </a:r>
           </a:p>
         </p:txBody>
@@ -24641,7 +24683,7 @@
                 </a:solidFill>
                 <a:latin typeface="Cambria"/>
               </a:rPr>
-              <a:t>The six ways the agent then fails</a:t>
+              <a:t>And where a defense can stand</a:t>
             </a:r>
           </a:p>
         </p:txBody>
@@ -24688,110 +24730,42 @@
         </p:nvSpPr>
         <p:spPr>
           <a:xfrm>
-            <a:off x="868680" y="2240280"/>
-            <a:ext cx="2651760" cy="274320"/>
-          </a:xfrm>
-          <a:prstGeom prst="rect">
-            <a:avLst/>
-          </a:prstGeom>
-          <a:noFill/>
-        </p:spPr>
-        <p:txBody>
-          <a:bodyPr wrap="square">
-            <a:spAutoFit/>
-          </a:bodyPr>
-          <a:lstStyle/>
-          <a:p>
-            <a:r>
-              <a:rPr sz="1150" b="1">
+            <a:off x="640080" y="2148840"/>
+            <a:ext cx="5257800" cy="274320"/>
+          </a:xfrm>
+          <a:prstGeom prst="rect">
+            <a:avLst/>
+          </a:prstGeom>
+          <a:noFill/>
+        </p:spPr>
+        <p:txBody>
+          <a:bodyPr wrap="square">
+            <a:spAutoFit/>
+          </a:bodyPr>
+          <a:lstStyle/>
+          <a:p>
+            <a:r>
+              <a:rPr sz="1200" b="1">
                 <a:solidFill>
                   <a:srgbClr val="E0A458"/>
                 </a:solidFill>
                 <a:latin typeface="Calibri"/>
               </a:rPr>
-              <a:t>CONSEQUENCE</a:t>
-            </a:r>
-          </a:p>
-        </p:txBody>
-      </p:sp>
-      <p:sp>
-        <p:nvSpPr>
-          <p:cNvPr id="6" name="TextBox 5"/>
-          <p:cNvSpPr txBox="1"/>
-          <p:nvPr/>
-        </p:nvSpPr>
-        <p:spPr>
-          <a:xfrm>
-            <a:off x="3703320" y="2240280"/>
-            <a:ext cx="6400800" cy="274320"/>
-          </a:xfrm>
-          <a:prstGeom prst="rect">
-            <a:avLst/>
-          </a:prstGeom>
-          <a:noFill/>
-        </p:spPr>
-        <p:txBody>
-          <a:bodyPr wrap="square">
-            <a:spAutoFit/>
-          </a:bodyPr>
-          <a:lstStyle/>
-          <a:p>
-            <a:r>
-              <a:rPr sz="1150" b="1">
-                <a:solidFill>
-                  <a:srgbClr val="E0A458"/>
-                </a:solidFill>
-                <a:latin typeface="Calibri"/>
-              </a:rPr>
-              <a:t>WHAT IT MEANS</a:t>
-            </a:r>
-          </a:p>
-        </p:txBody>
-      </p:sp>
-      <p:sp>
-        <p:nvSpPr>
-          <p:cNvPr id="7" name="TextBox 6"/>
-          <p:cNvSpPr txBox="1"/>
-          <p:nvPr/>
-        </p:nvSpPr>
-        <p:spPr>
-          <a:xfrm>
-            <a:off x="10607040" y="2240280"/>
-            <a:ext cx="914400" cy="274320"/>
-          </a:xfrm>
-          <a:prstGeom prst="rect">
-            <a:avLst/>
-          </a:prstGeom>
-          <a:noFill/>
-        </p:spPr>
-        <p:txBody>
-          <a:bodyPr wrap="square">
-            <a:spAutoFit/>
-          </a:bodyPr>
-          <a:lstStyle/>
-          <a:p>
-            <a:r>
-              <a:rPr sz="1150" b="1">
-                <a:solidFill>
-                  <a:srgbClr val="E0A458"/>
-                </a:solidFill>
-                <a:latin typeface="Calibri"/>
-              </a:rPr>
-              <a:t>ATTACKS</a:t>
-            </a:r>
-          </a:p>
-        </p:txBody>
-      </p:sp>
-      <p:sp>
-        <p:nvSpPr>
-          <p:cNvPr id="8" name="Rectangle 7"/>
+              <a:t>INTENT: DID SOMEONE MEAN IT?</a:t>
+            </a:r>
+          </a:p>
+        </p:txBody>
+      </p:sp>
+      <p:sp>
+        <p:nvSpPr>
+          <p:cNvPr id="6" name="Rectangle 5"/>
           <p:cNvSpPr/>
           <p:nvPr/>
         </p:nvSpPr>
         <p:spPr>
           <a:xfrm>
-            <a:off x="640080" y="2596896"/>
-            <a:ext cx="10881360" cy="530352"/>
+            <a:off x="640080" y="2487168"/>
+            <a:ext cx="5257800" cy="841248"/>
           </a:xfrm>
           <a:prstGeom prst="rect">
             <a:avLst/>
@@ -24828,48 +24802,48 @@
       </p:sp>
       <p:sp>
         <p:nvSpPr>
-          <p:cNvPr id="9" name="TextBox 8"/>
-          <p:cNvSpPr txBox="1"/>
-          <p:nvPr/>
-        </p:nvSpPr>
-        <p:spPr>
-          <a:xfrm>
-            <a:off x="868680" y="2724912"/>
-            <a:ext cx="2651760" cy="274320"/>
-          </a:xfrm>
-          <a:prstGeom prst="rect">
-            <a:avLst/>
-          </a:prstGeom>
-          <a:noFill/>
-        </p:spPr>
-        <p:txBody>
-          <a:bodyPr wrap="square">
-            <a:spAutoFit/>
-          </a:bodyPr>
-          <a:lstStyle/>
-          <a:p>
-            <a:r>
-              <a:rPr sz="1200" b="1">
+          <p:cNvPr id="7" name="TextBox 6"/>
+          <p:cNvSpPr txBox="1"/>
+          <p:nvPr/>
+        </p:nvSpPr>
+        <p:spPr>
+          <a:xfrm>
+            <a:off x="914400" y="2596896"/>
+            <a:ext cx="4754880" cy="274320"/>
+          </a:xfrm>
+          <a:prstGeom prst="rect">
+            <a:avLst/>
+          </a:prstGeom>
+          <a:noFill/>
+        </p:spPr>
+        <p:txBody>
+          <a:bodyPr wrap="square">
+            <a:spAutoFit/>
+          </a:bodyPr>
+          <a:lstStyle/>
+          <a:p>
+            <a:r>
+              <a:rPr sz="1300" b="1">
                 <a:solidFill>
                   <a:srgbClr val="FFFFFF"/>
                 </a:solidFill>
                 <a:latin typeface="Calibri"/>
               </a:rPr>
-              <a:t>goal-hijack</a:t>
-            </a:r>
-          </a:p>
-        </p:txBody>
-      </p:sp>
-      <p:sp>
-        <p:nvSpPr>
-          <p:cNvPr id="10" name="TextBox 9"/>
-          <p:cNvSpPr txBox="1"/>
-          <p:nvPr/>
-        </p:nvSpPr>
-        <p:spPr>
-          <a:xfrm>
-            <a:off x="3703320" y="2633472"/>
-            <a:ext cx="6766560" cy="475488"/>
+              <a:t>adversarial</a:t>
+            </a:r>
+          </a:p>
+        </p:txBody>
+      </p:sp>
+      <p:sp>
+        <p:nvSpPr>
+          <p:cNvPr id="8" name="TextBox 7"/>
+          <p:cNvSpPr txBox="1"/>
+          <p:nvPr/>
+        </p:nvSpPr>
+        <p:spPr>
+          <a:xfrm>
+            <a:off x="914400" y="2871216"/>
+            <a:ext cx="4754880" cy="411480"/>
           </a:xfrm>
           <a:prstGeom prst="rect">
             <a:avLst/>
@@ -24894,55 +24868,21 @@
                 </a:solidFill>
                 <a:latin typeface="Calibri"/>
               </a:rPr>
-              <a:t>The agent does another person's task instead of yours. Text in the window gives an order and the agent obeys.</a:t>
-            </a:r>
-          </a:p>
-        </p:txBody>
-      </p:sp>
-      <p:sp>
-        <p:nvSpPr>
-          <p:cNvPr id="11" name="TextBox 10"/>
-          <p:cNvSpPr txBox="1"/>
-          <p:nvPr/>
-        </p:nvSpPr>
-        <p:spPr>
-          <a:xfrm>
-            <a:off x="10607040" y="2724912"/>
-            <a:ext cx="914400" cy="274320"/>
-          </a:xfrm>
-          <a:prstGeom prst="rect">
-            <a:avLst/>
-          </a:prstGeom>
-          <a:noFill/>
-        </p:spPr>
-        <p:txBody>
-          <a:bodyPr wrap="square">
-            <a:spAutoFit/>
-          </a:bodyPr>
-          <a:lstStyle/>
-          <a:p>
-            <a:r>
-              <a:rPr sz="1200" b="1">
-                <a:solidFill>
-                  <a:srgbClr val="E0A458"/>
-                </a:solidFill>
-                <a:latin typeface="Calibri"/>
-              </a:rPr>
-              <a:t>126</a:t>
-            </a:r>
-          </a:p>
-        </p:txBody>
-      </p:sp>
-      <p:sp>
-        <p:nvSpPr>
-          <p:cNvPr id="12" name="Rectangle 11"/>
+              <a:t>A person placed the text to get this effect. This is the security track.</a:t>
+            </a:r>
+          </a:p>
+        </p:txBody>
+      </p:sp>
+      <p:sp>
+        <p:nvSpPr>
+          <p:cNvPr id="9" name="Rectangle 8"/>
           <p:cNvSpPr/>
           <p:nvPr/>
         </p:nvSpPr>
         <p:spPr>
           <a:xfrm>
-            <a:off x="640080" y="3200400"/>
-            <a:ext cx="10881360" cy="530352"/>
+            <a:off x="640080" y="3419856"/>
+            <a:ext cx="5257800" cy="841248"/>
           </a:xfrm>
           <a:prstGeom prst="rect">
             <a:avLst/>
@@ -24979,48 +24919,48 @@
       </p:sp>
       <p:sp>
         <p:nvSpPr>
-          <p:cNvPr id="13" name="TextBox 12"/>
-          <p:cNvSpPr txBox="1"/>
-          <p:nvPr/>
-        </p:nvSpPr>
-        <p:spPr>
-          <a:xfrm>
-            <a:off x="868680" y="3328416"/>
-            <a:ext cx="2651760" cy="274320"/>
-          </a:xfrm>
-          <a:prstGeom prst="rect">
-            <a:avLst/>
-          </a:prstGeom>
-          <a:noFill/>
-        </p:spPr>
-        <p:txBody>
-          <a:bodyPr wrap="square">
-            <a:spAutoFit/>
-          </a:bodyPr>
-          <a:lstStyle/>
-          <a:p>
-            <a:r>
-              <a:rPr sz="1200" b="1">
+          <p:cNvPr id="10" name="TextBox 9"/>
+          <p:cNvSpPr txBox="1"/>
+          <p:nvPr/>
+        </p:nvSpPr>
+        <p:spPr>
+          <a:xfrm>
+            <a:off x="914400" y="3529584"/>
+            <a:ext cx="4754880" cy="274320"/>
+          </a:xfrm>
+          <a:prstGeom prst="rect">
+            <a:avLst/>
+          </a:prstGeom>
+          <a:noFill/>
+        </p:spPr>
+        <p:txBody>
+          <a:bodyPr wrap="square">
+            <a:spAutoFit/>
+          </a:bodyPr>
+          <a:lstStyle/>
+          <a:p>
+            <a:r>
+              <a:rPr sz="1300" b="1">
                 <a:solidFill>
                   <a:srgbClr val="FFFFFF"/>
                 </a:solidFill>
                 <a:latin typeface="Calibri"/>
               </a:rPr>
-              <a:t>reasoning-corruption</a:t>
-            </a:r>
-          </a:p>
-        </p:txBody>
-      </p:sp>
-      <p:sp>
-        <p:nvSpPr>
-          <p:cNvPr id="14" name="TextBox 13"/>
-          <p:cNvSpPr txBox="1"/>
-          <p:nvPr/>
-        </p:nvSpPr>
-        <p:spPr>
-          <a:xfrm>
-            <a:off x="3703320" y="3236976"/>
-            <a:ext cx="6766560" cy="475488"/>
+              <a:t>incidental</a:t>
+            </a:r>
+          </a:p>
+        </p:txBody>
+      </p:sp>
+      <p:sp>
+        <p:nvSpPr>
+          <p:cNvPr id="11" name="TextBox 10"/>
+          <p:cNvSpPr txBox="1"/>
+          <p:nvPr/>
+        </p:nvSpPr>
+        <p:spPr>
+          <a:xfrm>
+            <a:off x="914400" y="3803904"/>
+            <a:ext cx="4754880" cy="411480"/>
           </a:xfrm>
           <a:prstGeom prst="rect">
             <a:avLst/>
@@ -25045,55 +24985,21 @@
                 </a:solidFill>
                 <a:latin typeface="Calibri"/>
               </a:rPr>
-              <a:t>Every word in the window is true. The window is too long or too cluttered, and the model stops using it well.</a:t>
-            </a:r>
-          </a:p>
-        </p:txBody>
-      </p:sp>
-      <p:sp>
-        <p:nvSpPr>
-          <p:cNvPr id="15" name="TextBox 14"/>
-          <p:cNvSpPr txBox="1"/>
-          <p:nvPr/>
-        </p:nvSpPr>
-        <p:spPr>
-          <a:xfrm>
-            <a:off x="10607040" y="3328416"/>
-            <a:ext cx="914400" cy="274320"/>
-          </a:xfrm>
-          <a:prstGeom prst="rect">
-            <a:avLst/>
-          </a:prstGeom>
-          <a:noFill/>
-        </p:spPr>
-        <p:txBody>
-          <a:bodyPr wrap="square">
-            <a:spAutoFit/>
-          </a:bodyPr>
-          <a:lstStyle/>
-          <a:p>
-            <a:r>
-              <a:rPr sz="1200" b="1">
-                <a:solidFill>
-                  <a:srgbClr val="E0A458"/>
-                </a:solidFill>
-                <a:latin typeface="Calibri"/>
-              </a:rPr>
-              <a:t>46</a:t>
-            </a:r>
-          </a:p>
-        </p:txBody>
-      </p:sp>
-      <p:sp>
-        <p:nvSpPr>
-          <p:cNvPr id="16" name="Rectangle 15"/>
+              <a:t>Nobody placed it. The window is long, stale or badly ordered. This is the ML/AI track.</a:t>
+            </a:r>
+          </a:p>
+        </p:txBody>
+      </p:sp>
+      <p:sp>
+        <p:nvSpPr>
+          <p:cNvPr id="12" name="Rectangle 11"/>
           <p:cNvSpPr/>
           <p:nvPr/>
         </p:nvSpPr>
         <p:spPr>
           <a:xfrm>
-            <a:off x="640080" y="3803904"/>
-            <a:ext cx="10881360" cy="530352"/>
+            <a:off x="640080" y="4352544"/>
+            <a:ext cx="5257800" cy="841248"/>
           </a:xfrm>
           <a:prstGeom prst="rect">
             <a:avLst/>
@@ -25130,14 +25036,87 @@
       </p:sp>
       <p:sp>
         <p:nvSpPr>
-          <p:cNvPr id="17" name="TextBox 16"/>
-          <p:cNvSpPr txBox="1"/>
-          <p:nvPr/>
-        </p:nvSpPr>
-        <p:spPr>
-          <a:xfrm>
-            <a:off x="868680" y="3931920"/>
-            <a:ext cx="2651760" cy="274320"/>
+          <p:cNvPr id="13" name="TextBox 12"/>
+          <p:cNvSpPr txBox="1"/>
+          <p:nvPr/>
+        </p:nvSpPr>
+        <p:spPr>
+          <a:xfrm>
+            <a:off x="914400" y="4462272"/>
+            <a:ext cx="4754880" cy="274320"/>
+          </a:xfrm>
+          <a:prstGeom prst="rect">
+            <a:avLst/>
+          </a:prstGeom>
+          <a:noFill/>
+        </p:spPr>
+        <p:txBody>
+          <a:bodyPr wrap="square">
+            <a:spAutoFit/>
+          </a:bodyPr>
+          <a:lstStyle/>
+          <a:p>
+            <a:r>
+              <a:rPr sz="1300" b="1">
+                <a:solidFill>
+                  <a:srgbClr val="FFFFFF"/>
+                </a:solidFill>
+                <a:latin typeface="Calibri"/>
+              </a:rPr>
+              <a:t>both</a:t>
+            </a:r>
+          </a:p>
+        </p:txBody>
+      </p:sp>
+      <p:sp>
+        <p:nvSpPr>
+          <p:cNvPr id="14" name="TextBox 13"/>
+          <p:cNvSpPr txBox="1"/>
+          <p:nvPr/>
+        </p:nvSpPr>
+        <p:spPr>
+          <a:xfrm>
+            <a:off x="914400" y="4736592"/>
+            <a:ext cx="4754880" cy="411480"/>
+          </a:xfrm>
+          <a:prstGeom prst="rect">
+            <a:avLst/>
+          </a:prstGeom>
+          <a:noFill/>
+        </p:spPr>
+        <p:txBody>
+          <a:bodyPr wrap="square">
+            <a:spAutoFit/>
+          </a:bodyPr>
+          <a:lstStyle/>
+          <a:p>
+            <a:pPr>
+              <a:spcAft>
+                <a:spcPts val="0"/>
+              </a:spcAft>
+            </a:pPr>
+            <a:r>
+              <a:rPr sz="1150" b="0">
+                <a:solidFill>
+                  <a:srgbClr val="CADCFC"/>
+                </a:solidFill>
+                <a:latin typeface="Calibri"/>
+              </a:rPr>
+              <a:t>The paper treats the case in both ways.</a:t>
+            </a:r>
+          </a:p>
+        </p:txBody>
+      </p:sp>
+      <p:sp>
+        <p:nvSpPr>
+          <p:cNvPr id="15" name="TextBox 14"/>
+          <p:cNvSpPr txBox="1"/>
+          <p:nvPr/>
+        </p:nvSpPr>
+        <p:spPr>
+          <a:xfrm>
+            <a:off x="6263640" y="2148840"/>
+            <a:ext cx="5257800" cy="274320"/>
           </a:xfrm>
           <a:prstGeom prst="rect">
             <a:avLst/>
@@ -25153,98 +25132,25 @@
             <a:r>
               <a:rPr sz="1200" b="1">
                 <a:solidFill>
-                  <a:srgbClr val="FFFFFF"/>
-                </a:solidFill>
-                <a:latin typeface="Calibri"/>
-              </a:rPr>
-              <a:t>silent-corruption</a:t>
-            </a:r>
-          </a:p>
-        </p:txBody>
-      </p:sp>
-      <p:sp>
-        <p:nvSpPr>
-          <p:cNvPr id="18" name="TextBox 17"/>
-          <p:cNvSpPr txBox="1"/>
-          <p:nvPr/>
-        </p:nvSpPr>
-        <p:spPr>
-          <a:xfrm>
-            <a:off x="3703320" y="3840480"/>
-            <a:ext cx="6766560" cy="475488"/>
-          </a:xfrm>
-          <a:prstGeom prst="rect">
-            <a:avLst/>
-          </a:prstGeom>
-          <a:noFill/>
-        </p:spPr>
-        <p:txBody>
-          <a:bodyPr wrap="square">
-            <a:spAutoFit/>
-          </a:bodyPr>
-          <a:lstStyle/>
-          <a:p>
-            <a:pPr>
-              <a:spcAft>
-                <a:spcPts val="0"/>
-              </a:spcAft>
-            </a:pPr>
-            <a:r>
-              <a:rPr sz="1150" b="0">
-                <a:solidFill>
-                  <a:srgbClr val="CADCFC"/>
-                </a:solidFill>
-                <a:latin typeface="Calibri"/>
-              </a:rPr>
-              <a:t>The agent answers from false or stale content. Nobody gave it a new task. It simply believes a wrong thing.</a:t>
-            </a:r>
-          </a:p>
-        </p:txBody>
-      </p:sp>
-      <p:sp>
-        <p:nvSpPr>
-          <p:cNvPr id="19" name="TextBox 18"/>
-          <p:cNvSpPr txBox="1"/>
-          <p:nvPr/>
-        </p:nvSpPr>
-        <p:spPr>
-          <a:xfrm>
-            <a:off x="10607040" y="3931920"/>
-            <a:ext cx="914400" cy="274320"/>
-          </a:xfrm>
-          <a:prstGeom prst="rect">
-            <a:avLst/>
-          </a:prstGeom>
-          <a:noFill/>
-        </p:spPr>
-        <p:txBody>
-          <a:bodyPr wrap="square">
-            <a:spAutoFit/>
-          </a:bodyPr>
-          <a:lstStyle/>
-          <a:p>
-            <a:r>
-              <a:rPr sz="1200" b="1">
-                <a:solidFill>
                   <a:srgbClr val="E0A458"/>
                 </a:solidFill>
                 <a:latin typeface="Calibri"/>
               </a:rPr>
-              <a:t>21</a:t>
-            </a:r>
-          </a:p>
-        </p:txBody>
-      </p:sp>
-      <p:sp>
-        <p:nvSpPr>
-          <p:cNvPr id="20" name="Rectangle 19"/>
+              <a:t>INTERVENTION POINT: WHERE THE DEFENSE ACTS</a:t>
+            </a:r>
+          </a:p>
+        </p:txBody>
+      </p:sp>
+      <p:sp>
+        <p:nvSpPr>
+          <p:cNvPr id="16" name="Rectangle 15"/>
           <p:cNvSpPr/>
           <p:nvPr/>
         </p:nvSpPr>
         <p:spPr>
           <a:xfrm>
-            <a:off x="640080" y="4407408"/>
-            <a:ext cx="10881360" cy="530352"/>
+            <a:off x="6263640" y="2487168"/>
+            <a:ext cx="5257800" cy="841248"/>
           </a:xfrm>
           <a:prstGeom prst="rect">
             <a:avLst/>
@@ -25281,48 +25187,82 @@
       </p:sp>
       <p:sp>
         <p:nvSpPr>
-          <p:cNvPr id="21" name="TextBox 20"/>
-          <p:cNvSpPr txBox="1"/>
-          <p:nvPr/>
-        </p:nvSpPr>
-        <p:spPr>
-          <a:xfrm>
-            <a:off x="868680" y="4535424"/>
-            <a:ext cx="2651760" cy="274320"/>
-          </a:xfrm>
-          <a:prstGeom prst="rect">
-            <a:avLst/>
-          </a:prstGeom>
-          <a:noFill/>
-        </p:spPr>
-        <p:txBody>
-          <a:bodyPr wrap="square">
-            <a:spAutoFit/>
-          </a:bodyPr>
-          <a:lstStyle/>
-          <a:p>
-            <a:r>
-              <a:rPr sz="1200" b="1">
+          <p:cNvPr id="17" name="TextBox 16"/>
+          <p:cNvSpPr txBox="1"/>
+          <p:nvPr/>
+        </p:nvSpPr>
+        <p:spPr>
+          <a:xfrm>
+            <a:off x="6537960" y="2596896"/>
+            <a:ext cx="3657600" cy="274320"/>
+          </a:xfrm>
+          <a:prstGeom prst="rect">
+            <a:avLst/>
+          </a:prstGeom>
+          <a:noFill/>
+        </p:spPr>
+        <p:txBody>
+          <a:bodyPr wrap="square">
+            <a:spAutoFit/>
+          </a:bodyPr>
+          <a:lstStyle/>
+          <a:p>
+            <a:r>
+              <a:rPr sz="1300" b="1">
                 <a:solidFill>
                   <a:srgbClr val="FFFFFF"/>
                 </a:solidFill>
                 <a:latin typeface="Calibri"/>
               </a:rPr>
-              <a:t>persistence-backdoor</a:t>
-            </a:r>
-          </a:p>
-        </p:txBody>
-      </p:sp>
-      <p:sp>
-        <p:nvSpPr>
-          <p:cNvPr id="22" name="TextBox 21"/>
-          <p:cNvSpPr txBox="1"/>
-          <p:nvPr/>
-        </p:nvSpPr>
-        <p:spPr>
-          <a:xfrm>
-            <a:off x="3703320" y="4443984"/>
-            <a:ext cx="6766560" cy="475488"/>
+              <a:t>ingestion</a:t>
+            </a:r>
+          </a:p>
+        </p:txBody>
+      </p:sp>
+      <p:sp>
+        <p:nvSpPr>
+          <p:cNvPr id="18" name="TextBox 17"/>
+          <p:cNvSpPr txBox="1"/>
+          <p:nvPr/>
+        </p:nvSpPr>
+        <p:spPr>
+          <a:xfrm>
+            <a:off x="10332720" y="2596896"/>
+            <a:ext cx="1005840" cy="274320"/>
+          </a:xfrm>
+          <a:prstGeom prst="rect">
+            <a:avLst/>
+          </a:prstGeom>
+          <a:noFill/>
+        </p:spPr>
+        <p:txBody>
+          <a:bodyPr wrap="square">
+            <a:spAutoFit/>
+          </a:bodyPr>
+          <a:lstStyle/>
+          <a:p>
+            <a:r>
+              <a:rPr sz="1300" b="1">
+                <a:solidFill>
+                  <a:srgbClr val="E0A458"/>
+                </a:solidFill>
+                <a:latin typeface="Calibri"/>
+              </a:rPr>
+              <a:t>155</a:t>
+            </a:r>
+          </a:p>
+        </p:txBody>
+      </p:sp>
+      <p:sp>
+        <p:nvSpPr>
+          <p:cNvPr id="19" name="TextBox 18"/>
+          <p:cNvSpPr txBox="1"/>
+          <p:nvPr/>
+        </p:nvSpPr>
+        <p:spPr>
+          <a:xfrm>
+            <a:off x="6537960" y="2871216"/>
+            <a:ext cx="4754880" cy="411480"/>
           </a:xfrm>
           <a:prstGeom prst="rect">
             <a:avLst/>
@@ -25347,55 +25287,21 @@
                 </a:solidFill>
                 <a:latin typeface="Calibri"/>
               </a:rPr>
-              <a:t>The bad content is written to memory or to a store. It fires on a later run, maybe for another user.</a:t>
-            </a:r>
-          </a:p>
-        </p:txBody>
-      </p:sp>
-      <p:sp>
-        <p:nvSpPr>
-          <p:cNvPr id="23" name="TextBox 22"/>
-          <p:cNvSpPr txBox="1"/>
-          <p:nvPr/>
-        </p:nvSpPr>
-        <p:spPr>
-          <a:xfrm>
-            <a:off x="10607040" y="4535424"/>
-            <a:ext cx="914400" cy="274320"/>
-          </a:xfrm>
-          <a:prstGeom prst="rect">
-            <a:avLst/>
-          </a:prstGeom>
-          <a:noFill/>
-        </p:spPr>
-        <p:txBody>
-          <a:bodyPr wrap="square">
-            <a:spAutoFit/>
-          </a:bodyPr>
-          <a:lstStyle/>
-          <a:p>
-            <a:r>
-              <a:rPr sz="1200" b="1">
-                <a:solidFill>
-                  <a:srgbClr val="E0A458"/>
-                </a:solidFill>
-                <a:latin typeface="Calibri"/>
-              </a:rPr>
-              <a:t>14</a:t>
-            </a:r>
-          </a:p>
-        </p:txBody>
-      </p:sp>
-      <p:sp>
-        <p:nvSpPr>
-          <p:cNvPr id="24" name="Rectangle 23"/>
+              <a:t>It checks the text as it arrives, before the model reads it.</a:t>
+            </a:r>
+          </a:p>
+        </p:txBody>
+      </p:sp>
+      <p:sp>
+        <p:nvSpPr>
+          <p:cNvPr id="20" name="Rectangle 19"/>
           <p:cNvSpPr/>
           <p:nvPr/>
         </p:nvSpPr>
         <p:spPr>
           <a:xfrm>
-            <a:off x="640080" y="5010912"/>
-            <a:ext cx="10881360" cy="530352"/>
+            <a:off x="6263640" y="3419856"/>
+            <a:ext cx="5257800" cy="841248"/>
           </a:xfrm>
           <a:prstGeom prst="rect">
             <a:avLst/>
@@ -25432,48 +25338,82 @@
       </p:sp>
       <p:sp>
         <p:nvSpPr>
-          <p:cNvPr id="25" name="TextBox 24"/>
-          <p:cNvSpPr txBox="1"/>
-          <p:nvPr/>
-        </p:nvSpPr>
-        <p:spPr>
-          <a:xfrm>
-            <a:off x="868680" y="5138928"/>
-            <a:ext cx="2651760" cy="274320"/>
-          </a:xfrm>
-          <a:prstGeom prst="rect">
-            <a:avLst/>
-          </a:prstGeom>
-          <a:noFill/>
-        </p:spPr>
-        <p:txBody>
-          <a:bodyPr wrap="square">
-            <a:spAutoFit/>
-          </a:bodyPr>
-          <a:lstStyle/>
-          <a:p>
-            <a:r>
-              <a:rPr sz="1200" b="1">
+          <p:cNvPr id="21" name="TextBox 20"/>
+          <p:cNvSpPr txBox="1"/>
+          <p:nvPr/>
+        </p:nvSpPr>
+        <p:spPr>
+          <a:xfrm>
+            <a:off x="6537960" y="3529584"/>
+            <a:ext cx="3657600" cy="274320"/>
+          </a:xfrm>
+          <a:prstGeom prst="rect">
+            <a:avLst/>
+          </a:prstGeom>
+          <a:noFill/>
+        </p:spPr>
+        <p:txBody>
+          <a:bodyPr wrap="square">
+            <a:spAutoFit/>
+          </a:bodyPr>
+          <a:lstStyle/>
+          <a:p>
+            <a:r>
+              <a:rPr sz="1300" b="1">
                 <a:solidFill>
                   <a:srgbClr val="FFFFFF"/>
                 </a:solidFill>
                 <a:latin typeface="Calibri"/>
               </a:rPr>
-              <a:t>data-exfiltration</a:t>
-            </a:r>
-          </a:p>
-        </p:txBody>
-      </p:sp>
-      <p:sp>
-        <p:nvSpPr>
-          <p:cNvPr id="26" name="TextBox 25"/>
-          <p:cNvSpPr txBox="1"/>
-          <p:nvPr/>
-        </p:nvSpPr>
-        <p:spPr>
-          <a:xfrm>
-            <a:off x="3703320" y="5047488"/>
-            <a:ext cx="6766560" cy="475488"/>
+              <a:t>reasoning</a:t>
+            </a:r>
+          </a:p>
+        </p:txBody>
+      </p:sp>
+      <p:sp>
+        <p:nvSpPr>
+          <p:cNvPr id="22" name="TextBox 21"/>
+          <p:cNvSpPr txBox="1"/>
+          <p:nvPr/>
+        </p:nvSpPr>
+        <p:spPr>
+          <a:xfrm>
+            <a:off x="10332720" y="3529584"/>
+            <a:ext cx="1005840" cy="274320"/>
+          </a:xfrm>
+          <a:prstGeom prst="rect">
+            <a:avLst/>
+          </a:prstGeom>
+          <a:noFill/>
+        </p:spPr>
+        <p:txBody>
+          <a:bodyPr wrap="square">
+            <a:spAutoFit/>
+          </a:bodyPr>
+          <a:lstStyle/>
+          <a:p>
+            <a:r>
+              <a:rPr sz="1300" b="1">
+                <a:solidFill>
+                  <a:srgbClr val="E0A458"/>
+                </a:solidFill>
+                <a:latin typeface="Calibri"/>
+              </a:rPr>
+              <a:t>205</a:t>
+            </a:r>
+          </a:p>
+        </p:txBody>
+      </p:sp>
+      <p:sp>
+        <p:nvSpPr>
+          <p:cNvPr id="23" name="TextBox 22"/>
+          <p:cNvSpPr txBox="1"/>
+          <p:nvPr/>
+        </p:nvSpPr>
+        <p:spPr>
+          <a:xfrm>
+            <a:off x="6537960" y="3803904"/>
+            <a:ext cx="4754880" cy="411480"/>
           </a:xfrm>
           <a:prstGeom prst="rect">
             <a:avLst/>
@@ -25498,55 +25438,21 @@
                 </a:solidFill>
                 <a:latin typeface="Calibri"/>
               </a:rPr>
-              <a:t>The agent sends out what it can read. It uses a tool call, a link or a message to move the data.</a:t>
-            </a:r>
-          </a:p>
-        </p:txBody>
-      </p:sp>
-      <p:sp>
-        <p:nvSpPr>
-          <p:cNvPr id="27" name="TextBox 26"/>
-          <p:cNvSpPr txBox="1"/>
-          <p:nvPr/>
-        </p:nvSpPr>
-        <p:spPr>
-          <a:xfrm>
-            <a:off x="10607040" y="5138928"/>
-            <a:ext cx="914400" cy="274320"/>
-          </a:xfrm>
-          <a:prstGeom prst="rect">
-            <a:avLst/>
-          </a:prstGeom>
-          <a:noFill/>
-        </p:spPr>
-        <p:txBody>
-          <a:bodyPr wrap="square">
-            <a:spAutoFit/>
-          </a:bodyPr>
-          <a:lstStyle/>
-          <a:p>
-            <a:r>
-              <a:rPr sz="1200" b="1">
-                <a:solidFill>
-                  <a:srgbClr val="E0A458"/>
-                </a:solidFill>
-                <a:latin typeface="Calibri"/>
-              </a:rPr>
-              <a:t>13</a:t>
-            </a:r>
-          </a:p>
-        </p:txBody>
-      </p:sp>
-      <p:sp>
-        <p:nvSpPr>
-          <p:cNvPr id="28" name="Rectangle 27"/>
+              <a:t>It changes how the model uses text that is already in the window.</a:t>
+            </a:r>
+          </a:p>
+        </p:txBody>
+      </p:sp>
+      <p:sp>
+        <p:nvSpPr>
+          <p:cNvPr id="24" name="Rectangle 23"/>
           <p:cNvSpPr/>
           <p:nvPr/>
         </p:nvSpPr>
         <p:spPr>
           <a:xfrm>
-            <a:off x="640080" y="5614416"/>
-            <a:ext cx="10881360" cy="530352"/>
+            <a:off x="6263640" y="4352544"/>
+            <a:ext cx="5257800" cy="841248"/>
           </a:xfrm>
           <a:prstGeom prst="rect">
             <a:avLst/>
@@ -25583,146 +25489,212 @@
       </p:sp>
       <p:sp>
         <p:nvSpPr>
+          <p:cNvPr id="25" name="TextBox 24"/>
+          <p:cNvSpPr txBox="1"/>
+          <p:nvPr/>
+        </p:nvSpPr>
+        <p:spPr>
+          <a:xfrm>
+            <a:off x="6537960" y="4462272"/>
+            <a:ext cx="3657600" cy="274320"/>
+          </a:xfrm>
+          <a:prstGeom prst="rect">
+            <a:avLst/>
+          </a:prstGeom>
+          <a:noFill/>
+        </p:spPr>
+        <p:txBody>
+          <a:bodyPr wrap="square">
+            <a:spAutoFit/>
+          </a:bodyPr>
+          <a:lstStyle/>
+          <a:p>
+            <a:r>
+              <a:rPr sz="1300" b="1">
+                <a:solidFill>
+                  <a:srgbClr val="FFFFFF"/>
+                </a:solidFill>
+                <a:latin typeface="Calibri"/>
+              </a:rPr>
+              <a:t>execution</a:t>
+            </a:r>
+          </a:p>
+        </p:txBody>
+      </p:sp>
+      <p:sp>
+        <p:nvSpPr>
+          <p:cNvPr id="26" name="TextBox 25"/>
+          <p:cNvSpPr txBox="1"/>
+          <p:nvPr/>
+        </p:nvSpPr>
+        <p:spPr>
+          <a:xfrm>
+            <a:off x="10332720" y="4462272"/>
+            <a:ext cx="1005840" cy="274320"/>
+          </a:xfrm>
+          <a:prstGeom prst="rect">
+            <a:avLst/>
+          </a:prstGeom>
+          <a:noFill/>
+        </p:spPr>
+        <p:txBody>
+          <a:bodyPr wrap="square">
+            <a:spAutoFit/>
+          </a:bodyPr>
+          <a:lstStyle/>
+          <a:p>
+            <a:r>
+              <a:rPr sz="1300" b="1">
+                <a:solidFill>
+                  <a:srgbClr val="E0A458"/>
+                </a:solidFill>
+                <a:latin typeface="Calibri"/>
+              </a:rPr>
+              <a:t>74</a:t>
+            </a:r>
+          </a:p>
+        </p:txBody>
+      </p:sp>
+      <p:sp>
+        <p:nvSpPr>
+          <p:cNvPr id="27" name="TextBox 26"/>
+          <p:cNvSpPr txBox="1"/>
+          <p:nvPr/>
+        </p:nvSpPr>
+        <p:spPr>
+          <a:xfrm>
+            <a:off x="6537960" y="4736592"/>
+            <a:ext cx="4754880" cy="411480"/>
+          </a:xfrm>
+          <a:prstGeom prst="rect">
+            <a:avLst/>
+          </a:prstGeom>
+          <a:noFill/>
+        </p:spPr>
+        <p:txBody>
+          <a:bodyPr wrap="square">
+            <a:spAutoFit/>
+          </a:bodyPr>
+          <a:lstStyle/>
+          <a:p>
+            <a:pPr>
+              <a:spcAft>
+                <a:spcPts val="0"/>
+              </a:spcAft>
+            </a:pPr>
+            <a:r>
+              <a:rPr sz="1150" b="0">
+                <a:solidFill>
+                  <a:srgbClr val="CADCFC"/>
+                </a:solidFill>
+                <a:latin typeface="Calibri"/>
+              </a:rPr>
+              <a:t>It checks the action the agent wants to take, after the model decides.</a:t>
+            </a:r>
+          </a:p>
+        </p:txBody>
+      </p:sp>
+      <p:sp>
+        <p:nvSpPr>
+          <p:cNvPr id="28" name="TextBox 27"/>
+          <p:cNvSpPr txBox="1"/>
+          <p:nvPr/>
+        </p:nvSpPr>
+        <p:spPr>
+          <a:xfrm>
+            <a:off x="640080" y="5440680"/>
+            <a:ext cx="10881360" cy="1097280"/>
+          </a:xfrm>
+          <a:prstGeom prst="rect">
+            <a:avLst/>
+          </a:prstGeom>
+          <a:noFill/>
+        </p:spPr>
+        <p:txBody>
+          <a:bodyPr wrap="square">
+            <a:spAutoFit/>
+          </a:bodyPr>
+          <a:lstStyle/>
+          <a:p>
+            <a:pPr>
+              <a:spcAft>
+                <a:spcPts val="400"/>
+              </a:spcAft>
+            </a:pPr>
+            <a:r>
+              <a:rPr sz="1400" b="1">
+                <a:solidFill>
+                  <a:srgbClr val="FFFFFF"/>
+                </a:solidFill>
+                <a:latin typeface="Calibri"/>
+              </a:rPr>
+              <a:t>Intent is the axis that splits the two literatures. The same failure gets two names and two sets of defenses.</a:t>
+            </a:r>
+          </a:p>
+          <a:p>
+            <a:pPr>
+              <a:spcAft>
+                <a:spcPts val="400"/>
+              </a:spcAft>
+            </a:pPr>
+            <a:r>
+              <a:rPr sz="1250" b="0">
+                <a:solidFill>
+                  <a:srgbClr val="CADCFC"/>
+                </a:solidFill>
+                <a:latin typeface="Calibri"/>
+              </a:rPr>
+              <a:t>A tool returns a page with a hidden order. A tool returns a page that is simply ten times too long. Both reach the window through the same channel. One has an author. One does not.</a:t>
+            </a:r>
+          </a:p>
+          <a:p>
+            <a:pPr>
+              <a:spcAft>
+                <a:spcPts val="400"/>
+              </a:spcAft>
+            </a:pPr>
+            <a:r>
+              <a:rPr sz="1250" b="0">
+                <a:solidFill>
+                  <a:srgbClr val="CFE8EF"/>
+                </a:solidFill>
+                <a:latin typeface="Calibri"/>
+              </a:rPr>
+              <a:t>The counts on the right are defenses, not attacks. 100 more defenses carry no intervention point: they act after the event, such as forensics, or we never coded them.</a:t>
+            </a:r>
+          </a:p>
+        </p:txBody>
+      </p:sp>
+      <p:sp>
+        <p:nvSpPr>
           <p:cNvPr id="29" name="TextBox 28"/>
           <p:cNvSpPr txBox="1"/>
           <p:nvPr/>
         </p:nvSpPr>
         <p:spPr>
           <a:xfrm>
-            <a:off x="868680" y="5742432"/>
-            <a:ext cx="2651760" cy="274320"/>
-          </a:xfrm>
-          <a:prstGeom prst="rect">
-            <a:avLst/>
-          </a:prstGeom>
-          <a:noFill/>
-        </p:spPr>
-        <p:txBody>
-          <a:bodyPr wrap="square">
-            <a:spAutoFit/>
-          </a:bodyPr>
-          <a:lstStyle/>
-          <a:p>
-            <a:r>
-              <a:rPr sz="1200" b="1">
-                <a:solidFill>
-                  <a:srgbClr val="FFFFFF"/>
-                </a:solidFill>
-                <a:latin typeface="Calibri"/>
-              </a:rPr>
-              <a:t>resource-abuse</a:t>
-            </a:r>
-          </a:p>
-        </p:txBody>
-      </p:sp>
-      <p:sp>
-        <p:nvSpPr>
-          <p:cNvPr id="30" name="TextBox 29"/>
-          <p:cNvSpPr txBox="1"/>
-          <p:nvPr/>
-        </p:nvSpPr>
-        <p:spPr>
-          <a:xfrm>
-            <a:off x="3703320" y="5650992"/>
-            <a:ext cx="6766560" cy="475488"/>
-          </a:xfrm>
-          <a:prstGeom prst="rect">
-            <a:avLst/>
-          </a:prstGeom>
-          <a:noFill/>
-        </p:spPr>
-        <p:txBody>
-          <a:bodyPr wrap="square">
-            <a:spAutoFit/>
-          </a:bodyPr>
-          <a:lstStyle/>
-          <a:p>
-            <a:pPr>
-              <a:spcAft>
-                <a:spcPts val="0"/>
-              </a:spcAft>
-            </a:pPr>
-            <a:r>
-              <a:rPr sz="1150" b="0">
-                <a:solidFill>
-                  <a:srgbClr val="CADCFC"/>
-                </a:solidFill>
-                <a:latin typeface="Calibri"/>
-              </a:rPr>
-              <a:t>No data moves and no goal changes. The agent burns time or refuses to answer at all.</a:t>
-            </a:r>
-          </a:p>
-        </p:txBody>
-      </p:sp>
-      <p:sp>
-        <p:nvSpPr>
-          <p:cNvPr id="31" name="TextBox 30"/>
-          <p:cNvSpPr txBox="1"/>
-          <p:nvPr/>
-        </p:nvSpPr>
-        <p:spPr>
-          <a:xfrm>
-            <a:off x="10607040" y="5742432"/>
-            <a:ext cx="914400" cy="274320"/>
-          </a:xfrm>
-          <a:prstGeom prst="rect">
-            <a:avLst/>
-          </a:prstGeom>
-          <a:noFill/>
-        </p:spPr>
-        <p:txBody>
-          <a:bodyPr wrap="square">
-            <a:spAutoFit/>
-          </a:bodyPr>
-          <a:lstStyle/>
-          <a:p>
-            <a:r>
-              <a:rPr sz="1200" b="1">
-                <a:solidFill>
-                  <a:srgbClr val="E0A458"/>
-                </a:solidFill>
-                <a:latin typeface="Calibri"/>
-              </a:rPr>
-              <a:t>3</a:t>
-            </a:r>
-          </a:p>
-        </p:txBody>
-      </p:sp>
-      <p:sp>
-        <p:nvSpPr>
-          <p:cNvPr id="32" name="TextBox 31"/>
-          <p:cNvSpPr txBox="1"/>
-          <p:nvPr/>
-        </p:nvSpPr>
-        <p:spPr>
-          <a:xfrm>
-            <a:off x="640080" y="6263640"/>
-            <a:ext cx="10881360" cy="411480"/>
-          </a:xfrm>
-          <a:prstGeom prst="rect">
-            <a:avLst/>
-          </a:prstGeom>
-          <a:noFill/>
-        </p:spPr>
-        <p:txBody>
-          <a:bodyPr wrap="square">
-            <a:spAutoFit/>
-          </a:bodyPr>
-          <a:lstStyle/>
-          <a:p>
-            <a:pPr>
-              <a:spcAft>
-                <a:spcPts val="400"/>
-              </a:spcAft>
-            </a:pPr>
-            <a:r>
-              <a:rPr sz="1250" b="0">
-                <a:solidFill>
-                  <a:srgbClr val="CFE8EF"/>
-                </a:solidFill>
-                <a:latin typeface="Calibri"/>
-              </a:rPr>
-              <a:t>The second row is the ML/AI track. The other five are mostly the security track. That split is the point of the paper.</a:t>
+            <a:off x="640080" y="6419088"/>
+            <a:ext cx="10789920" cy="402336"/>
+          </a:xfrm>
+          <a:prstGeom prst="rect">
+            <a:avLst/>
+          </a:prstGeom>
+          <a:noFill/>
+        </p:spPr>
+        <p:txBody>
+          <a:bodyPr wrap="square">
+            <a:spAutoFit/>
+          </a:bodyPr>
+          <a:lstStyle/>
+          <a:p>
+            <a:r>
+              <a:rPr sz="850" b="0">
+                <a:solidFill>
+                  <a:srgbClr val="5B6B79"/>
+                </a:solidFill>
+                <a:latin typeface="Calibri"/>
+              </a:rPr>
+              <a:t>Sources:  adversarial track Greshake et al., AISec@CCS 2023, arXiv:2302.12173   ·   incidental track Liu et al., TACL 2023, arXiv:2307.03172   ·   knowledge conflict Xu et al., EMNLP 2024, arXiv:2403.08319   ·   intervention points: this work</a:t>
             </a:r>
           </a:p>
         </p:txBody>
@@ -25782,7 +25754,7 @@
                 </a:solidFill>
                 <a:latin typeface="Calibri"/>
               </a:rPr>
-              <a:t>AXIS 2  ·  INTENT</a:t>
+              <a:t>THE ROADMAP</a:t>
             </a:r>
           </a:p>
         </p:txBody>
@@ -25815,13 +25787,13 @@
               </a:spcAft>
             </a:pPr>
             <a:r>
-              <a:rPr sz="2800" b="1">
+              <a:rPr sz="3000" b="1">
                 <a:solidFill>
                   <a:srgbClr val="FFFFFF"/>
                 </a:solidFill>
                 <a:latin typeface="Cambria"/>
               </a:rPr>
-              <a:t>And where a defense can stand</a:t>
+              <a:t>Seven questions, then the experiments</a:t>
             </a:r>
           </a:p>
         </p:txBody>
@@ -25862,48 +25834,14 @@
       </p:sp>
       <p:sp>
         <p:nvSpPr>
-          <p:cNvPr id="5" name="TextBox 4"/>
-          <p:cNvSpPr txBox="1"/>
-          <p:nvPr/>
-        </p:nvSpPr>
-        <p:spPr>
-          <a:xfrm>
-            <a:off x="640080" y="2148840"/>
-            <a:ext cx="5257800" cy="274320"/>
-          </a:xfrm>
-          <a:prstGeom prst="rect">
-            <a:avLst/>
-          </a:prstGeom>
-          <a:noFill/>
-        </p:spPr>
-        <p:txBody>
-          <a:bodyPr wrap="square">
-            <a:spAutoFit/>
-          </a:bodyPr>
-          <a:lstStyle/>
-          <a:p>
-            <a:r>
-              <a:rPr sz="1200" b="1">
-                <a:solidFill>
-                  <a:srgbClr val="E0A458"/>
-                </a:solidFill>
-                <a:latin typeface="Calibri"/>
-              </a:rPr>
-              <a:t>INTENT: DID SOMEONE MEAN IT?</a:t>
-            </a:r>
-          </a:p>
-        </p:txBody>
-      </p:sp>
-      <p:sp>
-        <p:nvSpPr>
-          <p:cNvPr id="6" name="Rectangle 5"/>
+          <p:cNvPr id="5" name="Rectangle 4"/>
           <p:cNvSpPr/>
           <p:nvPr/>
         </p:nvSpPr>
         <p:spPr>
           <a:xfrm>
-            <a:off x="640080" y="2487168"/>
-            <a:ext cx="5257800" cy="841248"/>
+            <a:off x="640080" y="2029968"/>
+            <a:ext cx="10881360" cy="475488"/>
           </a:xfrm>
           <a:prstGeom prst="rect">
             <a:avLst/>
@@ -25940,34 +25878,68 @@
       </p:sp>
       <p:sp>
         <p:nvSpPr>
+          <p:cNvPr id="6" name="TextBox 5"/>
+          <p:cNvSpPr txBox="1"/>
+          <p:nvPr/>
+        </p:nvSpPr>
+        <p:spPr>
+          <a:xfrm>
+            <a:off x="868680" y="2103120"/>
+            <a:ext cx="1005840" cy="320040"/>
+          </a:xfrm>
+          <a:prstGeom prst="rect">
+            <a:avLst/>
+          </a:prstGeom>
+          <a:noFill/>
+        </p:spPr>
+        <p:txBody>
+          <a:bodyPr wrap="square">
+            <a:spAutoFit/>
+          </a:bodyPr>
+          <a:lstStyle/>
+          <a:p>
+            <a:r>
+              <a:rPr sz="1400" b="1">
+                <a:solidFill>
+                  <a:srgbClr val="E0A458"/>
+                </a:solidFill>
+                <a:latin typeface="Cambria"/>
+              </a:rPr>
+              <a:t>BASE</a:t>
+            </a:r>
+          </a:p>
+        </p:txBody>
+      </p:sp>
+      <p:sp>
+        <p:nvSpPr>
           <p:cNvPr id="7" name="TextBox 6"/>
           <p:cNvSpPr txBox="1"/>
           <p:nvPr/>
         </p:nvSpPr>
         <p:spPr>
           <a:xfrm>
-            <a:off x="914400" y="2596896"/>
-            <a:ext cx="4754880" cy="274320"/>
-          </a:xfrm>
-          <a:prstGeom prst="rect">
-            <a:avLst/>
-          </a:prstGeom>
-          <a:noFill/>
-        </p:spPr>
-        <p:txBody>
-          <a:bodyPr wrap="square">
-            <a:spAutoFit/>
-          </a:bodyPr>
-          <a:lstStyle/>
-          <a:p>
-            <a:r>
-              <a:rPr sz="1300" b="1">
+            <a:off x="1874519" y="2112264"/>
+            <a:ext cx="3108960" cy="320040"/>
+          </a:xfrm>
+          <a:prstGeom prst="rect">
+            <a:avLst/>
+          </a:prstGeom>
+          <a:noFill/>
+        </p:spPr>
+        <p:txBody>
+          <a:bodyPr wrap="square">
+            <a:spAutoFit/>
+          </a:bodyPr>
+          <a:lstStyle/>
+          <a:p>
+            <a:r>
+              <a:rPr sz="1350" b="1">
                 <a:solidFill>
                   <a:srgbClr val="FFFFFF"/>
                 </a:solidFill>
                 <a:latin typeface="Calibri"/>
               </a:rPr>
-              <a:t>adversarial</a:t>
+              <a:t>What we measure</a:t>
             </a:r>
           </a:p>
         </p:txBody>
@@ -25980,33 +25952,28 @@
         </p:nvSpPr>
         <p:spPr>
           <a:xfrm>
-            <a:off x="914400" y="2871216"/>
-            <a:ext cx="4754880" cy="411480"/>
-          </a:xfrm>
-          <a:prstGeom prst="rect">
-            <a:avLst/>
-          </a:prstGeom>
-          <a:noFill/>
-        </p:spPr>
-        <p:txBody>
-          <a:bodyPr wrap="square">
-            <a:spAutoFit/>
-          </a:bodyPr>
-          <a:lstStyle/>
-          <a:p>
-            <a:pPr>
-              <a:spcAft>
-                <a:spcPts val="0"/>
-              </a:spcAft>
-            </a:pPr>
-            <a:r>
-              <a:rPr sz="1150" b="0">
+            <a:off x="5120640" y="2112264"/>
+            <a:ext cx="6126480" cy="320040"/>
+          </a:xfrm>
+          <a:prstGeom prst="rect">
+            <a:avLst/>
+          </a:prstGeom>
+          <a:noFill/>
+        </p:spPr>
+        <p:txBody>
+          <a:bodyPr wrap="square">
+            <a:spAutoFit/>
+          </a:bodyPr>
+          <a:lstStyle/>
+          <a:p>
+            <a:r>
+              <a:rPr sz="1300" b="0">
                 <a:solidFill>
                   <a:srgbClr val="CADCFC"/>
                 </a:solidFill>
                 <a:latin typeface="Calibri"/>
               </a:rPr>
-              <a:t>A person placed the text to get this effect. This is the security track.</a:t>
+              <a:t>3 axes: channel, intent, consequence</a:t>
             </a:r>
           </a:p>
         </p:txBody>
@@ -26019,8 +25986,8 @@
         </p:nvSpPr>
         <p:spPr>
           <a:xfrm>
-            <a:off x="640080" y="3419856"/>
-            <a:ext cx="5257800" cy="841248"/>
+            <a:off x="640080" y="2528316"/>
+            <a:ext cx="10881360" cy="475488"/>
           </a:xfrm>
           <a:prstGeom prst="rect">
             <a:avLst/>
@@ -26063,81 +26030,110 @@
         </p:nvSpPr>
         <p:spPr>
           <a:xfrm>
-            <a:off x="914400" y="3529584"/>
-            <a:ext cx="4754880" cy="274320"/>
-          </a:xfrm>
-          <a:prstGeom prst="rect">
-            <a:avLst/>
-          </a:prstGeom>
-          <a:noFill/>
-        </p:spPr>
-        <p:txBody>
-          <a:bodyPr wrap="square">
-            <a:spAutoFit/>
-          </a:bodyPr>
-          <a:lstStyle/>
-          <a:p>
-            <a:r>
-              <a:rPr sz="1300" b="1">
+            <a:off x="868680" y="2601468"/>
+            <a:ext cx="1005840" cy="320040"/>
+          </a:xfrm>
+          <a:prstGeom prst="rect">
+            <a:avLst/>
+          </a:prstGeom>
+          <a:noFill/>
+        </p:spPr>
+        <p:txBody>
+          <a:bodyPr wrap="square">
+            <a:spAutoFit/>
+          </a:bodyPr>
+          <a:lstStyle/>
+          <a:p>
+            <a:r>
+              <a:rPr sz="1400" b="1">
+                <a:solidFill>
+                  <a:srgbClr val="E0A458"/>
+                </a:solidFill>
+                <a:latin typeface="Cambria"/>
+              </a:rPr>
+              <a:t>RQ1</a:t>
+            </a:r>
+          </a:p>
+        </p:txBody>
+      </p:sp>
+      <p:sp>
+        <p:nvSpPr>
+          <p:cNvPr id="11" name="TextBox 10"/>
+          <p:cNvSpPr txBox="1"/>
+          <p:nvPr/>
+        </p:nvSpPr>
+        <p:spPr>
+          <a:xfrm>
+            <a:off x="1874519" y="2610612"/>
+            <a:ext cx="3108960" cy="320040"/>
+          </a:xfrm>
+          <a:prstGeom prst="rect">
+            <a:avLst/>
+          </a:prstGeom>
+          <a:noFill/>
+        </p:spPr>
+        <p:txBody>
+          <a:bodyPr wrap="square">
+            <a:spAutoFit/>
+          </a:bodyPr>
+          <a:lstStyle/>
+          <a:p>
+            <a:r>
+              <a:rPr sz="1350" b="1">
                 <a:solidFill>
                   <a:srgbClr val="FFFFFF"/>
                 </a:solidFill>
                 <a:latin typeface="Calibri"/>
               </a:rPr>
-              <a:t>incidental</a:t>
-            </a:r>
-          </a:p>
-        </p:txBody>
-      </p:sp>
-      <p:sp>
-        <p:nvSpPr>
-          <p:cNvPr id="11" name="TextBox 10"/>
-          <p:cNvSpPr txBox="1"/>
-          <p:nvPr/>
-        </p:nvSpPr>
-        <p:spPr>
-          <a:xfrm>
-            <a:off x="914400" y="3803904"/>
-            <a:ext cx="4754880" cy="411480"/>
-          </a:xfrm>
-          <a:prstGeom prst="rect">
-            <a:avLst/>
-          </a:prstGeom>
-          <a:noFill/>
-        </p:spPr>
-        <p:txBody>
-          <a:bodyPr wrap="square">
-            <a:spAutoFit/>
-          </a:bodyPr>
-          <a:lstStyle/>
-          <a:p>
-            <a:pPr>
-              <a:spcAft>
-                <a:spcPts val="0"/>
-              </a:spcAft>
-            </a:pPr>
-            <a:r>
-              <a:rPr sz="1150" b="0">
+              <a:t>Taxonomy</a:t>
+            </a:r>
+          </a:p>
+        </p:txBody>
+      </p:sp>
+      <p:sp>
+        <p:nvSpPr>
+          <p:cNvPr id="12" name="TextBox 11"/>
+          <p:cNvSpPr txBox="1"/>
+          <p:nvPr/>
+        </p:nvSpPr>
+        <p:spPr>
+          <a:xfrm>
+            <a:off x="5120640" y="2610612"/>
+            <a:ext cx="6126480" cy="320040"/>
+          </a:xfrm>
+          <a:prstGeom prst="rect">
+            <a:avLst/>
+          </a:prstGeom>
+          <a:noFill/>
+        </p:spPr>
+        <p:txBody>
+          <a:bodyPr wrap="square">
+            <a:spAutoFit/>
+          </a:bodyPr>
+          <a:lstStyle/>
+          <a:p>
+            <a:r>
+              <a:rPr sz="1300" b="0">
                 <a:solidFill>
                   <a:srgbClr val="CADCFC"/>
                 </a:solidFill>
                 <a:latin typeface="Calibri"/>
               </a:rPr>
-              <a:t>Nobody placed it. The window is long, stale or badly ordered. This is the ML/AI track.</a:t>
-            </a:r>
-          </a:p>
-        </p:txBody>
-      </p:sp>
-      <p:sp>
-        <p:nvSpPr>
-          <p:cNvPr id="12" name="Rectangle 11"/>
+              <a:t>60.5% of the cube is empty</a:t>
+            </a:r>
+          </a:p>
+        </p:txBody>
+      </p:sp>
+      <p:sp>
+        <p:nvSpPr>
+          <p:cNvPr id="13" name="Rectangle 12"/>
           <p:cNvSpPr/>
           <p:nvPr/>
         </p:nvSpPr>
         <p:spPr>
           <a:xfrm>
-            <a:off x="640080" y="4352544"/>
-            <a:ext cx="5257800" cy="841248"/>
+            <a:off x="640080" y="3026664"/>
+            <a:ext cx="10881360" cy="475488"/>
           </a:xfrm>
           <a:prstGeom prst="rect">
             <a:avLst/>
@@ -26174,121 +26170,116 @@
       </p:sp>
       <p:sp>
         <p:nvSpPr>
-          <p:cNvPr id="13" name="TextBox 12"/>
-          <p:cNvSpPr txBox="1"/>
-          <p:nvPr/>
-        </p:nvSpPr>
-        <p:spPr>
-          <a:xfrm>
-            <a:off x="914400" y="4462272"/>
-            <a:ext cx="4754880" cy="274320"/>
-          </a:xfrm>
-          <a:prstGeom prst="rect">
-            <a:avLst/>
-          </a:prstGeom>
-          <a:noFill/>
-        </p:spPr>
-        <p:txBody>
-          <a:bodyPr wrap="square">
-            <a:spAutoFit/>
-          </a:bodyPr>
-          <a:lstStyle/>
-          <a:p>
-            <a:r>
-              <a:rPr sz="1300" b="1">
+          <p:cNvPr id="14" name="TextBox 13"/>
+          <p:cNvSpPr txBox="1"/>
+          <p:nvPr/>
+        </p:nvSpPr>
+        <p:spPr>
+          <a:xfrm>
+            <a:off x="868680" y="3099816"/>
+            <a:ext cx="1005840" cy="320040"/>
+          </a:xfrm>
+          <a:prstGeom prst="rect">
+            <a:avLst/>
+          </a:prstGeom>
+          <a:noFill/>
+        </p:spPr>
+        <p:txBody>
+          <a:bodyPr wrap="square">
+            <a:spAutoFit/>
+          </a:bodyPr>
+          <a:lstStyle/>
+          <a:p>
+            <a:r>
+              <a:rPr sz="1400" b="1">
+                <a:solidFill>
+                  <a:srgbClr val="E0A458"/>
+                </a:solidFill>
+                <a:latin typeface="Cambria"/>
+              </a:rPr>
+              <a:t>RQ2</a:t>
+            </a:r>
+          </a:p>
+        </p:txBody>
+      </p:sp>
+      <p:sp>
+        <p:nvSpPr>
+          <p:cNvPr id="15" name="TextBox 14"/>
+          <p:cNvSpPr txBox="1"/>
+          <p:nvPr/>
+        </p:nvSpPr>
+        <p:spPr>
+          <a:xfrm>
+            <a:off x="1874519" y="3108960"/>
+            <a:ext cx="3108960" cy="320040"/>
+          </a:xfrm>
+          <a:prstGeom prst="rect">
+            <a:avLst/>
+          </a:prstGeom>
+          <a:noFill/>
+        </p:spPr>
+        <p:txBody>
+          <a:bodyPr wrap="square">
+            <a:spAutoFit/>
+          </a:bodyPr>
+          <a:lstStyle/>
+          <a:p>
+            <a:r>
+              <a:rPr sz="1350" b="1">
                 <a:solidFill>
                   <a:srgbClr val="FFFFFF"/>
                 </a:solidFill>
                 <a:latin typeface="Calibri"/>
               </a:rPr>
-              <a:t>both</a:t>
-            </a:r>
-          </a:p>
-        </p:txBody>
-      </p:sp>
-      <p:sp>
-        <p:nvSpPr>
-          <p:cNvPr id="14" name="TextBox 13"/>
-          <p:cNvSpPr txBox="1"/>
-          <p:nvPr/>
-        </p:nvSpPr>
-        <p:spPr>
-          <a:xfrm>
-            <a:off x="914400" y="4736592"/>
-            <a:ext cx="4754880" cy="411480"/>
-          </a:xfrm>
-          <a:prstGeom prst="rect">
-            <a:avLst/>
-          </a:prstGeom>
-          <a:noFill/>
-        </p:spPr>
-        <p:txBody>
-          <a:bodyPr wrap="square">
-            <a:spAutoFit/>
-          </a:bodyPr>
-          <a:lstStyle/>
-          <a:p>
-            <a:pPr>
-              <a:spcAft>
-                <a:spcPts val="0"/>
-              </a:spcAft>
-            </a:pPr>
-            <a:r>
-              <a:rPr sz="1150" b="0">
+              <a:t>Cross-citation</a:t>
+            </a:r>
+          </a:p>
+        </p:txBody>
+      </p:sp>
+      <p:sp>
+        <p:nvSpPr>
+          <p:cNvPr id="16" name="TextBox 15"/>
+          <p:cNvSpPr txBox="1"/>
+          <p:nvPr/>
+        </p:nvSpPr>
+        <p:spPr>
+          <a:xfrm>
+            <a:off x="5120640" y="3108960"/>
+            <a:ext cx="6126480" cy="320040"/>
+          </a:xfrm>
+          <a:prstGeom prst="rect">
+            <a:avLst/>
+          </a:prstGeom>
+          <a:noFill/>
+        </p:spPr>
+        <p:txBody>
+          <a:bodyPr wrap="square">
+            <a:spAutoFit/>
+          </a:bodyPr>
+          <a:lstStyle/>
+          <a:p>
+            <a:r>
+              <a:rPr sz="1300" b="0">
                 <a:solidFill>
                   <a:srgbClr val="CADCFC"/>
                 </a:solidFill>
                 <a:latin typeface="Calibri"/>
               </a:rPr>
-              <a:t>The paper treats the case in both ways.</a:t>
-            </a:r>
-          </a:p>
-        </p:txBody>
-      </p:sp>
-      <p:sp>
-        <p:nvSpPr>
-          <p:cNvPr id="15" name="TextBox 14"/>
-          <p:cNvSpPr txBox="1"/>
-          <p:nvPr/>
-        </p:nvSpPr>
-        <p:spPr>
-          <a:xfrm>
-            <a:off x="6263640" y="2148840"/>
-            <a:ext cx="5257800" cy="274320"/>
-          </a:xfrm>
-          <a:prstGeom prst="rect">
-            <a:avLst/>
-          </a:prstGeom>
-          <a:noFill/>
-        </p:spPr>
-        <p:txBody>
-          <a:bodyPr wrap="square">
-            <a:spAutoFit/>
-          </a:bodyPr>
-          <a:lstStyle/>
-          <a:p>
-            <a:r>
-              <a:rPr sz="1200" b="1">
-                <a:solidFill>
-                  <a:srgbClr val="E0A458"/>
-                </a:solidFill>
-                <a:latin typeface="Calibri"/>
-              </a:rPr>
-              <a:t>INTERVENTION POINT: WHERE THE DEFENSE ACTS</a:t>
-            </a:r>
-          </a:p>
-        </p:txBody>
-      </p:sp>
-      <p:sp>
-        <p:nvSpPr>
-          <p:cNvPr id="16" name="Rectangle 15"/>
+              <a:t>11.7% / 9.1% between tracks</a:t>
+            </a:r>
+          </a:p>
+        </p:txBody>
+      </p:sp>
+      <p:sp>
+        <p:nvSpPr>
+          <p:cNvPr id="17" name="Rectangle 16"/>
           <p:cNvSpPr/>
           <p:nvPr/>
         </p:nvSpPr>
         <p:spPr>
           <a:xfrm>
-            <a:off x="6263640" y="2487168"/>
-            <a:ext cx="5257800" cy="841248"/>
+            <a:off x="640080" y="3525012"/>
+            <a:ext cx="10881360" cy="475488"/>
           </a:xfrm>
           <a:prstGeom prst="rect">
             <a:avLst/>
@@ -26325,121 +26316,116 @@
       </p:sp>
       <p:sp>
         <p:nvSpPr>
-          <p:cNvPr id="17" name="TextBox 16"/>
-          <p:cNvSpPr txBox="1"/>
-          <p:nvPr/>
-        </p:nvSpPr>
-        <p:spPr>
-          <a:xfrm>
-            <a:off x="6537960" y="2596896"/>
-            <a:ext cx="3657600" cy="274320"/>
-          </a:xfrm>
-          <a:prstGeom prst="rect">
-            <a:avLst/>
-          </a:prstGeom>
-          <a:noFill/>
-        </p:spPr>
-        <p:txBody>
-          <a:bodyPr wrap="square">
-            <a:spAutoFit/>
-          </a:bodyPr>
-          <a:lstStyle/>
-          <a:p>
-            <a:r>
-              <a:rPr sz="1300" b="1">
+          <p:cNvPr id="18" name="TextBox 17"/>
+          <p:cNvSpPr txBox="1"/>
+          <p:nvPr/>
+        </p:nvSpPr>
+        <p:spPr>
+          <a:xfrm>
+            <a:off x="868680" y="3598164"/>
+            <a:ext cx="1005840" cy="320040"/>
+          </a:xfrm>
+          <a:prstGeom prst="rect">
+            <a:avLst/>
+          </a:prstGeom>
+          <a:noFill/>
+        </p:spPr>
+        <p:txBody>
+          <a:bodyPr wrap="square">
+            <a:spAutoFit/>
+          </a:bodyPr>
+          <a:lstStyle/>
+          <a:p>
+            <a:r>
+              <a:rPr sz="1400" b="1">
+                <a:solidFill>
+                  <a:srgbClr val="E0A458"/>
+                </a:solidFill>
+                <a:latin typeface="Cambria"/>
+              </a:rPr>
+              <a:t>RQ3</a:t>
+            </a:r>
+          </a:p>
+        </p:txBody>
+      </p:sp>
+      <p:sp>
+        <p:nvSpPr>
+          <p:cNvPr id="19" name="TextBox 18"/>
+          <p:cNvSpPr txBox="1"/>
+          <p:nvPr/>
+        </p:nvSpPr>
+        <p:spPr>
+          <a:xfrm>
+            <a:off x="1874519" y="3607308"/>
+            <a:ext cx="3108960" cy="320040"/>
+          </a:xfrm>
+          <a:prstGeom prst="rect">
+            <a:avLst/>
+          </a:prstGeom>
+          <a:noFill/>
+        </p:spPr>
+        <p:txBody>
+          <a:bodyPr wrap="square">
+            <a:spAutoFit/>
+          </a:bodyPr>
+          <a:lstStyle/>
+          <a:p>
+            <a:r>
+              <a:rPr sz="1350" b="1">
                 <a:solidFill>
                   <a:srgbClr val="FFFFFF"/>
                 </a:solidFill>
                 <a:latin typeface="Calibri"/>
               </a:rPr>
-              <a:t>ingestion</a:t>
-            </a:r>
-          </a:p>
-        </p:txBody>
-      </p:sp>
-      <p:sp>
-        <p:nvSpPr>
-          <p:cNvPr id="18" name="TextBox 17"/>
-          <p:cNvSpPr txBox="1"/>
-          <p:nvPr/>
-        </p:nvSpPr>
-        <p:spPr>
-          <a:xfrm>
-            <a:off x="10332720" y="2596896"/>
-            <a:ext cx="1005840" cy="274320"/>
-          </a:xfrm>
-          <a:prstGeom prst="rect">
-            <a:avLst/>
-          </a:prstGeom>
-          <a:noFill/>
-        </p:spPr>
-        <p:txBody>
-          <a:bodyPr wrap="square">
-            <a:spAutoFit/>
-          </a:bodyPr>
-          <a:lstStyle/>
-          <a:p>
-            <a:r>
-              <a:rPr sz="1300" b="1">
-                <a:solidFill>
-                  <a:srgbClr val="E0A458"/>
-                </a:solidFill>
-                <a:latin typeface="Calibri"/>
-              </a:rPr>
-              <a:t>155</a:t>
-            </a:r>
-          </a:p>
-        </p:txBody>
-      </p:sp>
-      <p:sp>
-        <p:nvSpPr>
-          <p:cNvPr id="19" name="TextBox 18"/>
-          <p:cNvSpPr txBox="1"/>
-          <p:nvPr/>
-        </p:nvSpPr>
-        <p:spPr>
-          <a:xfrm>
-            <a:off x="6537960" y="2871216"/>
-            <a:ext cx="4754880" cy="411480"/>
-          </a:xfrm>
-          <a:prstGeom prst="rect">
-            <a:avLst/>
-          </a:prstGeom>
-          <a:noFill/>
-        </p:spPr>
-        <p:txBody>
-          <a:bodyPr wrap="square">
-            <a:spAutoFit/>
-          </a:bodyPr>
-          <a:lstStyle/>
-          <a:p>
-            <a:pPr>
-              <a:spcAft>
-                <a:spcPts val="0"/>
-              </a:spcAft>
-            </a:pPr>
-            <a:r>
-              <a:rPr sz="1150" b="0">
+              <a:t>Pollution census</a:t>
+            </a:r>
+          </a:p>
+        </p:txBody>
+      </p:sp>
+      <p:sp>
+        <p:nvSpPr>
+          <p:cNvPr id="20" name="TextBox 19"/>
+          <p:cNvSpPr txBox="1"/>
+          <p:nvPr/>
+        </p:nvSpPr>
+        <p:spPr>
+          <a:xfrm>
+            <a:off x="5120640" y="3607308"/>
+            <a:ext cx="6126480" cy="320040"/>
+          </a:xfrm>
+          <a:prstGeom prst="rect">
+            <a:avLst/>
+          </a:prstGeom>
+          <a:noFill/>
+        </p:spPr>
+        <p:txBody>
+          <a:bodyPr wrap="square">
+            <a:spAutoFit/>
+          </a:bodyPr>
+          <a:lstStyle/>
+          <a:p>
+            <a:r>
+              <a:rPr sz="1300" b="0">
                 <a:solidFill>
                   <a:srgbClr val="CADCFC"/>
                 </a:solidFill>
                 <a:latin typeface="Calibri"/>
               </a:rPr>
-              <a:t>It checks the text as it arrives, before the model reads it.</a:t>
-            </a:r>
-          </a:p>
-        </p:txBody>
-      </p:sp>
-      <p:sp>
-        <p:nvSpPr>
-          <p:cNvPr id="20" name="Rectangle 19"/>
+              <a:t>223 named mechanisms</a:t>
+            </a:r>
+          </a:p>
+        </p:txBody>
+      </p:sp>
+      <p:sp>
+        <p:nvSpPr>
+          <p:cNvPr id="21" name="Rectangle 20"/>
           <p:cNvSpPr/>
           <p:nvPr/>
         </p:nvSpPr>
         <p:spPr>
           <a:xfrm>
-            <a:off x="6263640" y="3419856"/>
-            <a:ext cx="5257800" cy="841248"/>
+            <a:off x="640080" y="4023360"/>
+            <a:ext cx="10881360" cy="475488"/>
           </a:xfrm>
           <a:prstGeom prst="rect">
             <a:avLst/>
@@ -26476,121 +26462,116 @@
       </p:sp>
       <p:sp>
         <p:nvSpPr>
-          <p:cNvPr id="21" name="TextBox 20"/>
-          <p:cNvSpPr txBox="1"/>
-          <p:nvPr/>
-        </p:nvSpPr>
-        <p:spPr>
-          <a:xfrm>
-            <a:off x="6537960" y="3529584"/>
-            <a:ext cx="3657600" cy="274320"/>
-          </a:xfrm>
-          <a:prstGeom prst="rect">
-            <a:avLst/>
-          </a:prstGeom>
-          <a:noFill/>
-        </p:spPr>
-        <p:txBody>
-          <a:bodyPr wrap="square">
-            <a:spAutoFit/>
-          </a:bodyPr>
-          <a:lstStyle/>
-          <a:p>
-            <a:r>
-              <a:rPr sz="1300" b="1">
+          <p:cNvPr id="22" name="TextBox 21"/>
+          <p:cNvSpPr txBox="1"/>
+          <p:nvPr/>
+        </p:nvSpPr>
+        <p:spPr>
+          <a:xfrm>
+            <a:off x="868680" y="4096512"/>
+            <a:ext cx="1005840" cy="320040"/>
+          </a:xfrm>
+          <a:prstGeom prst="rect">
+            <a:avLst/>
+          </a:prstGeom>
+          <a:noFill/>
+        </p:spPr>
+        <p:txBody>
+          <a:bodyPr wrap="square">
+            <a:spAutoFit/>
+          </a:bodyPr>
+          <a:lstStyle/>
+          <a:p>
+            <a:r>
+              <a:rPr sz="1400" b="1">
+                <a:solidFill>
+                  <a:srgbClr val="E0A458"/>
+                </a:solidFill>
+                <a:latin typeface="Cambria"/>
+              </a:rPr>
+              <a:t>RQ4</a:t>
+            </a:r>
+          </a:p>
+        </p:txBody>
+      </p:sp>
+      <p:sp>
+        <p:nvSpPr>
+          <p:cNvPr id="23" name="TextBox 22"/>
+          <p:cNvSpPr txBox="1"/>
+          <p:nvPr/>
+        </p:nvSpPr>
+        <p:spPr>
+          <a:xfrm>
+            <a:off x="1874519" y="4105656"/>
+            <a:ext cx="3108960" cy="320040"/>
+          </a:xfrm>
+          <a:prstGeom prst="rect">
+            <a:avLst/>
+          </a:prstGeom>
+          <a:noFill/>
+        </p:spPr>
+        <p:txBody>
+          <a:bodyPr wrap="square">
+            <a:spAutoFit/>
+          </a:bodyPr>
+          <a:lstStyle/>
+          <a:p>
+            <a:r>
+              <a:rPr sz="1350" b="1">
                 <a:solidFill>
                   <a:srgbClr val="FFFFFF"/>
                 </a:solidFill>
                 <a:latin typeface="Calibri"/>
               </a:rPr>
-              <a:t>reasoning</a:t>
-            </a:r>
-          </a:p>
-        </p:txBody>
-      </p:sp>
-      <p:sp>
-        <p:nvSpPr>
-          <p:cNvPr id="22" name="TextBox 21"/>
-          <p:cNvSpPr txBox="1"/>
-          <p:nvPr/>
-        </p:nvSpPr>
-        <p:spPr>
-          <a:xfrm>
-            <a:off x="10332720" y="3529584"/>
-            <a:ext cx="1005840" cy="274320"/>
-          </a:xfrm>
-          <a:prstGeom prst="rect">
-            <a:avLst/>
-          </a:prstGeom>
-          <a:noFill/>
-        </p:spPr>
-        <p:txBody>
-          <a:bodyPr wrap="square">
-            <a:spAutoFit/>
-          </a:bodyPr>
-          <a:lstStyle/>
-          <a:p>
-            <a:r>
-              <a:rPr sz="1300" b="1">
-                <a:solidFill>
-                  <a:srgbClr val="E0A458"/>
-                </a:solidFill>
-                <a:latin typeface="Calibri"/>
-              </a:rPr>
-              <a:t>205</a:t>
-            </a:r>
-          </a:p>
-        </p:txBody>
-      </p:sp>
-      <p:sp>
-        <p:nvSpPr>
-          <p:cNvPr id="23" name="TextBox 22"/>
-          <p:cNvSpPr txBox="1"/>
-          <p:nvPr/>
-        </p:nvSpPr>
-        <p:spPr>
-          <a:xfrm>
-            <a:off x="6537960" y="3803904"/>
-            <a:ext cx="4754880" cy="411480"/>
-          </a:xfrm>
-          <a:prstGeom prst="rect">
-            <a:avLst/>
-          </a:prstGeom>
-          <a:noFill/>
-        </p:spPr>
-        <p:txBody>
-          <a:bodyPr wrap="square">
-            <a:spAutoFit/>
-          </a:bodyPr>
-          <a:lstStyle/>
-          <a:p>
-            <a:pPr>
-              <a:spcAft>
-                <a:spcPts val="0"/>
-              </a:spcAft>
-            </a:pPr>
-            <a:r>
-              <a:rPr sz="1150" b="0">
+              <a:t>Defense census</a:t>
+            </a:r>
+          </a:p>
+        </p:txBody>
+      </p:sp>
+      <p:sp>
+        <p:nvSpPr>
+          <p:cNvPr id="24" name="TextBox 23"/>
+          <p:cNvSpPr txBox="1"/>
+          <p:nvPr/>
+        </p:nvSpPr>
+        <p:spPr>
+          <a:xfrm>
+            <a:off x="5120640" y="4105656"/>
+            <a:ext cx="6126480" cy="320040"/>
+          </a:xfrm>
+          <a:prstGeom prst="rect">
+            <a:avLst/>
+          </a:prstGeom>
+          <a:noFill/>
+        </p:spPr>
+        <p:txBody>
+          <a:bodyPr wrap="square">
+            <a:spAutoFit/>
+          </a:bodyPr>
+          <a:lstStyle/>
+          <a:p>
+            <a:r>
+              <a:rPr sz="1300" b="0">
                 <a:solidFill>
                   <a:srgbClr val="CADCFC"/>
                 </a:solidFill>
                 <a:latin typeface="Calibri"/>
               </a:rPr>
-              <a:t>It changes how the model uses text that is already in the window.</a:t>
-            </a:r>
-          </a:p>
-        </p:txBody>
-      </p:sp>
-      <p:sp>
-        <p:nvSpPr>
-          <p:cNvPr id="24" name="Rectangle 23"/>
+              <a:t>534 named defenses</a:t>
+            </a:r>
+          </a:p>
+        </p:txBody>
+      </p:sp>
+      <p:sp>
+        <p:nvSpPr>
+          <p:cNvPr id="25" name="Rectangle 24"/>
           <p:cNvSpPr/>
           <p:nvPr/>
         </p:nvSpPr>
         <p:spPr>
           <a:xfrm>
-            <a:off x="6263640" y="4352544"/>
-            <a:ext cx="5257800" cy="841248"/>
+            <a:off x="640080" y="4521708"/>
+            <a:ext cx="10881360" cy="475488"/>
           </a:xfrm>
           <a:prstGeom prst="rect">
             <a:avLst/>
@@ -26627,178 +26608,540 @@
       </p:sp>
       <p:sp>
         <p:nvSpPr>
-          <p:cNvPr id="25" name="TextBox 24"/>
-          <p:cNvSpPr txBox="1"/>
-          <p:nvPr/>
-        </p:nvSpPr>
-        <p:spPr>
-          <a:xfrm>
-            <a:off x="6537960" y="4462272"/>
-            <a:ext cx="3657600" cy="274320"/>
-          </a:xfrm>
-          <a:prstGeom prst="rect">
-            <a:avLst/>
-          </a:prstGeom>
-          <a:noFill/>
-        </p:spPr>
-        <p:txBody>
-          <a:bodyPr wrap="square">
-            <a:spAutoFit/>
-          </a:bodyPr>
-          <a:lstStyle/>
-          <a:p>
-            <a:r>
-              <a:rPr sz="1300" b="1">
+          <p:cNvPr id="26" name="TextBox 25"/>
+          <p:cNvSpPr txBox="1"/>
+          <p:nvPr/>
+        </p:nvSpPr>
+        <p:spPr>
+          <a:xfrm>
+            <a:off x="868680" y="4594860"/>
+            <a:ext cx="1005840" cy="320040"/>
+          </a:xfrm>
+          <a:prstGeom prst="rect">
+            <a:avLst/>
+          </a:prstGeom>
+          <a:noFill/>
+        </p:spPr>
+        <p:txBody>
+          <a:bodyPr wrap="square">
+            <a:spAutoFit/>
+          </a:bodyPr>
+          <a:lstStyle/>
+          <a:p>
+            <a:r>
+              <a:rPr sz="1400" b="1">
+                <a:solidFill>
+                  <a:srgbClr val="E0A458"/>
+                </a:solidFill>
+                <a:latin typeface="Cambria"/>
+              </a:rPr>
+              <a:t>RQ5</a:t>
+            </a:r>
+          </a:p>
+        </p:txBody>
+      </p:sp>
+      <p:sp>
+        <p:nvSpPr>
+          <p:cNvPr id="27" name="TextBox 26"/>
+          <p:cNvSpPr txBox="1"/>
+          <p:nvPr/>
+        </p:nvSpPr>
+        <p:spPr>
+          <a:xfrm>
+            <a:off x="1874519" y="4604004"/>
+            <a:ext cx="3108960" cy="320040"/>
+          </a:xfrm>
+          <a:prstGeom prst="rect">
+            <a:avLst/>
+          </a:prstGeom>
+          <a:noFill/>
+        </p:spPr>
+        <p:txBody>
+          <a:bodyPr wrap="square">
+            <a:spAutoFit/>
+          </a:bodyPr>
+          <a:lstStyle/>
+          <a:p>
+            <a:r>
+              <a:rPr sz="1350" b="1">
                 <a:solidFill>
                   <a:srgbClr val="FFFFFF"/>
                 </a:solidFill>
                 <a:latin typeface="Calibri"/>
               </a:rPr>
-              <a:t>execution</a:t>
-            </a:r>
-          </a:p>
-        </p:txBody>
-      </p:sp>
-      <p:sp>
-        <p:nvSpPr>
-          <p:cNvPr id="26" name="TextBox 25"/>
-          <p:cNvSpPr txBox="1"/>
-          <p:nvPr/>
-        </p:nvSpPr>
-        <p:spPr>
-          <a:xfrm>
-            <a:off x="10332720" y="4462272"/>
-            <a:ext cx="1005840" cy="274320"/>
-          </a:xfrm>
-          <a:prstGeom prst="rect">
-            <a:avLst/>
-          </a:prstGeom>
-          <a:noFill/>
-        </p:spPr>
-        <p:txBody>
-          <a:bodyPr wrap="square">
-            <a:spAutoFit/>
-          </a:bodyPr>
-          <a:lstStyle/>
-          <a:p>
-            <a:r>
-              <a:rPr sz="1300" b="1">
+              <a:t>Coverage matrix</a:t>
+            </a:r>
+          </a:p>
+        </p:txBody>
+      </p:sp>
+      <p:sp>
+        <p:nvSpPr>
+          <p:cNvPr id="28" name="TextBox 27"/>
+          <p:cNvSpPr txBox="1"/>
+          <p:nvPr/>
+        </p:nvSpPr>
+        <p:spPr>
+          <a:xfrm>
+            <a:off x="5120640" y="4604004"/>
+            <a:ext cx="6126480" cy="320040"/>
+          </a:xfrm>
+          <a:prstGeom prst="rect">
+            <a:avLst/>
+          </a:prstGeom>
+          <a:noFill/>
+        </p:spPr>
+        <p:txBody>
+          <a:bodyPr wrap="square">
+            <a:spAutoFit/>
+          </a:bodyPr>
+          <a:lstStyle/>
+          <a:p>
+            <a:r>
+              <a:rPr sz="1300" b="0">
+                <a:solidFill>
+                  <a:srgbClr val="CADCFC"/>
+                </a:solidFill>
+                <a:latin typeface="Calibri"/>
+              </a:rPr>
+              <a:t>119 mechanisms never defended</a:t>
+            </a:r>
+          </a:p>
+        </p:txBody>
+      </p:sp>
+      <p:sp>
+        <p:nvSpPr>
+          <p:cNvPr id="29" name="Rectangle 28"/>
+          <p:cNvSpPr/>
+          <p:nvPr/>
+        </p:nvSpPr>
+        <p:spPr>
+          <a:xfrm>
+            <a:off x="640080" y="5020056"/>
+            <a:ext cx="10881360" cy="475488"/>
+          </a:xfrm>
+          <a:prstGeom prst="rect">
+            <a:avLst/>
+          </a:prstGeom>
+          <a:solidFill>
+            <a:srgbClr val="1B334F"/>
+          </a:solidFill>
+          <a:ln>
+            <a:noFill/>
+          </a:ln>
+          <a:effectLst/>
+        </p:spPr>
+        <p:style>
+          <a:lnRef idx="1">
+            <a:schemeClr val="accent1"/>
+          </a:lnRef>
+          <a:fillRef idx="3">
+            <a:schemeClr val="accent1"/>
+          </a:fillRef>
+          <a:effectRef idx="2">
+            <a:schemeClr val="accent1"/>
+          </a:effectRef>
+          <a:fontRef idx="minor">
+            <a:schemeClr val="lt1"/>
+          </a:fontRef>
+        </p:style>
+        <p:txBody>
+          <a:bodyPr rtlCol="0" anchor="ctr"/>
+          <a:lstStyle/>
+          <a:p>
+            <a:pPr algn="ctr"/>
+          </a:p>
+        </p:txBody>
+      </p:sp>
+      <p:sp>
+        <p:nvSpPr>
+          <p:cNvPr id="30" name="TextBox 29"/>
+          <p:cNvSpPr txBox="1"/>
+          <p:nvPr/>
+        </p:nvSpPr>
+        <p:spPr>
+          <a:xfrm>
+            <a:off x="868680" y="5093208"/>
+            <a:ext cx="1005840" cy="320040"/>
+          </a:xfrm>
+          <a:prstGeom prst="rect">
+            <a:avLst/>
+          </a:prstGeom>
+          <a:noFill/>
+        </p:spPr>
+        <p:txBody>
+          <a:bodyPr wrap="square">
+            <a:spAutoFit/>
+          </a:bodyPr>
+          <a:lstStyle/>
+          <a:p>
+            <a:r>
+              <a:rPr sz="1400" b="1">
                 <a:solidFill>
                   <a:srgbClr val="E0A458"/>
                 </a:solidFill>
-                <a:latin typeface="Calibri"/>
-              </a:rPr>
-              <a:t>74</a:t>
-            </a:r>
-          </a:p>
-        </p:txBody>
-      </p:sp>
-      <p:sp>
-        <p:nvSpPr>
-          <p:cNvPr id="27" name="TextBox 26"/>
-          <p:cNvSpPr txBox="1"/>
-          <p:nvPr/>
-        </p:nvSpPr>
-        <p:spPr>
-          <a:xfrm>
-            <a:off x="6537960" y="4736592"/>
-            <a:ext cx="4754880" cy="411480"/>
-          </a:xfrm>
-          <a:prstGeom prst="rect">
-            <a:avLst/>
-          </a:prstGeom>
-          <a:noFill/>
-        </p:spPr>
-        <p:txBody>
-          <a:bodyPr wrap="square">
-            <a:spAutoFit/>
-          </a:bodyPr>
-          <a:lstStyle/>
-          <a:p>
-            <a:pPr>
-              <a:spcAft>
-                <a:spcPts val="0"/>
-              </a:spcAft>
-            </a:pPr>
-            <a:r>
-              <a:rPr sz="1150" b="0">
+                <a:latin typeface="Cambria"/>
+              </a:rPr>
+              <a:t>RQ6</a:t>
+            </a:r>
+          </a:p>
+        </p:txBody>
+      </p:sp>
+      <p:sp>
+        <p:nvSpPr>
+          <p:cNvPr id="31" name="TextBox 30"/>
+          <p:cNvSpPr txBox="1"/>
+          <p:nvPr/>
+        </p:nvSpPr>
+        <p:spPr>
+          <a:xfrm>
+            <a:off x="1874519" y="5102352"/>
+            <a:ext cx="3108960" cy="320040"/>
+          </a:xfrm>
+          <a:prstGeom prst="rect">
+            <a:avLst/>
+          </a:prstGeom>
+          <a:noFill/>
+        </p:spPr>
+        <p:txBody>
+          <a:bodyPr wrap="square">
+            <a:spAutoFit/>
+          </a:bodyPr>
+          <a:lstStyle/>
+          <a:p>
+            <a:r>
+              <a:rPr sz="1350" b="1">
+                <a:solidFill>
+                  <a:srgbClr val="FFFFFF"/>
+                </a:solidFill>
+                <a:latin typeface="Calibri"/>
+              </a:rPr>
+              <a:t>Generalization</a:t>
+            </a:r>
+          </a:p>
+        </p:txBody>
+      </p:sp>
+      <p:sp>
+        <p:nvSpPr>
+          <p:cNvPr id="32" name="TextBox 31"/>
+          <p:cNvSpPr txBox="1"/>
+          <p:nvPr/>
+        </p:nvSpPr>
+        <p:spPr>
+          <a:xfrm>
+            <a:off x="5120640" y="5102352"/>
+            <a:ext cx="6126480" cy="320040"/>
+          </a:xfrm>
+          <a:prstGeom prst="rect">
+            <a:avLst/>
+          </a:prstGeom>
+          <a:noFill/>
+        </p:spPr>
+        <p:txBody>
+          <a:bodyPr wrap="square">
+            <a:spAutoFit/>
+          </a:bodyPr>
+          <a:lstStyle/>
+          <a:p>
+            <a:r>
+              <a:rPr sz="1300" b="0">
                 <a:solidFill>
                   <a:srgbClr val="CADCFC"/>
                 </a:solidFill>
                 <a:latin typeface="Calibri"/>
               </a:rPr>
-              <a:t>It checks the action the agent wants to take, after the model decides.</a:t>
-            </a:r>
-          </a:p>
-        </p:txBody>
-      </p:sp>
-      <p:sp>
-        <p:nvSpPr>
-          <p:cNvPr id="28" name="TextBox 27"/>
-          <p:cNvSpPr txBox="1"/>
-          <p:nvPr/>
-        </p:nvSpPr>
-        <p:spPr>
-          <a:xfrm>
-            <a:off x="640080" y="5440680"/>
-            <a:ext cx="10881360" cy="1097280"/>
-          </a:xfrm>
-          <a:prstGeom prst="rect">
-            <a:avLst/>
-          </a:prstGeom>
-          <a:noFill/>
-        </p:spPr>
-        <p:txBody>
-          <a:bodyPr wrap="square">
-            <a:spAutoFit/>
-          </a:bodyPr>
-          <a:lstStyle/>
-          <a:p>
-            <a:pPr>
-              <a:spcAft>
-                <a:spcPts val="400"/>
-              </a:spcAft>
-            </a:pPr>
+              <a:t>9 reconstructed case studies</a:t>
+            </a:r>
+          </a:p>
+        </p:txBody>
+      </p:sp>
+      <p:sp>
+        <p:nvSpPr>
+          <p:cNvPr id="33" name="Rectangle 32"/>
+          <p:cNvSpPr/>
+          <p:nvPr/>
+        </p:nvSpPr>
+        <p:spPr>
+          <a:xfrm>
+            <a:off x="640080" y="5518404"/>
+            <a:ext cx="10881360" cy="475488"/>
+          </a:xfrm>
+          <a:prstGeom prst="rect">
+            <a:avLst/>
+          </a:prstGeom>
+          <a:solidFill>
+            <a:srgbClr val="1B334F"/>
+          </a:solidFill>
+          <a:ln>
+            <a:noFill/>
+          </a:ln>
+          <a:effectLst/>
+        </p:spPr>
+        <p:style>
+          <a:lnRef idx="1">
+            <a:schemeClr val="accent1"/>
+          </a:lnRef>
+          <a:fillRef idx="3">
+            <a:schemeClr val="accent1"/>
+          </a:fillRef>
+          <a:effectRef idx="2">
+            <a:schemeClr val="accent1"/>
+          </a:effectRef>
+          <a:fontRef idx="minor">
+            <a:schemeClr val="lt1"/>
+          </a:fontRef>
+        </p:style>
+        <p:txBody>
+          <a:bodyPr rtlCol="0" anchor="ctr"/>
+          <a:lstStyle/>
+          <a:p>
+            <a:pPr algn="ctr"/>
+          </a:p>
+        </p:txBody>
+      </p:sp>
+      <p:sp>
+        <p:nvSpPr>
+          <p:cNvPr id="34" name="TextBox 33"/>
+          <p:cNvSpPr txBox="1"/>
+          <p:nvPr/>
+        </p:nvSpPr>
+        <p:spPr>
+          <a:xfrm>
+            <a:off x="868680" y="5591556"/>
+            <a:ext cx="1005840" cy="320040"/>
+          </a:xfrm>
+          <a:prstGeom prst="rect">
+            <a:avLst/>
+          </a:prstGeom>
+          <a:noFill/>
+        </p:spPr>
+        <p:txBody>
+          <a:bodyPr wrap="square">
+            <a:spAutoFit/>
+          </a:bodyPr>
+          <a:lstStyle/>
+          <a:p>
             <a:r>
               <a:rPr sz="1400" b="1">
                 <a:solidFill>
+                  <a:srgbClr val="E0A458"/>
+                </a:solidFill>
+                <a:latin typeface="Cambria"/>
+              </a:rPr>
+              <a:t>RQ7</a:t>
+            </a:r>
+          </a:p>
+        </p:txBody>
+      </p:sp>
+      <p:sp>
+        <p:nvSpPr>
+          <p:cNvPr id="35" name="TextBox 34"/>
+          <p:cNvSpPr txBox="1"/>
+          <p:nvPr/>
+        </p:nvSpPr>
+        <p:spPr>
+          <a:xfrm>
+            <a:off x="1874519" y="5600700"/>
+            <a:ext cx="3108960" cy="320040"/>
+          </a:xfrm>
+          <a:prstGeom prst="rect">
+            <a:avLst/>
+          </a:prstGeom>
+          <a:noFill/>
+        </p:spPr>
+        <p:txBody>
+          <a:bodyPr wrap="square">
+            <a:spAutoFit/>
+          </a:bodyPr>
+          <a:lstStyle/>
+          <a:p>
+            <a:r>
+              <a:rPr sz="1350" b="1">
+                <a:solidFill>
                   <a:srgbClr val="FFFFFF"/>
                 </a:solidFill>
                 <a:latin typeface="Calibri"/>
               </a:rPr>
-              <a:t>Intent is the axis that splits the two literatures. The same failure gets two names and two sets of defenses.</a:t>
-            </a:r>
-          </a:p>
-          <a:p>
-            <a:pPr>
-              <a:spcAft>
-                <a:spcPts val="400"/>
-              </a:spcAft>
-            </a:pPr>
-            <a:r>
-              <a:rPr sz="1250" b="0">
+              <a:t>Open problems</a:t>
+            </a:r>
+          </a:p>
+        </p:txBody>
+      </p:sp>
+      <p:sp>
+        <p:nvSpPr>
+          <p:cNvPr id="36" name="TextBox 35"/>
+          <p:cNvSpPr txBox="1"/>
+          <p:nvPr/>
+        </p:nvSpPr>
+        <p:spPr>
+          <a:xfrm>
+            <a:off x="5120640" y="5600700"/>
+            <a:ext cx="6126480" cy="320040"/>
+          </a:xfrm>
+          <a:prstGeom prst="rect">
+            <a:avLst/>
+          </a:prstGeom>
+          <a:noFill/>
+        </p:spPr>
+        <p:txBody>
+          <a:bodyPr wrap="square">
+            <a:spAutoFit/>
+          </a:bodyPr>
+          <a:lstStyle/>
+          <a:p>
+            <a:r>
+              <a:rPr sz="1300" b="0">
                 <a:solidFill>
                   <a:srgbClr val="CADCFC"/>
                 </a:solidFill>
                 <a:latin typeface="Calibri"/>
               </a:rPr>
-              <a:t>A tool returns a page with a hidden order. A tool returns a page that is simply ten times too long. Both reach the window through the same channel. One has an author. One does not.</a:t>
-            </a:r>
-          </a:p>
-          <a:p>
-            <a:pPr>
-              <a:spcAft>
-                <a:spcPts val="400"/>
-              </a:spcAft>
-            </a:pPr>
-            <a:r>
-              <a:rPr sz="1250" b="0">
-                <a:solidFill>
-                  <a:srgbClr val="CFE8EF"/>
-                </a:solidFill>
-                <a:latin typeface="Calibri"/>
-              </a:rPr>
-              <a:t>The counts on the right are defenses, not attacks. 100 more defenses carry no intervention point: they act after the event, such as forensics, or we never coded them.</a:t>
+              <a:t>7 ranked, falsifiable</a:t>
+            </a:r>
+          </a:p>
+        </p:txBody>
+      </p:sp>
+      <p:sp>
+        <p:nvSpPr>
+          <p:cNvPr id="37" name="Rectangle 36"/>
+          <p:cNvSpPr/>
+          <p:nvPr/>
+        </p:nvSpPr>
+        <p:spPr>
+          <a:xfrm>
+            <a:off x="640080" y="6016752"/>
+            <a:ext cx="10881360" cy="475488"/>
+          </a:xfrm>
+          <a:prstGeom prst="rect">
+            <a:avLst/>
+          </a:prstGeom>
+          <a:solidFill>
+            <a:srgbClr val="1B334F"/>
+          </a:solidFill>
+          <a:ln>
+            <a:noFill/>
+          </a:ln>
+          <a:effectLst/>
+        </p:spPr>
+        <p:style>
+          <a:lnRef idx="1">
+            <a:schemeClr val="accent1"/>
+          </a:lnRef>
+          <a:fillRef idx="3">
+            <a:schemeClr val="accent1"/>
+          </a:fillRef>
+          <a:effectRef idx="2">
+            <a:schemeClr val="accent1"/>
+          </a:effectRef>
+          <a:fontRef idx="minor">
+            <a:schemeClr val="lt1"/>
+          </a:fontRef>
+        </p:style>
+        <p:txBody>
+          <a:bodyPr rtlCol="0" anchor="ctr"/>
+          <a:lstStyle/>
+          <a:p>
+            <a:pPr algn="ctr"/>
+          </a:p>
+        </p:txBody>
+      </p:sp>
+      <p:sp>
+        <p:nvSpPr>
+          <p:cNvPr id="38" name="TextBox 37"/>
+          <p:cNvSpPr txBox="1"/>
+          <p:nvPr/>
+        </p:nvSpPr>
+        <p:spPr>
+          <a:xfrm>
+            <a:off x="868680" y="6089904"/>
+            <a:ext cx="1005840" cy="320040"/>
+          </a:xfrm>
+          <a:prstGeom prst="rect">
+            <a:avLst/>
+          </a:prstGeom>
+          <a:noFill/>
+        </p:spPr>
+        <p:txBody>
+          <a:bodyPr wrap="square">
+            <a:spAutoFit/>
+          </a:bodyPr>
+          <a:lstStyle/>
+          <a:p>
+            <a:r>
+              <a:rPr sz="1400" b="1">
+                <a:solidFill>
+                  <a:srgbClr val="E0A458"/>
+                </a:solidFill>
+                <a:latin typeface="Cambria"/>
+              </a:rPr>
+              <a:t>NEW</a:t>
+            </a:r>
+          </a:p>
+        </p:txBody>
+      </p:sp>
+      <p:sp>
+        <p:nvSpPr>
+          <p:cNvPr id="39" name="TextBox 38"/>
+          <p:cNvSpPr txBox="1"/>
+          <p:nvPr/>
+        </p:nvSpPr>
+        <p:spPr>
+          <a:xfrm>
+            <a:off x="1874519" y="6099048"/>
+            <a:ext cx="3108960" cy="320040"/>
+          </a:xfrm>
+          <a:prstGeom prst="rect">
+            <a:avLst/>
+          </a:prstGeom>
+          <a:noFill/>
+        </p:spPr>
+        <p:txBody>
+          <a:bodyPr wrap="square">
+            <a:spAutoFit/>
+          </a:bodyPr>
+          <a:lstStyle/>
+          <a:p>
+            <a:r>
+              <a:rPr sz="1350" b="1">
+                <a:solidFill>
+                  <a:srgbClr val="FFFFFF"/>
+                </a:solidFill>
+                <a:latin typeface="Calibri"/>
+              </a:rPr>
+              <a:t>Transfer matrix</a:t>
+            </a:r>
+          </a:p>
+        </p:txBody>
+      </p:sp>
+      <p:sp>
+        <p:nvSpPr>
+          <p:cNvPr id="40" name="TextBox 39"/>
+          <p:cNvSpPr txBox="1"/>
+          <p:nvPr/>
+        </p:nvSpPr>
+        <p:spPr>
+          <a:xfrm>
+            <a:off x="5120640" y="6099048"/>
+            <a:ext cx="6126480" cy="320040"/>
+          </a:xfrm>
+          <a:prstGeom prst="rect">
+            <a:avLst/>
+          </a:prstGeom>
+          <a:noFill/>
+        </p:spPr>
+        <p:txBody>
+          <a:bodyPr wrap="square">
+            <a:spAutoFit/>
+          </a:bodyPr>
+          <a:lstStyle/>
+          <a:p>
+            <a:r>
+              <a:rPr sz="1300" b="0">
+                <a:solidFill>
+                  <a:srgbClr val="CADCFC"/>
+                </a:solidFill>
+                <a:latin typeface="Calibri"/>
+              </a:rPr>
+              <a:t>16 cells that no paper reports</a:t>
             </a:r>
           </a:p>
         </p:txBody>
@@ -26897,7 +27240,7 @@
                 </a:solidFill>
                 <a:latin typeface="Cambria"/>
               </a:rPr>
-              <a:t>Kitchenham SLR + PRISMA-lite screening,</a:t>
+              <a:t>We follow a standard review protocol,</a:t>
             </a:r>
           </a:p>
           <a:p>
@@ -26913,7 +27256,7 @@
                 </a:solidFill>
                 <a:latin typeface="Cambria"/>
               </a:rPr>
-              <a:t>run across two literatures instead of one</a:t>
+              <a:t>and we run it across two literatures</a:t>
             </a:r>
           </a:p>
         </p:txBody>
@@ -27672,6 +28015,40 @@
                 <a:latin typeface="Calibri"/>
               </a:rPr>
               <a:t>the code ourselves.</a:t>
+            </a:r>
+          </a:p>
+        </p:txBody>
+      </p:sp>
+      <p:sp>
+        <p:nvSpPr>
+          <p:cNvPr id="17" name="TextBox 16"/>
+          <p:cNvSpPr txBox="1"/>
+          <p:nvPr/>
+        </p:nvSpPr>
+        <p:spPr>
+          <a:xfrm>
+            <a:off x="640080" y="6419088"/>
+            <a:ext cx="10789920" cy="402336"/>
+          </a:xfrm>
+          <a:prstGeom prst="rect">
+            <a:avLst/>
+          </a:prstGeom>
+          <a:noFill/>
+        </p:spPr>
+        <p:txBody>
+          <a:bodyPr wrap="square">
+            <a:spAutoFit/>
+          </a:bodyPr>
+          <a:lstStyle/>
+          <a:p>
+            <a:r>
+              <a:rPr sz="850" b="0">
+                <a:solidFill>
+                  <a:srgbClr val="5B6B79"/>
+                </a:solidFill>
+                <a:latin typeface="Calibri"/>
+              </a:rPr>
+              <a:t>Sources:  Review protocol: Kitchenham &amp; Charters, EBSE-2007-01   ·   Reporting: PRISMA 2020, Page et al., BMJ 2021;372:n71   ·   Both adapted, not followed to the letter</a:t>
             </a:r>
           </a:p>
         </p:txBody>

--- a/context_sok_results_presentation.pptx
+++ b/context_sok_results_presentation.pptx
@@ -27297,14 +27297,69 @@
       </p:sp>
       <p:sp>
         <p:nvSpPr>
-          <p:cNvPr id="5" name="Rectangle 4"/>
+          <p:cNvPr id="5" name="TextBox 4"/>
+          <p:cNvSpPr txBox="1"/>
+          <p:nvPr/>
+        </p:nvSpPr>
+        <p:spPr>
+          <a:xfrm>
+            <a:off x="640080" y="2432304"/>
+            <a:ext cx="10881360" cy="548640"/>
+          </a:xfrm>
+          <a:prstGeom prst="rect">
+            <a:avLst/>
+          </a:prstGeom>
+          <a:noFill/>
+        </p:spPr>
+        <p:txBody>
+          <a:bodyPr wrap="square">
+            <a:spAutoFit/>
+          </a:bodyPr>
+          <a:lstStyle/>
+          <a:p>
+            <a:pPr>
+              <a:spcAft>
+                <a:spcPts val="200"/>
+              </a:spcAft>
+            </a:pPr>
+            <a:r>
+              <a:rPr sz="1300" b="1">
+                <a:solidFill>
+                  <a:srgbClr val="FFFFFF"/>
+                </a:solidFill>
+                <a:latin typeface="Calibri"/>
+              </a:rPr>
+              <a:t>We did not invent the protocol. Four surveys in our own corpus use it, and we follow them.</a:t>
+            </a:r>
+          </a:p>
+          <a:p>
+            <a:pPr>
+              <a:spcAft>
+                <a:spcPts val="200"/>
+              </a:spcAft>
+            </a:pPr>
+            <a:r>
+              <a:rPr sz="1200" b="0">
+                <a:solidFill>
+                  <a:srgbClr val="CFE8EF"/>
+                </a:solidFill>
+                <a:latin typeface="Calibri"/>
+              </a:rPr>
+              <a:t>They apply the PRISMA reporting guidelines, or the Kitchenham review guidelines. We apply the same steps to two literatures at once.</a:t>
+            </a:r>
+          </a:p>
+        </p:txBody>
+      </p:sp>
+      <p:sp>
+        <p:nvSpPr>
+          <p:cNvPr id="6" name="Rectangle 5"/>
           <p:cNvSpPr/>
           <p:nvPr/>
         </p:nvSpPr>
         <p:spPr>
           <a:xfrm>
-            <a:off x="640080" y="2743200"/>
-            <a:ext cx="2606040" cy="2697480"/>
+            <a:off x="640080" y="3090672"/>
+            <a:ext cx="2606040" cy="2377440"/>
           </a:xfrm>
           <a:prstGeom prst="rect">
             <a:avLst/>
@@ -27341,13 +27396,13 @@
       </p:sp>
       <p:sp>
         <p:nvSpPr>
-          <p:cNvPr id="6" name="TextBox 5"/>
-          <p:cNvSpPr txBox="1"/>
-          <p:nvPr/>
-        </p:nvSpPr>
-        <p:spPr>
-          <a:xfrm>
-            <a:off x="868680" y="2971800"/>
+          <p:cNvPr id="7" name="TextBox 6"/>
+          <p:cNvSpPr txBox="1"/>
+          <p:nvPr/>
+        </p:nvSpPr>
+        <p:spPr>
+          <a:xfrm>
+            <a:off x="868680" y="3273552"/>
             <a:ext cx="2194560" cy="365760"/>
           </a:xfrm>
           <a:prstGeom prst="rect">
@@ -27375,14 +27430,14 @@
       </p:sp>
       <p:sp>
         <p:nvSpPr>
-          <p:cNvPr id="7" name="TextBox 6"/>
-          <p:cNvSpPr txBox="1"/>
-          <p:nvPr/>
-        </p:nvSpPr>
-        <p:spPr>
-          <a:xfrm>
-            <a:off x="868680" y="3429000"/>
-            <a:ext cx="2194560" cy="1920240"/>
+          <p:cNvPr id="8" name="TextBox 7"/>
+          <p:cNvSpPr txBox="1"/>
+          <p:nvPr/>
+        </p:nvSpPr>
+        <p:spPr>
+          <a:xfrm>
+            <a:off x="868680" y="3694176"/>
+            <a:ext cx="2240280" cy="1737360"/>
           </a:xfrm>
           <a:prstGeom prst="rect">
             <a:avLst/>
@@ -27407,7 +27462,7 @@
                 </a:solidFill>
                 <a:latin typeface="Calibri"/>
               </a:rPr>
-              <a:t>We searched two tracks at</a:t>
+              <a:t>We search two tracks at</a:t>
             </a:r>
           </a:p>
           <a:p>
@@ -27423,7 +27478,7 @@
                 </a:solidFill>
                 <a:latin typeface="Calibri"/>
               </a:rPr>
-              <a:t>the same time. One track is</a:t>
+              <a:t>once. One is adversarial.</a:t>
             </a:r>
           </a:p>
           <a:p>
@@ -27439,7 +27494,7 @@
                 </a:solidFill>
                 <a:latin typeface="Calibri"/>
               </a:rPr>
-              <a:t>adversarial. One track is</a:t>
+              <a:t>One is incidental.</a:t>
             </a:r>
           </a:p>
           <a:p>
@@ -27455,37 +27510,21 @@
                 </a:solidFill>
                 <a:latin typeface="Calibri"/>
               </a:rPr>
-              <a:t>incidental. We found</a:t>
-            </a:r>
-          </a:p>
-          <a:p>
-            <a:pPr>
-              <a:spcAft>
-                <a:spcPts val="100"/>
-              </a:spcAft>
-            </a:pPr>
-            <a:r>
-              <a:rPr sz="1150" b="0">
-                <a:solidFill>
-                  <a:srgbClr val="CADCFC"/>
-                </a:solidFill>
-                <a:latin typeface="Calibri"/>
-              </a:rPr>
-              <a:t>25,922 records.</a:t>
-            </a:r>
-          </a:p>
-        </p:txBody>
-      </p:sp>
-      <p:sp>
-        <p:nvSpPr>
-          <p:cNvPr id="8" name="Rectangle 7"/>
+              <a:t>We found 25,922 records.</a:t>
+            </a:r>
+          </a:p>
+        </p:txBody>
+      </p:sp>
+      <p:sp>
+        <p:nvSpPr>
+          <p:cNvPr id="9" name="Rectangle 8"/>
           <p:cNvSpPr/>
           <p:nvPr/>
         </p:nvSpPr>
         <p:spPr>
           <a:xfrm>
-            <a:off x="3429000" y="2743200"/>
-            <a:ext cx="2606040" cy="2697480"/>
+            <a:off x="3429000" y="3090672"/>
+            <a:ext cx="2606040" cy="2377440"/>
           </a:xfrm>
           <a:prstGeom prst="rect">
             <a:avLst/>
@@ -27522,13 +27561,13 @@
       </p:sp>
       <p:sp>
         <p:nvSpPr>
-          <p:cNvPr id="9" name="TextBox 8"/>
-          <p:cNvSpPr txBox="1"/>
-          <p:nvPr/>
-        </p:nvSpPr>
-        <p:spPr>
-          <a:xfrm>
-            <a:off x="3657600" y="2971800"/>
+          <p:cNvPr id="10" name="TextBox 9"/>
+          <p:cNvSpPr txBox="1"/>
+          <p:nvPr/>
+        </p:nvSpPr>
+        <p:spPr>
+          <a:xfrm>
+            <a:off x="3657600" y="3273552"/>
             <a:ext cx="2194560" cy="365760"/>
           </a:xfrm>
           <a:prstGeom prst="rect">
@@ -27556,14 +27595,14 @@
       </p:sp>
       <p:sp>
         <p:nvSpPr>
-          <p:cNvPr id="10" name="TextBox 9"/>
-          <p:cNvSpPr txBox="1"/>
-          <p:nvPr/>
-        </p:nvSpPr>
-        <p:spPr>
-          <a:xfrm>
-            <a:off x="3657600" y="3429000"/>
-            <a:ext cx="2194560" cy="1920240"/>
+          <p:cNvPr id="11" name="TextBox 10"/>
+          <p:cNvSpPr txBox="1"/>
+          <p:nvPr/>
+        </p:nvSpPr>
+        <p:spPr>
+          <a:xfrm>
+            <a:off x="3657600" y="3694176"/>
+            <a:ext cx="2240280" cy="1737360"/>
           </a:xfrm>
           <a:prstGeom prst="rect">
             <a:avLst/>
@@ -27659,14 +27698,14 @@
       </p:sp>
       <p:sp>
         <p:nvSpPr>
-          <p:cNvPr id="11" name="Rectangle 10"/>
+          <p:cNvPr id="12" name="Rectangle 11"/>
           <p:cNvSpPr/>
           <p:nvPr/>
         </p:nvSpPr>
         <p:spPr>
           <a:xfrm>
-            <a:off x="6217920" y="2743200"/>
-            <a:ext cx="2606040" cy="2697480"/>
+            <a:off x="6217920" y="3090672"/>
+            <a:ext cx="2606040" cy="2377440"/>
           </a:xfrm>
           <a:prstGeom prst="rect">
             <a:avLst/>
@@ -27703,13 +27742,13 @@
       </p:sp>
       <p:sp>
         <p:nvSpPr>
-          <p:cNvPr id="12" name="TextBox 11"/>
-          <p:cNvSpPr txBox="1"/>
-          <p:nvPr/>
-        </p:nvSpPr>
-        <p:spPr>
-          <a:xfrm>
-            <a:off x="6446520" y="2971800"/>
+          <p:cNvPr id="13" name="TextBox 12"/>
+          <p:cNvSpPr txBox="1"/>
+          <p:nvPr/>
+        </p:nvSpPr>
+        <p:spPr>
+          <a:xfrm>
+            <a:off x="6446520" y="3273552"/>
             <a:ext cx="2194560" cy="365760"/>
           </a:xfrm>
           <a:prstGeom prst="rect">
@@ -27737,14 +27776,14 @@
       </p:sp>
       <p:sp>
         <p:nvSpPr>
-          <p:cNvPr id="13" name="TextBox 12"/>
-          <p:cNvSpPr txBox="1"/>
-          <p:nvPr/>
-        </p:nvSpPr>
-        <p:spPr>
-          <a:xfrm>
-            <a:off x="6446520" y="3429000"/>
-            <a:ext cx="2194560" cy="1920240"/>
+          <p:cNvPr id="14" name="TextBox 13"/>
+          <p:cNvSpPr txBox="1"/>
+          <p:nvPr/>
+        </p:nvSpPr>
+        <p:spPr>
+          <a:xfrm>
+            <a:off x="6446520" y="3694176"/>
+            <a:ext cx="2240280" cy="1737360"/>
           </a:xfrm>
           <a:prstGeom prst="rect">
             <a:avLst/>
@@ -27840,14 +27879,14 @@
       </p:sp>
       <p:sp>
         <p:nvSpPr>
-          <p:cNvPr id="14" name="Rectangle 13"/>
+          <p:cNvPr id="15" name="Rectangle 14"/>
           <p:cNvSpPr/>
           <p:nvPr/>
         </p:nvSpPr>
         <p:spPr>
           <a:xfrm>
-            <a:off x="9006839" y="2743200"/>
-            <a:ext cx="2606040" cy="2697480"/>
+            <a:off x="9006839" y="3090672"/>
+            <a:ext cx="2606040" cy="2377440"/>
           </a:xfrm>
           <a:prstGeom prst="rect">
             <a:avLst/>
@@ -27884,13 +27923,13 @@
       </p:sp>
       <p:sp>
         <p:nvSpPr>
-          <p:cNvPr id="15" name="TextBox 14"/>
-          <p:cNvSpPr txBox="1"/>
-          <p:nvPr/>
-        </p:nvSpPr>
-        <p:spPr>
-          <a:xfrm>
-            <a:off x="9235439" y="2971800"/>
+          <p:cNvPr id="16" name="TextBox 15"/>
+          <p:cNvSpPr txBox="1"/>
+          <p:nvPr/>
+        </p:nvSpPr>
+        <p:spPr>
+          <a:xfrm>
+            <a:off x="9235439" y="3273552"/>
             <a:ext cx="2194560" cy="365760"/>
           </a:xfrm>
           <a:prstGeom prst="rect">
@@ -27918,14 +27957,14 @@
       </p:sp>
       <p:sp>
         <p:nvSpPr>
-          <p:cNvPr id="16" name="TextBox 15"/>
-          <p:cNvSpPr txBox="1"/>
-          <p:nvPr/>
-        </p:nvSpPr>
-        <p:spPr>
-          <a:xfrm>
-            <a:off x="9235439" y="3429000"/>
-            <a:ext cx="2194560" cy="1920240"/>
+          <p:cNvPr id="17" name="TextBox 16"/>
+          <p:cNvSpPr txBox="1"/>
+          <p:nvPr/>
+        </p:nvSpPr>
+        <p:spPr>
+          <a:xfrm>
+            <a:off x="9235439" y="3694176"/>
+            <a:ext cx="2240280" cy="1737360"/>
           </a:xfrm>
           <a:prstGeom prst="rect">
             <a:avLst/>
@@ -28021,34 +28060,34 @@
       </p:sp>
       <p:sp>
         <p:nvSpPr>
-          <p:cNvPr id="17" name="TextBox 16"/>
-          <p:cNvSpPr txBox="1"/>
-          <p:nvPr/>
-        </p:nvSpPr>
-        <p:spPr>
-          <a:xfrm>
-            <a:off x="640080" y="6419088"/>
-            <a:ext cx="10789920" cy="402336"/>
-          </a:xfrm>
-          <a:prstGeom prst="rect">
-            <a:avLst/>
-          </a:prstGeom>
-          <a:noFill/>
-        </p:spPr>
-        <p:txBody>
-          <a:bodyPr wrap="square">
-            <a:spAutoFit/>
-          </a:bodyPr>
-          <a:lstStyle/>
-          <a:p>
-            <a:r>
-              <a:rPr sz="850" b="0">
+          <p:cNvPr id="18" name="TextBox 17"/>
+          <p:cNvSpPr txBox="1"/>
+          <p:nvPr/>
+        </p:nvSpPr>
+        <p:spPr>
+          <a:xfrm>
+            <a:off x="640080" y="6327648"/>
+            <a:ext cx="10789920" cy="493776"/>
+          </a:xfrm>
+          <a:prstGeom prst="rect">
+            <a:avLst/>
+          </a:prstGeom>
+          <a:noFill/>
+        </p:spPr>
+        <p:txBody>
+          <a:bodyPr wrap="square">
+            <a:spAutoFit/>
+          </a:bodyPr>
+          <a:lstStyle/>
+          <a:p>
+            <a:r>
+              <a:rPr sz="750" b="0">
                 <a:solidFill>
                   <a:srgbClr val="5B6B79"/>
                 </a:solidFill>
                 <a:latin typeface="Calibri"/>
               </a:rPr>
-              <a:t>Sources:  Review protocol: Kitchenham &amp; Charters, EBSE-2007-01   ·   Reporting: PRISMA 2020, Page et al., BMJ 2021;372:n71   ·   Both adapted, not followed to the letter</a:t>
+              <a:t>Sources:  Protocol adopted from surveys in our own corpus: Woesle et al., IEEE Access 2026 (PRISMA)   ·   Duarte et al., IEEE Access 2026 (PRISMA, dual screening)   ·   Geng et al., Computers, Materials &amp; Continua 2025 (Kitchenham guidelines)   ·   Wang et al., 2026, arXiv:2602.10453 (SoK on a systematic review)</a:t>
             </a:r>
           </a:p>
         </p:txBody>

--- a/context_sok_results_presentation.pptx
+++ b/context_sok_results_presentation.pptx
@@ -3295,7 +3295,7 @@
                 </a:solidFill>
                 <a:latin typeface="Calibri"/>
               </a:rPr>
-              <a:t>1,158 papers screened · 1,026 included · 237 mechanisms · 534 defenses · 16 cells we ran ourselves</a:t>
+              <a:t>1,158 papers screened · 1,026 included · 237 mechanisms · 534 defenses · 18 cells we ran ourselves</a:t>
             </a:r>
           </a:p>
         </p:txBody>
@@ -12527,7 +12527,7 @@
                 </a:solidFill>
                 <a:latin typeface="Cambria"/>
               </a:rPr>
-              <a:t>16</a:t>
+              <a:t>18</a:t>
             </a:r>
           </a:p>
         </p:txBody>
@@ -12616,7 +12616,7 @@
                 </a:solidFill>
                 <a:latin typeface="Cambria"/>
               </a:rPr>
-              <a:t>94</a:t>
+              <a:t>104</a:t>
             </a:r>
           </a:p>
         </p:txBody>
@@ -13497,7 +13497,7 @@
                 </a:solidFill>
                 <a:latin typeface="Cambria"/>
               </a:rPr>
-              <a:t>0 of 8</a:t>
+              <a:t>0 of 10</a:t>
             </a:r>
           </a:p>
         </p:txBody>
@@ -15250,23 +15250,7 @@
                 </a:solidFill>
                 <a:latin typeface="Cambria"/>
               </a:rPr>
-              <a:t>Two versions of one defense give</a:t>
-            </a:r>
-          </a:p>
-          <a:p>
-            <a:pPr>
-              <a:spcAft>
-                <a:spcPts val="200"/>
-              </a:spcAft>
-            </a:pPr>
-            <a:r>
-              <a:rPr sz="2800" b="1">
-                <a:solidFill>
-                  <a:srgbClr val="FFFFFF"/>
-                </a:solidFill>
-                <a:latin typeface="Cambria"/>
-              </a:rPr>
-              <a:t>opposite answers</a:t>
+              <a:t>One defense, two models, opposite results</a:t>
             </a:r>
           </a:p>
         </p:txBody>
@@ -15313,28 +15297,28 @@
         </p:nvSpPr>
         <p:spPr>
           <a:xfrm>
-            <a:off x="640080" y="2331720"/>
-            <a:ext cx="10881360" cy="365760"/>
-          </a:xfrm>
-          <a:prstGeom prst="rect">
-            <a:avLst/>
-          </a:prstGeom>
-          <a:noFill/>
-        </p:spPr>
-        <p:txBody>
-          <a:bodyPr wrap="square">
-            <a:spAutoFit/>
-          </a:bodyPr>
-          <a:lstStyle/>
-          <a:p>
-            <a:r>
-              <a:rPr sz="1250" b="0">
-                <a:solidFill>
-                  <a:srgbClr val="CFE8EF"/>
-                </a:solidFill>
-                <a:latin typeface="Calibri"/>
-              </a:rPr>
-              <a:t>RobustRAG ships both. They share the isolation step. They differ only in how they join the answers.</a:t>
+            <a:off x="640080" y="2084831"/>
+            <a:ext cx="10881360" cy="411480"/>
+          </a:xfrm>
+          <a:prstGeom prst="rect">
+            <a:avLst/>
+          </a:prstGeom>
+          <a:noFill/>
+        </p:spPr>
+        <p:txBody>
+          <a:bodyPr wrap="square">
+            <a:spAutoFit/>
+          </a:bodyPr>
+          <a:lstStyle/>
+          <a:p>
+            <a:r>
+              <a:rPr sz="1350" b="1">
+                <a:solidFill>
+                  <a:srgbClr val="FFFFFF"/>
+                </a:solidFill>
+                <a:latin typeface="Calibri"/>
+              </a:rPr>
+              <a:t>Refusal rate under BadRAG DoS at 9 poisoned passages of 10. The undefended arm never refuses, on either model, at any dose.</a:t>
             </a:r>
           </a:p>
         </p:txBody>
@@ -15347,28 +15331,28 @@
         </p:nvSpPr>
         <p:spPr>
           <a:xfrm>
-            <a:off x="868680" y="2788920"/>
-            <a:ext cx="2834640" cy="320040"/>
-          </a:xfrm>
-          <a:prstGeom prst="rect">
-            <a:avLst/>
-          </a:prstGeom>
-          <a:noFill/>
-        </p:spPr>
-        <p:txBody>
-          <a:bodyPr wrap="square">
-            <a:spAutoFit/>
-          </a:bodyPr>
-          <a:lstStyle/>
-          <a:p>
-            <a:r>
-              <a:rPr sz="1250" b="1">
+            <a:off x="868680" y="2578608"/>
+            <a:ext cx="3017520" cy="274320"/>
+          </a:xfrm>
+          <a:prstGeom prst="rect">
+            <a:avLst/>
+          </a:prstGeom>
+          <a:noFill/>
+        </p:spPr>
+        <p:txBody>
+          <a:bodyPr wrap="square">
+            <a:spAutoFit/>
+          </a:bodyPr>
+          <a:lstStyle/>
+          <a:p>
+            <a:r>
+              <a:rPr sz="1150" b="1">
                 <a:solidFill>
                   <a:srgbClr val="E0A458"/>
                 </a:solidFill>
                 <a:latin typeface="Calibri"/>
               </a:rPr>
-              <a:t>Bad passages of 10</a:t>
+              <a:t>Model</a:t>
             </a:r>
           </a:p>
         </p:txBody>
@@ -15381,29 +15365,28 @@
         </p:nvSpPr>
         <p:spPr>
           <a:xfrm>
-            <a:off x="3977639" y="2788920"/>
-            <a:ext cx="960120" cy="320040"/>
-          </a:xfrm>
-          <a:prstGeom prst="rect">
-            <a:avLst/>
-          </a:prstGeom>
-          <a:noFill/>
-        </p:spPr>
-        <p:txBody>
-          <a:bodyPr wrap="square">
-            <a:spAutoFit/>
-          </a:bodyPr>
-          <a:lstStyle/>
-          <a:p>
-            <a:pPr algn="ctr"/>
-            <a:r>
-              <a:rPr sz="1250" b="1">
+            <a:off x="3977639" y="2578608"/>
+            <a:ext cx="3108960" cy="274320"/>
+          </a:xfrm>
+          <a:prstGeom prst="rect">
+            <a:avLst/>
+          </a:prstGeom>
+          <a:noFill/>
+        </p:spPr>
+        <p:txBody>
+          <a:bodyPr wrap="square">
+            <a:spAutoFit/>
+          </a:bodyPr>
+          <a:lstStyle/>
+          <a:p>
+            <a:r>
+              <a:rPr sz="1150" b="1">
                 <a:solidFill>
                   <a:srgbClr val="E0A458"/>
                 </a:solidFill>
                 <a:latin typeface="Calibri"/>
               </a:rPr>
-              <a:t>1</a:t>
+              <a:t>Version of the defense</a:t>
             </a:r>
           </a:p>
         </p:txBody>
@@ -15416,29 +15399,28 @@
         </p:nvSpPr>
         <p:spPr>
           <a:xfrm>
-            <a:off x="5056631" y="2788920"/>
-            <a:ext cx="960120" cy="320040"/>
-          </a:xfrm>
-          <a:prstGeom prst="rect">
-            <a:avLst/>
-          </a:prstGeom>
-          <a:noFill/>
-        </p:spPr>
-        <p:txBody>
-          <a:bodyPr wrap="square">
-            <a:spAutoFit/>
-          </a:bodyPr>
-          <a:lstStyle/>
-          <a:p>
-            <a:pPr algn="ctr"/>
-            <a:r>
-              <a:rPr sz="1250" b="1">
+            <a:off x="7315200" y="2578608"/>
+            <a:ext cx="1828800" cy="274320"/>
+          </a:xfrm>
+          <a:prstGeom prst="rect">
+            <a:avLst/>
+          </a:prstGeom>
+          <a:noFill/>
+        </p:spPr>
+        <p:txBody>
+          <a:bodyPr wrap="square">
+            <a:spAutoFit/>
+          </a:bodyPr>
+          <a:lstStyle/>
+          <a:p>
+            <a:r>
+              <a:rPr sz="1150" b="1">
                 <a:solidFill>
                   <a:srgbClr val="E0A458"/>
                 </a:solidFill>
                 <a:latin typeface="Calibri"/>
               </a:rPr>
-              <a:t>5</a:t>
+              <a:t>No defense</a:t>
             </a:r>
           </a:p>
         </p:txBody>
@@ -15451,183 +15433,42 @@
         </p:nvSpPr>
         <p:spPr>
           <a:xfrm>
-            <a:off x="6135623" y="2788920"/>
-            <a:ext cx="960120" cy="320040"/>
-          </a:xfrm>
-          <a:prstGeom prst="rect">
-            <a:avLst/>
-          </a:prstGeom>
-          <a:noFill/>
-        </p:spPr>
-        <p:txBody>
-          <a:bodyPr wrap="square">
-            <a:spAutoFit/>
-          </a:bodyPr>
-          <a:lstStyle/>
-          <a:p>
-            <a:pPr algn="ctr"/>
-            <a:r>
-              <a:rPr sz="1250" b="1">
+            <a:off x="9326880" y="2578608"/>
+            <a:ext cx="2194560" cy="274320"/>
+          </a:xfrm>
+          <a:prstGeom prst="rect">
+            <a:avLst/>
+          </a:prstGeom>
+          <a:noFill/>
+        </p:spPr>
+        <p:txBody>
+          <a:bodyPr wrap="square">
+            <a:spAutoFit/>
+          </a:bodyPr>
+          <a:lstStyle/>
+          <a:p>
+            <a:r>
+              <a:rPr sz="1150" b="1">
                 <a:solidFill>
                   <a:srgbClr val="E0A458"/>
                 </a:solidFill>
                 <a:latin typeface="Calibri"/>
               </a:rPr>
-              <a:t>6</a:t>
-            </a:r>
-          </a:p>
-        </p:txBody>
-      </p:sp>
-      <p:sp>
-        <p:nvSpPr>
-          <p:cNvPr id="10" name="TextBox 9"/>
-          <p:cNvSpPr txBox="1"/>
-          <p:nvPr/>
-        </p:nvSpPr>
-        <p:spPr>
-          <a:xfrm>
-            <a:off x="7214616" y="2788920"/>
-            <a:ext cx="960120" cy="320040"/>
-          </a:xfrm>
-          <a:prstGeom prst="rect">
-            <a:avLst/>
-          </a:prstGeom>
-          <a:noFill/>
-        </p:spPr>
-        <p:txBody>
-          <a:bodyPr wrap="square">
-            <a:spAutoFit/>
-          </a:bodyPr>
-          <a:lstStyle/>
-          <a:p>
-            <a:pPr algn="ctr"/>
-            <a:r>
-              <a:rPr sz="1250" b="1">
-                <a:solidFill>
-                  <a:srgbClr val="E0A458"/>
-                </a:solidFill>
-                <a:latin typeface="Calibri"/>
-              </a:rPr>
-              <a:t>7</a:t>
-            </a:r>
-          </a:p>
-        </p:txBody>
-      </p:sp>
-      <p:sp>
-        <p:nvSpPr>
-          <p:cNvPr id="11" name="TextBox 10"/>
-          <p:cNvSpPr txBox="1"/>
-          <p:nvPr/>
-        </p:nvSpPr>
-        <p:spPr>
-          <a:xfrm>
-            <a:off x="8293608" y="2788920"/>
-            <a:ext cx="960120" cy="320040"/>
-          </a:xfrm>
-          <a:prstGeom prst="rect">
-            <a:avLst/>
-          </a:prstGeom>
-          <a:noFill/>
-        </p:spPr>
-        <p:txBody>
-          <a:bodyPr wrap="square">
-            <a:spAutoFit/>
-          </a:bodyPr>
-          <a:lstStyle/>
-          <a:p>
-            <a:pPr algn="ctr"/>
-            <a:r>
-              <a:rPr sz="1250" b="1">
-                <a:solidFill>
-                  <a:srgbClr val="E0A458"/>
-                </a:solidFill>
-                <a:latin typeface="Calibri"/>
-              </a:rPr>
-              <a:t>8</a:t>
-            </a:r>
-          </a:p>
-        </p:txBody>
-      </p:sp>
-      <p:sp>
-        <p:nvSpPr>
-          <p:cNvPr id="12" name="TextBox 11"/>
-          <p:cNvSpPr txBox="1"/>
-          <p:nvPr/>
-        </p:nvSpPr>
-        <p:spPr>
-          <a:xfrm>
-            <a:off x="9372600" y="2788920"/>
-            <a:ext cx="960120" cy="320040"/>
-          </a:xfrm>
-          <a:prstGeom prst="rect">
-            <a:avLst/>
-          </a:prstGeom>
-          <a:noFill/>
-        </p:spPr>
-        <p:txBody>
-          <a:bodyPr wrap="square">
-            <a:spAutoFit/>
-          </a:bodyPr>
-          <a:lstStyle/>
-          <a:p>
-            <a:pPr algn="ctr"/>
-            <a:r>
-              <a:rPr sz="1250" b="1">
-                <a:solidFill>
-                  <a:srgbClr val="E0A458"/>
-                </a:solidFill>
-                <a:latin typeface="Calibri"/>
-              </a:rPr>
-              <a:t>9</a:t>
-            </a:r>
-          </a:p>
-        </p:txBody>
-      </p:sp>
-      <p:sp>
-        <p:nvSpPr>
-          <p:cNvPr id="13" name="TextBox 12"/>
-          <p:cNvSpPr txBox="1"/>
-          <p:nvPr/>
-        </p:nvSpPr>
-        <p:spPr>
-          <a:xfrm>
-            <a:off x="10451592" y="2788920"/>
-            <a:ext cx="960120" cy="320040"/>
-          </a:xfrm>
-          <a:prstGeom prst="rect">
-            <a:avLst/>
-          </a:prstGeom>
-          <a:noFill/>
-        </p:spPr>
-        <p:txBody>
-          <a:bodyPr wrap="square">
-            <a:spAutoFit/>
-          </a:bodyPr>
-          <a:lstStyle/>
-          <a:p>
-            <a:pPr algn="ctr"/>
-            <a:r>
-              <a:rPr sz="1250" b="1">
-                <a:solidFill>
-                  <a:srgbClr val="E0A458"/>
-                </a:solidFill>
-                <a:latin typeface="Calibri"/>
-              </a:rPr>
-              <a:t>10</a:t>
-            </a:r>
-          </a:p>
-        </p:txBody>
-      </p:sp>
-      <p:sp>
-        <p:nvSpPr>
-          <p:cNvPr id="14" name="Rectangle 13"/>
+              <a:t>With the defense</a:t>
+            </a:r>
+          </a:p>
+        </p:txBody>
+      </p:sp>
+      <p:sp>
+        <p:nvSpPr>
+          <p:cNvPr id="10" name="Rectangle 9"/>
           <p:cNvSpPr/>
           <p:nvPr/>
         </p:nvSpPr>
         <p:spPr>
           <a:xfrm>
-            <a:off x="640080" y="3218688"/>
-            <a:ext cx="10881360" cy="457200"/>
+            <a:off x="640080" y="2944368"/>
+            <a:ext cx="10881360" cy="420624"/>
           </a:xfrm>
           <a:prstGeom prst="rect">
             <a:avLst/>
@@ -15664,33 +15505,67 @@
       </p:sp>
       <p:sp>
         <p:nvSpPr>
-          <p:cNvPr id="15" name="TextBox 14"/>
-          <p:cNvSpPr txBox="1"/>
-          <p:nvPr/>
-        </p:nvSpPr>
-        <p:spPr>
-          <a:xfrm>
-            <a:off x="868680" y="3291840"/>
-            <a:ext cx="2834640" cy="320040"/>
-          </a:xfrm>
-          <a:prstGeom prst="rect">
-            <a:avLst/>
-          </a:prstGeom>
-          <a:noFill/>
-        </p:spPr>
-        <p:txBody>
-          <a:bodyPr wrap="square">
-            <a:spAutoFit/>
-          </a:bodyPr>
-          <a:lstStyle/>
-          <a:p>
-            <a:r>
-              <a:rPr sz="1250" b="0">
+          <p:cNvPr id="11" name="TextBox 10"/>
+          <p:cNvSpPr txBox="1"/>
+          <p:nvPr/>
+        </p:nvSpPr>
+        <p:spPr>
+          <a:xfrm>
+            <a:off x="868680" y="3008376"/>
+            <a:ext cx="3017520" cy="292608"/>
+          </a:xfrm>
+          <a:prstGeom prst="rect">
+            <a:avLst/>
+          </a:prstGeom>
+          <a:noFill/>
+        </p:spPr>
+        <p:txBody>
+          <a:bodyPr wrap="square">
+            <a:spAutoFit/>
+          </a:bodyPr>
+          <a:lstStyle/>
+          <a:p>
+            <a:r>
+              <a:rPr sz="1350" b="0">
                 <a:solidFill>
                   <a:srgbClr val="FFFFFF"/>
                 </a:solidFill>
                 <a:latin typeface="Calibri"/>
               </a:rPr>
+              <a:t>Mistral-7B-Instruct</a:t>
+            </a:r>
+          </a:p>
+        </p:txBody>
+      </p:sp>
+      <p:sp>
+        <p:nvSpPr>
+          <p:cNvPr id="12" name="TextBox 11"/>
+          <p:cNvSpPr txBox="1"/>
+          <p:nvPr/>
+        </p:nvSpPr>
+        <p:spPr>
+          <a:xfrm>
+            <a:off x="3977639" y="3008376"/>
+            <a:ext cx="3108960" cy="292608"/>
+          </a:xfrm>
+          <a:prstGeom prst="rect">
+            <a:avLst/>
+          </a:prstGeom>
+          <a:noFill/>
+        </p:spPr>
+        <p:txBody>
+          <a:bodyPr wrap="square">
+            <a:spAutoFit/>
+          </a:bodyPr>
+          <a:lstStyle/>
+          <a:p>
+            <a:r>
+              <a:rPr sz="1350" b="0">
+                <a:solidFill>
+                  <a:srgbClr val="CADCFC"/>
+                </a:solidFill>
+                <a:latin typeface="Calibri"/>
+              </a:rPr>
               <a:t>KeywordAgg</a:t>
             </a:r>
           </a:p>
@@ -15698,259 +15573,82 @@
       </p:sp>
       <p:sp>
         <p:nvSpPr>
-          <p:cNvPr id="16" name="TextBox 15"/>
-          <p:cNvSpPr txBox="1"/>
-          <p:nvPr/>
-        </p:nvSpPr>
-        <p:spPr>
-          <a:xfrm>
-            <a:off x="3977639" y="3291840"/>
-            <a:ext cx="960120" cy="320040"/>
-          </a:xfrm>
-          <a:prstGeom prst="rect">
-            <a:avLst/>
-          </a:prstGeom>
-          <a:noFill/>
-        </p:spPr>
-        <p:txBody>
-          <a:bodyPr wrap="square">
-            <a:spAutoFit/>
-          </a:bodyPr>
-          <a:lstStyle/>
-          <a:p>
-            <a:pPr algn="ctr"/>
-            <a:r>
-              <a:rPr sz="1250" b="0">
+          <p:cNvPr id="13" name="TextBox 12"/>
+          <p:cNvSpPr txBox="1"/>
+          <p:nvPr/>
+        </p:nvSpPr>
+        <p:spPr>
+          <a:xfrm>
+            <a:off x="7315200" y="3008376"/>
+            <a:ext cx="1828800" cy="292608"/>
+          </a:xfrm>
+          <a:prstGeom prst="rect">
+            <a:avLst/>
+          </a:prstGeom>
+          <a:noFill/>
+        </p:spPr>
+        <p:txBody>
+          <a:bodyPr wrap="square">
+            <a:spAutoFit/>
+          </a:bodyPr>
+          <a:lstStyle/>
+          <a:p>
+            <a:r>
+              <a:rPr sz="1350" b="0">
+                <a:solidFill>
+                  <a:srgbClr val="CADCFC"/>
+                </a:solidFill>
+                <a:latin typeface="Calibri"/>
+              </a:rPr>
+              <a:t>0.0 %</a:t>
+            </a:r>
+          </a:p>
+        </p:txBody>
+      </p:sp>
+      <p:sp>
+        <p:nvSpPr>
+          <p:cNvPr id="14" name="TextBox 13"/>
+          <p:cNvSpPr txBox="1"/>
+          <p:nvPr/>
+        </p:nvSpPr>
+        <p:spPr>
+          <a:xfrm>
+            <a:off x="9326880" y="3008376"/>
+            <a:ext cx="2194560" cy="292608"/>
+          </a:xfrm>
+          <a:prstGeom prst="rect">
+            <a:avLst/>
+          </a:prstGeom>
+          <a:noFill/>
+        </p:spPr>
+        <p:txBody>
+          <a:bodyPr wrap="square">
+            <a:spAutoFit/>
+          </a:bodyPr>
+          <a:lstStyle/>
+          <a:p>
+            <a:r>
+              <a:rPr sz="1350" b="1">
                 <a:solidFill>
                   <a:srgbClr val="1C7293"/>
                 </a:solidFill>
                 <a:latin typeface="Calibri"/>
               </a:rPr>
-              <a:t>+7.3</a:t>
-            </a:r>
-          </a:p>
-        </p:txBody>
-      </p:sp>
-      <p:sp>
-        <p:nvSpPr>
-          <p:cNvPr id="17" name="TextBox 16"/>
-          <p:cNvSpPr txBox="1"/>
-          <p:nvPr/>
-        </p:nvSpPr>
-        <p:spPr>
-          <a:xfrm>
-            <a:off x="5056631" y="3291840"/>
-            <a:ext cx="960120" cy="320040"/>
-          </a:xfrm>
-          <a:prstGeom prst="rect">
-            <a:avLst/>
-          </a:prstGeom>
-          <a:noFill/>
-        </p:spPr>
-        <p:txBody>
-          <a:bodyPr wrap="square">
-            <a:spAutoFit/>
-          </a:bodyPr>
-          <a:lstStyle/>
-          <a:p>
-            <a:pPr algn="ctr"/>
-            <a:r>
-              <a:rPr sz="1250" b="0">
-                <a:solidFill>
-                  <a:srgbClr val="1C7293"/>
-                </a:solidFill>
-                <a:latin typeface="Calibri"/>
-              </a:rPr>
-              <a:t>+4.0</a:t>
-            </a:r>
-          </a:p>
-        </p:txBody>
-      </p:sp>
-      <p:sp>
-        <p:nvSpPr>
-          <p:cNvPr id="18" name="TextBox 17"/>
-          <p:cNvSpPr txBox="1"/>
-          <p:nvPr/>
-        </p:nvSpPr>
-        <p:spPr>
-          <a:xfrm>
-            <a:off x="6135623" y="3291840"/>
-            <a:ext cx="960120" cy="320040"/>
-          </a:xfrm>
-          <a:prstGeom prst="rect">
-            <a:avLst/>
-          </a:prstGeom>
-          <a:noFill/>
-        </p:spPr>
-        <p:txBody>
-          <a:bodyPr wrap="square">
-            <a:spAutoFit/>
-          </a:bodyPr>
-          <a:lstStyle/>
-          <a:p>
-            <a:pPr algn="ctr"/>
-            <a:r>
-              <a:rPr sz="1250" b="0">
-                <a:solidFill>
-                  <a:srgbClr val="1C7293"/>
-                </a:solidFill>
-                <a:latin typeface="Calibri"/>
-              </a:rPr>
-              <a:t>+4.0</a:t>
-            </a:r>
-          </a:p>
-        </p:txBody>
-      </p:sp>
-      <p:sp>
-        <p:nvSpPr>
-          <p:cNvPr id="19" name="TextBox 18"/>
-          <p:cNvSpPr txBox="1"/>
-          <p:nvPr/>
-        </p:nvSpPr>
-        <p:spPr>
-          <a:xfrm>
-            <a:off x="7214616" y="3291840"/>
-            <a:ext cx="960120" cy="320040"/>
-          </a:xfrm>
-          <a:prstGeom prst="rect">
-            <a:avLst/>
-          </a:prstGeom>
-          <a:noFill/>
-        </p:spPr>
-        <p:txBody>
-          <a:bodyPr wrap="square">
-            <a:spAutoFit/>
-          </a:bodyPr>
-          <a:lstStyle/>
-          <a:p>
-            <a:pPr algn="ctr"/>
-            <a:r>
-              <a:rPr sz="1250" b="0">
-                <a:solidFill>
-                  <a:srgbClr val="1C7293"/>
-                </a:solidFill>
-                <a:latin typeface="Calibri"/>
-              </a:rPr>
-              <a:t>+5.7</a:t>
-            </a:r>
-          </a:p>
-        </p:txBody>
-      </p:sp>
-      <p:sp>
-        <p:nvSpPr>
-          <p:cNvPr id="20" name="TextBox 19"/>
-          <p:cNvSpPr txBox="1"/>
-          <p:nvPr/>
-        </p:nvSpPr>
-        <p:spPr>
-          <a:xfrm>
-            <a:off x="8293608" y="3291840"/>
-            <a:ext cx="960120" cy="320040"/>
-          </a:xfrm>
-          <a:prstGeom prst="rect">
-            <a:avLst/>
-          </a:prstGeom>
-          <a:noFill/>
-        </p:spPr>
-        <p:txBody>
-          <a:bodyPr wrap="square">
-            <a:spAutoFit/>
-          </a:bodyPr>
-          <a:lstStyle/>
-          <a:p>
-            <a:pPr algn="ctr"/>
-            <a:r>
-              <a:rPr sz="1250" b="0">
-                <a:solidFill>
-                  <a:srgbClr val="1C7293"/>
-                </a:solidFill>
-                <a:latin typeface="Calibri"/>
-              </a:rPr>
-              <a:t>+6.7</a:t>
-            </a:r>
-          </a:p>
-        </p:txBody>
-      </p:sp>
-      <p:sp>
-        <p:nvSpPr>
-          <p:cNvPr id="21" name="TextBox 20"/>
-          <p:cNvSpPr txBox="1"/>
-          <p:nvPr/>
-        </p:nvSpPr>
-        <p:spPr>
-          <a:xfrm>
-            <a:off x="9372600" y="3291840"/>
-            <a:ext cx="960120" cy="320040"/>
-          </a:xfrm>
-          <a:prstGeom prst="rect">
-            <a:avLst/>
-          </a:prstGeom>
-          <a:noFill/>
-        </p:spPr>
-        <p:txBody>
-          <a:bodyPr wrap="square">
-            <a:spAutoFit/>
-          </a:bodyPr>
-          <a:lstStyle/>
-          <a:p>
-            <a:pPr algn="ctr"/>
-            <a:r>
-              <a:rPr sz="1250" b="0">
-                <a:solidFill>
-                  <a:srgbClr val="1C7293"/>
-                </a:solidFill>
-                <a:latin typeface="Calibri"/>
-              </a:rPr>
-              <a:t>+12.3</a:t>
-            </a:r>
-          </a:p>
-        </p:txBody>
-      </p:sp>
-      <p:sp>
-        <p:nvSpPr>
-          <p:cNvPr id="22" name="TextBox 21"/>
-          <p:cNvSpPr txBox="1"/>
-          <p:nvPr/>
-        </p:nvSpPr>
-        <p:spPr>
-          <a:xfrm>
-            <a:off x="10451592" y="3291840"/>
-            <a:ext cx="960120" cy="320040"/>
-          </a:xfrm>
-          <a:prstGeom prst="rect">
-            <a:avLst/>
-          </a:prstGeom>
-          <a:noFill/>
-        </p:spPr>
-        <p:txBody>
-          <a:bodyPr wrap="square">
-            <a:spAutoFit/>
-          </a:bodyPr>
-          <a:lstStyle/>
-          <a:p>
-            <a:pPr algn="ctr"/>
-            <a:r>
-              <a:rPr sz="1250" b="0">
-                <a:solidFill>
-                  <a:srgbClr val="1C7293"/>
-                </a:solidFill>
-                <a:latin typeface="Calibri"/>
-              </a:rPr>
-              <a:t>-5.7</a:t>
-            </a:r>
-          </a:p>
-        </p:txBody>
-      </p:sp>
-      <p:sp>
-        <p:nvSpPr>
-          <p:cNvPr id="23" name="Rectangle 22"/>
+              <a:t>5.7 %</a:t>
+            </a:r>
+          </a:p>
+        </p:txBody>
+      </p:sp>
+      <p:sp>
+        <p:nvSpPr>
+          <p:cNvPr id="15" name="Rectangle 14"/>
           <p:cNvSpPr/>
           <p:nvPr/>
         </p:nvSpPr>
         <p:spPr>
           <a:xfrm>
-            <a:off x="640080" y="3767328"/>
-            <a:ext cx="10881360" cy="457200"/>
+            <a:off x="640080" y="3456432"/>
+            <a:ext cx="10881360" cy="420624"/>
           </a:xfrm>
           <a:prstGeom prst="rect">
             <a:avLst/>
@@ -15987,33 +15685,67 @@
       </p:sp>
       <p:sp>
         <p:nvSpPr>
-          <p:cNvPr id="24" name="TextBox 23"/>
-          <p:cNvSpPr txBox="1"/>
-          <p:nvPr/>
-        </p:nvSpPr>
-        <p:spPr>
-          <a:xfrm>
-            <a:off x="868680" y="3840480"/>
-            <a:ext cx="2834640" cy="320040"/>
-          </a:xfrm>
-          <a:prstGeom prst="rect">
-            <a:avLst/>
-          </a:prstGeom>
-          <a:noFill/>
-        </p:spPr>
-        <p:txBody>
-          <a:bodyPr wrap="square">
-            <a:spAutoFit/>
-          </a:bodyPr>
-          <a:lstStyle/>
-          <a:p>
-            <a:r>
-              <a:rPr sz="1250" b="0">
+          <p:cNvPr id="16" name="TextBox 15"/>
+          <p:cNvSpPr txBox="1"/>
+          <p:nvPr/>
+        </p:nvSpPr>
+        <p:spPr>
+          <a:xfrm>
+            <a:off x="868680" y="3520440"/>
+            <a:ext cx="3017520" cy="292608"/>
+          </a:xfrm>
+          <a:prstGeom prst="rect">
+            <a:avLst/>
+          </a:prstGeom>
+          <a:noFill/>
+        </p:spPr>
+        <p:txBody>
+          <a:bodyPr wrap="square">
+            <a:spAutoFit/>
+          </a:bodyPr>
+          <a:lstStyle/>
+          <a:p>
+            <a:r>
+              <a:rPr sz="1350" b="0">
                 <a:solidFill>
                   <a:srgbClr val="FFFFFF"/>
                 </a:solidFill>
                 <a:latin typeface="Calibri"/>
               </a:rPr>
+              <a:t>Mistral-7B-Instruct</a:t>
+            </a:r>
+          </a:p>
+        </p:txBody>
+      </p:sp>
+      <p:sp>
+        <p:nvSpPr>
+          <p:cNvPr id="17" name="TextBox 16"/>
+          <p:cNvSpPr txBox="1"/>
+          <p:nvPr/>
+        </p:nvSpPr>
+        <p:spPr>
+          <a:xfrm>
+            <a:off x="3977639" y="3520440"/>
+            <a:ext cx="3108960" cy="292608"/>
+          </a:xfrm>
+          <a:prstGeom prst="rect">
+            <a:avLst/>
+          </a:prstGeom>
+          <a:noFill/>
+        </p:spPr>
+        <p:txBody>
+          <a:bodyPr wrap="square">
+            <a:spAutoFit/>
+          </a:bodyPr>
+          <a:lstStyle/>
+          <a:p>
+            <a:r>
+              <a:rPr sz="1350" b="0">
+                <a:solidFill>
+                  <a:srgbClr val="CADCFC"/>
+                </a:solidFill>
+                <a:latin typeface="Calibri"/>
+              </a:rPr>
               <a:t>DecodingAgg</a:t>
             </a:r>
           </a:p>
@@ -16021,259 +15753,82 @@
       </p:sp>
       <p:sp>
         <p:nvSpPr>
-          <p:cNvPr id="25" name="TextBox 24"/>
-          <p:cNvSpPr txBox="1"/>
-          <p:nvPr/>
-        </p:nvSpPr>
-        <p:spPr>
-          <a:xfrm>
-            <a:off x="3977639" y="3840480"/>
-            <a:ext cx="960120" cy="320040"/>
-          </a:xfrm>
-          <a:prstGeom prst="rect">
-            <a:avLst/>
-          </a:prstGeom>
-          <a:noFill/>
-        </p:spPr>
-        <p:txBody>
-          <a:bodyPr wrap="square">
-            <a:spAutoFit/>
-          </a:bodyPr>
-          <a:lstStyle/>
-          <a:p>
-            <a:pPr algn="ctr"/>
-            <a:r>
-              <a:rPr sz="1250" b="0">
-                <a:solidFill>
-                  <a:srgbClr val="B54A3F"/>
-                </a:solidFill>
-                <a:latin typeface="Calibri"/>
-              </a:rPr>
-              <a:t>+8.7</a:t>
-            </a:r>
-          </a:p>
-        </p:txBody>
-      </p:sp>
-      <p:sp>
-        <p:nvSpPr>
-          <p:cNvPr id="26" name="TextBox 25"/>
-          <p:cNvSpPr txBox="1"/>
-          <p:nvPr/>
-        </p:nvSpPr>
-        <p:spPr>
-          <a:xfrm>
-            <a:off x="5056631" y="3840480"/>
-            <a:ext cx="960120" cy="320040"/>
-          </a:xfrm>
-          <a:prstGeom prst="rect">
-            <a:avLst/>
-          </a:prstGeom>
-          <a:noFill/>
-        </p:spPr>
-        <p:txBody>
-          <a:bodyPr wrap="square">
-            <a:spAutoFit/>
-          </a:bodyPr>
-          <a:lstStyle/>
-          <a:p>
-            <a:pPr algn="ctr"/>
-            <a:r>
-              <a:rPr sz="1250" b="0">
-                <a:solidFill>
-                  <a:srgbClr val="B54A3F"/>
-                </a:solidFill>
-                <a:latin typeface="Calibri"/>
-              </a:rPr>
-              <a:t>-9.0</a:t>
-            </a:r>
-          </a:p>
-        </p:txBody>
-      </p:sp>
-      <p:sp>
-        <p:nvSpPr>
-          <p:cNvPr id="27" name="TextBox 26"/>
-          <p:cNvSpPr txBox="1"/>
-          <p:nvPr/>
-        </p:nvSpPr>
-        <p:spPr>
-          <a:xfrm>
-            <a:off x="6135623" y="3840480"/>
-            <a:ext cx="960120" cy="320040"/>
-          </a:xfrm>
-          <a:prstGeom prst="rect">
-            <a:avLst/>
-          </a:prstGeom>
-          <a:noFill/>
-        </p:spPr>
-        <p:txBody>
-          <a:bodyPr wrap="square">
-            <a:spAutoFit/>
-          </a:bodyPr>
-          <a:lstStyle/>
-          <a:p>
-            <a:pPr algn="ctr"/>
-            <a:r>
-              <a:rPr sz="1250" b="0">
-                <a:solidFill>
-                  <a:srgbClr val="B54A3F"/>
-                </a:solidFill>
-                <a:latin typeface="Calibri"/>
-              </a:rPr>
-              <a:t>-14.0</a:t>
-            </a:r>
-          </a:p>
-        </p:txBody>
-      </p:sp>
-      <p:sp>
-        <p:nvSpPr>
-          <p:cNvPr id="28" name="TextBox 27"/>
-          <p:cNvSpPr txBox="1"/>
-          <p:nvPr/>
-        </p:nvSpPr>
-        <p:spPr>
-          <a:xfrm>
-            <a:off x="7214616" y="3840480"/>
-            <a:ext cx="960120" cy="320040"/>
-          </a:xfrm>
-          <a:prstGeom prst="rect">
-            <a:avLst/>
-          </a:prstGeom>
-          <a:noFill/>
-        </p:spPr>
-        <p:txBody>
-          <a:bodyPr wrap="square">
-            <a:spAutoFit/>
-          </a:bodyPr>
-          <a:lstStyle/>
-          <a:p>
-            <a:pPr algn="ctr"/>
-            <a:r>
-              <a:rPr sz="1250" b="0">
-                <a:solidFill>
-                  <a:srgbClr val="B54A3F"/>
-                </a:solidFill>
-                <a:latin typeface="Calibri"/>
-              </a:rPr>
-              <a:t>-18.3</a:t>
-            </a:r>
-          </a:p>
-        </p:txBody>
-      </p:sp>
-      <p:sp>
-        <p:nvSpPr>
-          <p:cNvPr id="29" name="TextBox 28"/>
-          <p:cNvSpPr txBox="1"/>
-          <p:nvPr/>
-        </p:nvSpPr>
-        <p:spPr>
-          <a:xfrm>
-            <a:off x="8293608" y="3840480"/>
-            <a:ext cx="960120" cy="320040"/>
-          </a:xfrm>
-          <a:prstGeom prst="rect">
-            <a:avLst/>
-          </a:prstGeom>
-          <a:noFill/>
-        </p:spPr>
-        <p:txBody>
-          <a:bodyPr wrap="square">
-            <a:spAutoFit/>
-          </a:bodyPr>
-          <a:lstStyle/>
-          <a:p>
-            <a:pPr algn="ctr"/>
-            <a:r>
-              <a:rPr sz="1250" b="0">
-                <a:solidFill>
-                  <a:srgbClr val="B54A3F"/>
-                </a:solidFill>
-                <a:latin typeface="Calibri"/>
-              </a:rPr>
-              <a:t>-20.3</a:t>
-            </a:r>
-          </a:p>
-        </p:txBody>
-      </p:sp>
-      <p:sp>
-        <p:nvSpPr>
-          <p:cNvPr id="30" name="TextBox 29"/>
-          <p:cNvSpPr txBox="1"/>
-          <p:nvPr/>
-        </p:nvSpPr>
-        <p:spPr>
-          <a:xfrm>
-            <a:off x="9372600" y="3840480"/>
-            <a:ext cx="960120" cy="320040"/>
-          </a:xfrm>
-          <a:prstGeom prst="rect">
-            <a:avLst/>
-          </a:prstGeom>
-          <a:noFill/>
-        </p:spPr>
-        <p:txBody>
-          <a:bodyPr wrap="square">
-            <a:spAutoFit/>
-          </a:bodyPr>
-          <a:lstStyle/>
-          <a:p>
-            <a:pPr algn="ctr"/>
-            <a:r>
-              <a:rPr sz="1250" b="0">
-                <a:solidFill>
-                  <a:srgbClr val="B54A3F"/>
-                </a:solidFill>
-                <a:latin typeface="Calibri"/>
-              </a:rPr>
-              <a:t>-17.3</a:t>
-            </a:r>
-          </a:p>
-        </p:txBody>
-      </p:sp>
-      <p:sp>
-        <p:nvSpPr>
-          <p:cNvPr id="31" name="TextBox 30"/>
-          <p:cNvSpPr txBox="1"/>
-          <p:nvPr/>
-        </p:nvSpPr>
-        <p:spPr>
-          <a:xfrm>
-            <a:off x="10451592" y="3840480"/>
-            <a:ext cx="960120" cy="320040"/>
-          </a:xfrm>
-          <a:prstGeom prst="rect">
-            <a:avLst/>
-          </a:prstGeom>
-          <a:noFill/>
-        </p:spPr>
-        <p:txBody>
-          <a:bodyPr wrap="square">
-            <a:spAutoFit/>
-          </a:bodyPr>
-          <a:lstStyle/>
-          <a:p>
-            <a:pPr algn="ctr"/>
-            <a:r>
-              <a:rPr sz="1250" b="0">
-                <a:solidFill>
-                  <a:srgbClr val="B54A3F"/>
-                </a:solidFill>
-                <a:latin typeface="Calibri"/>
-              </a:rPr>
-              <a:t>-4.0</a:t>
-            </a:r>
-          </a:p>
-        </p:txBody>
-      </p:sp>
-      <p:sp>
-        <p:nvSpPr>
-          <p:cNvPr id="32" name="Rectangle 31"/>
+          <p:cNvPr id="18" name="TextBox 17"/>
+          <p:cNvSpPr txBox="1"/>
+          <p:nvPr/>
+        </p:nvSpPr>
+        <p:spPr>
+          <a:xfrm>
+            <a:off x="7315200" y="3520440"/>
+            <a:ext cx="1828800" cy="292608"/>
+          </a:xfrm>
+          <a:prstGeom prst="rect">
+            <a:avLst/>
+          </a:prstGeom>
+          <a:noFill/>
+        </p:spPr>
+        <p:txBody>
+          <a:bodyPr wrap="square">
+            <a:spAutoFit/>
+          </a:bodyPr>
+          <a:lstStyle/>
+          <a:p>
+            <a:r>
+              <a:rPr sz="1350" b="0">
+                <a:solidFill>
+                  <a:srgbClr val="CADCFC"/>
+                </a:solidFill>
+                <a:latin typeface="Calibri"/>
+              </a:rPr>
+              <a:t>0.0 %</a:t>
+            </a:r>
+          </a:p>
+        </p:txBody>
+      </p:sp>
+      <p:sp>
+        <p:nvSpPr>
+          <p:cNvPr id="19" name="TextBox 18"/>
+          <p:cNvSpPr txBox="1"/>
+          <p:nvPr/>
+        </p:nvSpPr>
+        <p:spPr>
+          <a:xfrm>
+            <a:off x="9326880" y="3520440"/>
+            <a:ext cx="2194560" cy="292608"/>
+          </a:xfrm>
+          <a:prstGeom prst="rect">
+            <a:avLst/>
+          </a:prstGeom>
+          <a:noFill/>
+        </p:spPr>
+        <p:txBody>
+          <a:bodyPr wrap="square">
+            <a:spAutoFit/>
+          </a:bodyPr>
+          <a:lstStyle/>
+          <a:p>
+            <a:r>
+              <a:rPr sz="1350" b="1">
+                <a:solidFill>
+                  <a:srgbClr val="1C7293"/>
+                </a:solidFill>
+                <a:latin typeface="Calibri"/>
+              </a:rPr>
+              <a:t>3.7 %</a:t>
+            </a:r>
+          </a:p>
+        </p:txBody>
+      </p:sp>
+      <p:sp>
+        <p:nvSpPr>
+          <p:cNvPr id="20" name="Rectangle 19"/>
           <p:cNvSpPr/>
           <p:nvPr/>
         </p:nvSpPr>
         <p:spPr>
           <a:xfrm>
-            <a:off x="640080" y="4315968"/>
-            <a:ext cx="10881360" cy="457200"/>
+            <a:off x="640080" y="3968496"/>
+            <a:ext cx="10881360" cy="420624"/>
           </a:xfrm>
           <a:prstGeom prst="rect">
             <a:avLst/>
@@ -16310,292 +15865,329 @@
       </p:sp>
       <p:sp>
         <p:nvSpPr>
-          <p:cNvPr id="33" name="TextBox 32"/>
-          <p:cNvSpPr txBox="1"/>
-          <p:nvPr/>
-        </p:nvSpPr>
-        <p:spPr>
-          <a:xfrm>
-            <a:off x="868680" y="4389120"/>
-            <a:ext cx="2834640" cy="320040"/>
-          </a:xfrm>
-          <a:prstGeom prst="rect">
-            <a:avLst/>
-          </a:prstGeom>
-          <a:noFill/>
-        </p:spPr>
-        <p:txBody>
-          <a:bodyPr wrap="square">
-            <a:spAutoFit/>
-          </a:bodyPr>
-          <a:lstStyle/>
-          <a:p>
-            <a:r>
-              <a:rPr sz="1250" b="1">
+          <p:cNvPr id="21" name="TextBox 20"/>
+          <p:cNvSpPr txBox="1"/>
+          <p:nvPr/>
+        </p:nvSpPr>
+        <p:spPr>
+          <a:xfrm>
+            <a:off x="868680" y="4032504"/>
+            <a:ext cx="3017520" cy="292608"/>
+          </a:xfrm>
+          <a:prstGeom prst="rect">
+            <a:avLst/>
+          </a:prstGeom>
+          <a:noFill/>
+        </p:spPr>
+        <p:txBody>
+          <a:bodyPr wrap="square">
+            <a:spAutoFit/>
+          </a:bodyPr>
+          <a:lstStyle/>
+          <a:p>
+            <a:r>
+              <a:rPr sz="1350" b="0">
                 <a:solidFill>
                   <a:srgbClr val="FFFFFF"/>
                 </a:solidFill>
                 <a:latin typeface="Calibri"/>
               </a:rPr>
-              <a:t>Difference</a:t>
-            </a:r>
-          </a:p>
-        </p:txBody>
-      </p:sp>
-      <p:sp>
-        <p:nvSpPr>
-          <p:cNvPr id="34" name="TextBox 33"/>
-          <p:cNvSpPr txBox="1"/>
-          <p:nvPr/>
-        </p:nvSpPr>
-        <p:spPr>
-          <a:xfrm>
-            <a:off x="3977639" y="4389120"/>
-            <a:ext cx="960120" cy="320040"/>
-          </a:xfrm>
-          <a:prstGeom prst="rect">
-            <a:avLst/>
-          </a:prstGeom>
-          <a:noFill/>
-        </p:spPr>
-        <p:txBody>
-          <a:bodyPr wrap="square">
-            <a:spAutoFit/>
-          </a:bodyPr>
+              <a:t>Llama-3-8B-Instruct</a:t>
+            </a:r>
+          </a:p>
+        </p:txBody>
+      </p:sp>
+      <p:sp>
+        <p:nvSpPr>
+          <p:cNvPr id="22" name="TextBox 21"/>
+          <p:cNvSpPr txBox="1"/>
+          <p:nvPr/>
+        </p:nvSpPr>
+        <p:spPr>
+          <a:xfrm>
+            <a:off x="3977639" y="4032504"/>
+            <a:ext cx="3108960" cy="292608"/>
+          </a:xfrm>
+          <a:prstGeom prst="rect">
+            <a:avLst/>
+          </a:prstGeom>
+          <a:noFill/>
+        </p:spPr>
+        <p:txBody>
+          <a:bodyPr wrap="square">
+            <a:spAutoFit/>
+          </a:bodyPr>
+          <a:lstStyle/>
+          <a:p>
+            <a:r>
+              <a:rPr sz="1350" b="0">
+                <a:solidFill>
+                  <a:srgbClr val="CADCFC"/>
+                </a:solidFill>
+                <a:latin typeface="Calibri"/>
+              </a:rPr>
+              <a:t>KeywordAgg</a:t>
+            </a:r>
+          </a:p>
+        </p:txBody>
+      </p:sp>
+      <p:sp>
+        <p:nvSpPr>
+          <p:cNvPr id="23" name="TextBox 22"/>
+          <p:cNvSpPr txBox="1"/>
+          <p:nvPr/>
+        </p:nvSpPr>
+        <p:spPr>
+          <a:xfrm>
+            <a:off x="7315200" y="4032504"/>
+            <a:ext cx="1828800" cy="292608"/>
+          </a:xfrm>
+          <a:prstGeom prst="rect">
+            <a:avLst/>
+          </a:prstGeom>
+          <a:noFill/>
+        </p:spPr>
+        <p:txBody>
+          <a:bodyPr wrap="square">
+            <a:spAutoFit/>
+          </a:bodyPr>
+          <a:lstStyle/>
+          <a:p>
+            <a:r>
+              <a:rPr sz="1350" b="0">
+                <a:solidFill>
+                  <a:srgbClr val="CADCFC"/>
+                </a:solidFill>
+                <a:latin typeface="Calibri"/>
+              </a:rPr>
+              <a:t>0.0 %</a:t>
+            </a:r>
+          </a:p>
+        </p:txBody>
+      </p:sp>
+      <p:sp>
+        <p:nvSpPr>
+          <p:cNvPr id="24" name="TextBox 23"/>
+          <p:cNvSpPr txBox="1"/>
+          <p:nvPr/>
+        </p:nvSpPr>
+        <p:spPr>
+          <a:xfrm>
+            <a:off x="9326880" y="4032504"/>
+            <a:ext cx="2194560" cy="292608"/>
+          </a:xfrm>
+          <a:prstGeom prst="rect">
+            <a:avLst/>
+          </a:prstGeom>
+          <a:noFill/>
+        </p:spPr>
+        <p:txBody>
+          <a:bodyPr wrap="square">
+            <a:spAutoFit/>
+          </a:bodyPr>
+          <a:lstStyle/>
+          <a:p>
+            <a:r>
+              <a:rPr sz="1350" b="1">
+                <a:solidFill>
+                  <a:srgbClr val="B54A3F"/>
+                </a:solidFill>
+                <a:latin typeface="Calibri"/>
+              </a:rPr>
+              <a:t>85.0 %</a:t>
+            </a:r>
+          </a:p>
+        </p:txBody>
+      </p:sp>
+      <p:sp>
+        <p:nvSpPr>
+          <p:cNvPr id="25" name="Rectangle 24"/>
+          <p:cNvSpPr/>
+          <p:nvPr/>
+        </p:nvSpPr>
+        <p:spPr>
+          <a:xfrm>
+            <a:off x="640080" y="4480560"/>
+            <a:ext cx="10881360" cy="420624"/>
+          </a:xfrm>
+          <a:prstGeom prst="rect">
+            <a:avLst/>
+          </a:prstGeom>
+          <a:solidFill>
+            <a:srgbClr val="1B334F"/>
+          </a:solidFill>
+          <a:ln>
+            <a:noFill/>
+          </a:ln>
+          <a:effectLst/>
+        </p:spPr>
+        <p:style>
+          <a:lnRef idx="1">
+            <a:schemeClr val="accent1"/>
+          </a:lnRef>
+          <a:fillRef idx="3">
+            <a:schemeClr val="accent1"/>
+          </a:fillRef>
+          <a:effectRef idx="2">
+            <a:schemeClr val="accent1"/>
+          </a:effectRef>
+          <a:fontRef idx="minor">
+            <a:schemeClr val="lt1"/>
+          </a:fontRef>
+        </p:style>
+        <p:txBody>
+          <a:bodyPr rtlCol="0" anchor="ctr"/>
           <a:lstStyle/>
           <a:p>
             <a:pPr algn="ctr"/>
-            <a:r>
-              <a:rPr sz="1250" b="1">
+          </a:p>
+        </p:txBody>
+      </p:sp>
+      <p:sp>
+        <p:nvSpPr>
+          <p:cNvPr id="26" name="TextBox 25"/>
+          <p:cNvSpPr txBox="1"/>
+          <p:nvPr/>
+        </p:nvSpPr>
+        <p:spPr>
+          <a:xfrm>
+            <a:off x="868680" y="4544568"/>
+            <a:ext cx="3017520" cy="292608"/>
+          </a:xfrm>
+          <a:prstGeom prst="rect">
+            <a:avLst/>
+          </a:prstGeom>
+          <a:noFill/>
+        </p:spPr>
+        <p:txBody>
+          <a:bodyPr wrap="square">
+            <a:spAutoFit/>
+          </a:bodyPr>
+          <a:lstStyle/>
+          <a:p>
+            <a:r>
+              <a:rPr sz="1350" b="0">
                 <a:solidFill>
                   <a:srgbClr val="FFFFFF"/>
                 </a:solidFill>
                 <a:latin typeface="Calibri"/>
               </a:rPr>
-              <a:t>1.4</a:t>
-            </a:r>
-          </a:p>
-        </p:txBody>
-      </p:sp>
-      <p:sp>
-        <p:nvSpPr>
-          <p:cNvPr id="35" name="TextBox 34"/>
-          <p:cNvSpPr txBox="1"/>
-          <p:nvPr/>
-        </p:nvSpPr>
-        <p:spPr>
-          <a:xfrm>
-            <a:off x="5056631" y="4389120"/>
-            <a:ext cx="960120" cy="320040"/>
-          </a:xfrm>
-          <a:prstGeom prst="rect">
-            <a:avLst/>
-          </a:prstGeom>
-          <a:noFill/>
-        </p:spPr>
-        <p:txBody>
-          <a:bodyPr wrap="square">
-            <a:spAutoFit/>
-          </a:bodyPr>
-          <a:lstStyle/>
-          <a:p>
-            <a:pPr algn="ctr"/>
-            <a:r>
-              <a:rPr sz="1250" b="1">
-                <a:solidFill>
-                  <a:srgbClr val="FFFFFF"/>
-                </a:solidFill>
-                <a:latin typeface="Calibri"/>
-              </a:rPr>
-              <a:t>13.0</a:t>
-            </a:r>
-          </a:p>
-        </p:txBody>
-      </p:sp>
-      <p:sp>
-        <p:nvSpPr>
-          <p:cNvPr id="36" name="TextBox 35"/>
-          <p:cNvSpPr txBox="1"/>
-          <p:nvPr/>
-        </p:nvSpPr>
-        <p:spPr>
-          <a:xfrm>
-            <a:off x="6135623" y="4389120"/>
-            <a:ext cx="960120" cy="320040"/>
-          </a:xfrm>
-          <a:prstGeom prst="rect">
-            <a:avLst/>
-          </a:prstGeom>
-          <a:noFill/>
-        </p:spPr>
-        <p:txBody>
-          <a:bodyPr wrap="square">
-            <a:spAutoFit/>
-          </a:bodyPr>
-          <a:lstStyle/>
-          <a:p>
-            <a:pPr algn="ctr"/>
-            <a:r>
-              <a:rPr sz="1250" b="1">
-                <a:solidFill>
-                  <a:srgbClr val="FFFFFF"/>
-                </a:solidFill>
-                <a:latin typeface="Calibri"/>
-              </a:rPr>
-              <a:t>18.0</a:t>
-            </a:r>
-          </a:p>
-        </p:txBody>
-      </p:sp>
-      <p:sp>
-        <p:nvSpPr>
-          <p:cNvPr id="37" name="TextBox 36"/>
-          <p:cNvSpPr txBox="1"/>
-          <p:nvPr/>
-        </p:nvSpPr>
-        <p:spPr>
-          <a:xfrm>
-            <a:off x="7214616" y="4389120"/>
-            <a:ext cx="960120" cy="320040"/>
-          </a:xfrm>
-          <a:prstGeom prst="rect">
-            <a:avLst/>
-          </a:prstGeom>
-          <a:noFill/>
-        </p:spPr>
-        <p:txBody>
-          <a:bodyPr wrap="square">
-            <a:spAutoFit/>
-          </a:bodyPr>
-          <a:lstStyle/>
-          <a:p>
-            <a:pPr algn="ctr"/>
-            <a:r>
-              <a:rPr sz="1250" b="1">
-                <a:solidFill>
-                  <a:srgbClr val="FFFFFF"/>
-                </a:solidFill>
-                <a:latin typeface="Calibri"/>
-              </a:rPr>
-              <a:t>24.0</a:t>
-            </a:r>
-          </a:p>
-        </p:txBody>
-      </p:sp>
-      <p:sp>
-        <p:nvSpPr>
-          <p:cNvPr id="38" name="TextBox 37"/>
-          <p:cNvSpPr txBox="1"/>
-          <p:nvPr/>
-        </p:nvSpPr>
-        <p:spPr>
-          <a:xfrm>
-            <a:off x="8293608" y="4389120"/>
-            <a:ext cx="960120" cy="320040"/>
-          </a:xfrm>
-          <a:prstGeom prst="rect">
-            <a:avLst/>
-          </a:prstGeom>
-          <a:noFill/>
-        </p:spPr>
-        <p:txBody>
-          <a:bodyPr wrap="square">
-            <a:spAutoFit/>
-          </a:bodyPr>
-          <a:lstStyle/>
-          <a:p>
-            <a:pPr algn="ctr"/>
-            <a:r>
-              <a:rPr sz="1250" b="1">
-                <a:solidFill>
-                  <a:srgbClr val="FFFFFF"/>
-                </a:solidFill>
-                <a:latin typeface="Calibri"/>
-              </a:rPr>
-              <a:t>27.0</a:t>
-            </a:r>
-          </a:p>
-        </p:txBody>
-      </p:sp>
-      <p:sp>
-        <p:nvSpPr>
-          <p:cNvPr id="39" name="TextBox 38"/>
-          <p:cNvSpPr txBox="1"/>
-          <p:nvPr/>
-        </p:nvSpPr>
-        <p:spPr>
-          <a:xfrm>
-            <a:off x="9372600" y="4389120"/>
-            <a:ext cx="960120" cy="320040"/>
-          </a:xfrm>
-          <a:prstGeom prst="rect">
-            <a:avLst/>
-          </a:prstGeom>
-          <a:noFill/>
-        </p:spPr>
-        <p:txBody>
-          <a:bodyPr wrap="square">
-            <a:spAutoFit/>
-          </a:bodyPr>
-          <a:lstStyle/>
-          <a:p>
-            <a:pPr algn="ctr"/>
-            <a:r>
-              <a:rPr sz="1250" b="1">
-                <a:solidFill>
-                  <a:srgbClr val="FFFFFF"/>
-                </a:solidFill>
-                <a:latin typeface="Calibri"/>
-              </a:rPr>
-              <a:t>29.6</a:t>
-            </a:r>
-          </a:p>
-        </p:txBody>
-      </p:sp>
-      <p:sp>
-        <p:nvSpPr>
-          <p:cNvPr id="40" name="TextBox 39"/>
-          <p:cNvSpPr txBox="1"/>
-          <p:nvPr/>
-        </p:nvSpPr>
-        <p:spPr>
-          <a:xfrm>
-            <a:off x="10451592" y="4389120"/>
-            <a:ext cx="960120" cy="320040"/>
-          </a:xfrm>
-          <a:prstGeom prst="rect">
-            <a:avLst/>
-          </a:prstGeom>
-          <a:noFill/>
-        </p:spPr>
-        <p:txBody>
-          <a:bodyPr wrap="square">
-            <a:spAutoFit/>
-          </a:bodyPr>
-          <a:lstStyle/>
-          <a:p>
-            <a:pPr algn="ctr"/>
-            <a:r>
-              <a:rPr sz="1250" b="1">
-                <a:solidFill>
-                  <a:srgbClr val="FFFFFF"/>
-                </a:solidFill>
-                <a:latin typeface="Calibri"/>
-              </a:rPr>
-              <a:t>1.7</a:t>
-            </a:r>
-          </a:p>
-        </p:txBody>
-      </p:sp>
-      <p:sp>
-        <p:nvSpPr>
-          <p:cNvPr id="41" name="TextBox 40"/>
-          <p:cNvSpPr txBox="1"/>
-          <p:nvPr/>
-        </p:nvSpPr>
-        <p:spPr>
-          <a:xfrm>
-            <a:off x="640080" y="5074920"/>
+              <a:t>Llama-3-8B-Instruct</a:t>
+            </a:r>
+          </a:p>
+        </p:txBody>
+      </p:sp>
+      <p:sp>
+        <p:nvSpPr>
+          <p:cNvPr id="27" name="TextBox 26"/>
+          <p:cNvSpPr txBox="1"/>
+          <p:nvPr/>
+        </p:nvSpPr>
+        <p:spPr>
+          <a:xfrm>
+            <a:off x="3977639" y="4544568"/>
+            <a:ext cx="3108960" cy="292608"/>
+          </a:xfrm>
+          <a:prstGeom prst="rect">
+            <a:avLst/>
+          </a:prstGeom>
+          <a:noFill/>
+        </p:spPr>
+        <p:txBody>
+          <a:bodyPr wrap="square">
+            <a:spAutoFit/>
+          </a:bodyPr>
+          <a:lstStyle/>
+          <a:p>
+            <a:r>
+              <a:rPr sz="1350" b="0">
+                <a:solidFill>
+                  <a:srgbClr val="CADCFC"/>
+                </a:solidFill>
+                <a:latin typeface="Calibri"/>
+              </a:rPr>
+              <a:t>DecodingAgg</a:t>
+            </a:r>
+          </a:p>
+        </p:txBody>
+      </p:sp>
+      <p:sp>
+        <p:nvSpPr>
+          <p:cNvPr id="28" name="TextBox 27"/>
+          <p:cNvSpPr txBox="1"/>
+          <p:nvPr/>
+        </p:nvSpPr>
+        <p:spPr>
+          <a:xfrm>
+            <a:off x="7315200" y="4544568"/>
+            <a:ext cx="1828800" cy="292608"/>
+          </a:xfrm>
+          <a:prstGeom prst="rect">
+            <a:avLst/>
+          </a:prstGeom>
+          <a:noFill/>
+        </p:spPr>
+        <p:txBody>
+          <a:bodyPr wrap="square">
+            <a:spAutoFit/>
+          </a:bodyPr>
+          <a:lstStyle/>
+          <a:p>
+            <a:r>
+              <a:rPr sz="1350" b="0">
+                <a:solidFill>
+                  <a:srgbClr val="CADCFC"/>
+                </a:solidFill>
+                <a:latin typeface="Calibri"/>
+              </a:rPr>
+              <a:t>0.0 %</a:t>
+            </a:r>
+          </a:p>
+        </p:txBody>
+      </p:sp>
+      <p:sp>
+        <p:nvSpPr>
+          <p:cNvPr id="29" name="TextBox 28"/>
+          <p:cNvSpPr txBox="1"/>
+          <p:nvPr/>
+        </p:nvSpPr>
+        <p:spPr>
+          <a:xfrm>
+            <a:off x="9326880" y="4544568"/>
+            <a:ext cx="2194560" cy="292608"/>
+          </a:xfrm>
+          <a:prstGeom prst="rect">
+            <a:avLst/>
+          </a:prstGeom>
+          <a:noFill/>
+        </p:spPr>
+        <p:txBody>
+          <a:bodyPr wrap="square">
+            <a:spAutoFit/>
+          </a:bodyPr>
+          <a:lstStyle/>
+          <a:p>
+            <a:r>
+              <a:rPr sz="1350" b="1">
+                <a:solidFill>
+                  <a:srgbClr val="B54A3F"/>
+                </a:solidFill>
+                <a:latin typeface="Calibri"/>
+              </a:rPr>
+              <a:t>85.3 %</a:t>
+            </a:r>
+          </a:p>
+        </p:txBody>
+      </p:sp>
+      <p:sp>
+        <p:nvSpPr>
+          <p:cNvPr id="30" name="TextBox 29"/>
+          <p:cNvSpPr txBox="1"/>
+          <p:nvPr/>
+        </p:nvSpPr>
+        <p:spPr>
+          <a:xfrm>
+            <a:off x="640080" y="5138928"/>
             <a:ext cx="10881360" cy="1371600"/>
           </a:xfrm>
           <a:prstGeom prst="rect">
@@ -16611,39 +16203,23 @@
           <a:p>
             <a:pPr>
               <a:spcAft>
-                <a:spcPts val="400"/>
-              </a:spcAft>
-            </a:pPr>
-            <a:r>
-              <a:rPr sz="1350" b="1">
-                <a:solidFill>
-                  <a:srgbClr val="FFFFFF"/>
-                </a:solidFill>
-                <a:latin typeface="Calibri"/>
-              </a:rPr>
-              <a:t>At 9 bad passages of 10, one version helps and the other does harm. They are 29.6 points apart.</a:t>
-            </a:r>
-          </a:p>
-          <a:p>
-            <a:pPr>
-              <a:spcAft>
-                <a:spcPts val="400"/>
-              </a:spcAft>
-            </a:pPr>
-            <a:r>
-              <a:rPr sz="1250" b="0">
+                <a:spcPts val="600"/>
+              </a:spcAft>
+            </a:pPr>
+            <a:r>
+              <a:rPr sz="1300" b="0">
                 <a:solidFill>
                   <a:srgbClr val="CADCFC"/>
                 </a:solidFill>
                 <a:latin typeface="Calibri"/>
               </a:rPr>
-              <a:t>We wrote the cause down before we ran the test. A keyword filter throws away a passage with no answer in it, so one good passage still carries the answer. An average of the outputs lets nine bad ones drown it.</a:t>
-            </a:r>
-          </a:p>
-          <a:p>
-            <a:pPr>
-              <a:spcAft>
-                <a:spcPts val="400"/>
+              <a:t>On Mistral the two versions differ from each other by 29.6 points in accuracy at this dose, and the hard-filter against soft-average mechanism predicts that curve. On Llama-3 they agree, and both fail.</a:t>
+            </a:r>
+          </a:p>
+          <a:p>
+            <a:pPr>
+              <a:spcAft>
+                <a:spcPts val="600"/>
               </a:spcAft>
             </a:pPr>
             <a:r>
@@ -16653,14 +16229,14 @@
                 </a:solidFill>
                 <a:latin typeface="Calibri"/>
               </a:rPr>
-              <a:t>So the difference must grow as good passages go, and must vanish when none are left. It does both.</a:t>
-            </a:r>
-          </a:p>
-        </p:txBody>
-      </p:sp>
-      <p:sp>
-        <p:nvSpPr>
-          <p:cNvPr id="42" name="TextBox 41"/>
+              <a:t>The model is the larger variable. Isolation removes the dilution that protects an undefended model. That is why this family resists tone steering, and why it collapses here. One trade, not two results.</a:t>
+            </a:r>
+          </a:p>
+        </p:txBody>
+      </p:sp>
+      <p:sp>
+        <p:nvSpPr>
+          <p:cNvPr id="31" name="TextBox 30"/>
           <p:cNvSpPr txBox="1"/>
           <p:nvPr/>
         </p:nvSpPr>
@@ -27141,7 +26717,7 @@
                 </a:solidFill>
                 <a:latin typeface="Calibri"/>
               </a:rPr>
-              <a:t>16 cells that no paper reports</a:t>
+              <a:t>18 cells that no paper reports</a:t>
             </a:r>
           </a:p>
         </p:txBody>

--- a/context_sok_results_presentation.pptx
+++ b/context_sok_results_presentation.pptx
@@ -3295,7 +3295,7 @@
                 </a:solidFill>
                 <a:latin typeface="Calibri"/>
               </a:rPr>
-              <a:t>1,158 papers screened · 1,026 included · 237 mechanisms · 534 defenses · 18 cells we ran ourselves</a:t>
+              <a:t>1,158 papers screened · 1,026 included · 237 mechanisms · 534 defenses · 19 cells we ran ourselves</a:t>
             </a:r>
           </a:p>
         </p:txBody>
@@ -6172,7 +6172,7 @@
                 </a:solidFill>
                 <a:latin typeface="Calibri"/>
               </a:rPr>
-              <a:t>RQ3  ·  POLLUTION CENSUS</a:t>
+              <a:t>RQ3  ·  CAUSE CENSUS</a:t>
             </a:r>
           </a:p>
         </p:txBody>
@@ -6357,7 +6357,7 @@
                 </a:solidFill>
                 <a:latin typeface="Calibri"/>
               </a:rPr>
-              <a:t>168 adversarial  ·  55 incidental</a:t>
+              <a:t>182 attacks  ·  55 incidental mechanisms</a:t>
             </a:r>
           </a:p>
           <a:p>
@@ -6613,7 +6613,7 @@
                 </a:solidFill>
                 <a:latin typeface="Calibri"/>
               </a:rPr>
-              <a:t>RQ4  ·  DEFENSE CENSUS</a:t>
+              <a:t>RQ4  ·  PROTECTION CENSUS</a:t>
             </a:r>
           </a:p>
         </p:txBody>
@@ -6652,7 +6652,7 @@
                 </a:solidFill>
                 <a:latin typeface="Cambria"/>
               </a:rPr>
-              <a:t>And how many defenses answer them?</a:t>
+              <a:t>And how many protections answer them?</a:t>
             </a:r>
           </a:p>
         </p:txBody>
@@ -6887,7 +6887,39 @@
                 </a:solidFill>
                 <a:latin typeface="Calibri"/>
               </a:rPr>
-              <a:t>Only 15 of 534 defenses</a:t>
+              <a:t>263 defenses  ·  266 fixes</a:t>
+            </a:r>
+          </a:p>
+          <a:p>
+            <a:pPr>
+              <a:spcAft>
+                <a:spcPts val="400"/>
+              </a:spcAft>
+            </a:pPr>
+            <a:r>
+              <a:rPr sz="600" b="0">
+                <a:solidFill>
+                  <a:srgbClr val="CADCFC"/>
+                </a:solidFill>
+                <a:latin typeface="Calibri"/>
+              </a:rPr>
+              <a:t/>
+            </a:r>
+          </a:p>
+          <a:p>
+            <a:pPr>
+              <a:spcAft>
+                <a:spcPts val="400"/>
+              </a:spcAft>
+            </a:pPr>
+            <a:r>
+              <a:rPr sz="1500" b="1">
+                <a:solidFill>
+                  <a:srgbClr val="FFFFFF"/>
+                </a:solidFill>
+                <a:latin typeface="Calibri"/>
+              </a:rPr>
+              <a:t>Only 15 of 534</a:t>
             </a:r>
           </a:p>
           <a:p>
@@ -12527,7 +12559,7 @@
                 </a:solidFill>
                 <a:latin typeface="Cambria"/>
               </a:rPr>
-              <a:t>18</a:t>
+              <a:t>19</a:t>
             </a:r>
           </a:p>
         </p:txBody>
@@ -12616,7 +12648,7 @@
                 </a:solidFill>
                 <a:latin typeface="Cambria"/>
               </a:rPr>
-              <a:t>104</a:t>
+              <a:t>109</a:t>
             </a:r>
           </a:p>
         </p:txBody>
@@ -19657,7 +19689,7 @@
                 </a:solidFill>
                 <a:latin typeface="Calibri"/>
               </a:rPr>
-              <a:t>They name 223 ways to poison a context and 534 defenses. They almost never test one against the other.</a:t>
+              <a:t>The security side names 182 attacks and builds 263 defenses. The ML/AI side names 55 incidental mechanisms and builds 266 fixes. They almost never test across.</a:t>
             </a:r>
           </a:p>
         </p:txBody>
@@ -24418,8 +24450,8 @@
         </p:nvSpPr>
         <p:spPr>
           <a:xfrm>
-            <a:off x="914400" y="2871216"/>
-            <a:ext cx="4754880" cy="411480"/>
+            <a:off x="914400" y="2852928"/>
+            <a:ext cx="4754880" cy="475488"/>
           </a:xfrm>
           <a:prstGeom prst="rect">
             <a:avLst/>
@@ -24438,13 +24470,13 @@
               </a:spcAft>
             </a:pPr>
             <a:r>
-              <a:rPr sz="1150" b="0">
+              <a:rPr sz="1100" b="0">
                 <a:solidFill>
                   <a:srgbClr val="CADCFC"/>
                 </a:solidFill>
                 <a:latin typeface="Calibri"/>
               </a:rPr>
-              <a:t>A person placed the text to get this effect. This is the security track.</a:t>
+              <a:t>A person placed the text to get this effect. The security side calls it an ATTACK (182) and builds a DEFENSE (263).</a:t>
             </a:r>
           </a:p>
         </p:txBody>
@@ -24535,8 +24567,8 @@
         </p:nvSpPr>
         <p:spPr>
           <a:xfrm>
-            <a:off x="914400" y="3803904"/>
-            <a:ext cx="4754880" cy="411480"/>
+            <a:off x="914400" y="3785616"/>
+            <a:ext cx="4754880" cy="475488"/>
           </a:xfrm>
           <a:prstGeom prst="rect">
             <a:avLst/>
@@ -24555,13 +24587,13 @@
               </a:spcAft>
             </a:pPr>
             <a:r>
-              <a:rPr sz="1150" b="0">
+              <a:rPr sz="1100" b="0">
                 <a:solidFill>
                   <a:srgbClr val="CADCFC"/>
                 </a:solidFill>
                 <a:latin typeface="Calibri"/>
               </a:rPr>
-              <a:t>Nobody placed it. The window is long, stale or badly ordered. This is the ML/AI track.</a:t>
+              <a:t>Nobody placed it. The ML/AI side calls it an INCIDENTAL MECHANISM (55) and builds a FIX (266).</a:t>
             </a:r>
           </a:p>
         </p:txBody>
@@ -24652,8 +24684,8 @@
         </p:nvSpPr>
         <p:spPr>
           <a:xfrm>
-            <a:off x="914400" y="4736592"/>
-            <a:ext cx="4754880" cy="411480"/>
+            <a:off x="914400" y="4718304"/>
+            <a:ext cx="4754880" cy="475488"/>
           </a:xfrm>
           <a:prstGeom prst="rect">
             <a:avLst/>
@@ -24672,7 +24704,7 @@
               </a:spcAft>
             </a:pPr>
             <a:r>
-              <a:rPr sz="1150" b="0">
+              <a:rPr sz="1100" b="0">
                 <a:solidFill>
                   <a:srgbClr val="CADCFC"/>
                 </a:solidFill>
@@ -25204,7 +25236,7 @@
                 </a:solidFill>
                 <a:latin typeface="Calibri"/>
               </a:rPr>
-              <a:t>Intent is the axis that splits the two literatures. The same failure gets two names and two sets of defenses.</a:t>
+              <a:t>Intent is the axis that splits the two literatures, and the two sides do not build the same thing.</a:t>
             </a:r>
           </a:p>
           <a:p>
@@ -25220,7 +25252,7 @@
                 </a:solidFill>
                 <a:latin typeface="Calibri"/>
               </a:rPr>
-              <a:t>A tool returns a page with a hidden order. A tool returns a page that is simply ten times too long. Both reach the window through the same channel. One has an author. One does not.</a:t>
+              <a:t>A fix was never built to stop an adversary, so a fix with no attack pair is not an untested defense. It is answering a different question.</a:t>
             </a:r>
           </a:p>
           <a:p>
@@ -25953,7 +25985,7 @@
                 </a:solidFill>
                 <a:latin typeface="Calibri"/>
               </a:rPr>
-              <a:t>Pollution census</a:t>
+              <a:t>Cause census</a:t>
             </a:r>
           </a:p>
         </p:txBody>
@@ -25987,7 +26019,7 @@
                 </a:solidFill>
                 <a:latin typeface="Calibri"/>
               </a:rPr>
-              <a:t>223 named mechanisms</a:t>
+              <a:t>182 attacks  ·  55 incidental mechanisms</a:t>
             </a:r>
           </a:p>
         </p:txBody>
@@ -26099,7 +26131,7 @@
                 </a:solidFill>
                 <a:latin typeface="Calibri"/>
               </a:rPr>
-              <a:t>Defense census</a:t>
+              <a:t>Protection census</a:t>
             </a:r>
           </a:p>
         </p:txBody>
@@ -26133,7 +26165,7 @@
                 </a:solidFill>
                 <a:latin typeface="Calibri"/>
               </a:rPr>
-              <a:t>534 named defenses</a:t>
+              <a:t>263 defenses  ·  266 fixes</a:t>
             </a:r>
           </a:p>
         </p:txBody>
@@ -26279,7 +26311,7 @@
                 </a:solidFill>
                 <a:latin typeface="Calibri"/>
               </a:rPr>
-              <a:t>119 mechanisms never defended</a:t>
+              <a:t>119 causes nothing has been run against</a:t>
             </a:r>
           </a:p>
         </p:txBody>
@@ -26717,7 +26749,7 @@
                 </a:solidFill>
                 <a:latin typeface="Calibri"/>
               </a:rPr>
-              <a:t>18 cells that no paper reports</a:t>
+              <a:t>19 cells that no paper reports</a:t>
             </a:r>
           </a:p>
         </p:txBody>
